--- a/docs/presentation/ADB-Glue-Service.pptx
+++ b/docs/presentation/ADB-Glue-Service.pptx
@@ -14,23 +14,25 @@
     <p:sldId id="259" r:id="rId5"/>
     <p:sldId id="260" r:id="rId6"/>
     <p:sldId id="261" r:id="rId7"/>
-    <p:sldId id="262" r:id="rId8"/>
     <p:sldId id="263" r:id="rId9"/>
     <p:sldId id="264" r:id="rId10"/>
+    <p:sldId id="281" r:id="rId32"/>
+    <p:sldId id="282" r:id="rId33"/>
+    <p:sldId id="269" r:id="rId15"/>
+    <p:sldId id="273" r:id="rId19"/>
+    <p:sldId id="283" r:id="rId34"/>
+    <p:sldId id="276" r:id="rId22"/>
+    <p:sldId id="284" r:id="rId35"/>
+    <p:sldId id="262" r:id="rId8"/>
     <p:sldId id="265" r:id="rId11"/>
     <p:sldId id="266" r:id="rId12"/>
     <p:sldId id="267" r:id="rId13"/>
     <p:sldId id="268" r:id="rId14"/>
-    <p:sldId id="269" r:id="rId15"/>
+    <p:sldId id="274" r:id="rId20"/>
+    <p:sldId id="275" r:id="rId21"/>
     <p:sldId id="270" r:id="rId16"/>
     <p:sldId id="271" r:id="rId17"/>
     <p:sldId id="272" r:id="rId18"/>
-    <p:sldId id="273" r:id="rId19"/>
-    <p:sldId id="274" r:id="rId20"/>
-    <p:sldId id="275" r:id="rId21"/>
-    <p:sldId id="276" r:id="rId22"/>
-    <p:sldId id="277" r:id="rId23"/>
-    <p:sldId id="278" r:id="rId24"/>
     <p:sldId id="279" r:id="rId25"/>
     <p:sldId id="280" r:id="rId26"/>
   </p:sldIdLst>
@@ -1622,218 +1624,6 @@
 </p:notes>
 </file>
 
-<file path=ppt/notesSlides/notesSlide22.xml><?xml version="1.0" encoding="utf-8"?>
-<p:notes xmlns:a="http://schemas.openxmlformats.org/drawingml/2006/main" xmlns:r="http://schemas.openxmlformats.org/officeDocument/2006/relationships" xmlns:p="http://schemas.openxmlformats.org/presentationml/2006/main">
-  <p:cSld>
-    <p:spTree>
-      <p:nvGrpSpPr>
-        <p:cNvPr id="1" name=""/>
-        <p:cNvGrpSpPr/>
-        <p:nvPr/>
-      </p:nvGrpSpPr>
-      <p:grpSpPr>
-        <a:xfrm>
-          <a:off x="0" y="0"/>
-          <a:ext cx="0" cy="0"/>
-          <a:chOff x="0" y="0"/>
-          <a:chExt cx="0" cy="0"/>
-        </a:xfrm>
-      </p:grpSpPr>
-      <p:sp>
-        <p:nvSpPr>
-          <p:cNvPr id="2" name="Slide Image Placeholder 1"/>
-          <p:cNvSpPr>
-            <a:spLocks noGrp="1" noRot="1" noChangeAspect="1"/>
-          </p:cNvSpPr>
-          <p:nvPr>
-            <p:ph type="sldImg"/>
-          </p:nvPr>
-        </p:nvSpPr>
-        <p:spPr/>
-      </p:sp>
-      <p:sp>
-        <p:nvSpPr>
-          <p:cNvPr id="3" name="Notes Placeholder 2"/>
-          <p:cNvSpPr>
-            <a:spLocks noGrp="1"/>
-          </p:cNvSpPr>
-          <p:nvPr>
-            <p:ph type="body" idx="1"/>
-          </p:nvPr>
-        </p:nvSpPr>
-        <p:spPr/>
-        <p:txBody>
-          <a:bodyPr/>
-          <a:lstStyle/>
-          <a:p>
-            <a:r>
-              <a:rPr lang="en-US" dirty="0"/>
-              <a:t>Q1. A decision is cut short by a crash. Who finds that order?
-- The item moves to acting before the action runs and to decided after it (db.start_review, review.carry_out).
-- On start, settle.interrupted_decisions reopens an acting item if its action still applies, or closes it as resolved if the order has moved on. Same idea as events left processing going back to pending.
-- Test: tests/test_restart.py, a decision cut short is open again after a restart, and the retry then allocates.
-Q2. The warehouse shipped an eMAG order while eMAG was rate limiting. Then what?
-- router.notify_shipped catches the exhausted retries and queues an item with operation ship. The order stays shipped.
-- RETRY_FROM maps ship to shipped, so the card offers Retry, which tells eMAG again. It is the one outbound call that had no owner; it does now.
-- Test: tests/test_partial_failures.py, a ship notice the channel missed is retried from review: eMAG ends at status 4, nothing left open.
-Q3. Two events for one order land in the same batch. Which interleavings do you handle?
-- Each event and each decision takes ctx.order_lock(order_id), so they run one at a time per order.
-- Place and cancel racing the warehouse call: allocate sees cancelled after the 201 and releases the reservation. A repeat cancel is recorded as cancel_repeated and does nothing.
-- Test: two cancels in one batch cancel once. With several workers, partition by order id.
-Q4. What exactly is your idempotency key, and who can forge it?
-- Inbox: (source, event id), migration 2 in glue/db.py. Orders: channel plus channel order id. Outbound: Idempotency-Key with the order id.
-- Forging needs the source's secret: the HMAC covers the event id and the body, one secret per source, constant-time compare, an empty secret never verifies.
-- A source may only send its own event types, and the shop cannot send an emag- order. Real Adobe I/O Events signs with its own public-key scheme.
-Q5. Retry-After says 3600. Retry-After says a date.
-- glue/retry.py retry_after_seconds: digits or an HTTP date, capped at 30 s (MAX_RETRY_AFTER_SECONDS). A past date means retry now; anything else falls back to back-off.
-- Why cap: waiting holds a worker slot; a longer outage belongs in the review queue, and Retry all (or the auto-retry rule) clears it once the warehouse answers.
-- Tests in tests/test_retry.py cover the date, the cap, garbage values and a past date.
-</a:t>
-            </a:r>
-          </a:p>
-        </p:txBody>
-      </p:sp>
-      <p:sp>
-        <p:nvSpPr>
-          <p:cNvPr id="4" name="Slide Number Placeholder 3"/>
-          <p:cNvSpPr>
-            <a:spLocks noGrp="1"/>
-          </p:cNvSpPr>
-          <p:nvPr>
-            <p:ph type="sldNum" sz="quarter" idx="10"/>
-          </p:nvPr>
-        </p:nvSpPr>
-        <p:spPr/>
-        <p:txBody>
-          <a:bodyPr/>
-          <a:lstStyle/>
-          <a:p>
-            <a:fld id="{F7021451-1387-4CA6-816F-3879F97B5CBC}" type="slidenum">
-              <a:rPr lang="en-US"/>
-              <a:t>22</a:t>
-            </a:fld>
-            <a:endParaRPr lang="en-US"/>
-          </a:p>
-        </p:txBody>
-      </p:sp>
-    </p:spTree>
-    <p:extLst>
-      <p:ext uri="{BB962C8B-B14F-4D97-AF65-F5344CB8AC3E}">
-        <p14:creationId xmlns:p14="http://schemas.microsoft.com/office/powerpoint/2010/main" val="1024086991"/>
-      </p:ext>
-    </p:extLst>
-  </p:cSld>
-  <p:clrMapOvr>
-    <a:masterClrMapping/>
-  </p:clrMapOvr>
-</p:notes>
-</file>
-
-<file path=ppt/notesSlides/notesSlide23.xml><?xml version="1.0" encoding="utf-8"?>
-<p:notes xmlns:a="http://schemas.openxmlformats.org/drawingml/2006/main" xmlns:r="http://schemas.openxmlformats.org/officeDocument/2006/relationships" xmlns:p="http://schemas.openxmlformats.org/presentationml/2006/main">
-  <p:cSld>
-    <p:spTree>
-      <p:nvGrpSpPr>
-        <p:cNvPr id="1" name=""/>
-        <p:cNvGrpSpPr/>
-        <p:nvPr/>
-      </p:nvGrpSpPr>
-      <p:grpSpPr>
-        <a:xfrm>
-          <a:off x="0" y="0"/>
-          <a:ext cx="0" cy="0"/>
-          <a:chOff x="0" y="0"/>
-          <a:chExt cx="0" cy="0"/>
-        </a:xfrm>
-      </p:grpSpPr>
-      <p:sp>
-        <p:nvSpPr>
-          <p:cNvPr id="2" name="Slide Image Placeholder 1"/>
-          <p:cNvSpPr>
-            <a:spLocks noGrp="1" noRot="1" noChangeAspect="1"/>
-          </p:cNvSpPr>
-          <p:nvPr>
-            <p:ph type="sldImg"/>
-          </p:nvPr>
-        </p:nvSpPr>
-        <p:spPr/>
-      </p:sp>
-      <p:sp>
-        <p:nvSpPr>
-          <p:cNvPr id="3" name="Notes Placeholder 2"/>
-          <p:cNvSpPr>
-            <a:spLocks noGrp="1"/>
-          </p:cNvSpPr>
-          <p:nvPr>
-            <p:ph type="body" idx="1"/>
-          </p:nvPr>
-        </p:nvSpPr>
-        <p:spPr/>
-        <p:txBody>
-          <a:bodyPr/>
-          <a:lstStyle/>
-          <a:p>
-            <a:r>
-              <a:rPr lang="en-US" dirty="0"/>
-              <a:t>Q6. Why push every product every 10 s? What breaks at 20,000?
-- Because it heals drift no event reports: a restarted channel, a rejected or rate-limited push.
-- At 20,000 products eMAG's rate limit breaks first. Coalesce pushes for a second into one batch, reconcile changed products only, and keep a slow full sweep as the net.
-Q7. Show me the number.
-- python -m scripts.load_probe, in-process, real worker loop, 10 slots: about 527 orders/s; 300 orders at p50 0.31 s and p95 0.53 s; 1,000 orders at p50 1.03 s and p95 1.78 s (queue wait); every order reserved once.
-- The probe first showed the loop capped at about 20 orders/s (it slept whenever all slots were busy); fixed in 267009e with a test. Measuring found the bug.
-- Say what it is: no network, mock warehouse. The real limit is the warehouse and eMAG, not the glue.
-Q8. It is 3 a.m. Which alert fires, and what does it say?
-- /metrics (signed in) has the gauges: inbox pending and the oldest pending age, dirty stock rows and how long a channel has been behind, open review items and the oldest, warehouse down, last good reconcile. /health is liveness on the database only.
-- Page: oldest pending event over 60 s; warehouse down for 5 min; no good reconcile in three intervals while the warehouse is up. Warn: a channel behind for 5 min; a review item waiting 30 min in business hours; an item acting for 5 min; any failed inbox event; any rejected signature.
-Q9. Why a React console, a model and a palette for a small glue service? What did it cost the core?
-- The core came first; the history shows it. The console is the operator's product: the review queue only works if a person can act on it quickly.
-- The demo layer lives in glue/demo and is gated by the demo permission and DEMO_TRAFFIC; in production it would be absent.
-- What it cost: an independent analysis found eight gaps in the core. I fixed each with a failing test first. It also caught a dashboard figure, orders lost, that was a fixed zero; it is counted now. That is the honest answer.
-Q10. Policy in code and the model explains. So what is the model for? Would you ship it?
-- The rule lives in glue/ai/triage_prompt.py (playbook) and is testable Python. The 3B model writes the paragraph the operator reads.
-- It runs at temperature 0. The suggestion is filtered to the allowed actions, dropped if it names another order, and sentences naming internal tools are removed. It never acts; a person still clicks.
-- I would ship it as an explainer. A stronger model could get the open choice later, still behind a person.
-</a:t>
-            </a:r>
-          </a:p>
-        </p:txBody>
-      </p:sp>
-      <p:sp>
-        <p:nvSpPr>
-          <p:cNvPr id="4" name="Slide Number Placeholder 3"/>
-          <p:cNvSpPr>
-            <a:spLocks noGrp="1"/>
-          </p:cNvSpPr>
-          <p:nvPr>
-            <p:ph type="sldNum" sz="quarter" idx="10"/>
-          </p:nvPr>
-        </p:nvSpPr>
-        <p:spPr/>
-        <p:txBody>
-          <a:bodyPr/>
-          <a:lstStyle/>
-          <a:p>
-            <a:fld id="{F7021451-1387-4CA6-816F-3879F97B5CBC}" type="slidenum">
-              <a:rPr lang="en-US"/>
-              <a:t>23</a:t>
-            </a:fld>
-            <a:endParaRPr lang="en-US"/>
-          </a:p>
-        </p:txBody>
-      </p:sp>
-    </p:spTree>
-    <p:extLst>
-      <p:ext uri="{BB962C8B-B14F-4D97-AF65-F5344CB8AC3E}">
-        <p14:creationId xmlns:p14="http://schemas.microsoft.com/office/powerpoint/2010/main" val="1024086991"/>
-      </p:ext>
-    </p:extLst>
-  </p:cSld>
-  <p:clrMapOvr>
-    <a:masterClrMapping/>
-  </p:clrMapOvr>
-</p:notes>
-</file>
-
 <file path=ppt/notesSlides/notesSlide24.xml><?xml version="1.0" encoding="utf-8"?>
 <p:notes xmlns:a="http://schemas.openxmlformats.org/drawingml/2006/main" xmlns:r="http://schemas.openxmlformats.org/officeDocument/2006/relationships" xmlns:p="http://schemas.openxmlformats.org/presentationml/2006/main">
   <p:cSld>
@@ -2004,6 +1794,169 @@
         <p14:creationId xmlns:p14="http://schemas.microsoft.com/office/powerpoint/2010/main" val="1024086991"/>
       </p:ext>
     </p:extLst>
+  </p:cSld>
+  <p:clrMapOvr>
+    <a:masterClrMapping/>
+  </p:clrMapOvr>
+</p:notes>
+</file>
+
+<file path=ppt/notesSlides/notesSlide26.xml><?xml version="1.0" encoding="utf-8"?>
+<p:notes xmlns:a="http://schemas.openxmlformats.org/drawingml/2006/main" xmlns:p="http://schemas.openxmlformats.org/presentationml/2006/main" xmlns:r="http://schemas.openxmlformats.org/officeDocument/2006/relationships">
+  <p:cSld>
+    <p:spTree>
+      <p:nvGrpSpPr>
+        <p:cNvPr id="1" name=""/>
+        <p:cNvGrpSpPr/>
+        <p:nvPr/>
+      </p:nvGrpSpPr>
+      <p:grpSpPr>
+        <a:xfrm>
+          <a:off x="0" y="0"/>
+          <a:ext cx="0" cy="0"/>
+          <a:chOff x="0" y="0"/>
+          <a:chExt cx="0" cy="0"/>
+        </a:xfrm>
+      </p:grpSpPr>
+      <p:sp>
+        <p:nvSpPr>
+          <p:cNvPr id="3" name="Notes Placeholder 2"/>
+          <p:cNvSpPr>
+            <a:spLocks noGrp="1"/>
+          </p:cNvSpPr>
+          <p:nvPr>
+            <p:ph type="body" idx="1"/>
+          </p:nvPr>
+        </p:nvSpPr>
+        <p:spPr/>
+        <p:txBody>
+          <a:bodyPr/>
+          <a:lstStyle/>
+          <a:p>
+            <a:r>
+              <a:t>Three ways a glue service fails, and one answer each.</a:t>
+            </a:r>
+          </a:p>
+          <a:p>
+            <a:r>
+              <a:t>- Retries: one policy for every outbound call. Five tries, exponential backoff with jitter, Retry-After parsed and capped at 30 s. Out of tries, the order becomes a review item, and Retry all or the auto-retry rule sends it again when the warehouse is back.</a:t>
+            </a:r>
+          </a:p>
+          <a:p>
+            <a:r>
+              <a:t>- Duplicates: three layers. The inbox is keyed by source and event id; the order id dedupes a redelivery under a new event id; the warehouse replays its first answer for a repeated Idempotency-Key. Exactly once across three systems is not possible; at-least-once plus idempotency gives effectively once.</a:t>
+            </a:r>
+          </a:p>
+          <a:p>
+            <a:r>
+              <a:t>- Crashes: the crash-point test stops Glue before each of 132 writes in 11 flows, restarts it and checks five rules. 41 stops broke something before the fix: a failed order with no review item, a reservation with no audit row, a channel told twice. The fix: each state change, its audit row and its review item commit in one local transaction, never across an await.</a:t>
+            </a:r>
+          </a:p>
+        </p:txBody>
+      </p:sp>
+    </p:spTree>
+  </p:cSld>
+  <p:clrMapOvr>
+    <a:masterClrMapping/>
+  </p:clrMapOvr>
+</p:notes>
+</file>
+
+<file path=ppt/notesSlides/notesSlide27.xml><?xml version="1.0" encoding="utf-8"?>
+<p:notes xmlns:a="http://schemas.openxmlformats.org/drawingml/2006/main" xmlns:p="http://schemas.openxmlformats.org/presentationml/2006/main" xmlns:r="http://schemas.openxmlformats.org/officeDocument/2006/relationships">
+  <p:cSld>
+    <p:spTree>
+      <p:nvGrpSpPr>
+        <p:cNvPr id="1" name=""/>
+        <p:cNvGrpSpPr/>
+        <p:nvPr/>
+      </p:nvGrpSpPr>
+      <p:grpSpPr>
+        <a:xfrm>
+          <a:off x="0" y="0"/>
+          <a:ext cx="0" cy="0"/>
+          <a:chOff x="0" y="0"/>
+          <a:chExt cx="0" cy="0"/>
+        </a:xfrm>
+      </p:grpSpPr>
+      <p:sp>
+        <p:nvSpPr>
+          <p:cNvPr id="3" name="Notes Placeholder 2"/>
+          <p:cNvSpPr>
+            <a:spLocks noGrp="1"/>
+          </p:cNvSpPr>
+          <p:nvPr>
+            <p:ph type="body" idx="1"/>
+          </p:nvPr>
+        </p:nvSpPr>
+        <p:spPr/>
+        <p:txBody>
+          <a:bodyPr/>
+          <a:lstStyle/>
+          <a:p>
+            <a:r>
+              <a:t>Measured, not guessed: scripts/load_probe.py sends signed shop orders through the inbox and the real worker loop in-process on this laptop. About 527 orders/s with 10 worker slots; p50 0.31 s and p95 0.53 s at 300 orders, mostly queue wait. The first probe found the production loop capped at 20 orders/s because it slept whenever every slot was busy; the fix claims the next event as soon as a slot frees.</a:t>
+            </a:r>
+          </a:p>
+          <a:p>
+            <a:r>
+              <a:t>On-call reads /metrics, which needs a signed-in viewer; /health stays a liveness check. The gauges say whether the worker keeps up, whether a paid order waits for a person, and whether stock is fresh. The first real limit is eMAG's rate limit; next steps are coalesced pushes, a circuit breaker, then Postgres with SKIP LOCKED and workers partitioned by order id.</a:t>
+            </a:r>
+          </a:p>
+        </p:txBody>
+      </p:sp>
+    </p:spTree>
+  </p:cSld>
+  <p:clrMapOvr>
+    <a:masterClrMapping/>
+  </p:clrMapOvr>
+</p:notes>
+</file>
+
+<file path=ppt/notesSlides/notesSlide28.xml><?xml version="1.0" encoding="utf-8"?>
+<p:notes xmlns:a="http://schemas.openxmlformats.org/drawingml/2006/main" xmlns:p="http://schemas.openxmlformats.org/presentationml/2006/main" xmlns:r="http://schemas.openxmlformats.org/officeDocument/2006/relationships">
+  <p:cSld>
+    <p:spTree>
+      <p:nvGrpSpPr>
+        <p:cNvPr id="1" name=""/>
+        <p:cNvGrpSpPr/>
+        <p:nvPr/>
+      </p:nvGrpSpPr>
+      <p:grpSpPr>
+        <a:xfrm>
+          <a:off x="0" y="0"/>
+          <a:ext cx="0" cy="0"/>
+          <a:chOff x="0" y="0"/>
+          <a:chExt cx="0" cy="0"/>
+        </a:xfrm>
+      </p:grpSpPr>
+      <p:sp>
+        <p:nvSpPr>
+          <p:cNvPr id="3" name="Notes Placeholder 2"/>
+          <p:cNvSpPr>
+            <a:spLocks noGrp="1"/>
+          </p:cNvSpPr>
+          <p:nvPr>
+            <p:ph type="body" idx="1"/>
+          </p:nvPr>
+        </p:nvSpPr>
+        <p:spPr/>
+        <p:txBody>
+          <a:bodyPr/>
+          <a:lstStyle/>
+          <a:p>
+            <a:r>
+              <a:t>Four trade-offs I would defend: SQLite and one process (one writer; Postgres is a one-file move because all SQL is in glue/db.py), first to the warehouse wins (simple and atomic, but it does not protect eMAG's rating, so a person decides), a person in the loop (someone must own the queue), and mocks instead of sandboxes (real API quirks are untested).</a:t>
+            </a:r>
+          </a:p>
+          <a:p>
+            <a:r>
+              <a:t>Rollout: shadow mode first, receiving and reading everything and sending nothing, compared daily with the staff's work; then shop stock, then eMAG stock, then orders. About a week per stage. Shadow mode and the stage switches are not built yet: each is a flag checked before Glue calls a system. Success after 30 days is measured, not felt. Full limitations and what the customer provides are in the backup slides.</a:t>
+            </a:r>
+          </a:p>
+        </p:txBody>
+      </p:sp>
+    </p:spTree>
   </p:cSld>
   <p:clrMapOvr>
     <a:masterClrMapping/>
@@ -2972,7 +2925,7 @@
           </a:prstGeom>
           <a:extLst>
             <a:ext uri="{C572A759-6A51-4108-AA02-DFA0A04FC94B}">
-              <ma14:wrappingTextBoxFlag xmlns:ma14="http://schemas.microsoft.com/office/mac/drawingml/2011/main" xmlns="" val="0"/>
+              <ma14:wrappingTextBoxFlag xmlns="" xmlns:ma14="http://schemas.microsoft.com/office/mac/drawingml/2011/main" val="0"/>
             </a:ext>
           </a:extLst>
         </p:spPr>
@@ -3047,7 +3000,7 @@
           </a:prstGeom>
           <a:extLst>
             <a:ext uri="{C572A759-6A51-4108-AA02-DFA0A04FC94B}">
-              <ma14:wrappingTextBoxFlag xmlns:ma14="http://schemas.microsoft.com/office/mac/drawingml/2011/main" xmlns="" val="0"/>
+              <ma14:wrappingTextBoxFlag xmlns="" xmlns:ma14="http://schemas.microsoft.com/office/mac/drawingml/2011/main" val="0"/>
             </a:ext>
           </a:extLst>
         </p:spPr>
@@ -4243,7 +4196,7 @@
                 <a:ea typeface="Courier New" pitchFamily="34" charset="-122"/>
                 <a:cs typeface="Courier New" pitchFamily="34" charset="-120"/>
               </a:rPr>
-              <a:t>ROBUSTNESS</a:t>
+              <a:t>BACKUP · ROBUSTNESS</a:t>
             </a:r>
             <a:endParaRPr lang="en-US" sz="1100" dirty="0"/>
           </a:p>
@@ -5776,7 +5729,7 @@
           </a:prstGeom>
           <a:extLst>
             <a:ext uri="{C572A759-6A51-4108-AA02-DFA0A04FC94B}">
-              <ma14:wrappingTextBoxFlag xmlns:ma14="http://schemas.microsoft.com/office/mac/drawingml/2011/main" xmlns="" val="0"/>
+              <ma14:wrappingTextBoxFlag xmlns="" xmlns:ma14="http://schemas.microsoft.com/office/mac/drawingml/2011/main" val="0"/>
             </a:ext>
           </a:extLst>
         </p:spPr>
@@ -5863,7 +5816,7 @@
                 <a:ea typeface="Courier New" pitchFamily="34" charset="-122"/>
                 <a:cs typeface="Courier New" pitchFamily="34" charset="-120"/>
               </a:rPr>
-              <a:t>ROBUSTNESS</a:t>
+              <a:t>BACKUP · ROBUSTNESS</a:t>
             </a:r>
             <a:endParaRPr lang="en-US" sz="1100" dirty="0"/>
           </a:p>
@@ -6803,7 +6756,7 @@
           </a:prstGeom>
           <a:extLst>
             <a:ext uri="{C572A759-6A51-4108-AA02-DFA0A04FC94B}">
-              <ma14:wrappingTextBoxFlag xmlns:ma14="http://schemas.microsoft.com/office/mac/drawingml/2011/main" xmlns="" val="0"/>
+              <ma14:wrappingTextBoxFlag xmlns="" xmlns:ma14="http://schemas.microsoft.com/office/mac/drawingml/2011/main" val="0"/>
             </a:ext>
           </a:extLst>
         </p:spPr>
@@ -6890,7 +6843,7 @@
                 <a:ea typeface="Courier New" pitchFamily="34" charset="-122"/>
                 <a:cs typeface="Courier New" pitchFamily="34" charset="-120"/>
               </a:rPr>
-              <a:t>OPERATIONS</a:t>
+              <a:t>BACKUP · OPERATIONS</a:t>
             </a:r>
             <a:endParaRPr lang="en-US" sz="1100" dirty="0"/>
           </a:p>
@@ -8082,7 +8035,7 @@
           </a:prstGeom>
           <a:extLst>
             <a:ext uri="{C572A759-6A51-4108-AA02-DFA0A04FC94B}">
-              <ma14:wrappingTextBoxFlag xmlns:ma14="http://schemas.microsoft.com/office/mac/drawingml/2011/main" xmlns="" val="0"/>
+              <ma14:wrappingTextBoxFlag xmlns="" xmlns:ma14="http://schemas.microsoft.com/office/mac/drawingml/2011/main" val="0"/>
             </a:ext>
           </a:extLst>
         </p:spPr>
@@ -8169,7 +8122,7 @@
                 <a:ea typeface="Courier New" pitchFamily="34" charset="-122"/>
                 <a:cs typeface="Courier New" pitchFamily="34" charset="-120"/>
               </a:rPr>
-              <a:t>OPERATIONS</a:t>
+              <a:t>BACKUP · OPERATIONS</a:t>
             </a:r>
             <a:endParaRPr lang="en-US" sz="1100" dirty="0"/>
           </a:p>
@@ -9384,7 +9337,7 @@
           </a:prstGeom>
           <a:extLst>
             <a:ext uri="{C572A759-6A51-4108-AA02-DFA0A04FC94B}">
-              <ma14:wrappingTextBoxFlag xmlns:ma14="http://schemas.microsoft.com/office/mac/drawingml/2011/main" xmlns="" val="0"/>
+              <ma14:wrappingTextBoxFlag xmlns="" xmlns:ma14="http://schemas.microsoft.com/office/mac/drawingml/2011/main" val="0"/>
             </a:ext>
           </a:extLst>
         </p:spPr>
@@ -10444,7 +10397,7 @@
           </a:prstGeom>
           <a:extLst>
             <a:ext uri="{C572A759-6A51-4108-AA02-DFA0A04FC94B}">
-              <ma14:wrappingTextBoxFlag xmlns:ma14="http://schemas.microsoft.com/office/mac/drawingml/2011/main" xmlns="" val="0"/>
+              <ma14:wrappingTextBoxFlag xmlns="" xmlns:ma14="http://schemas.microsoft.com/office/mac/drawingml/2011/main" val="0"/>
             </a:ext>
           </a:extLst>
         </p:spPr>
@@ -10531,7 +10484,7 @@
                 <a:ea typeface="Courier New" pitchFamily="34" charset="-122"/>
                 <a:cs typeface="Courier New" pitchFamily="34" charset="-120"/>
               </a:rPr>
-              <a:t>THE DASHBOARD</a:t>
+              <a:t>BACKUP · THE DASHBOARD</a:t>
             </a:r>
             <a:endParaRPr lang="en-US" sz="1100" dirty="0"/>
           </a:p>
@@ -10763,7 +10716,7 @@
           </a:prstGeom>
           <a:extLst>
             <a:ext uri="{C572A759-6A51-4108-AA02-DFA0A04FC94B}">
-              <ma14:wrappingTextBoxFlag xmlns:ma14="http://schemas.microsoft.com/office/mac/drawingml/2011/main" xmlns="" val="0"/>
+              <ma14:wrappingTextBoxFlag xmlns="" xmlns:ma14="http://schemas.microsoft.com/office/mac/drawingml/2011/main" val="0"/>
             </a:ext>
           </a:extLst>
         </p:spPr>
@@ -10850,7 +10803,7 @@
                 <a:ea typeface="Courier New" pitchFamily="34" charset="-122"/>
                 <a:cs typeface="Courier New" pitchFamily="34" charset="-120"/>
               </a:rPr>
-              <a:t>THE DASHBOARD</a:t>
+              <a:t>BACKUP · THE DASHBOARD</a:t>
             </a:r>
             <a:endParaRPr lang="en-US" sz="1100" dirty="0"/>
           </a:p>
@@ -11168,7 +11121,7 @@
           </a:prstGeom>
           <a:extLst>
             <a:ext uri="{C572A759-6A51-4108-AA02-DFA0A04FC94B}">
-              <ma14:wrappingTextBoxFlag xmlns:ma14="http://schemas.microsoft.com/office/mac/drawingml/2011/main" xmlns="" val="0"/>
+              <ma14:wrappingTextBoxFlag xmlns="" xmlns:ma14="http://schemas.microsoft.com/office/mac/drawingml/2011/main" val="0"/>
             </a:ext>
           </a:extLst>
         </p:spPr>
@@ -11255,7 +11208,7 @@
                 <a:ea typeface="Courier New" pitchFamily="34" charset="-122"/>
                 <a:cs typeface="Courier New" pitchFamily="34" charset="-120"/>
               </a:rPr>
-              <a:t>THE SYSTEMS AROUND IT</a:t>
+              <a:t>BACKUP · THE SYSTEMS AROUND IT</a:t>
             </a:r>
             <a:endParaRPr lang="en-US" sz="1100" dirty="0"/>
           </a:p>
@@ -11772,7 +11725,7 @@
           </a:prstGeom>
           <a:extLst>
             <a:ext uri="{C572A759-6A51-4108-AA02-DFA0A04FC94B}">
-              <ma14:wrappingTextBoxFlag xmlns:ma14="http://schemas.microsoft.com/office/mac/drawingml/2011/main" xmlns="" val="0"/>
+              <ma14:wrappingTextBoxFlag xmlns="" xmlns:ma14="http://schemas.microsoft.com/office/mac/drawingml/2011/main" val="0"/>
             </a:ext>
           </a:extLst>
         </p:spPr>
@@ -13178,7 +13131,7 @@
           </a:prstGeom>
           <a:extLst>
             <a:ext uri="{C572A759-6A51-4108-AA02-DFA0A04FC94B}">
-              <ma14:wrappingTextBoxFlag xmlns:ma14="http://schemas.microsoft.com/office/mac/drawingml/2011/main" xmlns="" val="0"/>
+              <ma14:wrappingTextBoxFlag xmlns="" xmlns:ma14="http://schemas.microsoft.com/office/mac/drawingml/2011/main" val="0"/>
             </a:ext>
           </a:extLst>
         </p:spPr>
@@ -13265,7 +13218,7 @@
                 <a:ea typeface="Courier New" pitchFamily="34" charset="-122"/>
                 <a:cs typeface="Courier New" pitchFamily="34" charset="-120"/>
               </a:rPr>
-              <a:t>REFLECTION</a:t>
+              <a:t>BACKUP · REFLECTION</a:t>
             </a:r>
             <a:endParaRPr lang="en-US" sz="1100" dirty="0"/>
           </a:p>
@@ -14327,7 +14280,7 @@
           </a:prstGeom>
           <a:extLst>
             <a:ext uri="{C572A759-6A51-4108-AA02-DFA0A04FC94B}">
-              <ma14:wrappingTextBoxFlag xmlns:ma14="http://schemas.microsoft.com/office/mac/drawingml/2011/main" xmlns="" val="0"/>
+              <ma14:wrappingTextBoxFlag xmlns="" xmlns:ma14="http://schemas.microsoft.com/office/mac/drawingml/2011/main" val="0"/>
             </a:ext>
           </a:extLst>
         </p:spPr>
@@ -15517,7 +15470,7 @@
           </a:prstGeom>
           <a:extLst>
             <a:ext uri="{C572A759-6A51-4108-AA02-DFA0A04FC94B}">
-              <ma14:wrappingTextBoxFlag xmlns:ma14="http://schemas.microsoft.com/office/mac/drawingml/2011/main" xmlns="" val="0"/>
+              <ma14:wrappingTextBoxFlag xmlns="" xmlns:ma14="http://schemas.microsoft.com/office/mac/drawingml/2011/main" val="0"/>
             </a:ext>
           </a:extLst>
         </p:spPr>
@@ -15604,7 +15557,7 @@
                 <a:ea typeface="Courier New" pitchFamily="34" charset="-122"/>
                 <a:cs typeface="Courier New" pitchFamily="34" charset="-120"/>
               </a:rPr>
-              <a:t>AT THE CUSTOMER</a:t>
+              <a:t>BACKUP · AT THE CUSTOMER</a:t>
             </a:r>
             <a:endParaRPr lang="en-US" sz="1100" dirty="0"/>
           </a:p>
@@ -16818,7 +16771,7 @@
           </a:prstGeom>
           <a:extLst>
             <a:ext uri="{C572A759-6A51-4108-AA02-DFA0A04FC94B}">
-              <ma14:wrappingTextBoxFlag xmlns:ma14="http://schemas.microsoft.com/office/mac/drawingml/2011/main" xmlns="" val="0"/>
+              <ma14:wrappingTextBoxFlag xmlns="" xmlns:ma14="http://schemas.microsoft.com/office/mac/drawingml/2011/main" val="0"/>
             </a:ext>
           </a:extLst>
         </p:spPr>
@@ -18228,7 +18181,7 @@
           </a:prstGeom>
           <a:extLst>
             <a:ext uri="{C572A759-6A51-4108-AA02-DFA0A04FC94B}">
-              <ma14:wrappingTextBoxFlag xmlns:ma14="http://schemas.microsoft.com/office/mac/drawingml/2011/main" xmlns="" val="0"/>
+              <ma14:wrappingTextBoxFlag xmlns="" xmlns:ma14="http://schemas.microsoft.com/office/mac/drawingml/2011/main" val="0"/>
             </a:ext>
           </a:extLst>
         </p:spPr>
@@ -18248,1518 +18201,6 @@
             <a:fld id="{F7021451-1387-4CA6-816F-3879F97B5CBC}" type="slidenum">
               <a:rPr lang="en-US" b="0"/>
               <a:t>21</a:t>
-            </a:fld>
-            <a:endParaRPr lang="en-US"/>
-          </a:p>
-        </p:txBody>
-      </p:sp>
-    </p:spTree>
-  </p:cSld>
-  <p:clrMapOvr>
-    <a:masterClrMapping/>
-  </p:clrMapOvr>
-</p:sld>
-</file>
-
-<file path=ppt/slides/slide22.xml><?xml version="1.0" encoding="utf-8"?>
-<p:sld xmlns:a="http://schemas.openxmlformats.org/drawingml/2006/main" xmlns:r="http://schemas.openxmlformats.org/officeDocument/2006/relationships" xmlns:p="http://schemas.openxmlformats.org/presentationml/2006/main">
-  <p:cSld name="Slide 22">
-    <p:spTree>
-      <p:nvGrpSpPr>
-        <p:cNvPr id="1" name=""/>
-        <p:cNvGrpSpPr/>
-        <p:nvPr/>
-      </p:nvGrpSpPr>
-      <p:grpSpPr>
-        <a:xfrm>
-          <a:off x="0" y="0"/>
-          <a:ext cx="0" cy="0"/>
-          <a:chOff x="0" y="0"/>
-          <a:chExt cx="0" cy="0"/>
-        </a:xfrm>
-      </p:grpSpPr>
-      <p:sp>
-        <p:nvSpPr>
-          <p:cNvPr id="2" name="Text 0"/>
-          <p:cNvSpPr>
-            <a:spLocks noGrp="1"/>
-          </p:cNvSpPr>
-          <p:nvPr>
-            <p:ph type="body" idx="100" hasCustomPrompt="1"/>
-          </p:nvPr>
-        </p:nvSpPr>
-        <p:spPr>
-          <a:xfrm>
-            <a:off x="548640" y="384048"/>
-            <a:ext cx="8229600" cy="237744"/>
-          </a:xfrm>
-          <a:prstGeom prst="rect">
-            <a:avLst/>
-          </a:prstGeom>
-          <a:noFill/>
-          <a:ln/>
-        </p:spPr>
-        <p:txBody>
-          <a:bodyPr wrap="square" lIns="0" tIns="0" rIns="0" bIns="0" rtlCol="0" anchor="t"/>
-          <a:lstStyle/>
-          <a:p>
-            <a:pPr marL="0" indent="0" algn="l">
-              <a:buNone/>
-            </a:pPr>
-            <a:r>
-              <a:rPr lang="en-US" sz="1100" b="1" dirty="0">
-                <a:solidFill>
-                  <a:schemeClr val="tx2"/>
-                </a:solidFill>
-                <a:latin typeface="Courier New" pitchFamily="34" charset="0"/>
-                <a:ea typeface="Courier New" pitchFamily="34" charset="-122"/>
-                <a:cs typeface="Courier New" pitchFamily="34" charset="-120"/>
-              </a:rPr>
-              <a:t>BACKUP</a:t>
-            </a:r>
-            <a:endParaRPr lang="en-US" sz="1100" dirty="0"/>
-          </a:p>
-        </p:txBody>
-      </p:sp>
-      <p:sp>
-        <p:nvSpPr>
-          <p:cNvPr id="3" name="Text 0"/>
-          <p:cNvSpPr>
-            <a:spLocks noGrp="1"/>
-          </p:cNvSpPr>
-          <p:nvPr>
-            <p:ph type="title" idx="101" hasCustomPrompt="1"/>
-          </p:nvPr>
-        </p:nvSpPr>
-        <p:spPr>
-          <a:xfrm>
-            <a:off x="548640" y="621792"/>
-            <a:ext cx="11094415" cy="640080"/>
-          </a:xfrm>
-          <a:prstGeom prst="rect">
-            <a:avLst/>
-          </a:prstGeom>
-          <a:noFill/>
-          <a:ln/>
-        </p:spPr>
-        <p:txBody>
-          <a:bodyPr wrap="square" lIns="0" tIns="0" rIns="0" bIns="0" rtlCol="0" anchor="t"/>
-          <a:lstStyle/>
-          <a:p>
-            <a:pPr marL="0" indent="0" algn="l">
-              <a:buNone/>
-            </a:pPr>
-            <a:r>
-              <a:rPr lang="en-US" sz="3200" b="1" dirty="0">
-                <a:solidFill>
-                  <a:schemeClr val="tx1"/>
-                </a:solidFill>
-              </a:rPr>
-              <a:t>Questions I expect (1 of 2)</a:t>
-            </a:r>
-            <a:endParaRPr lang="en-US" sz="3200" dirty="0"/>
-          </a:p>
-        </p:txBody>
-      </p:sp>
-      <p:sp>
-        <p:nvSpPr>
-          <p:cNvPr id="4" name="step 1"/>
-          <p:cNvSpPr/>
-          <p:nvPr/>
-        </p:nvSpPr>
-        <p:spPr>
-          <a:xfrm>
-            <a:off x="548640" y="1508760"/>
-            <a:ext cx="420624" cy="420624"/>
-          </a:xfrm>
-          <a:prstGeom prst="ellipse">
-            <a:avLst/>
-          </a:prstGeom>
-          <a:solidFill>
-            <a:schemeClr val="tx1"/>
-          </a:solidFill>
-          <a:ln/>
-        </p:spPr>
-        <p:txBody>
-          <a:bodyPr/>
-          <a:lstStyle/>
-          <a:p>
-            <a:endParaRPr lang="en-US"/>
-          </a:p>
-        </p:txBody>
-      </p:sp>
-      <p:sp>
-        <p:nvSpPr>
-          <p:cNvPr id="5" name="Text 3"/>
-          <p:cNvSpPr txBox="1"/>
-          <p:nvPr/>
-        </p:nvSpPr>
-        <p:spPr>
-          <a:xfrm>
-            <a:off x="548640" y="1508760"/>
-            <a:ext cx="420624" cy="420624"/>
-          </a:xfrm>
-          <a:prstGeom prst="rect">
-            <a:avLst/>
-          </a:prstGeom>
-          <a:noFill/>
-          <a:ln/>
-        </p:spPr>
-        <p:txBody>
-          <a:bodyPr wrap="square" lIns="0" tIns="0" rIns="0" bIns="0" rtlCol="0" anchor="ctr"/>
-          <a:lstStyle/>
-          <a:p>
-            <a:pPr marL="0" indent="0" algn="ctr">
-              <a:buNone/>
-            </a:pPr>
-            <a:r>
-              <a:rPr lang="en-US" sz="1500" b="1" dirty="0">
-                <a:solidFill>
-                  <a:schemeClr val="bg1"/>
-                </a:solidFill>
-              </a:rPr>
-              <a:t>1</a:t>
-            </a:r>
-            <a:endParaRPr lang="en-US" sz="1500" dirty="0"/>
-          </a:p>
-        </p:txBody>
-      </p:sp>
-      <p:sp>
-        <p:nvSpPr>
-          <p:cNvPr id="6" name="Text 4"/>
-          <p:cNvSpPr txBox="1"/>
-          <p:nvPr/>
-        </p:nvSpPr>
-        <p:spPr>
-          <a:xfrm>
-            <a:off x="1188720" y="1472184"/>
-            <a:ext cx="10424160" cy="548640"/>
-          </a:xfrm>
-          <a:prstGeom prst="rect">
-            <a:avLst/>
-          </a:prstGeom>
-          <a:noFill/>
-          <a:ln/>
-        </p:spPr>
-        <p:txBody>
-          <a:bodyPr wrap="square" lIns="0" tIns="0" rIns="0" bIns="0" rtlCol="0" anchor="ctr"/>
-          <a:lstStyle/>
-          <a:p>
-            <a:pPr marL="0" indent="0">
-              <a:buNone/>
-            </a:pPr>
-            <a:r>
-              <a:rPr lang="en-US" sz="1800" dirty="0">
-                <a:solidFill>
-                  <a:schemeClr val="tx1"/>
-                </a:solidFill>
-              </a:rPr>
-              <a:t>A decision is cut short by a crash. Who finds that order?</a:t>
-            </a:r>
-            <a:endParaRPr lang="en-US" sz="1800" dirty="0"/>
-          </a:p>
-        </p:txBody>
-      </p:sp>
-      <p:sp>
-        <p:nvSpPr>
-          <p:cNvPr id="7" name="rule"/>
-          <p:cNvSpPr/>
-          <p:nvPr/>
-        </p:nvSpPr>
-        <p:spPr>
-          <a:xfrm>
-            <a:off x="1188720" y="2194560"/>
-            <a:ext cx="10451592" cy="9144"/>
-          </a:xfrm>
-          <a:prstGeom prst="rect">
-            <a:avLst/>
-          </a:prstGeom>
-          <a:solidFill>
-            <a:srgbClr val="E3E6EB"/>
-          </a:solidFill>
-          <a:ln/>
-        </p:spPr>
-        <p:txBody>
-          <a:bodyPr/>
-          <a:lstStyle/>
-          <a:p>
-            <a:endParaRPr lang="en-US"/>
-          </a:p>
-        </p:txBody>
-      </p:sp>
-      <p:sp>
-        <p:nvSpPr>
-          <p:cNvPr id="8" name="step 2"/>
-          <p:cNvSpPr/>
-          <p:nvPr/>
-        </p:nvSpPr>
-        <p:spPr>
-          <a:xfrm>
-            <a:off x="548640" y="2395728"/>
-            <a:ext cx="420624" cy="420624"/>
-          </a:xfrm>
-          <a:prstGeom prst="ellipse">
-            <a:avLst/>
-          </a:prstGeom>
-          <a:solidFill>
-            <a:srgbClr val="3D4552"/>
-          </a:solidFill>
-          <a:ln/>
-        </p:spPr>
-        <p:txBody>
-          <a:bodyPr/>
-          <a:lstStyle/>
-          <a:p>
-            <a:endParaRPr lang="en-US"/>
-          </a:p>
-        </p:txBody>
-      </p:sp>
-      <p:sp>
-        <p:nvSpPr>
-          <p:cNvPr id="9" name="Text 7"/>
-          <p:cNvSpPr txBox="1"/>
-          <p:nvPr/>
-        </p:nvSpPr>
-        <p:spPr>
-          <a:xfrm>
-            <a:off x="548640" y="2395728"/>
-            <a:ext cx="420624" cy="420624"/>
-          </a:xfrm>
-          <a:prstGeom prst="rect">
-            <a:avLst/>
-          </a:prstGeom>
-          <a:noFill/>
-          <a:ln/>
-        </p:spPr>
-        <p:txBody>
-          <a:bodyPr wrap="square" lIns="0" tIns="0" rIns="0" bIns="0" rtlCol="0" anchor="ctr"/>
-          <a:lstStyle/>
-          <a:p>
-            <a:pPr marL="0" indent="0" algn="ctr">
-              <a:buNone/>
-            </a:pPr>
-            <a:r>
-              <a:rPr lang="en-US" sz="1500" b="1" dirty="0">
-                <a:solidFill>
-                  <a:schemeClr val="bg1"/>
-                </a:solidFill>
-              </a:rPr>
-              <a:t>2</a:t>
-            </a:r>
-            <a:endParaRPr lang="en-US" sz="1500" dirty="0"/>
-          </a:p>
-        </p:txBody>
-      </p:sp>
-      <p:sp>
-        <p:nvSpPr>
-          <p:cNvPr id="10" name="Text 8"/>
-          <p:cNvSpPr txBox="1"/>
-          <p:nvPr/>
-        </p:nvSpPr>
-        <p:spPr>
-          <a:xfrm>
-            <a:off x="1188720" y="2359152"/>
-            <a:ext cx="10424160" cy="548640"/>
-          </a:xfrm>
-          <a:prstGeom prst="rect">
-            <a:avLst/>
-          </a:prstGeom>
-          <a:noFill/>
-          <a:ln/>
-        </p:spPr>
-        <p:txBody>
-          <a:bodyPr wrap="square" lIns="0" tIns="0" rIns="0" bIns="0" rtlCol="0" anchor="ctr"/>
-          <a:lstStyle/>
-          <a:p>
-            <a:pPr marL="0" indent="0">
-              <a:buNone/>
-            </a:pPr>
-            <a:r>
-              <a:rPr lang="en-US" sz="1800" dirty="0">
-                <a:solidFill>
-                  <a:schemeClr val="tx1"/>
-                </a:solidFill>
-              </a:rPr>
-              <a:t>The warehouse shipped an eMAG order while eMAG was rate limiting. Then what?</a:t>
-            </a:r>
-            <a:endParaRPr lang="en-US" sz="1800" dirty="0"/>
-          </a:p>
-        </p:txBody>
-      </p:sp>
-      <p:sp>
-        <p:nvSpPr>
-          <p:cNvPr id="11" name="rule"/>
-          <p:cNvSpPr/>
-          <p:nvPr/>
-        </p:nvSpPr>
-        <p:spPr>
-          <a:xfrm>
-            <a:off x="1188720" y="3081528"/>
-            <a:ext cx="10451592" cy="9144"/>
-          </a:xfrm>
-          <a:prstGeom prst="rect">
-            <a:avLst/>
-          </a:prstGeom>
-          <a:solidFill>
-            <a:srgbClr val="E3E6EB"/>
-          </a:solidFill>
-          <a:ln/>
-        </p:spPr>
-        <p:txBody>
-          <a:bodyPr/>
-          <a:lstStyle/>
-          <a:p>
-            <a:endParaRPr lang="en-US"/>
-          </a:p>
-        </p:txBody>
-      </p:sp>
-      <p:sp>
-        <p:nvSpPr>
-          <p:cNvPr id="12" name="step 3"/>
-          <p:cNvSpPr/>
-          <p:nvPr/>
-        </p:nvSpPr>
-        <p:spPr>
-          <a:xfrm>
-            <a:off x="548640" y="3282696"/>
-            <a:ext cx="420624" cy="420624"/>
-          </a:xfrm>
-          <a:prstGeom prst="ellipse">
-            <a:avLst/>
-          </a:prstGeom>
-          <a:solidFill>
-            <a:schemeClr val="tx1"/>
-          </a:solidFill>
-          <a:ln/>
-        </p:spPr>
-        <p:txBody>
-          <a:bodyPr/>
-          <a:lstStyle/>
-          <a:p>
-            <a:endParaRPr lang="en-US"/>
-          </a:p>
-        </p:txBody>
-      </p:sp>
-      <p:sp>
-        <p:nvSpPr>
-          <p:cNvPr id="13" name="Text 11"/>
-          <p:cNvSpPr txBox="1"/>
-          <p:nvPr/>
-        </p:nvSpPr>
-        <p:spPr>
-          <a:xfrm>
-            <a:off x="548640" y="3282696"/>
-            <a:ext cx="420624" cy="420624"/>
-          </a:xfrm>
-          <a:prstGeom prst="rect">
-            <a:avLst/>
-          </a:prstGeom>
-          <a:noFill/>
-          <a:ln/>
-        </p:spPr>
-        <p:txBody>
-          <a:bodyPr wrap="square" lIns="0" tIns="0" rIns="0" bIns="0" rtlCol="0" anchor="ctr"/>
-          <a:lstStyle/>
-          <a:p>
-            <a:pPr marL="0" indent="0" algn="ctr">
-              <a:buNone/>
-            </a:pPr>
-            <a:r>
-              <a:rPr lang="en-US" sz="1500" b="1" dirty="0">
-                <a:solidFill>
-                  <a:schemeClr val="bg1"/>
-                </a:solidFill>
-              </a:rPr>
-              <a:t>3</a:t>
-            </a:r>
-            <a:endParaRPr lang="en-US" sz="1500" dirty="0"/>
-          </a:p>
-        </p:txBody>
-      </p:sp>
-      <p:sp>
-        <p:nvSpPr>
-          <p:cNvPr id="14" name="Text 12"/>
-          <p:cNvSpPr txBox="1"/>
-          <p:nvPr/>
-        </p:nvSpPr>
-        <p:spPr>
-          <a:xfrm>
-            <a:off x="1188720" y="3246120"/>
-            <a:ext cx="10424160" cy="548640"/>
-          </a:xfrm>
-          <a:prstGeom prst="rect">
-            <a:avLst/>
-          </a:prstGeom>
-          <a:noFill/>
-          <a:ln/>
-        </p:spPr>
-        <p:txBody>
-          <a:bodyPr wrap="square" lIns="0" tIns="0" rIns="0" bIns="0" rtlCol="0" anchor="ctr"/>
-          <a:lstStyle/>
-          <a:p>
-            <a:pPr marL="0" indent="0">
-              <a:buNone/>
-            </a:pPr>
-            <a:r>
-              <a:rPr lang="en-US" sz="1800" dirty="0">
-                <a:solidFill>
-                  <a:schemeClr val="tx1"/>
-                </a:solidFill>
-              </a:rPr>
-              <a:t>Two events for one order land in the same batch. Which interleavings do you handle?</a:t>
-            </a:r>
-            <a:endParaRPr lang="en-US" sz="1800" dirty="0"/>
-          </a:p>
-        </p:txBody>
-      </p:sp>
-      <p:sp>
-        <p:nvSpPr>
-          <p:cNvPr id="15" name="rule"/>
-          <p:cNvSpPr/>
-          <p:nvPr/>
-        </p:nvSpPr>
-        <p:spPr>
-          <a:xfrm>
-            <a:off x="1188720" y="3968496"/>
-            <a:ext cx="10451592" cy="9144"/>
-          </a:xfrm>
-          <a:prstGeom prst="rect">
-            <a:avLst/>
-          </a:prstGeom>
-          <a:solidFill>
-            <a:srgbClr val="E3E6EB"/>
-          </a:solidFill>
-          <a:ln/>
-        </p:spPr>
-        <p:txBody>
-          <a:bodyPr/>
-          <a:lstStyle/>
-          <a:p>
-            <a:endParaRPr lang="en-US"/>
-          </a:p>
-        </p:txBody>
-      </p:sp>
-      <p:sp>
-        <p:nvSpPr>
-          <p:cNvPr id="16" name="step 4"/>
-          <p:cNvSpPr/>
-          <p:nvPr/>
-        </p:nvSpPr>
-        <p:spPr>
-          <a:xfrm>
-            <a:off x="548640" y="4169664"/>
-            <a:ext cx="420624" cy="420624"/>
-          </a:xfrm>
-          <a:prstGeom prst="ellipse">
-            <a:avLst/>
-          </a:prstGeom>
-          <a:solidFill>
-            <a:srgbClr val="3D4552"/>
-          </a:solidFill>
-          <a:ln/>
-        </p:spPr>
-        <p:txBody>
-          <a:bodyPr/>
-          <a:lstStyle/>
-          <a:p>
-            <a:endParaRPr lang="en-US"/>
-          </a:p>
-        </p:txBody>
-      </p:sp>
-      <p:sp>
-        <p:nvSpPr>
-          <p:cNvPr id="17" name="Text 15"/>
-          <p:cNvSpPr txBox="1"/>
-          <p:nvPr/>
-        </p:nvSpPr>
-        <p:spPr>
-          <a:xfrm>
-            <a:off x="548640" y="4169664"/>
-            <a:ext cx="420624" cy="420624"/>
-          </a:xfrm>
-          <a:prstGeom prst="rect">
-            <a:avLst/>
-          </a:prstGeom>
-          <a:noFill/>
-          <a:ln/>
-        </p:spPr>
-        <p:txBody>
-          <a:bodyPr wrap="square" lIns="0" tIns="0" rIns="0" bIns="0" rtlCol="0" anchor="ctr"/>
-          <a:lstStyle/>
-          <a:p>
-            <a:pPr marL="0" indent="0" algn="ctr">
-              <a:buNone/>
-            </a:pPr>
-            <a:r>
-              <a:rPr lang="en-US" sz="1500" b="1" dirty="0">
-                <a:solidFill>
-                  <a:schemeClr val="bg1"/>
-                </a:solidFill>
-              </a:rPr>
-              <a:t>4</a:t>
-            </a:r>
-            <a:endParaRPr lang="en-US" sz="1500" dirty="0"/>
-          </a:p>
-        </p:txBody>
-      </p:sp>
-      <p:sp>
-        <p:nvSpPr>
-          <p:cNvPr id="18" name="Text 16"/>
-          <p:cNvSpPr txBox="1"/>
-          <p:nvPr/>
-        </p:nvSpPr>
-        <p:spPr>
-          <a:xfrm>
-            <a:off x="1188720" y="4133088"/>
-            <a:ext cx="10424160" cy="548640"/>
-          </a:xfrm>
-          <a:prstGeom prst="rect">
-            <a:avLst/>
-          </a:prstGeom>
-          <a:noFill/>
-          <a:ln/>
-        </p:spPr>
-        <p:txBody>
-          <a:bodyPr wrap="square" lIns="0" tIns="0" rIns="0" bIns="0" rtlCol="0" anchor="ctr"/>
-          <a:lstStyle/>
-          <a:p>
-            <a:pPr marL="0" indent="0">
-              <a:buNone/>
-            </a:pPr>
-            <a:r>
-              <a:rPr lang="en-US" sz="1800" dirty="0">
-                <a:solidFill>
-                  <a:schemeClr val="tx1"/>
-                </a:solidFill>
-              </a:rPr>
-              <a:t>What exactly is your idempotency key, and who can forge it?</a:t>
-            </a:r>
-            <a:endParaRPr lang="en-US" sz="1800" dirty="0"/>
-          </a:p>
-        </p:txBody>
-      </p:sp>
-      <p:sp>
-        <p:nvSpPr>
-          <p:cNvPr id="19" name="rule"/>
-          <p:cNvSpPr/>
-          <p:nvPr/>
-        </p:nvSpPr>
-        <p:spPr>
-          <a:xfrm>
-            <a:off x="1188720" y="4855464"/>
-            <a:ext cx="10451592" cy="9144"/>
-          </a:xfrm>
-          <a:prstGeom prst="rect">
-            <a:avLst/>
-          </a:prstGeom>
-          <a:solidFill>
-            <a:srgbClr val="E3E6EB"/>
-          </a:solidFill>
-          <a:ln/>
-        </p:spPr>
-        <p:txBody>
-          <a:bodyPr/>
-          <a:lstStyle/>
-          <a:p>
-            <a:endParaRPr lang="en-US"/>
-          </a:p>
-        </p:txBody>
-      </p:sp>
-      <p:sp>
-        <p:nvSpPr>
-          <p:cNvPr id="20" name="step 5"/>
-          <p:cNvSpPr/>
-          <p:nvPr/>
-        </p:nvSpPr>
-        <p:spPr>
-          <a:xfrm>
-            <a:off x="548640" y="5056632"/>
-            <a:ext cx="420624" cy="420624"/>
-          </a:xfrm>
-          <a:prstGeom prst="ellipse">
-            <a:avLst/>
-          </a:prstGeom>
-          <a:solidFill>
-            <a:schemeClr val="tx1"/>
-          </a:solidFill>
-          <a:ln/>
-        </p:spPr>
-        <p:txBody>
-          <a:bodyPr/>
-          <a:lstStyle/>
-          <a:p>
-            <a:endParaRPr lang="en-US"/>
-          </a:p>
-        </p:txBody>
-      </p:sp>
-      <p:sp>
-        <p:nvSpPr>
-          <p:cNvPr id="21" name="Text 19"/>
-          <p:cNvSpPr txBox="1"/>
-          <p:nvPr/>
-        </p:nvSpPr>
-        <p:spPr>
-          <a:xfrm>
-            <a:off x="548640" y="5056632"/>
-            <a:ext cx="420624" cy="420624"/>
-          </a:xfrm>
-          <a:prstGeom prst="rect">
-            <a:avLst/>
-          </a:prstGeom>
-          <a:noFill/>
-          <a:ln/>
-        </p:spPr>
-        <p:txBody>
-          <a:bodyPr wrap="square" lIns="0" tIns="0" rIns="0" bIns="0" rtlCol="0" anchor="ctr"/>
-          <a:lstStyle/>
-          <a:p>
-            <a:pPr marL="0" indent="0" algn="ctr">
-              <a:buNone/>
-            </a:pPr>
-            <a:r>
-              <a:rPr lang="en-US" sz="1500" b="1" dirty="0">
-                <a:solidFill>
-                  <a:schemeClr val="bg1"/>
-                </a:solidFill>
-              </a:rPr>
-              <a:t>5</a:t>
-            </a:r>
-            <a:endParaRPr lang="en-US" sz="1500" dirty="0"/>
-          </a:p>
-        </p:txBody>
-      </p:sp>
-      <p:sp>
-        <p:nvSpPr>
-          <p:cNvPr id="22" name="Text 20"/>
-          <p:cNvSpPr txBox="1"/>
-          <p:nvPr/>
-        </p:nvSpPr>
-        <p:spPr>
-          <a:xfrm>
-            <a:off x="1188720" y="5020056"/>
-            <a:ext cx="10424160" cy="548640"/>
-          </a:xfrm>
-          <a:prstGeom prst="rect">
-            <a:avLst/>
-          </a:prstGeom>
-          <a:noFill/>
-          <a:ln/>
-        </p:spPr>
-        <p:txBody>
-          <a:bodyPr wrap="square" lIns="0" tIns="0" rIns="0" bIns="0" rtlCol="0" anchor="ctr"/>
-          <a:lstStyle/>
-          <a:p>
-            <a:pPr marL="0" indent="0">
-              <a:buNone/>
-            </a:pPr>
-            <a:r>
-              <a:rPr lang="en-US" sz="1800" dirty="0">
-                <a:solidFill>
-                  <a:schemeClr val="tx1"/>
-                </a:solidFill>
-              </a:rPr>
-              <a:t>Retry-After says 3600. Retry-After says a date.</a:t>
-            </a:r>
-            <a:endParaRPr lang="en-US" sz="1800" dirty="0"/>
-          </a:p>
-        </p:txBody>
-      </p:sp>
-      <p:sp>
-        <p:nvSpPr>
-          <p:cNvPr id="25" name="Slide Number Placeholder 0"/>
-          <p:cNvSpPr>
-            <a:spLocks noGrp="1"/>
-          </p:cNvSpPr>
-          <p:nvPr>
-            <p:ph type="sldNum" sz="quarter" idx="4294967295"/>
-          </p:nvPr>
-        </p:nvSpPr>
-        <p:spPr>
-          <a:xfrm>
-            <a:off x="11183112" y="6446520"/>
-            <a:ext cx="457200" cy="228600"/>
-          </a:xfrm>
-          <a:prstGeom prst="rect">
-            <a:avLst/>
-          </a:prstGeom>
-          <a:extLst>
-            <a:ext uri="{C572A759-6A51-4108-AA02-DFA0A04FC94B}">
-              <ma14:wrappingTextBoxFlag xmlns:ma14="http://schemas.microsoft.com/office/mac/drawingml/2011/main" xmlns="" val="0"/>
-            </a:ext>
-          </a:extLst>
-        </p:spPr>
-        <p:txBody>
-          <a:bodyPr lIns="0" tIns="0" rIns="0" bIns="0"/>
-          <a:lstStyle>
-            <a:lvl1pPr>
-              <a:defRPr sz="1000">
-                <a:solidFill>
-                  <a:srgbClr val="8A93A1"/>
-                </a:solidFill>
-              </a:defRPr>
-            </a:lvl1pPr>
-          </a:lstStyle>
-          <a:p>
-            <a:pPr algn="r"/>
-            <a:fld id="{F7021451-1387-4CA6-816F-3879F97B5CBC}" type="slidenum">
-              <a:rPr lang="en-US" b="0"/>
-              <a:t>22</a:t>
-            </a:fld>
-            <a:endParaRPr lang="en-US"/>
-          </a:p>
-        </p:txBody>
-      </p:sp>
-    </p:spTree>
-  </p:cSld>
-  <p:clrMapOvr>
-    <a:masterClrMapping/>
-  </p:clrMapOvr>
-</p:sld>
-</file>
-
-<file path=ppt/slides/slide23.xml><?xml version="1.0" encoding="utf-8"?>
-<p:sld xmlns:a="http://schemas.openxmlformats.org/drawingml/2006/main" xmlns:r="http://schemas.openxmlformats.org/officeDocument/2006/relationships" xmlns:p="http://schemas.openxmlformats.org/presentationml/2006/main">
-  <p:cSld name="Slide 23">
-    <p:spTree>
-      <p:nvGrpSpPr>
-        <p:cNvPr id="1" name=""/>
-        <p:cNvGrpSpPr/>
-        <p:nvPr/>
-      </p:nvGrpSpPr>
-      <p:grpSpPr>
-        <a:xfrm>
-          <a:off x="0" y="0"/>
-          <a:ext cx="0" cy="0"/>
-          <a:chOff x="0" y="0"/>
-          <a:chExt cx="0" cy="0"/>
-        </a:xfrm>
-      </p:grpSpPr>
-      <p:sp>
-        <p:nvSpPr>
-          <p:cNvPr id="2" name="Text 0"/>
-          <p:cNvSpPr>
-            <a:spLocks noGrp="1"/>
-          </p:cNvSpPr>
-          <p:nvPr>
-            <p:ph type="body" idx="100" hasCustomPrompt="1"/>
-          </p:nvPr>
-        </p:nvSpPr>
-        <p:spPr>
-          <a:xfrm>
-            <a:off x="548640" y="384048"/>
-            <a:ext cx="8229600" cy="237744"/>
-          </a:xfrm>
-          <a:prstGeom prst="rect">
-            <a:avLst/>
-          </a:prstGeom>
-          <a:noFill/>
-          <a:ln/>
-        </p:spPr>
-        <p:txBody>
-          <a:bodyPr wrap="square" lIns="0" tIns="0" rIns="0" bIns="0" rtlCol="0" anchor="t"/>
-          <a:lstStyle/>
-          <a:p>
-            <a:pPr marL="0" indent="0" algn="l">
-              <a:buNone/>
-            </a:pPr>
-            <a:r>
-              <a:rPr lang="en-US" sz="1100" b="1" dirty="0">
-                <a:solidFill>
-                  <a:schemeClr val="tx2"/>
-                </a:solidFill>
-                <a:latin typeface="Courier New" pitchFamily="34" charset="0"/>
-                <a:ea typeface="Courier New" pitchFamily="34" charset="-122"/>
-                <a:cs typeface="Courier New" pitchFamily="34" charset="-120"/>
-              </a:rPr>
-              <a:t>BACKUP</a:t>
-            </a:r>
-            <a:endParaRPr lang="en-US" sz="1100" dirty="0"/>
-          </a:p>
-        </p:txBody>
-      </p:sp>
-      <p:sp>
-        <p:nvSpPr>
-          <p:cNvPr id="3" name="Text 0"/>
-          <p:cNvSpPr>
-            <a:spLocks noGrp="1"/>
-          </p:cNvSpPr>
-          <p:nvPr>
-            <p:ph type="title" idx="101" hasCustomPrompt="1"/>
-          </p:nvPr>
-        </p:nvSpPr>
-        <p:spPr>
-          <a:xfrm>
-            <a:off x="548640" y="621792"/>
-            <a:ext cx="11094415" cy="640080"/>
-          </a:xfrm>
-          <a:prstGeom prst="rect">
-            <a:avLst/>
-          </a:prstGeom>
-          <a:noFill/>
-          <a:ln/>
-        </p:spPr>
-        <p:txBody>
-          <a:bodyPr wrap="square" lIns="0" tIns="0" rIns="0" bIns="0" rtlCol="0" anchor="t"/>
-          <a:lstStyle/>
-          <a:p>
-            <a:pPr marL="0" indent="0" algn="l">
-              <a:buNone/>
-            </a:pPr>
-            <a:r>
-              <a:rPr lang="en-US" sz="3200" b="1" dirty="0">
-                <a:solidFill>
-                  <a:schemeClr val="tx1"/>
-                </a:solidFill>
-              </a:rPr>
-              <a:t>Questions I expect (2 of 2)</a:t>
-            </a:r>
-            <a:endParaRPr lang="en-US" sz="3200" dirty="0"/>
-          </a:p>
-        </p:txBody>
-      </p:sp>
-      <p:sp>
-        <p:nvSpPr>
-          <p:cNvPr id="4" name="step 6"/>
-          <p:cNvSpPr/>
-          <p:nvPr/>
-        </p:nvSpPr>
-        <p:spPr>
-          <a:xfrm>
-            <a:off x="548640" y="1508760"/>
-            <a:ext cx="420624" cy="420624"/>
-          </a:xfrm>
-          <a:prstGeom prst="ellipse">
-            <a:avLst/>
-          </a:prstGeom>
-          <a:solidFill>
-            <a:schemeClr val="tx1"/>
-          </a:solidFill>
-          <a:ln/>
-        </p:spPr>
-        <p:txBody>
-          <a:bodyPr/>
-          <a:lstStyle/>
-          <a:p>
-            <a:endParaRPr lang="en-US"/>
-          </a:p>
-        </p:txBody>
-      </p:sp>
-      <p:sp>
-        <p:nvSpPr>
-          <p:cNvPr id="5" name="Text 3"/>
-          <p:cNvSpPr txBox="1"/>
-          <p:nvPr/>
-        </p:nvSpPr>
-        <p:spPr>
-          <a:xfrm>
-            <a:off x="548640" y="1508760"/>
-            <a:ext cx="420624" cy="420624"/>
-          </a:xfrm>
-          <a:prstGeom prst="rect">
-            <a:avLst/>
-          </a:prstGeom>
-          <a:noFill/>
-          <a:ln/>
-        </p:spPr>
-        <p:txBody>
-          <a:bodyPr wrap="square" lIns="0" tIns="0" rIns="0" bIns="0" rtlCol="0" anchor="ctr"/>
-          <a:lstStyle/>
-          <a:p>
-            <a:pPr marL="0" indent="0" algn="ctr">
-              <a:buNone/>
-            </a:pPr>
-            <a:r>
-              <a:rPr lang="en-US" sz="1500" b="1" dirty="0">
-                <a:solidFill>
-                  <a:schemeClr val="bg1"/>
-                </a:solidFill>
-              </a:rPr>
-              <a:t>6</a:t>
-            </a:r>
-            <a:endParaRPr lang="en-US" sz="1500" dirty="0"/>
-          </a:p>
-        </p:txBody>
-      </p:sp>
-      <p:sp>
-        <p:nvSpPr>
-          <p:cNvPr id="6" name="Text 4"/>
-          <p:cNvSpPr txBox="1"/>
-          <p:nvPr/>
-        </p:nvSpPr>
-        <p:spPr>
-          <a:xfrm>
-            <a:off x="1188720" y="1472184"/>
-            <a:ext cx="10424160" cy="548640"/>
-          </a:xfrm>
-          <a:prstGeom prst="rect">
-            <a:avLst/>
-          </a:prstGeom>
-          <a:noFill/>
-          <a:ln/>
-        </p:spPr>
-        <p:txBody>
-          <a:bodyPr wrap="square" lIns="0" tIns="0" rIns="0" bIns="0" rtlCol="0" anchor="ctr"/>
-          <a:lstStyle/>
-          <a:p>
-            <a:pPr marL="0" indent="0">
-              <a:buNone/>
-            </a:pPr>
-            <a:r>
-              <a:rPr lang="en-US" sz="1800" dirty="0">
-                <a:solidFill>
-                  <a:schemeClr val="tx1"/>
-                </a:solidFill>
-              </a:rPr>
-              <a:t>Why push every product every 10 s? What breaks at 20,000?</a:t>
-            </a:r>
-            <a:endParaRPr lang="en-US" sz="1800" dirty="0"/>
-          </a:p>
-        </p:txBody>
-      </p:sp>
-      <p:sp>
-        <p:nvSpPr>
-          <p:cNvPr id="7" name="rule"/>
-          <p:cNvSpPr/>
-          <p:nvPr/>
-        </p:nvSpPr>
-        <p:spPr>
-          <a:xfrm>
-            <a:off x="1188720" y="2194560"/>
-            <a:ext cx="10451592" cy="9144"/>
-          </a:xfrm>
-          <a:prstGeom prst="rect">
-            <a:avLst/>
-          </a:prstGeom>
-          <a:solidFill>
-            <a:srgbClr val="E3E6EB"/>
-          </a:solidFill>
-          <a:ln/>
-        </p:spPr>
-        <p:txBody>
-          <a:bodyPr/>
-          <a:lstStyle/>
-          <a:p>
-            <a:endParaRPr lang="en-US"/>
-          </a:p>
-        </p:txBody>
-      </p:sp>
-      <p:sp>
-        <p:nvSpPr>
-          <p:cNvPr id="8" name="step 7"/>
-          <p:cNvSpPr/>
-          <p:nvPr/>
-        </p:nvSpPr>
-        <p:spPr>
-          <a:xfrm>
-            <a:off x="548640" y="2395728"/>
-            <a:ext cx="420624" cy="420624"/>
-          </a:xfrm>
-          <a:prstGeom prst="ellipse">
-            <a:avLst/>
-          </a:prstGeom>
-          <a:solidFill>
-            <a:srgbClr val="3D4552"/>
-          </a:solidFill>
-          <a:ln/>
-        </p:spPr>
-        <p:txBody>
-          <a:bodyPr/>
-          <a:lstStyle/>
-          <a:p>
-            <a:endParaRPr lang="en-US"/>
-          </a:p>
-        </p:txBody>
-      </p:sp>
-      <p:sp>
-        <p:nvSpPr>
-          <p:cNvPr id="9" name="Text 7"/>
-          <p:cNvSpPr txBox="1"/>
-          <p:nvPr/>
-        </p:nvSpPr>
-        <p:spPr>
-          <a:xfrm>
-            <a:off x="548640" y="2395728"/>
-            <a:ext cx="420624" cy="420624"/>
-          </a:xfrm>
-          <a:prstGeom prst="rect">
-            <a:avLst/>
-          </a:prstGeom>
-          <a:noFill/>
-          <a:ln/>
-        </p:spPr>
-        <p:txBody>
-          <a:bodyPr wrap="square" lIns="0" tIns="0" rIns="0" bIns="0" rtlCol="0" anchor="ctr"/>
-          <a:lstStyle/>
-          <a:p>
-            <a:pPr marL="0" indent="0" algn="ctr">
-              <a:buNone/>
-            </a:pPr>
-            <a:r>
-              <a:rPr lang="en-US" sz="1500" b="1" dirty="0">
-                <a:solidFill>
-                  <a:schemeClr val="bg1"/>
-                </a:solidFill>
-              </a:rPr>
-              <a:t>7</a:t>
-            </a:r>
-            <a:endParaRPr lang="en-US" sz="1500" dirty="0"/>
-          </a:p>
-        </p:txBody>
-      </p:sp>
-      <p:sp>
-        <p:nvSpPr>
-          <p:cNvPr id="10" name="Text 8"/>
-          <p:cNvSpPr txBox="1"/>
-          <p:nvPr/>
-        </p:nvSpPr>
-        <p:spPr>
-          <a:xfrm>
-            <a:off x="1188720" y="2359152"/>
-            <a:ext cx="10424160" cy="548640"/>
-          </a:xfrm>
-          <a:prstGeom prst="rect">
-            <a:avLst/>
-          </a:prstGeom>
-          <a:noFill/>
-          <a:ln/>
-        </p:spPr>
-        <p:txBody>
-          <a:bodyPr wrap="square" lIns="0" tIns="0" rIns="0" bIns="0" rtlCol="0" anchor="ctr"/>
-          <a:lstStyle/>
-          <a:p>
-            <a:pPr marL="0" indent="0">
-              <a:buNone/>
-            </a:pPr>
-            <a:r>
-              <a:rPr lang="en-US" sz="1800" dirty="0">
-                <a:solidFill>
-                  <a:schemeClr val="tx1"/>
-                </a:solidFill>
-              </a:rPr>
-              <a:t>Show me the number.</a:t>
-            </a:r>
-            <a:endParaRPr lang="en-US" sz="1800" dirty="0"/>
-          </a:p>
-        </p:txBody>
-      </p:sp>
-      <p:sp>
-        <p:nvSpPr>
-          <p:cNvPr id="11" name="rule"/>
-          <p:cNvSpPr/>
-          <p:nvPr/>
-        </p:nvSpPr>
-        <p:spPr>
-          <a:xfrm>
-            <a:off x="1188720" y="3081528"/>
-            <a:ext cx="10451592" cy="9144"/>
-          </a:xfrm>
-          <a:prstGeom prst="rect">
-            <a:avLst/>
-          </a:prstGeom>
-          <a:solidFill>
-            <a:srgbClr val="E3E6EB"/>
-          </a:solidFill>
-          <a:ln/>
-        </p:spPr>
-        <p:txBody>
-          <a:bodyPr/>
-          <a:lstStyle/>
-          <a:p>
-            <a:endParaRPr lang="en-US"/>
-          </a:p>
-        </p:txBody>
-      </p:sp>
-      <p:sp>
-        <p:nvSpPr>
-          <p:cNvPr id="12" name="step 8"/>
-          <p:cNvSpPr/>
-          <p:nvPr/>
-        </p:nvSpPr>
-        <p:spPr>
-          <a:xfrm>
-            <a:off x="548640" y="3282696"/>
-            <a:ext cx="420624" cy="420624"/>
-          </a:xfrm>
-          <a:prstGeom prst="ellipse">
-            <a:avLst/>
-          </a:prstGeom>
-          <a:solidFill>
-            <a:schemeClr val="tx1"/>
-          </a:solidFill>
-          <a:ln/>
-        </p:spPr>
-        <p:txBody>
-          <a:bodyPr/>
-          <a:lstStyle/>
-          <a:p>
-            <a:endParaRPr lang="en-US"/>
-          </a:p>
-        </p:txBody>
-      </p:sp>
-      <p:sp>
-        <p:nvSpPr>
-          <p:cNvPr id="13" name="Text 11"/>
-          <p:cNvSpPr txBox="1"/>
-          <p:nvPr/>
-        </p:nvSpPr>
-        <p:spPr>
-          <a:xfrm>
-            <a:off x="548640" y="3282696"/>
-            <a:ext cx="420624" cy="420624"/>
-          </a:xfrm>
-          <a:prstGeom prst="rect">
-            <a:avLst/>
-          </a:prstGeom>
-          <a:noFill/>
-          <a:ln/>
-        </p:spPr>
-        <p:txBody>
-          <a:bodyPr wrap="square" lIns="0" tIns="0" rIns="0" bIns="0" rtlCol="0" anchor="ctr"/>
-          <a:lstStyle/>
-          <a:p>
-            <a:pPr marL="0" indent="0" algn="ctr">
-              <a:buNone/>
-            </a:pPr>
-            <a:r>
-              <a:rPr lang="en-US" sz="1500" b="1" dirty="0">
-                <a:solidFill>
-                  <a:schemeClr val="bg1"/>
-                </a:solidFill>
-              </a:rPr>
-              <a:t>8</a:t>
-            </a:r>
-            <a:endParaRPr lang="en-US" sz="1500" dirty="0"/>
-          </a:p>
-        </p:txBody>
-      </p:sp>
-      <p:sp>
-        <p:nvSpPr>
-          <p:cNvPr id="14" name="Text 12"/>
-          <p:cNvSpPr txBox="1"/>
-          <p:nvPr/>
-        </p:nvSpPr>
-        <p:spPr>
-          <a:xfrm>
-            <a:off x="1188720" y="3246120"/>
-            <a:ext cx="10424160" cy="548640"/>
-          </a:xfrm>
-          <a:prstGeom prst="rect">
-            <a:avLst/>
-          </a:prstGeom>
-          <a:noFill/>
-          <a:ln/>
-        </p:spPr>
-        <p:txBody>
-          <a:bodyPr wrap="square" lIns="0" tIns="0" rIns="0" bIns="0" rtlCol="0" anchor="ctr"/>
-          <a:lstStyle/>
-          <a:p>
-            <a:pPr marL="0" indent="0">
-              <a:buNone/>
-            </a:pPr>
-            <a:r>
-              <a:rPr lang="en-US" sz="1800" dirty="0">
-                <a:solidFill>
-                  <a:schemeClr val="tx1"/>
-                </a:solidFill>
-              </a:rPr>
-              <a:t>It is 3 a.m. Which alert fires, and what does it say?</a:t>
-            </a:r>
-            <a:endParaRPr lang="en-US" sz="1800" dirty="0"/>
-          </a:p>
-        </p:txBody>
-      </p:sp>
-      <p:sp>
-        <p:nvSpPr>
-          <p:cNvPr id="15" name="rule"/>
-          <p:cNvSpPr/>
-          <p:nvPr/>
-        </p:nvSpPr>
-        <p:spPr>
-          <a:xfrm>
-            <a:off x="1188720" y="3968496"/>
-            <a:ext cx="10451592" cy="9144"/>
-          </a:xfrm>
-          <a:prstGeom prst="rect">
-            <a:avLst/>
-          </a:prstGeom>
-          <a:solidFill>
-            <a:srgbClr val="E3E6EB"/>
-          </a:solidFill>
-          <a:ln/>
-        </p:spPr>
-        <p:txBody>
-          <a:bodyPr/>
-          <a:lstStyle/>
-          <a:p>
-            <a:endParaRPr lang="en-US"/>
-          </a:p>
-        </p:txBody>
-      </p:sp>
-      <p:sp>
-        <p:nvSpPr>
-          <p:cNvPr id="16" name="step 9"/>
-          <p:cNvSpPr/>
-          <p:nvPr/>
-        </p:nvSpPr>
-        <p:spPr>
-          <a:xfrm>
-            <a:off x="548640" y="4169664"/>
-            <a:ext cx="420624" cy="420624"/>
-          </a:xfrm>
-          <a:prstGeom prst="ellipse">
-            <a:avLst/>
-          </a:prstGeom>
-          <a:solidFill>
-            <a:srgbClr val="3D4552"/>
-          </a:solidFill>
-          <a:ln/>
-        </p:spPr>
-        <p:txBody>
-          <a:bodyPr/>
-          <a:lstStyle/>
-          <a:p>
-            <a:endParaRPr lang="en-US"/>
-          </a:p>
-        </p:txBody>
-      </p:sp>
-      <p:sp>
-        <p:nvSpPr>
-          <p:cNvPr id="17" name="Text 15"/>
-          <p:cNvSpPr txBox="1"/>
-          <p:nvPr/>
-        </p:nvSpPr>
-        <p:spPr>
-          <a:xfrm>
-            <a:off x="548640" y="4169664"/>
-            <a:ext cx="420624" cy="420624"/>
-          </a:xfrm>
-          <a:prstGeom prst="rect">
-            <a:avLst/>
-          </a:prstGeom>
-          <a:noFill/>
-          <a:ln/>
-        </p:spPr>
-        <p:txBody>
-          <a:bodyPr wrap="square" lIns="0" tIns="0" rIns="0" bIns="0" rtlCol="0" anchor="ctr"/>
-          <a:lstStyle/>
-          <a:p>
-            <a:pPr marL="0" indent="0" algn="ctr">
-              <a:buNone/>
-            </a:pPr>
-            <a:r>
-              <a:rPr lang="en-US" sz="1500" b="1" dirty="0">
-                <a:solidFill>
-                  <a:schemeClr val="bg1"/>
-                </a:solidFill>
-              </a:rPr>
-              <a:t>9</a:t>
-            </a:r>
-            <a:endParaRPr lang="en-US" sz="1500" dirty="0"/>
-          </a:p>
-        </p:txBody>
-      </p:sp>
-      <p:sp>
-        <p:nvSpPr>
-          <p:cNvPr id="18" name="Text 16"/>
-          <p:cNvSpPr txBox="1"/>
-          <p:nvPr/>
-        </p:nvSpPr>
-        <p:spPr>
-          <a:xfrm>
-            <a:off x="1188720" y="4133088"/>
-            <a:ext cx="10424160" cy="548640"/>
-          </a:xfrm>
-          <a:prstGeom prst="rect">
-            <a:avLst/>
-          </a:prstGeom>
-          <a:noFill/>
-          <a:ln/>
-        </p:spPr>
-        <p:txBody>
-          <a:bodyPr wrap="square" lIns="0" tIns="0" rIns="0" bIns="0" rtlCol="0" anchor="ctr"/>
-          <a:lstStyle/>
-          <a:p>
-            <a:pPr marL="0" indent="0">
-              <a:buNone/>
-            </a:pPr>
-            <a:r>
-              <a:rPr lang="en-US" sz="1800" dirty="0">
-                <a:solidFill>
-                  <a:schemeClr val="tx1"/>
-                </a:solidFill>
-              </a:rPr>
-              <a:t>Why a React console, a model and a palette for a small glue service? What did it cost the core?</a:t>
-            </a:r>
-            <a:endParaRPr lang="en-US" sz="1800" dirty="0"/>
-          </a:p>
-        </p:txBody>
-      </p:sp>
-      <p:sp>
-        <p:nvSpPr>
-          <p:cNvPr id="19" name="rule"/>
-          <p:cNvSpPr/>
-          <p:nvPr/>
-        </p:nvSpPr>
-        <p:spPr>
-          <a:xfrm>
-            <a:off x="1188720" y="4855464"/>
-            <a:ext cx="10451592" cy="9144"/>
-          </a:xfrm>
-          <a:prstGeom prst="rect">
-            <a:avLst/>
-          </a:prstGeom>
-          <a:solidFill>
-            <a:srgbClr val="E3E6EB"/>
-          </a:solidFill>
-          <a:ln/>
-        </p:spPr>
-        <p:txBody>
-          <a:bodyPr/>
-          <a:lstStyle/>
-          <a:p>
-            <a:endParaRPr lang="en-US"/>
-          </a:p>
-        </p:txBody>
-      </p:sp>
-      <p:sp>
-        <p:nvSpPr>
-          <p:cNvPr id="20" name="step 10"/>
-          <p:cNvSpPr/>
-          <p:nvPr/>
-        </p:nvSpPr>
-        <p:spPr>
-          <a:xfrm>
-            <a:off x="548640" y="5056632"/>
-            <a:ext cx="420624" cy="420624"/>
-          </a:xfrm>
-          <a:prstGeom prst="ellipse">
-            <a:avLst/>
-          </a:prstGeom>
-          <a:solidFill>
-            <a:schemeClr val="tx1"/>
-          </a:solidFill>
-          <a:ln/>
-        </p:spPr>
-        <p:txBody>
-          <a:bodyPr/>
-          <a:lstStyle/>
-          <a:p>
-            <a:endParaRPr lang="en-US"/>
-          </a:p>
-        </p:txBody>
-      </p:sp>
-      <p:sp>
-        <p:nvSpPr>
-          <p:cNvPr id="21" name="Text 19"/>
-          <p:cNvSpPr txBox="1"/>
-          <p:nvPr/>
-        </p:nvSpPr>
-        <p:spPr>
-          <a:xfrm>
-            <a:off x="548640" y="5056632"/>
-            <a:ext cx="420624" cy="420624"/>
-          </a:xfrm>
-          <a:prstGeom prst="rect">
-            <a:avLst/>
-          </a:prstGeom>
-          <a:noFill/>
-          <a:ln/>
-        </p:spPr>
-        <p:txBody>
-          <a:bodyPr wrap="square" lIns="0" tIns="0" rIns="0" bIns="0" rtlCol="0" anchor="ctr"/>
-          <a:lstStyle/>
-          <a:p>
-            <a:pPr marL="0" indent="0" algn="ctr">
-              <a:buNone/>
-            </a:pPr>
-            <a:r>
-              <a:rPr lang="en-US" sz="1500" b="1" dirty="0">
-                <a:solidFill>
-                  <a:schemeClr val="bg1"/>
-                </a:solidFill>
-              </a:rPr>
-              <a:t>10</a:t>
-            </a:r>
-            <a:endParaRPr lang="en-US" sz="1500" dirty="0"/>
-          </a:p>
-        </p:txBody>
-      </p:sp>
-      <p:sp>
-        <p:nvSpPr>
-          <p:cNvPr id="22" name="Text 20"/>
-          <p:cNvSpPr txBox="1"/>
-          <p:nvPr/>
-        </p:nvSpPr>
-        <p:spPr>
-          <a:xfrm>
-            <a:off x="1188720" y="5020056"/>
-            <a:ext cx="10424160" cy="548640"/>
-          </a:xfrm>
-          <a:prstGeom prst="rect">
-            <a:avLst/>
-          </a:prstGeom>
-          <a:noFill/>
-          <a:ln/>
-        </p:spPr>
-        <p:txBody>
-          <a:bodyPr wrap="square" lIns="0" tIns="0" rIns="0" bIns="0" rtlCol="0" anchor="ctr"/>
-          <a:lstStyle/>
-          <a:p>
-            <a:pPr marL="0" indent="0">
-              <a:buNone/>
-            </a:pPr>
-            <a:r>
-              <a:rPr lang="en-US" sz="1800" dirty="0">
-                <a:solidFill>
-                  <a:schemeClr val="tx1"/>
-                </a:solidFill>
-              </a:rPr>
-              <a:t>Policy in code and the model explains. So what is the model for? Would you ship it?</a:t>
-            </a:r>
-            <a:endParaRPr lang="en-US" sz="1800" dirty="0"/>
-          </a:p>
-        </p:txBody>
-      </p:sp>
-      <p:sp>
-        <p:nvSpPr>
-          <p:cNvPr id="25" name="Slide Number Placeholder 0"/>
-          <p:cNvSpPr>
-            <a:spLocks noGrp="1"/>
-          </p:cNvSpPr>
-          <p:nvPr>
-            <p:ph type="sldNum" sz="quarter" idx="4294967295"/>
-          </p:nvPr>
-        </p:nvSpPr>
-        <p:spPr>
-          <a:xfrm>
-            <a:off x="11183112" y="6446520"/>
-            <a:ext cx="457200" cy="228600"/>
-          </a:xfrm>
-          <a:prstGeom prst="rect">
-            <a:avLst/>
-          </a:prstGeom>
-          <a:extLst>
-            <a:ext uri="{C572A759-6A51-4108-AA02-DFA0A04FC94B}">
-              <ma14:wrappingTextBoxFlag xmlns:ma14="http://schemas.microsoft.com/office/mac/drawingml/2011/main" xmlns="" val="0"/>
-            </a:ext>
-          </a:extLst>
-        </p:spPr>
-        <p:txBody>
-          <a:bodyPr lIns="0" tIns="0" rIns="0" bIns="0"/>
-          <a:lstStyle>
-            <a:lvl1pPr>
-              <a:defRPr sz="1000">
-                <a:solidFill>
-                  <a:srgbClr val="8A93A1"/>
-                </a:solidFill>
-              </a:defRPr>
-            </a:lvl1pPr>
-          </a:lstStyle>
-          <a:p>
-            <a:pPr algn="r"/>
-            <a:fld id="{F7021451-1387-4CA6-816F-3879F97B5CBC}" type="slidenum">
-              <a:rPr lang="en-US" b="0"/>
-              <a:t>23</a:t>
             </a:fld>
             <a:endParaRPr lang="en-US"/>
           </a:p>
@@ -20073,7 +18514,7 @@
           </a:prstGeom>
           <a:extLst>
             <a:ext uri="{C572A759-6A51-4108-AA02-DFA0A04FC94B}">
-              <ma14:wrappingTextBoxFlag xmlns:ma14="http://schemas.microsoft.com/office/mac/drawingml/2011/main" xmlns="" val="0"/>
+              <ma14:wrappingTextBoxFlag xmlns="" xmlns:ma14="http://schemas.microsoft.com/office/mac/drawingml/2011/main" val="0"/>
             </a:ext>
           </a:extLst>
         </p:spPr>
@@ -20280,7 +18721,7 @@
           </a:prstGeom>
           <a:extLst>
             <a:ext uri="{C572A759-6A51-4108-AA02-DFA0A04FC94B}">
-              <ma14:wrappingTextBoxFlag xmlns:ma14="http://schemas.microsoft.com/office/mac/drawingml/2011/main" xmlns="" val="0"/>
+              <ma14:wrappingTextBoxFlag xmlns="" xmlns:ma14="http://schemas.microsoft.com/office/mac/drawingml/2011/main" val="0"/>
             </a:ext>
           </a:extLst>
         </p:spPr>
@@ -20300,6 +18741,3782 @@
             <a:fld id="{F7021451-1387-4CA6-816F-3879F97B5CBC}" type="slidenum">
               <a:rPr lang="en-US" b="0"/>
               <a:t>25</a:t>
+            </a:fld>
+            <a:endParaRPr lang="en-US"/>
+          </a:p>
+        </p:txBody>
+      </p:sp>
+    </p:spTree>
+  </p:cSld>
+  <p:clrMapOvr>
+    <a:masterClrMapping/>
+  </p:clrMapOvr>
+</p:sld>
+</file>
+
+<file path=ppt/slides/slide26.xml><?xml version="1.0" encoding="utf-8"?>
+<p:sld xmlns:a="http://schemas.openxmlformats.org/drawingml/2006/main" xmlns:p="http://schemas.openxmlformats.org/presentationml/2006/main" xmlns:r="http://schemas.openxmlformats.org/officeDocument/2006/relationships">
+  <p:cSld>
+    <p:spTree>
+      <p:nvGrpSpPr>
+        <p:cNvPr id="2" name=""/>
+        <p:cNvGrpSpPr/>
+        <p:nvPr/>
+      </p:nvGrpSpPr>
+      <p:grpSpPr/>
+      <p:sp>
+        <p:nvSpPr>
+          <p:cNvPr id="3" name="Text 0"/>
+          <p:cNvSpPr>
+            <a:spLocks noGrp="1"/>
+          </p:cNvSpPr>
+          <p:nvPr>
+            <p:ph type="body" idx="100" hasCustomPrompt="1"/>
+          </p:nvPr>
+        </p:nvSpPr>
+        <p:spPr>
+          <a:xfrm>
+            <a:off x="548640" y="384048"/>
+            <a:ext cx="8229600" cy="237744"/>
+          </a:xfrm>
+          <a:prstGeom prst="rect">
+            <a:avLst/>
+          </a:prstGeom>
+          <a:noFill/>
+          <a:ln/>
+        </p:spPr>
+        <p:txBody>
+          <a:bodyPr wrap="square" lIns="0" tIns="0" rIns="0" bIns="0" rtlCol="0" anchor="t"/>
+          <a:lstStyle/>
+          <a:p>
+            <a:pPr marL="0" indent="0" algn="l">
+              <a:buNone/>
+            </a:pPr>
+            <a:r>
+              <a:rPr lang="en-US" sz="1100" b="1" dirty="0">
+                <a:solidFill>
+                  <a:schemeClr val="tx2"/>
+                </a:solidFill>
+                <a:latin typeface="Courier New" pitchFamily="34" charset="0"/>
+                <a:ea typeface="Courier New" pitchFamily="34" charset="-122"/>
+                <a:cs typeface="Courier New" pitchFamily="34" charset="-120"/>
+              </a:rPr>
+              <a:t>ROBUSTNESS</a:t>
+            </a:r>
+            <a:endParaRPr lang="en-US" sz="1100" dirty="0"/>
+          </a:p>
+        </p:txBody>
+      </p:sp>
+      <p:sp>
+        <p:nvSpPr>
+          <p:cNvPr id="4" name="Text 0"/>
+          <p:cNvSpPr>
+            <a:spLocks noGrp="1"/>
+          </p:cNvSpPr>
+          <p:nvPr>
+            <p:ph type="title" idx="101" hasCustomPrompt="1"/>
+          </p:nvPr>
+        </p:nvSpPr>
+        <p:spPr>
+          <a:xfrm>
+            <a:off x="548640" y="621792"/>
+            <a:ext cx="11094415" cy="640080"/>
+          </a:xfrm>
+          <a:prstGeom prst="rect">
+            <a:avLst/>
+          </a:prstGeom>
+          <a:noFill/>
+          <a:ln/>
+        </p:spPr>
+        <p:txBody>
+          <a:bodyPr wrap="square" lIns="0" tIns="0" rIns="0" bIns="0" rtlCol="0" anchor="t"/>
+          <a:lstStyle/>
+          <a:p>
+            <a:pPr marL="0" indent="0" algn="l">
+              <a:buNone/>
+            </a:pPr>
+            <a:r>
+              <a:rPr lang="en-US" sz="3200" b="1" dirty="0">
+                <a:solidFill>
+                  <a:schemeClr val="tx1"/>
+                </a:solidFill>
+              </a:rPr>
+              <a:t>When things fail: retries, duplicates, crashes</a:t>
+            </a:r>
+            <a:endParaRPr lang="en-US" sz="3200" dirty="0"/>
+          </a:p>
+        </p:txBody>
+      </p:sp>
+      <p:sp>
+        <p:nvSpPr>
+          <p:cNvPr id="5" name="Oldest pending event"/>
+          <p:cNvSpPr/>
+          <p:nvPr/>
+        </p:nvSpPr>
+        <p:spPr>
+          <a:xfrm>
+            <a:off x="548640" y="1463040"/>
+            <a:ext cx="3593592" cy="3337560"/>
+          </a:xfrm>
+          <a:prstGeom prst="roundRect">
+            <a:avLst>
+              <a:gd name="adj" fmla="val 2191"/>
+            </a:avLst>
+          </a:prstGeom>
+          <a:solidFill>
+            <a:schemeClr val="bg1"/>
+          </a:solidFill>
+          <a:ln w="9525">
+            <a:solidFill>
+              <a:srgbClr val="E3E6EB"/>
+            </a:solidFill>
+            <a:prstDash val="solid"/>
+          </a:ln>
+        </p:spPr>
+        <p:txBody>
+          <a:bodyPr/>
+          <a:lstStyle/>
+          <a:p>
+            <a:endParaRPr lang="en-US"/>
+          </a:p>
+        </p:txBody>
+      </p:sp>
+      <p:sp>
+        <p:nvSpPr>
+          <p:cNvPr id="6" name="Text 4"/>
+          <p:cNvSpPr txBox="1"/>
+          <p:nvPr/>
+        </p:nvSpPr>
+        <p:spPr>
+          <a:xfrm>
+            <a:off x="749808" y="1627632"/>
+            <a:ext cx="3191256" cy="365760"/>
+          </a:xfrm>
+          <a:prstGeom prst="rect">
+            <a:avLst/>
+          </a:prstGeom>
+          <a:noFill/>
+          <a:ln/>
+        </p:spPr>
+        <p:txBody>
+          <a:bodyPr wrap="square" lIns="0" tIns="0" rIns="0" bIns="0" rtlCol="0" anchor="t"/>
+          <a:lstStyle/>
+          <a:p>
+            <a:pPr marL="0" indent="0">
+              <a:buNone/>
+            </a:pPr>
+            <a:r>
+              <a:rPr lang="en-US" sz="1300" b="1" dirty="0">
+                <a:solidFill>
+                  <a:schemeClr val="tx1"/>
+                </a:solidFill>
+              </a:rPr>
+              <a:t>Retries</a:t>
+            </a:r>
+            <a:endParaRPr lang="en-US" sz="1300" dirty="0"/>
+          </a:p>
+        </p:txBody>
+      </p:sp>
+      <p:sp>
+        <p:nvSpPr>
+          <p:cNvPr id="7" name="Text 19"/>
+          <p:cNvSpPr txBox="1"/>
+          <p:nvPr/>
+        </p:nvSpPr>
+        <p:spPr>
+          <a:xfrm>
+            <a:off x="749808" y="2029968"/>
+            <a:ext cx="3191256" cy="2633472"/>
+          </a:xfrm>
+          <a:prstGeom prst="rect">
+            <a:avLst/>
+          </a:prstGeom>
+          <a:noFill/>
+          <a:ln/>
+        </p:spPr>
+        <p:txBody>
+          <a:bodyPr wrap="square" lIns="0" tIns="0" rIns="0" bIns="0" rtlCol="0" anchor="t"/>
+          <a:lstStyle/>
+          <a:p>
+            <a:pPr marL="177800" indent="-177800">
+              <a:spcAft>
+                <a:spcPts val="500"/>
+              </a:spcAft>
+              <a:buSzPct val="100000"/>
+              <a:buChar char="•"/>
+            </a:pPr>
+            <a:r>
+              <a:rPr lang="en-US" sz="1300" b="1" dirty="0">
+                <a:solidFill>
+                  <a:srgbClr val="3D4552"/>
+                </a:solidFill>
+              </a:rPr>
+              <a:t>One policy for every call out: </a:t>
+            </a:r>
+            <a:r>
+              <a:rPr lang="en-US" sz="1300" dirty="0">
+                <a:solidFill>
+                  <a:srgbClr val="3D4552"/>
+                </a:solidFill>
+              </a:rPr>
+              <a:t>5 tries, 2 s timeout</a:t>
+            </a:r>
+            <a:endParaRPr lang="en-US" sz="1300" dirty="0"/>
+          </a:p>
+          <a:p>
+            <a:pPr marL="177800" indent="-177800">
+              <a:spcAft>
+                <a:spcPts val="500"/>
+              </a:spcAft>
+              <a:buSzPct val="100000"/>
+              <a:buChar char="•"/>
+            </a:pPr>
+            <a:r>
+              <a:rPr lang="en-US" sz="1300" b="1" dirty="0">
+                <a:solidFill>
+                  <a:srgbClr val="3D4552"/>
+                </a:solidFill>
+              </a:rPr>
+              <a:t>Backoff </a:t>
+            </a:r>
+            <a:r>
+              <a:rPr lang="en-US" sz="1300" dirty="0">
+                <a:solidFill>
+                  <a:srgbClr val="3D4552"/>
+                </a:solidFill>
+              </a:rPr>
+              <a:t>from 0.5 s with jitter; Retry-After honoured, capped at 30 s</a:t>
+            </a:r>
+            <a:endParaRPr lang="en-US" sz="1300" dirty="0"/>
+          </a:p>
+          <a:p>
+            <a:pPr marL="177800" indent="-177800">
+              <a:spcAft>
+                <a:spcPts val="500"/>
+              </a:spcAft>
+              <a:buSzPct val="100000"/>
+              <a:buChar char="•"/>
+            </a:pPr>
+            <a:r>
+              <a:rPr lang="en-US" sz="1300" b="1" dirty="0">
+                <a:solidFill>
+                  <a:srgbClr val="3D4552"/>
+                </a:solidFill>
+              </a:rPr>
+              <a:t>Out of tries: </a:t>
+            </a:r>
+            <a:r>
+              <a:rPr lang="en-US" sz="1300" dirty="0">
+                <a:solidFill>
+                  <a:srgbClr val="3D4552"/>
+                </a:solidFill>
+              </a:rPr>
+              <a:t>the order goes to the review queue; Retry all once the warehouse is back</a:t>
+            </a:r>
+            <a:endParaRPr lang="en-US" sz="1300" dirty="0"/>
+          </a:p>
+        </p:txBody>
+      </p:sp>
+      <p:sp>
+        <p:nvSpPr>
+          <p:cNvPr id="8" name="Oldest pending event"/>
+          <p:cNvSpPr/>
+          <p:nvPr/>
+        </p:nvSpPr>
+        <p:spPr>
+          <a:xfrm>
+            <a:off x="4297680" y="1463040"/>
+            <a:ext cx="3593592" cy="3337560"/>
+          </a:xfrm>
+          <a:prstGeom prst="roundRect">
+            <a:avLst>
+              <a:gd name="adj" fmla="val 2191"/>
+            </a:avLst>
+          </a:prstGeom>
+          <a:solidFill>
+            <a:schemeClr val="bg1"/>
+          </a:solidFill>
+          <a:ln w="9525">
+            <a:solidFill>
+              <a:srgbClr val="E3E6EB"/>
+            </a:solidFill>
+            <a:prstDash val="solid"/>
+          </a:ln>
+        </p:spPr>
+        <p:txBody>
+          <a:bodyPr/>
+          <a:lstStyle/>
+          <a:p>
+            <a:endParaRPr lang="en-US"/>
+          </a:p>
+        </p:txBody>
+      </p:sp>
+      <p:sp>
+        <p:nvSpPr>
+          <p:cNvPr id="9" name="Text 4"/>
+          <p:cNvSpPr txBox="1"/>
+          <p:nvPr/>
+        </p:nvSpPr>
+        <p:spPr>
+          <a:xfrm>
+            <a:off x="4498848" y="1627632"/>
+            <a:ext cx="3191256" cy="365760"/>
+          </a:xfrm>
+          <a:prstGeom prst="rect">
+            <a:avLst/>
+          </a:prstGeom>
+          <a:noFill/>
+          <a:ln/>
+        </p:spPr>
+        <p:txBody>
+          <a:bodyPr wrap="square" lIns="0" tIns="0" rIns="0" bIns="0" rtlCol="0" anchor="t"/>
+          <a:lstStyle/>
+          <a:p>
+            <a:pPr marL="0" indent="0">
+              <a:buNone/>
+            </a:pPr>
+            <a:r>
+              <a:rPr lang="en-US" sz="1300" b="1" dirty="0">
+                <a:solidFill>
+                  <a:schemeClr val="tx1"/>
+                </a:solidFill>
+              </a:rPr>
+              <a:t>Duplicates</a:t>
+            </a:r>
+            <a:endParaRPr lang="en-US" sz="1300" dirty="0"/>
+          </a:p>
+        </p:txBody>
+      </p:sp>
+      <p:sp>
+        <p:nvSpPr>
+          <p:cNvPr id="10" name="Text 19"/>
+          <p:cNvSpPr txBox="1"/>
+          <p:nvPr/>
+        </p:nvSpPr>
+        <p:spPr>
+          <a:xfrm>
+            <a:off x="4498848" y="2029968"/>
+            <a:ext cx="3191256" cy="2633472"/>
+          </a:xfrm>
+          <a:prstGeom prst="rect">
+            <a:avLst/>
+          </a:prstGeom>
+          <a:noFill/>
+          <a:ln/>
+        </p:spPr>
+        <p:txBody>
+          <a:bodyPr wrap="square" lIns="0" tIns="0" rIns="0" bIns="0" rtlCol="0" anchor="t"/>
+          <a:lstStyle/>
+          <a:p>
+            <a:pPr marL="177800" indent="-177800">
+              <a:spcAft>
+                <a:spcPts val="500"/>
+              </a:spcAft>
+              <a:buSzPct val="100000"/>
+              <a:buChar char="•"/>
+            </a:pPr>
+            <a:r>
+              <a:rPr lang="en-US" sz="1300" b="1" dirty="0">
+                <a:solidFill>
+                  <a:srgbClr val="3D4552"/>
+                </a:solidFill>
+              </a:rPr>
+              <a:t>Event id per source: </a:t>
+            </a:r>
+            <a:r>
+              <a:rPr lang="en-US" sz="1300" dirty="0">
+                <a:solidFill>
+                  <a:srgbClr val="3D4552"/>
+                </a:solidFill>
+              </a:rPr>
+              <a:t>a repeat is dropped at the inbox</a:t>
+            </a:r>
+            <a:endParaRPr lang="en-US" sz="1300" dirty="0"/>
+          </a:p>
+          <a:p>
+            <a:pPr marL="177800" indent="-177800">
+              <a:spcAft>
+                <a:spcPts val="500"/>
+              </a:spcAft>
+              <a:buSzPct val="100000"/>
+              <a:buChar char="•"/>
+            </a:pPr>
+            <a:r>
+              <a:rPr lang="en-US" sz="1300" b="1" dirty="0">
+                <a:solidFill>
+                  <a:srgbClr val="3D4552"/>
+                </a:solidFill>
+              </a:rPr>
+              <a:t>Channel order id: </a:t>
+            </a:r>
+            <a:r>
+              <a:rPr lang="en-US" sz="1300" dirty="0">
+                <a:solidFill>
+                  <a:srgbClr val="3D4552"/>
+                </a:solidFill>
+              </a:rPr>
+              <a:t>a redelivery under a new id is recognised</a:t>
+            </a:r>
+            <a:endParaRPr lang="en-US" sz="1300" dirty="0"/>
+          </a:p>
+          <a:p>
+            <a:pPr marL="177800" indent="-177800">
+              <a:spcAft>
+                <a:spcPts val="500"/>
+              </a:spcAft>
+              <a:buSzPct val="100000"/>
+              <a:buChar char="•"/>
+            </a:pPr>
+            <a:r>
+              <a:rPr lang="en-US" sz="1300" b="1" dirty="0">
+                <a:solidFill>
+                  <a:srgbClr val="3D4552"/>
+                </a:solidFill>
+              </a:rPr>
+              <a:t>Idempotency-Key: </a:t>
+            </a:r>
+            <a:r>
+              <a:rPr lang="en-US" sz="1300" dirty="0">
+                <a:solidFill>
+                  <a:srgbClr val="3D4552"/>
+                </a:solidFill>
+              </a:rPr>
+              <a:t>the warehouse replays its first answer</a:t>
+            </a:r>
+            <a:endParaRPr lang="en-US" sz="1300" dirty="0"/>
+          </a:p>
+          <a:p>
+            <a:pPr marL="177800" indent="-177800">
+              <a:spcAft>
+                <a:spcPts val="500"/>
+              </a:spcAft>
+              <a:buSzPct val="100000"/>
+              <a:buChar char="•"/>
+            </a:pPr>
+            <a:r>
+              <a:rPr lang="en-US" sz="1300" b="1" dirty="0">
+                <a:solidFill>
+                  <a:srgbClr val="3D4552"/>
+                </a:solidFill>
+              </a:rPr>
+              <a:t>Together: </a:t>
+            </a:r>
+            <a:r>
+              <a:rPr lang="en-US" sz="1300" dirty="0">
+                <a:solidFill>
+                  <a:srgbClr val="3D4552"/>
+                </a:solidFill>
+              </a:rPr>
+              <a:t>effectively once</a:t>
+            </a:r>
+            <a:endParaRPr lang="en-US" sz="1300" dirty="0"/>
+          </a:p>
+        </p:txBody>
+      </p:sp>
+      <p:sp>
+        <p:nvSpPr>
+          <p:cNvPr id="11" name="Oldest pending event"/>
+          <p:cNvSpPr/>
+          <p:nvPr/>
+        </p:nvSpPr>
+        <p:spPr>
+          <a:xfrm>
+            <a:off x="8046720" y="1463040"/>
+            <a:ext cx="3593592" cy="3337560"/>
+          </a:xfrm>
+          <a:prstGeom prst="roundRect">
+            <a:avLst>
+              <a:gd name="adj" fmla="val 2191"/>
+            </a:avLst>
+          </a:prstGeom>
+          <a:solidFill>
+            <a:schemeClr val="bg1"/>
+          </a:solidFill>
+          <a:ln w="9525">
+            <a:solidFill>
+              <a:srgbClr val="E3E6EB"/>
+            </a:solidFill>
+            <a:prstDash val="solid"/>
+          </a:ln>
+        </p:spPr>
+        <p:txBody>
+          <a:bodyPr/>
+          <a:lstStyle/>
+          <a:p>
+            <a:endParaRPr lang="en-US"/>
+          </a:p>
+        </p:txBody>
+      </p:sp>
+      <p:sp>
+        <p:nvSpPr>
+          <p:cNvPr id="12" name="Text 4"/>
+          <p:cNvSpPr txBox="1"/>
+          <p:nvPr/>
+        </p:nvSpPr>
+        <p:spPr>
+          <a:xfrm>
+            <a:off x="8247888" y="1627632"/>
+            <a:ext cx="3191256" cy="365760"/>
+          </a:xfrm>
+          <a:prstGeom prst="rect">
+            <a:avLst/>
+          </a:prstGeom>
+          <a:noFill/>
+          <a:ln/>
+        </p:spPr>
+        <p:txBody>
+          <a:bodyPr wrap="square" lIns="0" tIns="0" rIns="0" bIns="0" rtlCol="0" anchor="t"/>
+          <a:lstStyle/>
+          <a:p>
+            <a:pPr marL="0" indent="0">
+              <a:buNone/>
+            </a:pPr>
+            <a:r>
+              <a:rPr lang="en-US" sz="1300" b="1" dirty="0">
+                <a:solidFill>
+                  <a:schemeClr val="tx1"/>
+                </a:solidFill>
+              </a:rPr>
+              <a:t>Crashes</a:t>
+            </a:r>
+            <a:endParaRPr lang="en-US" sz="1300" dirty="0"/>
+          </a:p>
+        </p:txBody>
+      </p:sp>
+      <p:sp>
+        <p:nvSpPr>
+          <p:cNvPr id="13" name="Text 3"/>
+          <p:cNvSpPr txBox="1"/>
+          <p:nvPr/>
+        </p:nvSpPr>
+        <p:spPr>
+          <a:xfrm>
+            <a:off x="8247888" y="2029968"/>
+            <a:ext cx="3191256" cy="685800"/>
+          </a:xfrm>
+          <a:prstGeom prst="rect">
+            <a:avLst/>
+          </a:prstGeom>
+          <a:noFill/>
+          <a:ln/>
+        </p:spPr>
+        <p:txBody>
+          <a:bodyPr wrap="square" lIns="0" tIns="0" rIns="0" bIns="0" rtlCol="0" anchor="t"/>
+          <a:lstStyle/>
+          <a:p>
+            <a:pPr marL="0" indent="0">
+              <a:buNone/>
+            </a:pPr>
+            <a:r>
+              <a:rPr lang="en-US" sz="3600" b="1" dirty="0">
+                <a:solidFill>
+                  <a:schemeClr val="accent1"/>
+                </a:solidFill>
+              </a:rPr>
+              <a:t>41 → 0</a:t>
+            </a:r>
+            <a:endParaRPr lang="en-US" sz="3600" dirty="0"/>
+          </a:p>
+        </p:txBody>
+      </p:sp>
+      <p:sp>
+        <p:nvSpPr>
+          <p:cNvPr id="14" name="Text 4"/>
+          <p:cNvSpPr txBox="1"/>
+          <p:nvPr/>
+        </p:nvSpPr>
+        <p:spPr>
+          <a:xfrm>
+            <a:off x="8247888" y="2743200"/>
+            <a:ext cx="3191256" cy="411480"/>
+          </a:xfrm>
+          <a:prstGeom prst="rect">
+            <a:avLst/>
+          </a:prstGeom>
+          <a:noFill/>
+          <a:ln/>
+        </p:spPr>
+        <p:txBody>
+          <a:bodyPr wrap="square" lIns="0" tIns="0" rIns="0" bIns="0" rtlCol="0" anchor="t"/>
+          <a:lstStyle/>
+          <a:p>
+            <a:pPr marL="0" indent="0">
+              <a:buNone/>
+            </a:pPr>
+            <a:r>
+              <a:rPr lang="en-US" sz="1300" dirty="0">
+                <a:solidFill>
+                  <a:srgbClr val="3D4552"/>
+                </a:solidFill>
+              </a:rPr>
+              <a:t>stops that broke something, before and after the fix</a:t>
+            </a:r>
+            <a:endParaRPr lang="en-US" sz="1300" dirty="0"/>
+          </a:p>
+        </p:txBody>
+      </p:sp>
+      <p:sp>
+        <p:nvSpPr>
+          <p:cNvPr id="15" name="Text 19"/>
+          <p:cNvSpPr txBox="1"/>
+          <p:nvPr/>
+        </p:nvSpPr>
+        <p:spPr>
+          <a:xfrm>
+            <a:off x="8247888" y="3218688"/>
+            <a:ext cx="3191256" cy="1444751"/>
+          </a:xfrm>
+          <a:prstGeom prst="rect">
+            <a:avLst/>
+          </a:prstGeom>
+          <a:noFill/>
+          <a:ln/>
+        </p:spPr>
+        <p:txBody>
+          <a:bodyPr wrap="square" lIns="0" tIns="0" rIns="0" bIns="0" rtlCol="0" anchor="t"/>
+          <a:lstStyle/>
+          <a:p>
+            <a:pPr marL="177800" indent="-177800">
+              <a:spcAft>
+                <a:spcPts val="500"/>
+              </a:spcAft>
+              <a:buSzPct val="100000"/>
+              <a:buChar char="•"/>
+            </a:pPr>
+            <a:r>
+              <a:rPr lang="en-US" sz="1300" b="1" dirty="0">
+                <a:solidFill>
+                  <a:srgbClr val="3D4552"/>
+                </a:solidFill>
+              </a:rPr>
+              <a:t>Glue was stopped </a:t>
+            </a:r>
+            <a:r>
+              <a:rPr lang="en-US" sz="1300" dirty="0">
+                <a:solidFill>
+                  <a:srgbClr val="3D4552"/>
+                </a:solidFill>
+              </a:rPr>
+              <a:t>before each of 132 database writes in 11 flows, then restarted</a:t>
+            </a:r>
+            <a:endParaRPr lang="en-US" sz="1300" dirty="0"/>
+          </a:p>
+          <a:p>
+            <a:pPr marL="177800" indent="-177800">
+              <a:spcAft>
+                <a:spcPts val="500"/>
+              </a:spcAft>
+              <a:buSzPct val="100000"/>
+              <a:buChar char="•"/>
+            </a:pPr>
+            <a:r>
+              <a:rPr lang="en-US" sz="1300" b="1" dirty="0">
+                <a:solidFill>
+                  <a:srgbClr val="3D4552"/>
+                </a:solidFill>
+              </a:rPr>
+              <a:t>Each state change </a:t>
+            </a:r>
+            <a:r>
+              <a:rPr lang="en-US" sz="1300" dirty="0">
+                <a:solidFill>
+                  <a:srgbClr val="3D4552"/>
+                </a:solidFill>
+              </a:rPr>
+              <a:t>is saved with its audit row in one transaction</a:t>
+            </a:r>
+            <a:endParaRPr lang="en-US" sz="1300" dirty="0"/>
+          </a:p>
+          <a:p>
+            <a:pPr marL="177800" indent="-177800">
+              <a:spcAft>
+                <a:spcPts val="500"/>
+              </a:spcAft>
+              <a:buSzPct val="100000"/>
+              <a:buChar char="•"/>
+            </a:pPr>
+            <a:r>
+              <a:rPr lang="en-US" sz="1300" b="1" dirty="0">
+                <a:solidFill>
+                  <a:srgbClr val="3D4552"/>
+                </a:solidFill>
+              </a:rPr>
+              <a:t>Proof: </a:t>
+            </a:r>
+            <a:r>
+              <a:rPr lang="en-US" sz="1300" dirty="0">
+                <a:solidFill>
+                  <a:srgbClr val="3D4552"/>
+                </a:solidFill>
+              </a:rPr>
+              <a:t>tests/test_crash_points.py</a:t>
+            </a:r>
+            <a:endParaRPr lang="en-US" sz="1300" dirty="0"/>
+          </a:p>
+        </p:txBody>
+      </p:sp>
+      <p:sp>
+        <p:nvSpPr>
+          <p:cNvPr id="16" name="Text 14"/>
+          <p:cNvSpPr txBox="1"/>
+          <p:nvPr/>
+        </p:nvSpPr>
+        <p:spPr>
+          <a:xfrm>
+            <a:off x="548640" y="4937760"/>
+            <a:ext cx="11091672" cy="274320"/>
+          </a:xfrm>
+          <a:prstGeom prst="rect">
+            <a:avLst/>
+          </a:prstGeom>
+          <a:noFill/>
+          <a:ln/>
+        </p:spPr>
+        <p:txBody>
+          <a:bodyPr wrap="square" lIns="0" tIns="0" rIns="0" bIns="0" rtlCol="0" anchor="t"/>
+          <a:lstStyle/>
+          <a:p>
+            <a:pPr marL="0" indent="0">
+              <a:buNone/>
+            </a:pPr>
+            <a:r>
+              <a:rPr lang="en-US" sz="1100" dirty="0">
+                <a:solidFill>
+                  <a:schemeClr val="tx2"/>
+                </a:solidFill>
+              </a:rPr>
+              <a:t>The detail for each column is in the backup slides.</a:t>
+            </a:r>
+            <a:endParaRPr lang="en-US" sz="1100" dirty="0"/>
+          </a:p>
+        </p:txBody>
+      </p:sp>
+      <p:sp>
+        <p:nvSpPr>
+          <p:cNvPr id="17" name="Slide Number Placeholder 0"/>
+          <p:cNvSpPr>
+            <a:spLocks noGrp="1"/>
+          </p:cNvSpPr>
+          <p:nvPr>
+            <p:ph type="sldNum" sz="quarter" idx="4294967295"/>
+          </p:nvPr>
+        </p:nvSpPr>
+        <p:spPr>
+          <a:xfrm>
+            <a:off x="11183112" y="6446520"/>
+            <a:ext cx="457200" cy="228600"/>
+          </a:xfrm>
+          <a:prstGeom prst="rect">
+            <a:avLst/>
+          </a:prstGeom>
+          <a:extLst>
+            <a:ext uri="{C572A759-6A51-4108-AA02-DFA0A04FC94B}">
+              <ma14:wrappingTextBoxFlag xmlns="" xmlns:ma14="http://schemas.microsoft.com/office/mac/drawingml/2011/main" val="0"/>
+            </a:ext>
+          </a:extLst>
+        </p:spPr>
+        <p:txBody>
+          <a:bodyPr lIns="0" tIns="0" rIns="0" bIns="0"/>
+          <a:lstStyle>
+            <a:lvl1pPr>
+              <a:defRPr sz="1000">
+                <a:solidFill>
+                  <a:srgbClr val="8A93A1"/>
+                </a:solidFill>
+              </a:defRPr>
+            </a:lvl1pPr>
+          </a:lstStyle>
+          <a:p>
+            <a:pPr algn="r"/>
+            <a:fld id="{F7021451-1387-4CA6-816F-3879F97B5CBC}" type="slidenum">
+              <a:rPr lang="en-US" b="0"/>
+              <a:t>12</a:t>
+            </a:fld>
+            <a:endParaRPr lang="en-US"/>
+          </a:p>
+        </p:txBody>
+      </p:sp>
+    </p:spTree>
+  </p:cSld>
+  <p:clrMapOvr>
+    <a:masterClrMapping/>
+  </p:clrMapOvr>
+</p:sld>
+</file>
+
+<file path=ppt/slides/slide27.xml><?xml version="1.0" encoding="utf-8"?>
+<p:sld xmlns:a="http://schemas.openxmlformats.org/drawingml/2006/main" xmlns:p="http://schemas.openxmlformats.org/presentationml/2006/main" xmlns:r="http://schemas.openxmlformats.org/officeDocument/2006/relationships">
+  <p:cSld>
+    <p:spTree>
+      <p:nvGrpSpPr>
+        <p:cNvPr id="2" name=""/>
+        <p:cNvGrpSpPr/>
+        <p:nvPr/>
+      </p:nvGrpSpPr>
+      <p:grpSpPr/>
+      <p:sp>
+        <p:nvSpPr>
+          <p:cNvPr id="3" name="Text 0"/>
+          <p:cNvSpPr>
+            <a:spLocks noGrp="1"/>
+          </p:cNvSpPr>
+          <p:nvPr>
+            <p:ph type="body" idx="100" hasCustomPrompt="1"/>
+          </p:nvPr>
+        </p:nvSpPr>
+        <p:spPr>
+          <a:xfrm>
+            <a:off x="548640" y="384048"/>
+            <a:ext cx="8229600" cy="237744"/>
+          </a:xfrm>
+          <a:prstGeom prst="rect">
+            <a:avLst/>
+          </a:prstGeom>
+          <a:noFill/>
+          <a:ln/>
+        </p:spPr>
+        <p:txBody>
+          <a:bodyPr wrap="square" lIns="0" tIns="0" rIns="0" bIns="0" rtlCol="0" anchor="t"/>
+          <a:lstStyle/>
+          <a:p>
+            <a:pPr marL="0" indent="0" algn="l">
+              <a:buNone/>
+            </a:pPr>
+            <a:r>
+              <a:rPr lang="en-US" sz="1100" b="1" dirty="0">
+                <a:solidFill>
+                  <a:schemeClr val="tx2"/>
+                </a:solidFill>
+                <a:latin typeface="Courier New" pitchFamily="34" charset="0"/>
+                <a:ea typeface="Courier New" pitchFamily="34" charset="-122"/>
+                <a:cs typeface="Courier New" pitchFamily="34" charset="-120"/>
+              </a:rPr>
+              <a:t>OPERATIONS</a:t>
+            </a:r>
+            <a:endParaRPr lang="en-US" sz="1100" dirty="0"/>
+          </a:p>
+        </p:txBody>
+      </p:sp>
+      <p:sp>
+        <p:nvSpPr>
+          <p:cNvPr id="4" name="Text 0"/>
+          <p:cNvSpPr>
+            <a:spLocks noGrp="1"/>
+          </p:cNvSpPr>
+          <p:nvPr>
+            <p:ph type="title" idx="101" hasCustomPrompt="1"/>
+          </p:nvPr>
+        </p:nvSpPr>
+        <p:spPr>
+          <a:xfrm>
+            <a:off x="548640" y="621792"/>
+            <a:ext cx="11094415" cy="640080"/>
+          </a:xfrm>
+          <a:prstGeom prst="rect">
+            <a:avLst/>
+          </a:prstGeom>
+          <a:noFill/>
+          <a:ln/>
+        </p:spPr>
+        <p:txBody>
+          <a:bodyPr wrap="square" lIns="0" tIns="0" rIns="0" bIns="0" rtlCol="0" anchor="t"/>
+          <a:lstStyle/>
+          <a:p>
+            <a:pPr marL="0" indent="0" algn="l">
+              <a:buNone/>
+            </a:pPr>
+            <a:r>
+              <a:rPr lang="en-US" sz="3200" b="1" dirty="0">
+                <a:solidFill>
+                  <a:schemeClr val="tx1"/>
+                </a:solidFill>
+              </a:rPr>
+              <a:t>Operating it: what on-call sees, and how it scales</a:t>
+            </a:r>
+            <a:endParaRPr lang="en-US" sz="3200" dirty="0"/>
+          </a:p>
+        </p:txBody>
+      </p:sp>
+      <p:sp>
+        <p:nvSpPr>
+          <p:cNvPr id="5" name="~527"/>
+          <p:cNvSpPr/>
+          <p:nvPr/>
+        </p:nvSpPr>
+        <p:spPr>
+          <a:xfrm>
+            <a:off x="548640" y="1463040"/>
+            <a:ext cx="2651760" cy="1417320"/>
+          </a:xfrm>
+          <a:prstGeom prst="roundRect">
+            <a:avLst>
+              <a:gd name="adj" fmla="val 5161"/>
+            </a:avLst>
+          </a:prstGeom>
+          <a:solidFill>
+            <a:schemeClr val="bg2"/>
+          </a:solidFill>
+          <a:ln/>
+        </p:spPr>
+        <p:txBody>
+          <a:bodyPr/>
+          <a:lstStyle/>
+          <a:p>
+            <a:endParaRPr lang="en-US"/>
+          </a:p>
+        </p:txBody>
+      </p:sp>
+      <p:sp>
+        <p:nvSpPr>
+          <p:cNvPr id="6" name="Text 3"/>
+          <p:cNvSpPr txBox="1"/>
+          <p:nvPr/>
+        </p:nvSpPr>
+        <p:spPr>
+          <a:xfrm>
+            <a:off x="731520" y="1572768"/>
+            <a:ext cx="2377440" cy="685800"/>
+          </a:xfrm>
+          <a:prstGeom prst="rect">
+            <a:avLst/>
+          </a:prstGeom>
+          <a:noFill/>
+          <a:ln/>
+        </p:spPr>
+        <p:txBody>
+          <a:bodyPr wrap="square" lIns="0" tIns="0" rIns="0" bIns="0" rtlCol="0" anchor="t"/>
+          <a:lstStyle/>
+          <a:p>
+            <a:pPr marL="0" indent="0">
+              <a:buNone/>
+            </a:pPr>
+            <a:r>
+              <a:rPr lang="en-US" sz="3600" b="1" dirty="0">
+                <a:solidFill>
+                  <a:schemeClr val="accent1"/>
+                </a:solidFill>
+              </a:rPr>
+              <a:t>~527</a:t>
+            </a:r>
+            <a:endParaRPr lang="en-US" sz="3600" dirty="0"/>
+          </a:p>
+        </p:txBody>
+      </p:sp>
+      <p:sp>
+        <p:nvSpPr>
+          <p:cNvPr id="7" name="Text 4"/>
+          <p:cNvSpPr txBox="1"/>
+          <p:nvPr/>
+        </p:nvSpPr>
+        <p:spPr>
+          <a:xfrm>
+            <a:off x="731520" y="2286000"/>
+            <a:ext cx="2377440" cy="502920"/>
+          </a:xfrm>
+          <a:prstGeom prst="rect">
+            <a:avLst/>
+          </a:prstGeom>
+          <a:noFill/>
+          <a:ln/>
+        </p:spPr>
+        <p:txBody>
+          <a:bodyPr wrap="square" lIns="0" tIns="0" rIns="0" bIns="0" rtlCol="0" anchor="t"/>
+          <a:lstStyle/>
+          <a:p>
+            <a:pPr marL="0" indent="0">
+              <a:buNone/>
+            </a:pPr>
+            <a:r>
+              <a:rPr lang="en-US" sz="1300" dirty="0">
+                <a:solidFill>
+                  <a:srgbClr val="3D4552"/>
+                </a:solidFill>
+              </a:rPr>
+              <a:t>orders/s reserved, 10 worker slots</a:t>
+            </a:r>
+            <a:endParaRPr lang="en-US" sz="1300" dirty="0"/>
+          </a:p>
+        </p:txBody>
+      </p:sp>
+      <p:sp>
+        <p:nvSpPr>
+          <p:cNvPr id="8" name="3,800+"/>
+          <p:cNvSpPr/>
+          <p:nvPr/>
+        </p:nvSpPr>
+        <p:spPr>
+          <a:xfrm>
+            <a:off x="3364992" y="1463040"/>
+            <a:ext cx="2651760" cy="1417320"/>
+          </a:xfrm>
+          <a:prstGeom prst="roundRect">
+            <a:avLst>
+              <a:gd name="adj" fmla="val 5161"/>
+            </a:avLst>
+          </a:prstGeom>
+          <a:solidFill>
+            <a:schemeClr val="bg2"/>
+          </a:solidFill>
+          <a:ln/>
+        </p:spPr>
+        <p:txBody>
+          <a:bodyPr/>
+          <a:lstStyle/>
+          <a:p>
+            <a:endParaRPr lang="en-US"/>
+          </a:p>
+        </p:txBody>
+      </p:sp>
+      <p:sp>
+        <p:nvSpPr>
+          <p:cNvPr id="9" name="Text 6"/>
+          <p:cNvSpPr txBox="1"/>
+          <p:nvPr/>
+        </p:nvSpPr>
+        <p:spPr>
+          <a:xfrm>
+            <a:off x="3547872" y="1572768"/>
+            <a:ext cx="2377440" cy="685800"/>
+          </a:xfrm>
+          <a:prstGeom prst="rect">
+            <a:avLst/>
+          </a:prstGeom>
+          <a:noFill/>
+          <a:ln/>
+        </p:spPr>
+        <p:txBody>
+          <a:bodyPr wrap="square" lIns="0" tIns="0" rIns="0" bIns="0" rtlCol="0" anchor="t"/>
+          <a:lstStyle/>
+          <a:p>
+            <a:pPr marL="0" indent="0">
+              <a:buNone/>
+            </a:pPr>
+            <a:r>
+              <a:rPr lang="en-US" sz="3600" b="1" dirty="0">
+                <a:solidFill>
+                  <a:schemeClr val="accent1"/>
+                </a:solidFill>
+              </a:rPr>
+              <a:t>3,800+</a:t>
+            </a:r>
+            <a:endParaRPr lang="en-US" sz="3600" dirty="0"/>
+          </a:p>
+        </p:txBody>
+      </p:sp>
+      <p:sp>
+        <p:nvSpPr>
+          <p:cNvPr id="10" name="Text 7"/>
+          <p:cNvSpPr txBox="1"/>
+          <p:nvPr/>
+        </p:nvSpPr>
+        <p:spPr>
+          <a:xfrm>
+            <a:off x="3547872" y="2286000"/>
+            <a:ext cx="2377440" cy="502920"/>
+          </a:xfrm>
+          <a:prstGeom prst="rect">
+            <a:avLst/>
+          </a:prstGeom>
+          <a:noFill/>
+          <a:ln/>
+        </p:spPr>
+        <p:txBody>
+          <a:bodyPr wrap="square" lIns="0" tIns="0" rIns="0" bIns="0" rtlCol="0" anchor="t"/>
+          <a:lstStyle/>
+          <a:p>
+            <a:pPr marL="0" indent="0">
+              <a:buNone/>
+            </a:pPr>
+            <a:r>
+              <a:rPr lang="en-US" sz="1300" dirty="0">
+                <a:solidFill>
+                  <a:srgbClr val="3D4552"/>
+                </a:solidFill>
+              </a:rPr>
+              <a:t>events/s accepted by the inbox</a:t>
+            </a:r>
+            <a:endParaRPr lang="en-US" sz="1300" dirty="0"/>
+          </a:p>
+        </p:txBody>
+      </p:sp>
+      <p:sp>
+        <p:nvSpPr>
+          <p:cNvPr id="11" name="0.31 s"/>
+          <p:cNvSpPr/>
+          <p:nvPr/>
+        </p:nvSpPr>
+        <p:spPr>
+          <a:xfrm>
+            <a:off x="6181344" y="1463040"/>
+            <a:ext cx="2651760" cy="1417320"/>
+          </a:xfrm>
+          <a:prstGeom prst="roundRect">
+            <a:avLst>
+              <a:gd name="adj" fmla="val 5161"/>
+            </a:avLst>
+          </a:prstGeom>
+          <a:solidFill>
+            <a:schemeClr val="bg2"/>
+          </a:solidFill>
+          <a:ln/>
+        </p:spPr>
+        <p:txBody>
+          <a:bodyPr/>
+          <a:lstStyle/>
+          <a:p>
+            <a:endParaRPr lang="en-US"/>
+          </a:p>
+        </p:txBody>
+      </p:sp>
+      <p:sp>
+        <p:nvSpPr>
+          <p:cNvPr id="12" name="Text 9"/>
+          <p:cNvSpPr txBox="1"/>
+          <p:nvPr/>
+        </p:nvSpPr>
+        <p:spPr>
+          <a:xfrm>
+            <a:off x="6364224" y="1572768"/>
+            <a:ext cx="2377440" cy="685800"/>
+          </a:xfrm>
+          <a:prstGeom prst="rect">
+            <a:avLst/>
+          </a:prstGeom>
+          <a:noFill/>
+          <a:ln/>
+        </p:spPr>
+        <p:txBody>
+          <a:bodyPr wrap="square" lIns="0" tIns="0" rIns="0" bIns="0" rtlCol="0" anchor="t"/>
+          <a:lstStyle/>
+          <a:p>
+            <a:pPr marL="0" indent="0">
+              <a:buNone/>
+            </a:pPr>
+            <a:r>
+              <a:rPr lang="en-US" sz="3600" b="1" dirty="0">
+                <a:solidFill>
+                  <a:schemeClr val="accent1"/>
+                </a:solidFill>
+              </a:rPr>
+              <a:t>0.31 s</a:t>
+            </a:r>
+            <a:endParaRPr lang="en-US" sz="3600" dirty="0"/>
+          </a:p>
+        </p:txBody>
+      </p:sp>
+      <p:sp>
+        <p:nvSpPr>
+          <p:cNvPr id="13" name="Text 10"/>
+          <p:cNvSpPr txBox="1"/>
+          <p:nvPr/>
+        </p:nvSpPr>
+        <p:spPr>
+          <a:xfrm>
+            <a:off x="6364224" y="2286000"/>
+            <a:ext cx="2377440" cy="502920"/>
+          </a:xfrm>
+          <a:prstGeom prst="rect">
+            <a:avLst/>
+          </a:prstGeom>
+          <a:noFill/>
+          <a:ln/>
+        </p:spPr>
+        <p:txBody>
+          <a:bodyPr wrap="square" lIns="0" tIns="0" rIns="0" bIns="0" rtlCol="0" anchor="t"/>
+          <a:lstStyle/>
+          <a:p>
+            <a:pPr marL="0" indent="0">
+              <a:buNone/>
+            </a:pPr>
+            <a:r>
+              <a:rPr lang="en-US" sz="1300" dirty="0">
+                <a:solidFill>
+                  <a:srgbClr val="3D4552"/>
+                </a:solidFill>
+              </a:rPr>
+              <a:t>p50 received to reserved; p95 0.53 s (300 orders)</a:t>
+            </a:r>
+            <a:endParaRPr lang="en-US" sz="1300" dirty="0"/>
+          </a:p>
+        </p:txBody>
+      </p:sp>
+      <p:sp>
+        <p:nvSpPr>
+          <p:cNvPr id="14" name="20 → 527"/>
+          <p:cNvSpPr/>
+          <p:nvPr/>
+        </p:nvSpPr>
+        <p:spPr>
+          <a:xfrm>
+            <a:off x="8997696" y="1463040"/>
+            <a:ext cx="2651760" cy="1417320"/>
+          </a:xfrm>
+          <a:prstGeom prst="roundRect">
+            <a:avLst>
+              <a:gd name="adj" fmla="val 5161"/>
+            </a:avLst>
+          </a:prstGeom>
+          <a:solidFill>
+            <a:schemeClr val="bg2"/>
+          </a:solidFill>
+          <a:ln/>
+        </p:spPr>
+        <p:txBody>
+          <a:bodyPr/>
+          <a:lstStyle/>
+          <a:p>
+            <a:endParaRPr lang="en-US"/>
+          </a:p>
+        </p:txBody>
+      </p:sp>
+      <p:sp>
+        <p:nvSpPr>
+          <p:cNvPr id="15" name="Text 12"/>
+          <p:cNvSpPr txBox="1"/>
+          <p:nvPr/>
+        </p:nvSpPr>
+        <p:spPr>
+          <a:xfrm>
+            <a:off x="9180576" y="1572768"/>
+            <a:ext cx="2377440" cy="685800"/>
+          </a:xfrm>
+          <a:prstGeom prst="rect">
+            <a:avLst/>
+          </a:prstGeom>
+          <a:noFill/>
+          <a:ln/>
+        </p:spPr>
+        <p:txBody>
+          <a:bodyPr wrap="square" lIns="0" tIns="0" rIns="0" bIns="0" rtlCol="0" anchor="t"/>
+          <a:lstStyle/>
+          <a:p>
+            <a:pPr marL="0" indent="0">
+              <a:buNone/>
+            </a:pPr>
+            <a:r>
+              <a:rPr lang="en-US" sz="3600" b="1" dirty="0">
+                <a:solidFill>
+                  <a:schemeClr val="accent1"/>
+                </a:solidFill>
+              </a:rPr>
+              <a:t>20 → 527</a:t>
+            </a:r>
+            <a:endParaRPr lang="en-US" sz="3600" dirty="0"/>
+          </a:p>
+        </p:txBody>
+      </p:sp>
+      <p:sp>
+        <p:nvSpPr>
+          <p:cNvPr id="16" name="Text 13"/>
+          <p:cNvSpPr txBox="1"/>
+          <p:nvPr/>
+        </p:nvSpPr>
+        <p:spPr>
+          <a:xfrm>
+            <a:off x="9180576" y="2286000"/>
+            <a:ext cx="2377440" cy="502920"/>
+          </a:xfrm>
+          <a:prstGeom prst="rect">
+            <a:avLst/>
+          </a:prstGeom>
+          <a:noFill/>
+          <a:ln/>
+        </p:spPr>
+        <p:txBody>
+          <a:bodyPr wrap="square" lIns="0" tIns="0" rIns="0" bIns="0" rtlCol="0" anchor="t"/>
+          <a:lstStyle/>
+          <a:p>
+            <a:pPr marL="0" indent="0">
+              <a:buNone/>
+            </a:pPr>
+            <a:r>
+              <a:rPr lang="en-US" sz="1300" dirty="0">
+                <a:solidFill>
+                  <a:srgbClr val="3D4552"/>
+                </a:solidFill>
+              </a:rPr>
+              <a:t>orders/s before and after the loop fix the probe found</a:t>
+            </a:r>
+            <a:endParaRPr lang="en-US" sz="1300" dirty="0"/>
+          </a:p>
+        </p:txBody>
+      </p:sp>
+      <p:sp>
+        <p:nvSpPr>
+          <p:cNvPr id="17" name="Text 14"/>
+          <p:cNvSpPr txBox="1"/>
+          <p:nvPr/>
+        </p:nvSpPr>
+        <p:spPr>
+          <a:xfrm>
+            <a:off x="548640" y="2971800"/>
+            <a:ext cx="11094415" cy="411480"/>
+          </a:xfrm>
+          <a:prstGeom prst="rect">
+            <a:avLst/>
+          </a:prstGeom>
+          <a:noFill/>
+          <a:ln/>
+        </p:spPr>
+        <p:txBody>
+          <a:bodyPr wrap="square" lIns="0" tIns="0" rIns="0" bIns="0" rtlCol="0" anchor="t"/>
+          <a:lstStyle/>
+          <a:p>
+            <a:pPr marL="0" indent="0">
+              <a:buNone/>
+            </a:pPr>
+            <a:r>
+              <a:rPr lang="en-US" sz="1100" dirty="0">
+                <a:solidFill>
+                  <a:schemeClr val="tx2"/>
+                </a:solidFill>
+              </a:rPr>
+              <a:t>In-process on a laptop (Apple M4 Pro): signed shop orders through the inbox and the real worker loop, mock warehouse, no network. 300 and 1,000 orders, each reserved once, no duplicates. scripts/load_probe.py</a:t>
+            </a:r>
+            <a:endParaRPr lang="en-US" sz="1100" dirty="0"/>
+          </a:p>
+        </p:txBody>
+      </p:sp>
+      <p:sp>
+        <p:nvSpPr>
+          <p:cNvPr id="18" name="Text 18"/>
+          <p:cNvSpPr txBox="1"/>
+          <p:nvPr/>
+        </p:nvSpPr>
+        <p:spPr>
+          <a:xfrm>
+            <a:off x="548640" y="3474720"/>
+            <a:ext cx="5120640" cy="274320"/>
+          </a:xfrm>
+          <a:prstGeom prst="rect">
+            <a:avLst/>
+          </a:prstGeom>
+          <a:noFill/>
+          <a:ln/>
+        </p:spPr>
+        <p:txBody>
+          <a:bodyPr wrap="square" lIns="0" tIns="0" rIns="0" bIns="0" rtlCol="0" anchor="t"/>
+          <a:lstStyle/>
+          <a:p>
+            <a:pPr marL="0" indent="0">
+              <a:buNone/>
+            </a:pPr>
+            <a:r>
+              <a:rPr lang="en-US" sz="1500" b="1" dirty="0">
+                <a:solidFill>
+                  <a:schemeClr val="tx1"/>
+                </a:solidFill>
+              </a:rPr>
+              <a:t>What on-call watches, on /metrics</a:t>
+            </a:r>
+            <a:endParaRPr lang="en-US" sz="1500" dirty="0"/>
+          </a:p>
+        </p:txBody>
+      </p:sp>
+      <p:sp>
+        <p:nvSpPr>
+          <p:cNvPr id="19" name="Text 19"/>
+          <p:cNvSpPr txBox="1"/>
+          <p:nvPr/>
+        </p:nvSpPr>
+        <p:spPr>
+          <a:xfrm>
+            <a:off x="548640" y="3822191"/>
+            <a:ext cx="5120640" cy="1463040"/>
+          </a:xfrm>
+          <a:prstGeom prst="rect">
+            <a:avLst/>
+          </a:prstGeom>
+          <a:noFill/>
+          <a:ln/>
+        </p:spPr>
+        <p:txBody>
+          <a:bodyPr wrap="square" lIns="0" tIns="0" rIns="0" bIns="0" rtlCol="0" anchor="t"/>
+          <a:lstStyle/>
+          <a:p>
+            <a:pPr marL="177800" indent="-177800">
+              <a:spcAft>
+                <a:spcPts val="500"/>
+              </a:spcAft>
+              <a:buSzPct val="100000"/>
+              <a:buChar char="•"/>
+            </a:pPr>
+            <a:r>
+              <a:rPr lang="en-US" sz="1300" b="1" dirty="0">
+                <a:solidFill>
+                  <a:srgbClr val="3D4552"/>
+                </a:solidFill>
+              </a:rPr>
+              <a:t>Oldest pending event: </a:t>
+            </a:r>
+            <a:r>
+              <a:rPr lang="en-US" sz="1300" dirty="0">
+                <a:solidFill>
+                  <a:srgbClr val="3D4552"/>
+                </a:solidFill>
+              </a:rPr>
+              <a:t>the worker keeps up</a:t>
+            </a:r>
+            <a:endParaRPr lang="en-US" sz="1300" dirty="0"/>
+          </a:p>
+          <a:p>
+            <a:pPr marL="177800" indent="-177800">
+              <a:spcAft>
+                <a:spcPts val="500"/>
+              </a:spcAft>
+              <a:buSzPct val="100000"/>
+              <a:buChar char="•"/>
+            </a:pPr>
+            <a:r>
+              <a:rPr lang="en-US" sz="1300" b="1" dirty="0">
+                <a:solidFill>
+                  <a:srgbClr val="3D4552"/>
+                </a:solidFill>
+              </a:rPr>
+              <a:t>Oldest review item: </a:t>
+            </a:r>
+            <a:r>
+              <a:rPr lang="en-US" sz="1300" dirty="0">
+                <a:solidFill>
+                  <a:srgbClr val="3D4552"/>
+                </a:solidFill>
+              </a:rPr>
+              <a:t>a paid order waits for a person</a:t>
+            </a:r>
+            <a:endParaRPr lang="en-US" sz="1300" dirty="0"/>
+          </a:p>
+          <a:p>
+            <a:pPr marL="177800" indent="-177800">
+              <a:spcAft>
+                <a:spcPts val="500"/>
+              </a:spcAft>
+              <a:buSzPct val="100000"/>
+              <a:buChar char="•"/>
+            </a:pPr>
+            <a:r>
+              <a:rPr lang="en-US" sz="1300" b="1" dirty="0">
+                <a:solidFill>
+                  <a:srgbClr val="3D4552"/>
+                </a:solidFill>
+              </a:rPr>
+              <a:t>Warehouse down, last good reconcile: </a:t>
+            </a:r>
+            <a:r>
+              <a:rPr lang="en-US" sz="1300" dirty="0">
+                <a:solidFill>
+                  <a:srgbClr val="3D4552"/>
+                </a:solidFill>
+              </a:rPr>
+              <a:t>stock is fresh</a:t>
+            </a:r>
+            <a:endParaRPr lang="en-US" sz="1300" dirty="0"/>
+          </a:p>
+          <a:p>
+            <a:pPr marL="177800" indent="-177800">
+              <a:spcAft>
+                <a:spcPts val="500"/>
+              </a:spcAft>
+              <a:buSzPct val="100000"/>
+              <a:buChar char="•"/>
+            </a:pPr>
+            <a:r>
+              <a:rPr lang="en-US" sz="1300" b="1" dirty="0">
+                <a:solidFill>
+                  <a:srgbClr val="3D4552"/>
+                </a:solidFill>
+              </a:rPr>
+              <a:t>First real bottleneck: </a:t>
+            </a:r>
+            <a:r>
+              <a:rPr lang="en-US" sz="1300" dirty="0">
+                <a:solidFill>
+                  <a:srgbClr val="3D4552"/>
+                </a:solidFill>
+              </a:rPr>
+              <a:t>eMAG's rate limit, not the glue</a:t>
+            </a:r>
+            <a:endParaRPr lang="en-US" sz="1300" dirty="0"/>
+          </a:p>
+        </p:txBody>
+      </p:sp>
+      <p:sp>
+        <p:nvSpPr>
+          <p:cNvPr id="20" name="alerts"/>
+          <p:cNvSpPr/>
+          <p:nvPr/>
+        </p:nvSpPr>
+        <p:spPr>
+          <a:xfrm>
+            <a:off x="5989320" y="3474720"/>
+            <a:ext cx="5650992" cy="1783080"/>
+          </a:xfrm>
+          <a:prstGeom prst="roundRect">
+            <a:avLst>
+              <a:gd name="adj" fmla="val 4102"/>
+            </a:avLst>
+          </a:prstGeom>
+          <a:solidFill>
+            <a:schemeClr val="bg2"/>
+          </a:solidFill>
+          <a:ln/>
+        </p:spPr>
+        <p:txBody>
+          <a:bodyPr/>
+          <a:lstStyle/>
+          <a:p>
+            <a:endParaRPr lang="en-US"/>
+          </a:p>
+        </p:txBody>
+      </p:sp>
+      <p:sp>
+        <p:nvSpPr>
+          <p:cNvPr id="21" name="Text 23"/>
+          <p:cNvSpPr txBox="1"/>
+          <p:nvPr/>
+        </p:nvSpPr>
+        <p:spPr>
+          <a:xfrm>
+            <a:off x="6217920" y="3630168"/>
+            <a:ext cx="5212080" cy="274320"/>
+          </a:xfrm>
+          <a:prstGeom prst="rect">
+            <a:avLst/>
+          </a:prstGeom>
+          <a:noFill/>
+          <a:ln/>
+        </p:spPr>
+        <p:txBody>
+          <a:bodyPr wrap="square" lIns="0" tIns="0" rIns="0" bIns="0" rtlCol="0" anchor="t"/>
+          <a:lstStyle/>
+          <a:p>
+            <a:pPr marL="0" indent="0">
+              <a:buNone/>
+            </a:pPr>
+            <a:r>
+              <a:rPr lang="en-US" sz="1500" b="1" dirty="0">
+                <a:solidFill>
+                  <a:schemeClr val="tx1"/>
+                </a:solidFill>
+              </a:rPr>
+              <a:t>Alerts I would set, as sentences</a:t>
+            </a:r>
+            <a:endParaRPr lang="en-US" sz="1500" dirty="0"/>
+          </a:p>
+        </p:txBody>
+      </p:sp>
+      <p:sp>
+        <p:nvSpPr>
+          <p:cNvPr id="22" name="Text 24"/>
+          <p:cNvSpPr txBox="1"/>
+          <p:nvPr/>
+        </p:nvSpPr>
+        <p:spPr>
+          <a:xfrm>
+            <a:off x="6217920" y="4023360"/>
+            <a:ext cx="5257800" cy="1463040"/>
+          </a:xfrm>
+          <a:prstGeom prst="rect">
+            <a:avLst/>
+          </a:prstGeom>
+          <a:noFill/>
+          <a:ln/>
+        </p:spPr>
+        <p:txBody>
+          <a:bodyPr wrap="square" lIns="0" tIns="0" rIns="0" bIns="0" rtlCol="0" anchor="t"/>
+          <a:lstStyle/>
+          <a:p>
+            <a:pPr marL="177800" indent="-177800">
+              <a:spcAft>
+                <a:spcPts val="400"/>
+              </a:spcAft>
+              <a:buSzPct val="100000"/>
+              <a:buChar char="•"/>
+            </a:pPr>
+            <a:r>
+              <a:rPr lang="en-US" sz="1300" b="1" dirty="0">
+                <a:solidFill>
+                  <a:srgbClr val="3D4552"/>
+                </a:solidFill>
+              </a:rPr>
+              <a:t>Page: </a:t>
+            </a:r>
+            <a:r>
+              <a:rPr lang="en-US" sz="1300" dirty="0">
+                <a:solidFill>
+                  <a:srgbClr val="3D4552"/>
+                </a:solidFill>
+              </a:rPr>
+              <a:t>oldest pending event older than 60 s</a:t>
+            </a:r>
+            <a:endParaRPr lang="en-US" sz="1300" dirty="0"/>
+          </a:p>
+          <a:p>
+            <a:pPr marL="177800" indent="-177800">
+              <a:spcAft>
+                <a:spcPts val="400"/>
+              </a:spcAft>
+              <a:buSzPct val="100000"/>
+              <a:buChar char="•"/>
+            </a:pPr>
+            <a:r>
+              <a:rPr lang="en-US" sz="1300" b="1" dirty="0">
+                <a:solidFill>
+                  <a:srgbClr val="3D4552"/>
+                </a:solidFill>
+              </a:rPr>
+              <a:t>Page: </a:t>
+            </a:r>
+            <a:r>
+              <a:rPr lang="en-US" sz="1300" dirty="0">
+                <a:solidFill>
+                  <a:srgbClr val="3D4552"/>
+                </a:solidFill>
+              </a:rPr>
+              <a:t>warehouse down for more than 5 min</a:t>
+            </a:r>
+            <a:endParaRPr lang="en-US" sz="1300" dirty="0"/>
+          </a:p>
+          <a:p>
+            <a:pPr marL="177800" indent="-177800">
+              <a:spcAft>
+                <a:spcPts val="400"/>
+              </a:spcAft>
+              <a:buSzPct val="100000"/>
+              <a:buChar char="•"/>
+            </a:pPr>
+            <a:r>
+              <a:rPr lang="en-US" sz="1300" b="1" dirty="0">
+                <a:solidFill>
+                  <a:srgbClr val="3D4552"/>
+                </a:solidFill>
+              </a:rPr>
+              <a:t>Page: </a:t>
+            </a:r>
+            <a:r>
+              <a:rPr lang="en-US" sz="1300" dirty="0">
+                <a:solidFill>
+                  <a:srgbClr val="3D4552"/>
+                </a:solidFill>
+              </a:rPr>
+              <a:t>no good reconcile in 3 intervals, warehouse up</a:t>
+            </a:r>
+            <a:endParaRPr lang="en-US" sz="1300" dirty="0"/>
+          </a:p>
+          <a:p>
+            <a:pPr marL="177800" indent="-177800">
+              <a:spcAft>
+                <a:spcPts val="400"/>
+              </a:spcAft>
+              <a:buSzPct val="100000"/>
+              <a:buChar char="•"/>
+            </a:pPr>
+            <a:r>
+              <a:rPr lang="en-US" sz="1300" b="1" dirty="0">
+                <a:solidFill>
+                  <a:srgbClr val="3D4552"/>
+                </a:solidFill>
+              </a:rPr>
+              <a:t>Warn: </a:t>
+            </a:r>
+            <a:r>
+              <a:rPr lang="en-US" sz="1300" dirty="0">
+                <a:solidFill>
+                  <a:srgbClr val="3D4552"/>
+                </a:solidFill>
+              </a:rPr>
+              <a:t>a review item waiting 30 min in business hours</a:t>
+            </a:r>
+            <a:endParaRPr lang="en-US" sz="1300" dirty="0"/>
+          </a:p>
+        </p:txBody>
+      </p:sp>
+      <p:sp>
+        <p:nvSpPr>
+          <p:cNvPr id="23" name="Slide Number Placeholder 0"/>
+          <p:cNvSpPr>
+            <a:spLocks noGrp="1"/>
+          </p:cNvSpPr>
+          <p:nvPr>
+            <p:ph type="sldNum" sz="quarter" idx="4294967295"/>
+          </p:nvPr>
+        </p:nvSpPr>
+        <p:spPr>
+          <a:xfrm>
+            <a:off x="11183112" y="6446520"/>
+            <a:ext cx="457200" cy="228600"/>
+          </a:xfrm>
+          <a:prstGeom prst="rect">
+            <a:avLst/>
+          </a:prstGeom>
+          <a:extLst>
+            <a:ext uri="{C572A759-6A51-4108-AA02-DFA0A04FC94B}">
+              <ma14:wrappingTextBoxFlag xmlns="" xmlns:ma14="http://schemas.microsoft.com/office/mac/drawingml/2011/main" val="0"/>
+            </a:ext>
+          </a:extLst>
+        </p:spPr>
+        <p:txBody>
+          <a:bodyPr lIns="0" tIns="0" rIns="0" bIns="0"/>
+          <a:lstStyle>
+            <a:lvl1pPr>
+              <a:defRPr sz="1000">
+                <a:solidFill>
+                  <a:srgbClr val="8A93A1"/>
+                </a:solidFill>
+              </a:defRPr>
+            </a:lvl1pPr>
+          </a:lstStyle>
+          <a:p>
+            <a:pPr algn="r"/>
+            <a:fld id="{F7021451-1387-4CA6-816F-3879F97B5CBC}" type="slidenum">
+              <a:rPr lang="en-US" b="0"/>
+              <a:t>13</a:t>
+            </a:fld>
+            <a:endParaRPr lang="en-US"/>
+          </a:p>
+        </p:txBody>
+      </p:sp>
+    </p:spTree>
+  </p:cSld>
+  <p:clrMapOvr>
+    <a:masterClrMapping/>
+  </p:clrMapOvr>
+</p:sld>
+</file>
+
+<file path=ppt/slides/slide28.xml><?xml version="1.0" encoding="utf-8"?>
+<p:sld xmlns:a="http://schemas.openxmlformats.org/drawingml/2006/main" xmlns:p="http://schemas.openxmlformats.org/presentationml/2006/main" xmlns:r="http://schemas.openxmlformats.org/officeDocument/2006/relationships">
+  <p:cSld>
+    <p:spTree>
+      <p:nvGrpSpPr>
+        <p:cNvPr id="2" name=""/>
+        <p:cNvGrpSpPr/>
+        <p:nvPr/>
+      </p:nvGrpSpPr>
+      <p:grpSpPr/>
+      <p:sp>
+        <p:nvSpPr>
+          <p:cNvPr id="3" name="Text 0"/>
+          <p:cNvSpPr>
+            <a:spLocks noGrp="1"/>
+          </p:cNvSpPr>
+          <p:nvPr>
+            <p:ph type="body" idx="100" hasCustomPrompt="1"/>
+          </p:nvPr>
+        </p:nvSpPr>
+        <p:spPr>
+          <a:xfrm>
+            <a:off x="548640" y="384048"/>
+            <a:ext cx="8229600" cy="237744"/>
+          </a:xfrm>
+          <a:prstGeom prst="rect">
+            <a:avLst/>
+          </a:prstGeom>
+          <a:noFill/>
+          <a:ln/>
+        </p:spPr>
+        <p:txBody>
+          <a:bodyPr wrap="square" lIns="0" tIns="0" rIns="0" bIns="0" rtlCol="0" anchor="t"/>
+          <a:lstStyle/>
+          <a:p>
+            <a:pPr marL="0" indent="0" algn="l">
+              <a:buNone/>
+            </a:pPr>
+            <a:r>
+              <a:rPr lang="en-US" sz="1100" b="1" dirty="0">
+                <a:solidFill>
+                  <a:schemeClr val="tx2"/>
+                </a:solidFill>
+                <a:latin typeface="Courier New" pitchFamily="34" charset="0"/>
+                <a:ea typeface="Courier New" pitchFamily="34" charset="-122"/>
+                <a:cs typeface="Courier New" pitchFamily="34" charset="-120"/>
+              </a:rPr>
+              <a:t>REFLECTION</a:t>
+            </a:r>
+            <a:endParaRPr lang="en-US" sz="1100" dirty="0"/>
+          </a:p>
+        </p:txBody>
+      </p:sp>
+      <p:sp>
+        <p:nvSpPr>
+          <p:cNvPr id="4" name="Text 0"/>
+          <p:cNvSpPr>
+            <a:spLocks noGrp="1"/>
+          </p:cNvSpPr>
+          <p:nvPr>
+            <p:ph type="title" idx="101" hasCustomPrompt="1"/>
+          </p:nvPr>
+        </p:nvSpPr>
+        <p:spPr>
+          <a:xfrm>
+            <a:off x="548640" y="621792"/>
+            <a:ext cx="11094415" cy="640080"/>
+          </a:xfrm>
+          <a:prstGeom prst="rect">
+            <a:avLst/>
+          </a:prstGeom>
+          <a:noFill/>
+          <a:ln/>
+        </p:spPr>
+        <p:txBody>
+          <a:bodyPr wrap="square" lIns="0" tIns="0" rIns="0" bIns="0" rtlCol="0" anchor="t"/>
+          <a:lstStyle/>
+          <a:p>
+            <a:pPr marL="0" indent="0" algn="l">
+              <a:buNone/>
+            </a:pPr>
+            <a:r>
+              <a:rPr lang="en-US" sz="3200" b="1" dirty="0">
+                <a:solidFill>
+                  <a:schemeClr val="tx1"/>
+                </a:solidFill>
+              </a:rPr>
+              <a:t>Trade-offs, and how I'd roll it out</a:t>
+            </a:r>
+            <a:endParaRPr lang="en-US" sz="3200" dirty="0"/>
+          </a:p>
+        </p:txBody>
+      </p:sp>
+      <p:sp>
+        <p:nvSpPr>
+          <p:cNvPr id="5" name="Shadow mode"/>
+          <p:cNvSpPr/>
+          <p:nvPr/>
+        </p:nvSpPr>
+        <p:spPr>
+          <a:xfrm>
+            <a:off x="548640" y="1463040"/>
+            <a:ext cx="2606040" cy="1600200"/>
+          </a:xfrm>
+          <a:prstGeom prst="roundRect">
+            <a:avLst>
+              <a:gd name="adj" fmla="val 4571"/>
+            </a:avLst>
+          </a:prstGeom>
+          <a:solidFill>
+            <a:schemeClr val="bg1"/>
+          </a:solidFill>
+          <a:ln w="9525">
+            <a:solidFill>
+              <a:srgbClr val="E3E6EB"/>
+            </a:solidFill>
+            <a:prstDash val="solid"/>
+          </a:ln>
+        </p:spPr>
+        <p:txBody>
+          <a:bodyPr/>
+          <a:lstStyle/>
+          <a:p>
+            <a:endParaRPr lang="en-US"/>
+          </a:p>
+        </p:txBody>
+      </p:sp>
+      <p:sp>
+        <p:nvSpPr>
+          <p:cNvPr id="6" name="step 1"/>
+          <p:cNvSpPr/>
+          <p:nvPr/>
+        </p:nvSpPr>
+        <p:spPr>
+          <a:xfrm>
+            <a:off x="731520" y="1627632"/>
+            <a:ext cx="365760" cy="365760"/>
+          </a:xfrm>
+          <a:prstGeom prst="ellipse">
+            <a:avLst/>
+          </a:prstGeom>
+          <a:solidFill>
+            <a:schemeClr val="accent1"/>
+          </a:solidFill>
+          <a:ln/>
+        </p:spPr>
+        <p:txBody>
+          <a:bodyPr/>
+          <a:lstStyle/>
+          <a:p>
+            <a:endParaRPr lang="en-US"/>
+          </a:p>
+        </p:txBody>
+      </p:sp>
+      <p:sp>
+        <p:nvSpPr>
+          <p:cNvPr id="7" name="Text 4"/>
+          <p:cNvSpPr txBox="1"/>
+          <p:nvPr/>
+        </p:nvSpPr>
+        <p:spPr>
+          <a:xfrm>
+            <a:off x="731520" y="1627632"/>
+            <a:ext cx="365760" cy="365760"/>
+          </a:xfrm>
+          <a:prstGeom prst="rect">
+            <a:avLst/>
+          </a:prstGeom>
+          <a:noFill/>
+          <a:ln/>
+        </p:spPr>
+        <p:txBody>
+          <a:bodyPr wrap="square" lIns="0" tIns="0" rIns="0" bIns="0" rtlCol="0" anchor="ctr"/>
+          <a:lstStyle/>
+          <a:p>
+            <a:pPr marL="0" indent="0" algn="ctr">
+              <a:buNone/>
+            </a:pPr>
+            <a:r>
+              <a:rPr lang="en-US" sz="1200" b="1" dirty="0">
+                <a:solidFill>
+                  <a:schemeClr val="bg1"/>
+                </a:solidFill>
+              </a:rPr>
+              <a:t>1</a:t>
+            </a:r>
+            <a:endParaRPr lang="en-US" sz="1200" dirty="0"/>
+          </a:p>
+        </p:txBody>
+      </p:sp>
+      <p:sp>
+        <p:nvSpPr>
+          <p:cNvPr id="8" name="Text 5"/>
+          <p:cNvSpPr txBox="1"/>
+          <p:nvPr/>
+        </p:nvSpPr>
+        <p:spPr>
+          <a:xfrm>
+            <a:off x="1207008" y="1627632"/>
+            <a:ext cx="1828800" cy="365760"/>
+          </a:xfrm>
+          <a:prstGeom prst="rect">
+            <a:avLst/>
+          </a:prstGeom>
+          <a:noFill/>
+          <a:ln/>
+        </p:spPr>
+        <p:txBody>
+          <a:bodyPr wrap="square" lIns="0" tIns="0" rIns="0" bIns="0" rtlCol="0" anchor="ctr"/>
+          <a:lstStyle/>
+          <a:p>
+            <a:pPr marL="0" indent="0">
+              <a:buNone/>
+            </a:pPr>
+            <a:r>
+              <a:rPr lang="en-US" sz="1600" b="1" dirty="0">
+                <a:solidFill>
+                  <a:schemeClr val="tx1"/>
+                </a:solidFill>
+              </a:rPr>
+              <a:t>Shadow mode</a:t>
+            </a:r>
+            <a:endParaRPr lang="en-US" sz="1600" dirty="0"/>
+          </a:p>
+        </p:txBody>
+      </p:sp>
+      <p:sp>
+        <p:nvSpPr>
+          <p:cNvPr id="9" name="Text 6"/>
+          <p:cNvSpPr txBox="1"/>
+          <p:nvPr/>
+        </p:nvSpPr>
+        <p:spPr>
+          <a:xfrm>
+            <a:off x="731520" y="2121408"/>
+            <a:ext cx="2286000" cy="868680"/>
+          </a:xfrm>
+          <a:prstGeom prst="rect">
+            <a:avLst/>
+          </a:prstGeom>
+          <a:noFill/>
+          <a:ln/>
+        </p:spPr>
+        <p:txBody>
+          <a:bodyPr wrap="square" lIns="0" tIns="0" rIns="0" bIns="0" rtlCol="0" anchor="t"/>
+          <a:lstStyle/>
+          <a:p>
+            <a:pPr marL="0" indent="0">
+              <a:buNone/>
+            </a:pPr>
+            <a:r>
+              <a:rPr lang="en-US" sz="1300" dirty="0">
+                <a:solidFill>
+                  <a:srgbClr val="3D4552"/>
+                </a:solidFill>
+              </a:rPr>
+              <a:t>Receives and reads everything, sends nothing. Compared daily with the staff's work.</a:t>
+            </a:r>
+            <a:endParaRPr lang="en-US" sz="1300" dirty="0"/>
+          </a:p>
+        </p:txBody>
+      </p:sp>
+      <p:sp>
+        <p:nvSpPr>
+          <p:cNvPr id="10" name="Shape 7"/>
+          <p:cNvSpPr/>
+          <p:nvPr/>
+        </p:nvSpPr>
+        <p:spPr>
+          <a:xfrm>
+            <a:off x="3182112" y="2263140"/>
+            <a:ext cx="173736" cy="0"/>
+          </a:xfrm>
+          <a:prstGeom prst="line">
+            <a:avLst/>
+          </a:prstGeom>
+          <a:noFill/>
+          <a:ln w="15875">
+            <a:solidFill>
+              <a:schemeClr val="tx1"/>
+            </a:solidFill>
+            <a:prstDash val="solid"/>
+            <a:tailEnd type="triangle"/>
+          </a:ln>
+        </p:spPr>
+        <p:txBody>
+          <a:bodyPr/>
+          <a:lstStyle/>
+          <a:p>
+            <a:endParaRPr lang="en-US"/>
+          </a:p>
+        </p:txBody>
+      </p:sp>
+      <p:sp>
+        <p:nvSpPr>
+          <p:cNvPr id="11" name="Shop stock"/>
+          <p:cNvSpPr/>
+          <p:nvPr/>
+        </p:nvSpPr>
+        <p:spPr>
+          <a:xfrm>
+            <a:off x="3383280" y="1463040"/>
+            <a:ext cx="2606040" cy="1600200"/>
+          </a:xfrm>
+          <a:prstGeom prst="roundRect">
+            <a:avLst>
+              <a:gd name="adj" fmla="val 4571"/>
+            </a:avLst>
+          </a:prstGeom>
+          <a:solidFill>
+            <a:schemeClr val="bg1"/>
+          </a:solidFill>
+          <a:ln w="9525">
+            <a:solidFill>
+              <a:srgbClr val="E3E6EB"/>
+            </a:solidFill>
+            <a:prstDash val="solid"/>
+          </a:ln>
+        </p:spPr>
+        <p:txBody>
+          <a:bodyPr/>
+          <a:lstStyle/>
+          <a:p>
+            <a:endParaRPr lang="en-US"/>
+          </a:p>
+        </p:txBody>
+      </p:sp>
+      <p:sp>
+        <p:nvSpPr>
+          <p:cNvPr id="12" name="step 2"/>
+          <p:cNvSpPr/>
+          <p:nvPr/>
+        </p:nvSpPr>
+        <p:spPr>
+          <a:xfrm>
+            <a:off x="3566160" y="1627632"/>
+            <a:ext cx="365760" cy="365760"/>
+          </a:xfrm>
+          <a:prstGeom prst="ellipse">
+            <a:avLst/>
+          </a:prstGeom>
+          <a:solidFill>
+            <a:schemeClr val="accent1"/>
+          </a:solidFill>
+          <a:ln/>
+        </p:spPr>
+        <p:txBody>
+          <a:bodyPr/>
+          <a:lstStyle/>
+          <a:p>
+            <a:endParaRPr lang="en-US"/>
+          </a:p>
+        </p:txBody>
+      </p:sp>
+      <p:sp>
+        <p:nvSpPr>
+          <p:cNvPr id="13" name="Text 10"/>
+          <p:cNvSpPr txBox="1"/>
+          <p:nvPr/>
+        </p:nvSpPr>
+        <p:spPr>
+          <a:xfrm>
+            <a:off x="3566160" y="1627632"/>
+            <a:ext cx="365760" cy="365760"/>
+          </a:xfrm>
+          <a:prstGeom prst="rect">
+            <a:avLst/>
+          </a:prstGeom>
+          <a:noFill/>
+          <a:ln/>
+        </p:spPr>
+        <p:txBody>
+          <a:bodyPr wrap="square" lIns="0" tIns="0" rIns="0" bIns="0" rtlCol="0" anchor="ctr"/>
+          <a:lstStyle/>
+          <a:p>
+            <a:pPr marL="0" indent="0" algn="ctr">
+              <a:buNone/>
+            </a:pPr>
+            <a:r>
+              <a:rPr lang="en-US" sz="1200" b="1" dirty="0">
+                <a:solidFill>
+                  <a:schemeClr val="bg1"/>
+                </a:solidFill>
+              </a:rPr>
+              <a:t>2</a:t>
+            </a:r>
+            <a:endParaRPr lang="en-US" sz="1200" dirty="0"/>
+          </a:p>
+        </p:txBody>
+      </p:sp>
+      <p:sp>
+        <p:nvSpPr>
+          <p:cNvPr id="14" name="Text 11"/>
+          <p:cNvSpPr txBox="1"/>
+          <p:nvPr/>
+        </p:nvSpPr>
+        <p:spPr>
+          <a:xfrm>
+            <a:off x="4041648" y="1627632"/>
+            <a:ext cx="1828800" cy="365760"/>
+          </a:xfrm>
+          <a:prstGeom prst="rect">
+            <a:avLst/>
+          </a:prstGeom>
+          <a:noFill/>
+          <a:ln/>
+        </p:spPr>
+        <p:txBody>
+          <a:bodyPr wrap="square" lIns="0" tIns="0" rIns="0" bIns="0" rtlCol="0" anchor="ctr"/>
+          <a:lstStyle/>
+          <a:p>
+            <a:pPr marL="0" indent="0">
+              <a:buNone/>
+            </a:pPr>
+            <a:r>
+              <a:rPr lang="en-US" sz="1600" b="1" dirty="0">
+                <a:solidFill>
+                  <a:schemeClr val="tx1"/>
+                </a:solidFill>
+              </a:rPr>
+              <a:t>Shop stock</a:t>
+            </a:r>
+            <a:endParaRPr lang="en-US" sz="1600" dirty="0"/>
+          </a:p>
+        </p:txBody>
+      </p:sp>
+      <p:sp>
+        <p:nvSpPr>
+          <p:cNvPr id="15" name="Text 12"/>
+          <p:cNvSpPr txBox="1"/>
+          <p:nvPr/>
+        </p:nvSpPr>
+        <p:spPr>
+          <a:xfrm>
+            <a:off x="3566160" y="2121408"/>
+            <a:ext cx="2286000" cy="868680"/>
+          </a:xfrm>
+          <a:prstGeom prst="rect">
+            <a:avLst/>
+          </a:prstGeom>
+          <a:noFill/>
+          <a:ln/>
+        </p:spPr>
+        <p:txBody>
+          <a:bodyPr wrap="square" lIns="0" tIns="0" rIns="0" bIns="0" rtlCol="0" anchor="t"/>
+          <a:lstStyle/>
+          <a:p>
+            <a:pPr marL="0" indent="0">
+              <a:buNone/>
+            </a:pPr>
+            <a:r>
+              <a:rPr lang="en-US" sz="1300" dirty="0">
+                <a:solidFill>
+                  <a:srgbClr val="3D4552"/>
+                </a:solidFill>
+              </a:rPr>
+              <a:t>Glue pushes stock to the shop only. Staff keep everything else.</a:t>
+            </a:r>
+            <a:endParaRPr lang="en-US" sz="1300" dirty="0"/>
+          </a:p>
+        </p:txBody>
+      </p:sp>
+      <p:sp>
+        <p:nvSpPr>
+          <p:cNvPr id="16" name="Shape 13"/>
+          <p:cNvSpPr/>
+          <p:nvPr/>
+        </p:nvSpPr>
+        <p:spPr>
+          <a:xfrm>
+            <a:off x="6016752" y="2263140"/>
+            <a:ext cx="173736" cy="0"/>
+          </a:xfrm>
+          <a:prstGeom prst="line">
+            <a:avLst/>
+          </a:prstGeom>
+          <a:noFill/>
+          <a:ln w="15875">
+            <a:solidFill>
+              <a:schemeClr val="tx1"/>
+            </a:solidFill>
+            <a:prstDash val="solid"/>
+            <a:tailEnd type="triangle"/>
+          </a:ln>
+        </p:spPr>
+        <p:txBody>
+          <a:bodyPr/>
+          <a:lstStyle/>
+          <a:p>
+            <a:endParaRPr lang="en-US"/>
+          </a:p>
+        </p:txBody>
+      </p:sp>
+      <p:sp>
+        <p:nvSpPr>
+          <p:cNvPr id="17" name="eMAG stock"/>
+          <p:cNvSpPr/>
+          <p:nvPr/>
+        </p:nvSpPr>
+        <p:spPr>
+          <a:xfrm>
+            <a:off x="6217920" y="1463040"/>
+            <a:ext cx="2606040" cy="1600200"/>
+          </a:xfrm>
+          <a:prstGeom prst="roundRect">
+            <a:avLst>
+              <a:gd name="adj" fmla="val 4571"/>
+            </a:avLst>
+          </a:prstGeom>
+          <a:solidFill>
+            <a:schemeClr val="bg1"/>
+          </a:solidFill>
+          <a:ln w="9525">
+            <a:solidFill>
+              <a:srgbClr val="E3E6EB"/>
+            </a:solidFill>
+            <a:prstDash val="solid"/>
+          </a:ln>
+        </p:spPr>
+        <p:txBody>
+          <a:bodyPr/>
+          <a:lstStyle/>
+          <a:p>
+            <a:endParaRPr lang="en-US"/>
+          </a:p>
+        </p:txBody>
+      </p:sp>
+      <p:sp>
+        <p:nvSpPr>
+          <p:cNvPr id="18" name="step 3"/>
+          <p:cNvSpPr/>
+          <p:nvPr/>
+        </p:nvSpPr>
+        <p:spPr>
+          <a:xfrm>
+            <a:off x="6400800" y="1627632"/>
+            <a:ext cx="365760" cy="365760"/>
+          </a:xfrm>
+          <a:prstGeom prst="ellipse">
+            <a:avLst/>
+          </a:prstGeom>
+          <a:solidFill>
+            <a:schemeClr val="accent1"/>
+          </a:solidFill>
+          <a:ln/>
+        </p:spPr>
+        <p:txBody>
+          <a:bodyPr/>
+          <a:lstStyle/>
+          <a:p>
+            <a:endParaRPr lang="en-US"/>
+          </a:p>
+        </p:txBody>
+      </p:sp>
+      <p:sp>
+        <p:nvSpPr>
+          <p:cNvPr id="19" name="Text 16"/>
+          <p:cNvSpPr txBox="1"/>
+          <p:nvPr/>
+        </p:nvSpPr>
+        <p:spPr>
+          <a:xfrm>
+            <a:off x="6400800" y="1627632"/>
+            <a:ext cx="365760" cy="365760"/>
+          </a:xfrm>
+          <a:prstGeom prst="rect">
+            <a:avLst/>
+          </a:prstGeom>
+          <a:noFill/>
+          <a:ln/>
+        </p:spPr>
+        <p:txBody>
+          <a:bodyPr wrap="square" lIns="0" tIns="0" rIns="0" bIns="0" rtlCol="0" anchor="ctr"/>
+          <a:lstStyle/>
+          <a:p>
+            <a:pPr marL="0" indent="0" algn="ctr">
+              <a:buNone/>
+            </a:pPr>
+            <a:r>
+              <a:rPr lang="en-US" sz="1200" b="1" dirty="0">
+                <a:solidFill>
+                  <a:schemeClr val="bg1"/>
+                </a:solidFill>
+              </a:rPr>
+              <a:t>3</a:t>
+            </a:r>
+            <a:endParaRPr lang="en-US" sz="1200" dirty="0"/>
+          </a:p>
+        </p:txBody>
+      </p:sp>
+      <p:sp>
+        <p:nvSpPr>
+          <p:cNvPr id="20" name="Text 17"/>
+          <p:cNvSpPr txBox="1"/>
+          <p:nvPr/>
+        </p:nvSpPr>
+        <p:spPr>
+          <a:xfrm>
+            <a:off x="6876288" y="1627632"/>
+            <a:ext cx="1828800" cy="365760"/>
+          </a:xfrm>
+          <a:prstGeom prst="rect">
+            <a:avLst/>
+          </a:prstGeom>
+          <a:noFill/>
+          <a:ln/>
+        </p:spPr>
+        <p:txBody>
+          <a:bodyPr wrap="square" lIns="0" tIns="0" rIns="0" bIns="0" rtlCol="0" anchor="ctr"/>
+          <a:lstStyle/>
+          <a:p>
+            <a:pPr marL="0" indent="0">
+              <a:buNone/>
+            </a:pPr>
+            <a:r>
+              <a:rPr lang="en-US" sz="1600" b="1" dirty="0">
+                <a:solidFill>
+                  <a:schemeClr val="tx1"/>
+                </a:solidFill>
+              </a:rPr>
+              <a:t>eMAG stock</a:t>
+            </a:r>
+            <a:endParaRPr lang="en-US" sz="1600" dirty="0"/>
+          </a:p>
+        </p:txBody>
+      </p:sp>
+      <p:sp>
+        <p:nvSpPr>
+          <p:cNvPr id="21" name="Text 18"/>
+          <p:cNvSpPr txBox="1"/>
+          <p:nvPr/>
+        </p:nvSpPr>
+        <p:spPr>
+          <a:xfrm>
+            <a:off x="6400800" y="2121408"/>
+            <a:ext cx="2286000" cy="868680"/>
+          </a:xfrm>
+          <a:prstGeom prst="rect">
+            <a:avLst/>
+          </a:prstGeom>
+          <a:noFill/>
+          <a:ln/>
+        </p:spPr>
+        <p:txBody>
+          <a:bodyPr wrap="square" lIns="0" tIns="0" rIns="0" bIns="0" rtlCol="0" anchor="t"/>
+          <a:lstStyle/>
+          <a:p>
+            <a:pPr marL="0" indent="0">
+              <a:buNone/>
+            </a:pPr>
+            <a:r>
+              <a:rPr lang="en-US" sz="1300" dirty="0">
+                <a:solidFill>
+                  <a:srgbClr val="3D4552"/>
+                </a:solidFill>
+              </a:rPr>
+              <a:t>Then eMAG. Oversell risk drops; eMAG's real rate limits are met here.</a:t>
+            </a:r>
+            <a:endParaRPr lang="en-US" sz="1300" dirty="0"/>
+          </a:p>
+        </p:txBody>
+      </p:sp>
+      <p:sp>
+        <p:nvSpPr>
+          <p:cNvPr id="22" name="Shape 19"/>
+          <p:cNvSpPr/>
+          <p:nvPr/>
+        </p:nvSpPr>
+        <p:spPr>
+          <a:xfrm>
+            <a:off x="8851392" y="2263140"/>
+            <a:ext cx="173736" cy="0"/>
+          </a:xfrm>
+          <a:prstGeom prst="line">
+            <a:avLst/>
+          </a:prstGeom>
+          <a:noFill/>
+          <a:ln w="15875">
+            <a:solidFill>
+              <a:schemeClr val="tx1"/>
+            </a:solidFill>
+            <a:prstDash val="solid"/>
+            <a:tailEnd type="triangle"/>
+          </a:ln>
+        </p:spPr>
+        <p:txBody>
+          <a:bodyPr/>
+          <a:lstStyle/>
+          <a:p>
+            <a:endParaRPr lang="en-US"/>
+          </a:p>
+        </p:txBody>
+      </p:sp>
+      <p:sp>
+        <p:nvSpPr>
+          <p:cNvPr id="23" name="Orders"/>
+          <p:cNvSpPr/>
+          <p:nvPr/>
+        </p:nvSpPr>
+        <p:spPr>
+          <a:xfrm>
+            <a:off x="9052560" y="1463040"/>
+            <a:ext cx="2606040" cy="1600200"/>
+          </a:xfrm>
+          <a:prstGeom prst="roundRect">
+            <a:avLst>
+              <a:gd name="adj" fmla="val 4571"/>
+            </a:avLst>
+          </a:prstGeom>
+          <a:solidFill>
+            <a:srgbClr val="E8EEFD"/>
+          </a:solidFill>
+          <a:ln w="9525">
+            <a:solidFill>
+              <a:srgbClr val="9DB4F0"/>
+            </a:solidFill>
+            <a:prstDash val="solid"/>
+          </a:ln>
+        </p:spPr>
+        <p:txBody>
+          <a:bodyPr/>
+          <a:lstStyle/>
+          <a:p>
+            <a:endParaRPr lang="en-US"/>
+          </a:p>
+        </p:txBody>
+      </p:sp>
+      <p:sp>
+        <p:nvSpPr>
+          <p:cNvPr id="24" name="step 4"/>
+          <p:cNvSpPr/>
+          <p:nvPr/>
+        </p:nvSpPr>
+        <p:spPr>
+          <a:xfrm>
+            <a:off x="9235440" y="1627632"/>
+            <a:ext cx="365760" cy="365760"/>
+          </a:xfrm>
+          <a:prstGeom prst="ellipse">
+            <a:avLst/>
+          </a:prstGeom>
+          <a:solidFill>
+            <a:schemeClr val="accent1"/>
+          </a:solidFill>
+          <a:ln/>
+        </p:spPr>
+        <p:txBody>
+          <a:bodyPr/>
+          <a:lstStyle/>
+          <a:p>
+            <a:endParaRPr lang="en-US"/>
+          </a:p>
+        </p:txBody>
+      </p:sp>
+      <p:sp>
+        <p:nvSpPr>
+          <p:cNvPr id="25" name="Text 22"/>
+          <p:cNvSpPr txBox="1"/>
+          <p:nvPr/>
+        </p:nvSpPr>
+        <p:spPr>
+          <a:xfrm>
+            <a:off x="9235440" y="1627632"/>
+            <a:ext cx="365760" cy="365760"/>
+          </a:xfrm>
+          <a:prstGeom prst="rect">
+            <a:avLst/>
+          </a:prstGeom>
+          <a:noFill/>
+          <a:ln/>
+        </p:spPr>
+        <p:txBody>
+          <a:bodyPr wrap="square" lIns="0" tIns="0" rIns="0" bIns="0" rtlCol="0" anchor="ctr"/>
+          <a:lstStyle/>
+          <a:p>
+            <a:pPr marL="0" indent="0" algn="ctr">
+              <a:buNone/>
+            </a:pPr>
+            <a:r>
+              <a:rPr lang="en-US" sz="1200" b="1" dirty="0">
+                <a:solidFill>
+                  <a:schemeClr val="bg1"/>
+                </a:solidFill>
+              </a:rPr>
+              <a:t>4</a:t>
+            </a:r>
+            <a:endParaRPr lang="en-US" sz="1200" dirty="0"/>
+          </a:p>
+        </p:txBody>
+      </p:sp>
+      <p:sp>
+        <p:nvSpPr>
+          <p:cNvPr id="26" name="Text 23"/>
+          <p:cNvSpPr txBox="1"/>
+          <p:nvPr/>
+        </p:nvSpPr>
+        <p:spPr>
+          <a:xfrm>
+            <a:off x="9710928" y="1627632"/>
+            <a:ext cx="1828800" cy="365760"/>
+          </a:xfrm>
+          <a:prstGeom prst="rect">
+            <a:avLst/>
+          </a:prstGeom>
+          <a:noFill/>
+          <a:ln/>
+        </p:spPr>
+        <p:txBody>
+          <a:bodyPr wrap="square" lIns="0" tIns="0" rIns="0" bIns="0" rtlCol="0" anchor="ctr"/>
+          <a:lstStyle/>
+          <a:p>
+            <a:pPr marL="0" indent="0">
+              <a:buNone/>
+            </a:pPr>
+            <a:r>
+              <a:rPr lang="en-US" sz="1600" b="1" dirty="0">
+                <a:solidFill>
+                  <a:schemeClr val="tx1"/>
+                </a:solidFill>
+              </a:rPr>
+              <a:t>Orders</a:t>
+            </a:r>
+            <a:endParaRPr lang="en-US" sz="1600" dirty="0"/>
+          </a:p>
+        </p:txBody>
+      </p:sp>
+      <p:sp>
+        <p:nvSpPr>
+          <p:cNvPr id="27" name="Text 24"/>
+          <p:cNvSpPr txBox="1"/>
+          <p:nvPr/>
+        </p:nvSpPr>
+        <p:spPr>
+          <a:xfrm>
+            <a:off x="9235440" y="2121408"/>
+            <a:ext cx="2286000" cy="868680"/>
+          </a:xfrm>
+          <a:prstGeom prst="rect">
+            <a:avLst/>
+          </a:prstGeom>
+          <a:noFill/>
+          <a:ln/>
+        </p:spPr>
+        <p:txBody>
+          <a:bodyPr wrap="square" lIns="0" tIns="0" rIns="0" bIns="0" rtlCol="0" anchor="t"/>
+          <a:lstStyle/>
+          <a:p>
+            <a:pPr marL="0" indent="0">
+              <a:buNone/>
+            </a:pPr>
+            <a:r>
+              <a:rPr lang="en-US" sz="1300" dirty="0">
+                <a:solidFill>
+                  <a:srgbClr val="3D4552"/>
+                </a:solidFill>
+              </a:rPr>
+              <a:t>eMAG first, as it re-sends until confirmed, then the shop. The queue owner starts.</a:t>
+            </a:r>
+            <a:endParaRPr lang="en-US" sz="1300" dirty="0"/>
+          </a:p>
+        </p:txBody>
+      </p:sp>
+      <p:sp>
+        <p:nvSpPr>
+          <p:cNvPr id="28" name="Text 25"/>
+          <p:cNvSpPr txBox="1"/>
+          <p:nvPr/>
+        </p:nvSpPr>
+        <p:spPr>
+          <a:xfrm>
+            <a:off x="548640" y="3154680"/>
+            <a:ext cx="11094415" cy="274320"/>
+          </a:xfrm>
+          <a:prstGeom prst="rect">
+            <a:avLst/>
+          </a:prstGeom>
+          <a:noFill/>
+          <a:ln/>
+        </p:spPr>
+        <p:txBody>
+          <a:bodyPr wrap="square" lIns="0" tIns="0" rIns="0" bIns="0" rtlCol="0" anchor="t"/>
+          <a:lstStyle/>
+          <a:p>
+            <a:pPr marL="0" indent="0">
+              <a:buNone/>
+            </a:pPr>
+            <a:r>
+              <a:rPr lang="en-US" sz="1200" dirty="0">
+                <a:solidFill>
+                  <a:schemeClr val="tx2"/>
+                </a:solidFill>
+              </a:rPr>
+              <a:t>About a week per stage. Shadow mode and the per-stage switches are not built yet: each is a flag checked before Glue calls a system.</a:t>
+            </a:r>
+            <a:endParaRPr lang="en-US" sz="1200" dirty="0"/>
+          </a:p>
+        </p:txBody>
+      </p:sp>
+      <p:graphicFrame>
+        <p:nvGraphicFramePr>
+          <p:cNvPr id="29" name="Table 0"/>
+          <p:cNvGraphicFramePr>
+            <a:graphicFrameLocks noGrp="1"/>
+          </p:cNvGraphicFramePr>
+          <p:nvPr>
+            <p:extLst>
+              <p:ext uri="{D42A27DB-BD31-4B8C-83A1-F6EECF244321}">
+                <p14:modId xmlns:p14="http://schemas.microsoft.com/office/powerpoint/2010/main" val="1579011935"/>
+              </p:ext>
+            </p:extLst>
+          </p:nvPr>
+        </p:nvGraphicFramePr>
+        <p:xfrm>
+          <a:off x="548640" y="3611880"/>
+          <a:ext cx="5394960" cy="2103120"/>
+        </p:xfrm>
+        <a:graphic>
+          <a:graphicData uri="http://schemas.openxmlformats.org/drawingml/2006/table">
+            <a:tbl>
+              <a:tblPr/>
+              <a:tblGrid>
+                <a:gridCol w="2788920">
+                  <a:extLst>
+                    <a:ext uri="{9D8B030D-6E8A-4147-A177-3AD203B41FA5}">
+                      <a16:colId xmlns:a16="http://schemas.microsoft.com/office/drawing/2014/main" val="20000"/>
+                    </a:ext>
+                  </a:extLst>
+                </a:gridCol>
+                <a:gridCol w="2606040">
+                  <a:extLst>
+                    <a:ext uri="{9D8B030D-6E8A-4147-A177-3AD203B41FA5}">
+                      <a16:colId xmlns:a16="http://schemas.microsoft.com/office/drawing/2014/main" val="20001"/>
+                    </a:ext>
+                  </a:extLst>
+                </a:gridCol>
+              </a:tblGrid>
+              <a:tr h="402336">
+                <a:tc>
+                  <a:txBody>
+                    <a:bodyPr/>
+                    <a:lstStyle/>
+                    <a:p>
+                      <a:pPr marL="0" indent="0">
+                        <a:buNone/>
+                      </a:pPr>
+                      <a:r>
+                        <a:rPr lang="en-US" sz="1200" b="1" dirty="0">
+                          <a:solidFill>
+                            <a:srgbClr val="5B6472"/>
+                          </a:solidFill>
+                        </a:rPr>
+                        <a:t>I chose</a:t>
+                      </a:r>
+                      <a:endParaRPr lang="en-US" sz="1200" dirty="0"/>
+                    </a:p>
+                  </a:txBody>
+                  <a:tcPr marL="54864" marR="54864" marT="0" marB="0" anchor="ctr">
+                    <a:lnL w="0" cap="flat" cmpd="sng" algn="ctr">
+                      <a:noFill/>
+                    </a:lnL>
+                    <a:lnR w="0" cap="flat" cmpd="sng" algn="ctr">
+                      <a:noFill/>
+                    </a:lnR>
+                    <a:lnT w="0" cap="flat" cmpd="sng" algn="ctr">
+                      <a:noFill/>
+                    </a:lnT>
+                    <a:lnB w="9525" cap="flat" cmpd="sng" algn="ctr">
+                      <a:solidFill>
+                        <a:srgbClr val="E3E6EB"/>
+                      </a:solidFill>
+                      <a:prstDash val="solid"/>
+                      <a:round/>
+                      <a:headEnd type="none" w="med" len="med"/>
+                      <a:tailEnd type="none" w="med" len="med"/>
+                    </a:lnB>
+                    <a:solidFill>
+                      <a:srgbClr val="F6F7F9"/>
+                    </a:solidFill>
+                  </a:tcPr>
+                </a:tc>
+                <a:tc>
+                  <a:txBody>
+                    <a:bodyPr/>
+                    <a:lstStyle/>
+                    <a:p>
+                      <a:pPr marL="0" indent="0">
+                        <a:buNone/>
+                      </a:pPr>
+                      <a:r>
+                        <a:rPr lang="en-US" sz="1200" b="1" dirty="0">
+                          <a:solidFill>
+                            <a:srgbClr val="5B6472"/>
+                          </a:solidFill>
+                        </a:rPr>
+                        <a:t>It costs</a:t>
+                      </a:r>
+                      <a:endParaRPr lang="en-US" sz="1200" dirty="0"/>
+                    </a:p>
+                  </a:txBody>
+                  <a:tcPr marL="54864" marR="54864" marT="0" marB="0" anchor="ctr">
+                    <a:lnL w="0" cap="flat" cmpd="sng" algn="ctr">
+                      <a:noFill/>
+                    </a:lnL>
+                    <a:lnR w="0" cap="flat" cmpd="sng" algn="ctr">
+                      <a:noFill/>
+                    </a:lnR>
+                    <a:lnT w="0" cap="flat" cmpd="sng" algn="ctr">
+                      <a:noFill/>
+                    </a:lnT>
+                    <a:lnB w="9525" cap="flat" cmpd="sng" algn="ctr">
+                      <a:solidFill>
+                        <a:srgbClr val="E3E6EB"/>
+                      </a:solidFill>
+                      <a:prstDash val="solid"/>
+                      <a:round/>
+                      <a:headEnd type="none" w="med" len="med"/>
+                      <a:tailEnd type="none" w="med" len="med"/>
+                    </a:lnB>
+                    <a:solidFill>
+                      <a:srgbClr val="F6F7F9"/>
+                    </a:solidFill>
+                  </a:tcPr>
+                </a:tc>
+                <a:extLst>
+                  <a:ext uri="{0D108BD9-81ED-4DB2-BD59-A6C34878D82A}">
+                    <a16:rowId xmlns:a16="http://schemas.microsoft.com/office/drawing/2014/main" val="10000"/>
+                  </a:ext>
+                </a:extLst>
+              </a:tr>
+              <a:tr h="402336">
+                <a:tc>
+                  <a:txBody>
+                    <a:bodyPr/>
+                    <a:lstStyle/>
+                    <a:p>
+                      <a:pPr marL="0" indent="0">
+                        <a:buNone/>
+                      </a:pPr>
+                      <a:r>
+                        <a:rPr lang="en-US" sz="1400" b="1" dirty="0">
+                          <a:solidFill>
+                            <a:schemeClr val="tx1"/>
+                          </a:solidFill>
+                        </a:rPr>
+                        <a:t>SQLite and one process</a:t>
+                      </a:r>
+                      <a:endParaRPr lang="en-US" sz="1400" dirty="0"/>
+                    </a:p>
+                  </a:txBody>
+                  <a:tcPr marL="54864" marR="54864" marT="0" marB="0" anchor="ctr">
+                    <a:lnL w="0" cap="flat" cmpd="sng" algn="ctr">
+                      <a:noFill/>
+                    </a:lnL>
+                    <a:lnR w="0" cap="flat" cmpd="sng" algn="ctr">
+                      <a:noFill/>
+                    </a:lnR>
+                    <a:lnT w="9525" cap="flat" cmpd="sng" algn="ctr">
+                      <a:solidFill>
+                        <a:srgbClr val="E3E6EB"/>
+                      </a:solidFill>
+                      <a:prstDash val="solid"/>
+                      <a:round/>
+                      <a:headEnd type="none" w="med" len="med"/>
+                      <a:tailEnd type="none" w="med" len="med"/>
+                    </a:lnT>
+                    <a:lnB w="9525" cap="flat" cmpd="sng" algn="ctr">
+                      <a:solidFill>
+                        <a:srgbClr val="E3E6EB"/>
+                      </a:solidFill>
+                      <a:prstDash val="solid"/>
+                      <a:round/>
+                      <a:headEnd type="none" w="med" len="med"/>
+                      <a:tailEnd type="none" w="med" len="med"/>
+                    </a:lnB>
+                  </a:tcPr>
+                </a:tc>
+                <a:tc>
+                  <a:txBody>
+                    <a:bodyPr/>
+                    <a:lstStyle/>
+                    <a:p>
+                      <a:pPr marL="0" indent="0">
+                        <a:buNone/>
+                      </a:pPr>
+                      <a:r>
+                        <a:rPr lang="en-US" sz="1400" dirty="0">
+                          <a:solidFill>
+                            <a:srgbClr val="3D4552"/>
+                          </a:solidFill>
+                        </a:rPr>
+                        <a:t>One writer, one instance</a:t>
+                      </a:r>
+                      <a:endParaRPr lang="en-US" sz="1400" dirty="0"/>
+                    </a:p>
+                  </a:txBody>
+                  <a:tcPr marL="54864" marR="54864" marT="0" marB="0" anchor="ctr">
+                    <a:lnL w="0" cap="flat" cmpd="sng" algn="ctr">
+                      <a:noFill/>
+                    </a:lnL>
+                    <a:lnR w="0" cap="flat" cmpd="sng" algn="ctr">
+                      <a:noFill/>
+                    </a:lnR>
+                    <a:lnT w="9525" cap="flat" cmpd="sng" algn="ctr">
+                      <a:solidFill>
+                        <a:srgbClr val="E3E6EB"/>
+                      </a:solidFill>
+                      <a:prstDash val="solid"/>
+                      <a:round/>
+                      <a:headEnd type="none" w="med" len="med"/>
+                      <a:tailEnd type="none" w="med" len="med"/>
+                    </a:lnT>
+                    <a:lnB w="9525" cap="flat" cmpd="sng" algn="ctr">
+                      <a:solidFill>
+                        <a:srgbClr val="E3E6EB"/>
+                      </a:solidFill>
+                      <a:prstDash val="solid"/>
+                      <a:round/>
+                      <a:headEnd type="none" w="med" len="med"/>
+                      <a:tailEnd type="none" w="med" len="med"/>
+                    </a:lnB>
+                  </a:tcPr>
+                </a:tc>
+                <a:extLst>
+                  <a:ext uri="{0D108BD9-81ED-4DB2-BD59-A6C34878D82A}">
+                    <a16:rowId xmlns:a16="http://schemas.microsoft.com/office/drawing/2014/main" val="10001"/>
+                  </a:ext>
+                </a:extLst>
+              </a:tr>
+              <a:tr h="402336">
+                <a:tc>
+                  <a:txBody>
+                    <a:bodyPr/>
+                    <a:lstStyle/>
+                    <a:p>
+                      <a:pPr marL="0" indent="0">
+                        <a:buNone/>
+                      </a:pPr>
+                      <a:r>
+                        <a:rPr lang="en-US" sz="1400" b="1" dirty="0">
+                          <a:solidFill>
+                            <a:schemeClr val="tx1"/>
+                          </a:solidFill>
+                        </a:rPr>
+                        <a:t>First to the warehouse wins</a:t>
+                      </a:r>
+                      <a:endParaRPr lang="en-US" sz="1400" dirty="0"/>
+                    </a:p>
+                  </a:txBody>
+                  <a:tcPr marL="54864" marR="54864" marT="0" marB="0" anchor="ctr">
+                    <a:lnL w="0" cap="flat" cmpd="sng" algn="ctr">
+                      <a:noFill/>
+                    </a:lnL>
+                    <a:lnR w="0" cap="flat" cmpd="sng" algn="ctr">
+                      <a:noFill/>
+                    </a:lnR>
+                    <a:lnT w="9525" cap="flat" cmpd="sng" algn="ctr">
+                      <a:solidFill>
+                        <a:srgbClr val="E3E6EB"/>
+                      </a:solidFill>
+                      <a:prstDash val="solid"/>
+                      <a:round/>
+                      <a:headEnd type="none" w="med" len="med"/>
+                      <a:tailEnd type="none" w="med" len="med"/>
+                    </a:lnT>
+                    <a:lnB w="9525" cap="flat" cmpd="sng" algn="ctr">
+                      <a:solidFill>
+                        <a:srgbClr val="E3E6EB"/>
+                      </a:solidFill>
+                      <a:prstDash val="solid"/>
+                      <a:round/>
+                      <a:headEnd type="none" w="med" len="med"/>
+                      <a:tailEnd type="none" w="med" len="med"/>
+                    </a:lnB>
+                  </a:tcPr>
+                </a:tc>
+                <a:tc>
+                  <a:txBody>
+                    <a:bodyPr/>
+                    <a:lstStyle/>
+                    <a:p>
+                      <a:pPr marL="0" indent="0">
+                        <a:buNone/>
+                      </a:pPr>
+                      <a:r>
+                        <a:rPr lang="en-US" sz="1400" dirty="0">
+                          <a:solidFill>
+                            <a:srgbClr val="3D4552"/>
+                          </a:solidFill>
+                        </a:rPr>
+                        <a:t>Does not protect eMAG's rating</a:t>
+                      </a:r>
+                      <a:endParaRPr lang="en-US" sz="1400" dirty="0"/>
+                    </a:p>
+                  </a:txBody>
+                  <a:tcPr marL="54864" marR="54864" marT="0" marB="0" anchor="ctr">
+                    <a:lnL w="0" cap="flat" cmpd="sng" algn="ctr">
+                      <a:noFill/>
+                    </a:lnL>
+                    <a:lnR w="0" cap="flat" cmpd="sng" algn="ctr">
+                      <a:noFill/>
+                    </a:lnR>
+                    <a:lnT w="9525" cap="flat" cmpd="sng" algn="ctr">
+                      <a:solidFill>
+                        <a:srgbClr val="E3E6EB"/>
+                      </a:solidFill>
+                      <a:prstDash val="solid"/>
+                      <a:round/>
+                      <a:headEnd type="none" w="med" len="med"/>
+                      <a:tailEnd type="none" w="med" len="med"/>
+                    </a:lnT>
+                    <a:lnB w="9525" cap="flat" cmpd="sng" algn="ctr">
+                      <a:solidFill>
+                        <a:srgbClr val="E3E6EB"/>
+                      </a:solidFill>
+                      <a:prstDash val="solid"/>
+                      <a:round/>
+                      <a:headEnd type="none" w="med" len="med"/>
+                      <a:tailEnd type="none" w="med" len="med"/>
+                    </a:lnB>
+                  </a:tcPr>
+                </a:tc>
+                <a:extLst>
+                  <a:ext uri="{0D108BD9-81ED-4DB2-BD59-A6C34878D82A}">
+                    <a16:rowId xmlns:a16="http://schemas.microsoft.com/office/drawing/2014/main" val="10003"/>
+                  </a:ext>
+                </a:extLst>
+              </a:tr>
+              <a:tr h="402336">
+                <a:tc>
+                  <a:txBody>
+                    <a:bodyPr/>
+                    <a:lstStyle/>
+                    <a:p>
+                      <a:pPr marL="0" indent="0">
+                        <a:buNone/>
+                      </a:pPr>
+                      <a:r>
+                        <a:rPr lang="en-US" sz="1400" b="1" dirty="0">
+                          <a:solidFill>
+                            <a:schemeClr val="tx1"/>
+                          </a:solidFill>
+                        </a:rPr>
+                        <a:t>A person decides oversells</a:t>
+                      </a:r>
+                      <a:endParaRPr lang="en-US" sz="1400" dirty="0"/>
+                    </a:p>
+                  </a:txBody>
+                  <a:tcPr marL="54864" marR="54864" marT="0" marB="0" anchor="ctr">
+                    <a:lnL w="0" cap="flat" cmpd="sng" algn="ctr">
+                      <a:noFill/>
+                    </a:lnL>
+                    <a:lnR w="0" cap="flat" cmpd="sng" algn="ctr">
+                      <a:noFill/>
+                    </a:lnR>
+                    <a:lnT w="9525" cap="flat" cmpd="sng" algn="ctr">
+                      <a:solidFill>
+                        <a:srgbClr val="E3E6EB"/>
+                      </a:solidFill>
+                      <a:prstDash val="solid"/>
+                      <a:round/>
+                      <a:headEnd type="none" w="med" len="med"/>
+                      <a:tailEnd type="none" w="med" len="med"/>
+                    </a:lnT>
+                    <a:lnB w="9525" cap="flat" cmpd="sng" algn="ctr">
+                      <a:solidFill>
+                        <a:srgbClr val="E3E6EB"/>
+                      </a:solidFill>
+                      <a:prstDash val="solid"/>
+                      <a:round/>
+                      <a:headEnd type="none" w="med" len="med"/>
+                      <a:tailEnd type="none" w="med" len="med"/>
+                    </a:lnB>
+                  </a:tcPr>
+                </a:tc>
+                <a:tc>
+                  <a:txBody>
+                    <a:bodyPr/>
+                    <a:lstStyle/>
+                    <a:p>
+                      <a:pPr marL="0" indent="0">
+                        <a:buNone/>
+                      </a:pPr>
+                      <a:r>
+                        <a:rPr lang="en-US" sz="1400" dirty="0">
+                          <a:solidFill>
+                            <a:srgbClr val="3D4552"/>
+                          </a:solidFill>
+                        </a:rPr>
+                        <a:t>Someone must watch the queue</a:t>
+                      </a:r>
+                      <a:endParaRPr lang="en-US" sz="1400" dirty="0"/>
+                    </a:p>
+                  </a:txBody>
+                  <a:tcPr marL="54864" marR="54864" marT="0" marB="0" anchor="ctr">
+                    <a:lnL w="0" cap="flat" cmpd="sng" algn="ctr">
+                      <a:noFill/>
+                    </a:lnL>
+                    <a:lnR w="0" cap="flat" cmpd="sng" algn="ctr">
+                      <a:noFill/>
+                    </a:lnR>
+                    <a:lnT w="9525" cap="flat" cmpd="sng" algn="ctr">
+                      <a:solidFill>
+                        <a:srgbClr val="E3E6EB"/>
+                      </a:solidFill>
+                      <a:prstDash val="solid"/>
+                      <a:round/>
+                      <a:headEnd type="none" w="med" len="med"/>
+                      <a:tailEnd type="none" w="med" len="med"/>
+                    </a:lnT>
+                    <a:lnB w="9525" cap="flat" cmpd="sng" algn="ctr">
+                      <a:solidFill>
+                        <a:srgbClr val="E3E6EB"/>
+                      </a:solidFill>
+                      <a:prstDash val="solid"/>
+                      <a:round/>
+                      <a:headEnd type="none" w="med" len="med"/>
+                      <a:tailEnd type="none" w="med" len="med"/>
+                    </a:lnB>
+                  </a:tcPr>
+                </a:tc>
+                <a:extLst>
+                  <a:ext uri="{0D108BD9-81ED-4DB2-BD59-A6C34878D82A}">
+                    <a16:rowId xmlns:a16="http://schemas.microsoft.com/office/drawing/2014/main" val="10004"/>
+                  </a:ext>
+                </a:extLst>
+              </a:tr>
+              <a:tr h="402336">
+                <a:tc>
+                  <a:txBody>
+                    <a:bodyPr/>
+                    <a:lstStyle/>
+                    <a:p>
+                      <a:pPr marL="0" indent="0">
+                        <a:buNone/>
+                      </a:pPr>
+                      <a:r>
+                        <a:rPr lang="en-US" sz="1400" b="1" dirty="0">
+                          <a:solidFill>
+                            <a:schemeClr val="tx1"/>
+                          </a:solidFill>
+                        </a:rPr>
+                        <a:t>Mocks, not sandboxes</a:t>
+                      </a:r>
+                      <a:endParaRPr lang="en-US" sz="1400" dirty="0"/>
+                    </a:p>
+                  </a:txBody>
+                  <a:tcPr marL="54864" marR="54864" marT="0" marB="0" anchor="ctr">
+                    <a:lnL w="0" cap="flat" cmpd="sng" algn="ctr">
+                      <a:noFill/>
+                    </a:lnL>
+                    <a:lnR w="0" cap="flat" cmpd="sng" algn="ctr">
+                      <a:noFill/>
+                    </a:lnR>
+                    <a:lnT w="9525" cap="flat" cmpd="sng" algn="ctr">
+                      <a:solidFill>
+                        <a:srgbClr val="E3E6EB"/>
+                      </a:solidFill>
+                      <a:prstDash val="solid"/>
+                      <a:round/>
+                      <a:headEnd type="none" w="med" len="med"/>
+                      <a:tailEnd type="none" w="med" len="med"/>
+                    </a:lnT>
+                    <a:lnB w="9525" cap="flat" cmpd="sng" algn="ctr">
+                      <a:solidFill>
+                        <a:srgbClr val="E3E6EB"/>
+                      </a:solidFill>
+                      <a:prstDash val="solid"/>
+                      <a:round/>
+                      <a:headEnd type="none" w="med" len="med"/>
+                      <a:tailEnd type="none" w="med" len="med"/>
+                    </a:lnB>
+                  </a:tcPr>
+                </a:tc>
+                <a:tc>
+                  <a:txBody>
+                    <a:bodyPr/>
+                    <a:lstStyle/>
+                    <a:p>
+                      <a:pPr marL="0" indent="0">
+                        <a:buNone/>
+                      </a:pPr>
+                      <a:r>
+                        <a:rPr lang="en-US" sz="1400" dirty="0">
+                          <a:solidFill>
+                            <a:srgbClr val="3D4552"/>
+                          </a:solidFill>
+                        </a:rPr>
+                        <a:t>Real API quirks are untested</a:t>
+                      </a:r>
+                      <a:endParaRPr lang="en-US" sz="1400" dirty="0"/>
+                    </a:p>
+                  </a:txBody>
+                  <a:tcPr marL="54864" marR="54864" marT="0" marB="0" anchor="ctr">
+                    <a:lnL w="0" cap="flat" cmpd="sng" algn="ctr">
+                      <a:noFill/>
+                    </a:lnL>
+                    <a:lnR w="0" cap="flat" cmpd="sng" algn="ctr">
+                      <a:noFill/>
+                    </a:lnR>
+                    <a:lnT w="9525" cap="flat" cmpd="sng" algn="ctr">
+                      <a:solidFill>
+                        <a:srgbClr val="E3E6EB"/>
+                      </a:solidFill>
+                      <a:prstDash val="solid"/>
+                      <a:round/>
+                      <a:headEnd type="none" w="med" len="med"/>
+                      <a:tailEnd type="none" w="med" len="med"/>
+                    </a:lnT>
+                    <a:lnB w="9525" cap="flat" cmpd="sng" algn="ctr">
+                      <a:solidFill>
+                        <a:srgbClr val="E3E6EB"/>
+                      </a:solidFill>
+                      <a:prstDash val="solid"/>
+                      <a:round/>
+                      <a:headEnd type="none" w="med" len="med"/>
+                      <a:tailEnd type="none" w="med" len="med"/>
+                    </a:lnB>
+                  </a:tcPr>
+                </a:tc>
+                <a:extLst>
+                  <a:ext uri="{0D108BD9-81ED-4DB2-BD59-A6C34878D82A}">
+                    <a16:rowId xmlns:a16="http://schemas.microsoft.com/office/drawing/2014/main" val="10005"/>
+                  </a:ext>
+                </a:extLst>
+              </a:tr>
+            </a:tbl>
+          </a:graphicData>
+        </a:graphic>
+      </p:graphicFrame>
+      <p:sp>
+        <p:nvSpPr>
+          <p:cNvPr id="30" name="success"/>
+          <p:cNvSpPr/>
+          <p:nvPr/>
+        </p:nvSpPr>
+        <p:spPr>
+          <a:xfrm>
+            <a:off x="6263640" y="3611880"/>
+            <a:ext cx="5376672" cy="2011680"/>
+          </a:xfrm>
+          <a:prstGeom prst="roundRect">
+            <a:avLst>
+              <a:gd name="adj" fmla="val 3636"/>
+            </a:avLst>
+          </a:prstGeom>
+          <a:solidFill>
+            <a:schemeClr val="bg2"/>
+          </a:solidFill>
+          <a:ln/>
+        </p:spPr>
+        <p:txBody>
+          <a:bodyPr/>
+          <a:lstStyle/>
+          <a:p>
+            <a:endParaRPr lang="en-US"/>
+          </a:p>
+        </p:txBody>
+      </p:sp>
+      <p:sp>
+        <p:nvSpPr>
+          <p:cNvPr id="31" name="Text 29"/>
+          <p:cNvSpPr txBox="1"/>
+          <p:nvPr/>
+        </p:nvSpPr>
+        <p:spPr>
+          <a:xfrm>
+            <a:off x="6492240" y="3767328"/>
+            <a:ext cx="4937760" cy="274320"/>
+          </a:xfrm>
+          <a:prstGeom prst="rect">
+            <a:avLst/>
+          </a:prstGeom>
+          <a:noFill/>
+          <a:ln/>
+        </p:spPr>
+        <p:txBody>
+          <a:bodyPr wrap="square" lIns="0" tIns="0" rIns="0" bIns="0" rtlCol="0" anchor="t"/>
+          <a:lstStyle/>
+          <a:p>
+            <a:pPr marL="0" indent="0">
+              <a:buNone/>
+            </a:pPr>
+            <a:r>
+              <a:rPr lang="en-US" sz="1500" b="1" dirty="0">
+                <a:solidFill>
+                  <a:schemeClr val="tx1"/>
+                </a:solidFill>
+              </a:rPr>
+              <a:t>Success after 30 days</a:t>
+            </a:r>
+            <a:endParaRPr lang="en-US" sz="1500" dirty="0"/>
+          </a:p>
+        </p:txBody>
+      </p:sp>
+      <p:sp>
+        <p:nvSpPr>
+          <p:cNvPr id="32" name="Text 30"/>
+          <p:cNvSpPr txBox="1"/>
+          <p:nvPr/>
+        </p:nvSpPr>
+        <p:spPr>
+          <a:xfrm>
+            <a:off x="6492240" y="4114800"/>
+            <a:ext cx="4983480" cy="1828800"/>
+          </a:xfrm>
+          <a:prstGeom prst="rect">
+            <a:avLst/>
+          </a:prstGeom>
+          <a:noFill/>
+          <a:ln/>
+        </p:spPr>
+        <p:txBody>
+          <a:bodyPr wrap="square" lIns="0" tIns="0" rIns="0" bIns="0" rtlCol="0" anchor="t"/>
+          <a:lstStyle/>
+          <a:p>
+            <a:pPr marL="177800" indent="-177800">
+              <a:spcAft>
+                <a:spcPts val="500"/>
+              </a:spcAft>
+              <a:buSzPct val="100000"/>
+              <a:buChar char="•"/>
+            </a:pPr>
+            <a:r>
+              <a:rPr lang="en-US" sz="1300" dirty="0">
+                <a:solidFill>
+                  <a:srgbClr val="3D4552"/>
+                </a:solidFill>
+              </a:rPr>
+              <a:t>Missed orders: zero, and Flow shows no lost orders</a:t>
+            </a:r>
+            <a:endParaRPr lang="en-US" sz="1300" dirty="0"/>
+          </a:p>
+          <a:p>
+            <a:pPr marL="177800" indent="-177800">
+              <a:spcAft>
+                <a:spcPts val="500"/>
+              </a:spcAft>
+              <a:buSzPct val="100000"/>
+              <a:buChar char="•"/>
+            </a:pPr>
+            <a:r>
+              <a:rPr lang="en-US" sz="1300" dirty="0">
+                <a:solidFill>
+                  <a:srgbClr val="3D4552"/>
+                </a:solidFill>
+              </a:rPr>
+              <a:t>Oversells well below the baseline</a:t>
+            </a:r>
+            <a:endParaRPr lang="en-US" sz="1300" dirty="0"/>
+          </a:p>
+          <a:p>
+            <a:pPr marL="177800" indent="-177800">
+              <a:spcAft>
+                <a:spcPts val="500"/>
+              </a:spcAft>
+              <a:buSzPct val="100000"/>
+              <a:buChar char="•"/>
+            </a:pPr>
+            <a:r>
+              <a:rPr lang="en-US" sz="1300" dirty="0">
+                <a:solidFill>
+                  <a:srgbClr val="3D4552"/>
+                </a:solidFill>
+              </a:rPr>
+              <a:t>eMAG seller cancellation rate inside eMAG's threshold</a:t>
+            </a:r>
+            <a:endParaRPr lang="en-US" sz="1300" dirty="0"/>
+          </a:p>
+          <a:p>
+            <a:pPr marL="177800" indent="-177800">
+              <a:spcAft>
+                <a:spcPts val="500"/>
+              </a:spcAft>
+              <a:buSzPct val="100000"/>
+              <a:buChar char="•"/>
+            </a:pPr>
+            <a:r>
+              <a:rPr lang="en-US" sz="1300" dirty="0">
+                <a:solidFill>
+                  <a:srgbClr val="3D4552"/>
+                </a:solidFill>
+              </a:rPr>
+              <a:t>Oldest open review item under 30 min in business hours</a:t>
+            </a:r>
+            <a:endParaRPr lang="en-US" sz="1300" dirty="0"/>
+          </a:p>
+        </p:txBody>
+      </p:sp>
+      <p:sp>
+        <p:nvSpPr>
+          <p:cNvPr id="33" name="Slide Number Placeholder 0"/>
+          <p:cNvSpPr>
+            <a:spLocks noGrp="1"/>
+          </p:cNvSpPr>
+          <p:nvPr>
+            <p:ph type="sldNum" sz="quarter" idx="4294967295"/>
+          </p:nvPr>
+        </p:nvSpPr>
+        <p:spPr>
+          <a:xfrm>
+            <a:off x="11183112" y="6446520"/>
+            <a:ext cx="457200" cy="228600"/>
+          </a:xfrm>
+          <a:prstGeom prst="rect">
+            <a:avLst/>
+          </a:prstGeom>
+          <a:extLst>
+            <a:ext uri="{C572A759-6A51-4108-AA02-DFA0A04FC94B}">
+              <ma14:wrappingTextBoxFlag xmlns="" xmlns:ma14="http://schemas.microsoft.com/office/mac/drawingml/2011/main" val="0"/>
+            </a:ext>
+          </a:extLst>
+        </p:spPr>
+        <p:txBody>
+          <a:bodyPr lIns="0" tIns="0" rIns="0" bIns="0"/>
+          <a:lstStyle>
+            <a:lvl1pPr>
+              <a:defRPr sz="1000">
+                <a:solidFill>
+                  <a:srgbClr val="8A93A1"/>
+                </a:solidFill>
+              </a:defRPr>
+            </a:lvl1pPr>
+          </a:lstStyle>
+          <a:p>
+            <a:pPr algn="r"/>
+            <a:fld id="{F7021451-1387-4CA6-816F-3879F97B5CBC}" type="slidenum">
+              <a:rPr lang="en-US" b="0"/>
+              <a:t>20</a:t>
+            </a:fld>
+            <a:endParaRPr lang="en-US"/>
+          </a:p>
+        </p:txBody>
+      </p:sp>
+    </p:spTree>
+  </p:cSld>
+  <p:clrMapOvr>
+    <a:masterClrMapping/>
+  </p:clrMapOvr>
+</p:sld>
+</file>
+
+<file path=ppt/slides/slide29.xml><?xml version="1.0" encoding="utf-8"?>
+<p:sld xmlns:a="http://schemas.openxmlformats.org/drawingml/2006/main" xmlns:p="http://schemas.openxmlformats.org/presentationml/2006/main" xmlns:r="http://schemas.openxmlformats.org/officeDocument/2006/relationships">
+  <p:cSld>
+    <p:spTree>
+      <p:nvGrpSpPr>
+        <p:cNvPr id="2" name=""/>
+        <p:cNvGrpSpPr/>
+        <p:nvPr/>
+      </p:nvGrpSpPr>
+      <p:grpSpPr/>
+      <p:sp>
+        <p:nvSpPr>
+          <p:cNvPr id="3" name="Text 0"/>
+          <p:cNvSpPr>
+            <a:spLocks noGrp="1"/>
+          </p:cNvSpPr>
+          <p:nvPr>
+            <p:ph type="body" idx="100" hasCustomPrompt="1"/>
+          </p:nvPr>
+        </p:nvSpPr>
+        <p:spPr>
+          <a:xfrm>
+            <a:off x="548640" y="384048"/>
+            <a:ext cx="8229600" cy="237744"/>
+          </a:xfrm>
+          <a:prstGeom prst="rect">
+            <a:avLst/>
+          </a:prstGeom>
+          <a:noFill/>
+          <a:ln/>
+        </p:spPr>
+        <p:txBody>
+          <a:bodyPr wrap="square" lIns="0" tIns="0" rIns="0" bIns="0" rtlCol="0" anchor="t"/>
+          <a:lstStyle/>
+          <a:p>
+            <a:pPr marL="0" indent="0" algn="l">
+              <a:buNone/>
+            </a:pPr>
+            <a:r>
+              <a:rPr lang="en-US" sz="1100" b="1" dirty="0">
+                <a:solidFill>
+                  <a:schemeClr val="tx2"/>
+                </a:solidFill>
+                <a:latin typeface="Courier New" pitchFamily="34" charset="0"/>
+                <a:ea typeface="Courier New" pitchFamily="34" charset="-122"/>
+                <a:cs typeface="Courier New" pitchFamily="34" charset="-120"/>
+              </a:rPr>
+              <a:t>BACKUP</a:t>
+            </a:r>
+            <a:endParaRPr lang="en-US" sz="1100" dirty="0"/>
+          </a:p>
+        </p:txBody>
+      </p:sp>
+      <p:sp>
+        <p:nvSpPr>
+          <p:cNvPr id="4" name="Text 0"/>
+          <p:cNvSpPr>
+            <a:spLocks noGrp="1"/>
+          </p:cNvSpPr>
+          <p:nvPr>
+            <p:ph type="title" idx="101" hasCustomPrompt="1"/>
+          </p:nvPr>
+        </p:nvSpPr>
+        <p:spPr>
+          <a:xfrm>
+            <a:off x="548640" y="621792"/>
+            <a:ext cx="11094415" cy="640080"/>
+          </a:xfrm>
+          <a:prstGeom prst="rect">
+            <a:avLst/>
+          </a:prstGeom>
+          <a:noFill/>
+          <a:ln/>
+        </p:spPr>
+        <p:txBody>
+          <a:bodyPr wrap="square" lIns="0" tIns="0" rIns="0" bIns="0" rtlCol="0" anchor="t"/>
+          <a:lstStyle/>
+          <a:p>
+            <a:pPr marL="0" indent="0" algn="l">
+              <a:buNone/>
+            </a:pPr>
+            <a:r>
+              <a:rPr lang="en-US" sz="3200" b="1" dirty="0">
+                <a:solidFill>
+                  <a:schemeClr val="tx1"/>
+                </a:solidFill>
+              </a:rPr>
+              <a:t>Details for questions</a:t>
+            </a:r>
+            <a:endParaRPr lang="en-US" sz="3200" dirty="0"/>
+          </a:p>
+        </p:txBody>
+      </p:sp>
+      <p:sp>
+        <p:nvSpPr>
+          <p:cNvPr id="5" name="Text 19"/>
+          <p:cNvSpPr txBox="1"/>
+          <p:nvPr/>
+        </p:nvSpPr>
+        <p:spPr>
+          <a:xfrm>
+            <a:off x="548640" y="1554480"/>
+            <a:ext cx="5394960" cy="3291840"/>
+          </a:xfrm>
+          <a:prstGeom prst="rect">
+            <a:avLst/>
+          </a:prstGeom>
+          <a:noFill/>
+          <a:ln/>
+        </p:spPr>
+        <p:txBody>
+          <a:bodyPr wrap="square" lIns="0" tIns="0" rIns="0" bIns="0" rtlCol="0" anchor="t"/>
+          <a:lstStyle/>
+          <a:p>
+            <a:pPr marL="177800" indent="-177800">
+              <a:spcAft>
+                <a:spcPts val="500"/>
+              </a:spcAft>
+              <a:buSzPct val="100000"/>
+              <a:buChar char="•"/>
+            </a:pPr>
+            <a:r>
+              <a:rPr lang="en-US" sz="1300" b="1" dirty="0">
+                <a:solidFill>
+                  <a:srgbClr val="3D4552"/>
+                </a:solidFill>
+              </a:rPr>
+              <a:t>An eMAG order: notify, read, reserve, acknowledge</a:t>
+            </a:r>
+            <a:endParaRPr lang="en-US" sz="1300" dirty="0"/>
+          </a:p>
+          <a:p>
+            <a:pPr marL="177800" indent="-177800">
+              <a:spcAft>
+                <a:spcPts val="500"/>
+              </a:spcAft>
+              <a:buSzPct val="100000"/>
+              <a:buChar char="•"/>
+            </a:pPr>
+            <a:r>
+              <a:rPr lang="en-US" sz="1300" b="1" dirty="0">
+                <a:solidFill>
+                  <a:srgbClr val="3D4552"/>
+                </a:solidFill>
+              </a:rPr>
+              <a:t>Retries and partial failures</a:t>
+            </a:r>
+            <a:endParaRPr lang="en-US" sz="1300" dirty="0"/>
+          </a:p>
+          <a:p>
+            <a:pPr marL="177800" indent="-177800">
+              <a:spcAft>
+                <a:spcPts val="500"/>
+              </a:spcAft>
+              <a:buSzPct val="100000"/>
+              <a:buChar char="•"/>
+            </a:pPr>
+            <a:r>
+              <a:rPr lang="en-US" sz="1300" b="1" dirty="0">
+                <a:solidFill>
+                  <a:srgbClr val="3D4552"/>
+                </a:solidFill>
+              </a:rPr>
+              <a:t>Idempotency and security</a:t>
+            </a:r>
+            <a:endParaRPr lang="en-US" sz="1300" dirty="0"/>
+          </a:p>
+          <a:p>
+            <a:pPr marL="177800" indent="-177800">
+              <a:spcAft>
+                <a:spcPts val="500"/>
+              </a:spcAft>
+              <a:buSzPct val="100000"/>
+              <a:buChar char="•"/>
+            </a:pPr>
+            <a:r>
+              <a:rPr lang="en-US" sz="1300" b="1" dirty="0">
+                <a:solidFill>
+                  <a:srgbClr val="3D4552"/>
+                </a:solidFill>
+              </a:rPr>
+              <a:t>Observability: what on-call looks at</a:t>
+            </a:r>
+            <a:endParaRPr lang="en-US" sz="1300" dirty="0"/>
+          </a:p>
+          <a:p>
+            <a:pPr marL="177800" indent="-177800">
+              <a:spcAft>
+                <a:spcPts val="500"/>
+              </a:spcAft>
+              <a:buSzPct val="100000"/>
+              <a:buChar char="•"/>
+            </a:pPr>
+            <a:r>
+              <a:rPr lang="en-US" sz="1300" b="1" dirty="0">
+                <a:solidFill>
+                  <a:srgbClr val="3D4552"/>
+                </a:solidFill>
+              </a:rPr>
+              <a:t>Scale: measured, and where it breaks first</a:t>
+            </a:r>
+            <a:endParaRPr lang="en-US" sz="1300" dirty="0"/>
+          </a:p>
+          <a:p>
+            <a:pPr marL="177800" indent="-177800">
+              <a:spcAft>
+                <a:spcPts val="500"/>
+              </a:spcAft>
+              <a:buSzPct val="100000"/>
+              <a:buChar char="•"/>
+            </a:pPr>
+            <a:r>
+              <a:rPr lang="en-US" sz="1300" b="1" dirty="0">
+                <a:solidFill>
+                  <a:srgbClr val="3D4552"/>
+                </a:solidFill>
+              </a:rPr>
+              <a:t>Trade-offs and limitations</a:t>
+            </a:r>
+            <a:endParaRPr lang="en-US" sz="1300" dirty="0"/>
+          </a:p>
+        </p:txBody>
+      </p:sp>
+      <p:sp>
+        <p:nvSpPr>
+          <p:cNvPr id="6" name="Text 19"/>
+          <p:cNvSpPr txBox="1"/>
+          <p:nvPr/>
+        </p:nvSpPr>
+        <p:spPr>
+          <a:xfrm>
+            <a:off x="6217920" y="1554480"/>
+            <a:ext cx="5394960" cy="3291840"/>
+          </a:xfrm>
+          <a:prstGeom prst="rect">
+            <a:avLst/>
+          </a:prstGeom>
+          <a:noFill/>
+          <a:ln/>
+        </p:spPr>
+        <p:txBody>
+          <a:bodyPr wrap="square" lIns="0" tIns="0" rIns="0" bIns="0" rtlCol="0" anchor="t"/>
+          <a:lstStyle/>
+          <a:p>
+            <a:pPr marL="177800" indent="-177800">
+              <a:spcAft>
+                <a:spcPts val="500"/>
+              </a:spcAft>
+              <a:buSzPct val="100000"/>
+              <a:buChar char="•"/>
+            </a:pPr>
+            <a:r>
+              <a:rPr lang="en-US" sz="1300" b="1" dirty="0">
+                <a:solidFill>
+                  <a:srgbClr val="3D4552"/>
+                </a:solidFill>
+              </a:rPr>
+              <a:t>Rolling it out</a:t>
+            </a:r>
+            <a:endParaRPr lang="en-US" sz="1300" dirty="0"/>
+          </a:p>
+          <a:p>
+            <a:pPr marL="177800" indent="-177800">
+              <a:spcAft>
+                <a:spcPts val="500"/>
+              </a:spcAft>
+              <a:buSzPct val="100000"/>
+              <a:buChar char="•"/>
+            </a:pPr>
+            <a:r>
+              <a:rPr lang="en-US" sz="1300" b="1" dirty="0">
+                <a:solidFill>
+                  <a:srgbClr val="3D4552"/>
+                </a:solidFill>
+              </a:rPr>
+              <a:t>The dashboard: live map</a:t>
+            </a:r>
+            <a:endParaRPr lang="en-US" sz="1300" dirty="0"/>
+          </a:p>
+          <a:p>
+            <a:pPr marL="177800" indent="-177800">
+              <a:spcAft>
+                <a:spcPts val="500"/>
+              </a:spcAft>
+              <a:buSzPct val="100000"/>
+              <a:buChar char="•"/>
+            </a:pPr>
+            <a:r>
+              <a:rPr lang="en-US" sz="1300" b="1" dirty="0">
+                <a:solidFill>
+                  <a:srgbClr val="3D4552"/>
+                </a:solidFill>
+              </a:rPr>
+              <a:t>The review queue and Flow analytics</a:t>
+            </a:r>
+            <a:endParaRPr lang="en-US" sz="1300" dirty="0"/>
+          </a:p>
+          <a:p>
+            <a:pPr marL="177800" indent="-177800">
+              <a:spcAft>
+                <a:spcPts val="500"/>
+              </a:spcAft>
+              <a:buSzPct val="100000"/>
+              <a:buChar char="•"/>
+            </a:pPr>
+            <a:r>
+              <a:rPr lang="en-US" sz="1300" b="1" dirty="0">
+                <a:solidFill>
+                  <a:srgbClr val="3D4552"/>
+                </a:solidFill>
+              </a:rPr>
+              <a:t>The three mock systems</a:t>
+            </a:r>
+            <a:endParaRPr lang="en-US" sz="1300" dirty="0"/>
+          </a:p>
+          <a:p>
+            <a:pPr marL="177800" indent="-177800">
+              <a:spcAft>
+                <a:spcPts val="500"/>
+              </a:spcAft>
+              <a:buSzPct val="100000"/>
+              <a:buChar char="•"/>
+            </a:pPr>
+            <a:r>
+              <a:rPr lang="en-US" sz="1300" b="1" dirty="0">
+                <a:solidFill>
+                  <a:srgbClr val="3D4552"/>
+                </a:solidFill>
+              </a:rPr>
+              <a:t>Order and review item states</a:t>
+            </a:r>
+            <a:endParaRPr lang="en-US" sz="1300" dirty="0"/>
+          </a:p>
+          <a:p>
+            <a:pPr marL="177800" indent="-177800">
+              <a:spcAft>
+                <a:spcPts val="500"/>
+              </a:spcAft>
+              <a:buSzPct val="100000"/>
+              <a:buChar char="•"/>
+            </a:pPr>
+            <a:r>
+              <a:rPr lang="en-US" sz="1300" b="1" dirty="0">
+                <a:solidFill>
+                  <a:srgbClr val="3D4552"/>
+                </a:solidFill>
+              </a:rPr>
+              <a:t>Component map</a:t>
+            </a:r>
+            <a:endParaRPr lang="en-US" sz="1300" dirty="0"/>
+          </a:p>
+        </p:txBody>
+      </p:sp>
+      <p:sp>
+        <p:nvSpPr>
+          <p:cNvPr id="7" name="Slide Number Placeholder 0"/>
+          <p:cNvSpPr>
+            <a:spLocks noGrp="1"/>
+          </p:cNvSpPr>
+          <p:nvPr>
+            <p:ph type="sldNum" sz="quarter" idx="4294967295"/>
+          </p:nvPr>
+        </p:nvSpPr>
+        <p:spPr>
+          <a:xfrm>
+            <a:off x="11183112" y="6446520"/>
+            <a:ext cx="457200" cy="228600"/>
+          </a:xfrm>
+          <a:prstGeom prst="rect">
+            <a:avLst/>
+          </a:prstGeom>
+          <a:extLst>
+            <a:ext uri="{C572A759-6A51-4108-AA02-DFA0A04FC94B}">
+              <ma14:wrappingTextBoxFlag xmlns="" xmlns:ma14="http://schemas.microsoft.com/office/mac/drawingml/2011/main" val="0"/>
+            </a:ext>
+          </a:extLst>
+        </p:spPr>
+        <p:txBody>
+          <a:bodyPr lIns="0" tIns="0" rIns="0" bIns="0"/>
+          <a:lstStyle>
+            <a:lvl1pPr>
+              <a:defRPr sz="1000">
+                <a:solidFill>
+                  <a:srgbClr val="8A93A1"/>
+                </a:solidFill>
+              </a:defRPr>
+            </a:lvl1pPr>
+          </a:lstStyle>
+          <a:p>
+            <a:pPr algn="r"/>
+            <a:fld id="{F7021451-1387-4CA6-816F-3879F97B5CBC}" type="slidenum">
+              <a:rPr lang="en-US" b="0"/>
+              <a:t>22</a:t>
             </a:fld>
             <a:endParaRPr lang="en-US"/>
           </a:p>
@@ -22034,7 +24251,7 @@
           </a:prstGeom>
           <a:extLst>
             <a:ext uri="{C572A759-6A51-4108-AA02-DFA0A04FC94B}">
-              <ma14:wrappingTextBoxFlag xmlns:ma14="http://schemas.microsoft.com/office/mac/drawingml/2011/main" xmlns="" val="0"/>
+              <ma14:wrappingTextBoxFlag xmlns="" xmlns:ma14="http://schemas.microsoft.com/office/mac/drawingml/2011/main" val="0"/>
             </a:ext>
           </a:extLst>
         </p:spPr>
@@ -24743,7 +26960,7 @@
           </a:prstGeom>
           <a:extLst>
             <a:ext uri="{C572A759-6A51-4108-AA02-DFA0A04FC94B}">
-              <ma14:wrappingTextBoxFlag xmlns:ma14="http://schemas.microsoft.com/office/mac/drawingml/2011/main" xmlns="" val="0"/>
+              <ma14:wrappingTextBoxFlag xmlns="" xmlns:ma14="http://schemas.microsoft.com/office/mac/drawingml/2011/main" val="0"/>
             </a:ext>
           </a:extLst>
         </p:spPr>
@@ -25595,7 +27812,7 @@
           </a:prstGeom>
           <a:extLst>
             <a:ext uri="{C572A759-6A51-4108-AA02-DFA0A04FC94B}">
-              <ma14:wrappingTextBoxFlag xmlns:ma14="http://schemas.microsoft.com/office/mac/drawingml/2011/main" xmlns="" val="0"/>
+              <ma14:wrappingTextBoxFlag xmlns="" xmlns:ma14="http://schemas.microsoft.com/office/mac/drawingml/2011/main" val="0"/>
             </a:ext>
           </a:extLst>
         </p:spPr>
@@ -27619,7 +29836,7 @@
           </a:prstGeom>
           <a:extLst>
             <a:ext uri="{C572A759-6A51-4108-AA02-DFA0A04FC94B}">
-              <ma14:wrappingTextBoxFlag xmlns:ma14="http://schemas.microsoft.com/office/mac/drawingml/2011/main" xmlns="" val="0"/>
+              <ma14:wrappingTextBoxFlag xmlns="" xmlns:ma14="http://schemas.microsoft.com/office/mac/drawingml/2011/main" val="0"/>
             </a:ext>
           </a:extLst>
         </p:spPr>
@@ -27706,7 +29923,7 @@
                 <a:ea typeface="Courier New" pitchFamily="34" charset="-122"/>
                 <a:cs typeface="Courier New" pitchFamily="34" charset="-120"/>
               </a:rPr>
-              <a:t>HOW IT WORKS</a:t>
+              <a:t>BACKUP · HOW IT WORKS</a:t>
             </a:r>
             <a:endParaRPr lang="en-US" sz="1100" dirty="0"/>
           </a:p>
@@ -28763,7 +30980,7 @@
           </a:prstGeom>
           <a:extLst>
             <a:ext uri="{C572A759-6A51-4108-AA02-DFA0A04FC94B}">
-              <ma14:wrappingTextBoxFlag xmlns:ma14="http://schemas.microsoft.com/office/mac/drawingml/2011/main" xmlns="" val="0"/>
+              <ma14:wrappingTextBoxFlag xmlns="" xmlns:ma14="http://schemas.microsoft.com/office/mac/drawingml/2011/main" val="0"/>
             </a:ext>
           </a:extLst>
         </p:spPr>
@@ -31719,7 +33936,7 @@
           </a:prstGeom>
           <a:extLst>
             <a:ext uri="{C572A759-6A51-4108-AA02-DFA0A04FC94B}">
-              <ma14:wrappingTextBoxFlag xmlns:ma14="http://schemas.microsoft.com/office/mac/drawingml/2011/main" xmlns="" val="0"/>
+              <ma14:wrappingTextBoxFlag xmlns="" xmlns:ma14="http://schemas.microsoft.com/office/mac/drawingml/2011/main" val="0"/>
             </a:ext>
           </a:extLst>
         </p:spPr>
@@ -32459,7 +34676,7 @@
           </a:prstGeom>
           <a:extLst>
             <a:ext uri="{C572A759-6A51-4108-AA02-DFA0A04FC94B}">
-              <ma14:wrappingTextBoxFlag xmlns:ma14="http://schemas.microsoft.com/office/mac/drawingml/2011/main" xmlns="" val="0"/>
+              <ma14:wrappingTextBoxFlag xmlns="" xmlns:ma14="http://schemas.microsoft.com/office/mac/drawingml/2011/main" val="0"/>
             </a:ext>
           </a:extLst>
         </p:spPr>

--- a/docs/presentation/ADB-Glue-Service.pptx
+++ b/docs/presentation/ADB-Glue-Service.pptx
@@ -5,7 +5,7 @@
     <p:sldMasterId id="2147483648" r:id="rId1"/>
   </p:sldMasterIdLst>
   <p:notesMasterIdLst>
-    <p:notesMasterId r:id="rId27"/>
+    <p:notesMasterId r:id="rId16"/>
   </p:notesMasterIdLst>
   <p:sldIdLst>
     <p:sldId id="256" r:id="rId2"/>
@@ -14,14 +14,14 @@
     <p:sldId id="259" r:id="rId5"/>
     <p:sldId id="260" r:id="rId6"/>
     <p:sldId id="261" r:id="rId7"/>
-    <p:sldId id="263" r:id="rId9"/>
-    <p:sldId id="264" r:id="rId10"/>
-    <p:sldId id="281" r:id="rId32"/>
-    <p:sldId id="282" r:id="rId33"/>
-    <p:sldId id="269" r:id="rId15"/>
-    <p:sldId id="273" r:id="rId19"/>
-    <p:sldId id="283" r:id="rId34"/>
-    <p:sldId id="276" r:id="rId22"/>
+    <p:sldId id="263" r:id="rId8"/>
+    <p:sldId id="264" r:id="rId9"/>
+    <p:sldId id="281" r:id="rId10"/>
+    <p:sldId id="282" r:id="rId11"/>
+    <p:sldId id="269" r:id="rId12"/>
+    <p:sldId id="283" r:id="rId14"/>
+    <p:sldId id="273" r:id="rId13"/>
+    <p:sldId id="276" r:id="rId15"/>
   </p:sldIdLst>
   <p:sldSz cx="12192000" cy="6858000"/>
   <p:notesSz cx="6858000" cy="12192000"/>
@@ -140,41 +140,32 @@
         <p14:section name="How it works" id="{53C2E35C-3B1F-E928-48AA-167E6E5E25DB}">
           <p14:sldIdLst>
             <p14:sldId id="261"/>
-            <p14:sldId id="262"/>
             <p14:sldId id="263"/>
           </p14:sldIdLst>
         </p14:section>
         <p14:section name="Robustness" id="{1E63B782-D108-BAA6-B8EA-D74E901FB329}">
           <p14:sldIdLst>
             <p14:sldId id="264"/>
-            <p14:sldId id="265"/>
-            <p14:sldId id="266"/>
+            <p14:sldId id="281"/>
+            <p14:sldId id="282"/>
           </p14:sldIdLst>
         </p14:section>
         <p14:section name="Operations" id="{562B87B7-2E99-F8BC-5F1B-B6615F3CA32A}">
           <p14:sldIdLst>
-            <p14:sldId id="267"/>
-            <p14:sldId id="268"/>
             <p14:sldId id="269"/>
           </p14:sldIdLst>
         </p14:section>
         <p14:section name="Product" id="{777E4464-BF30-58F2-E9DA-D0B006C9D292}">
-          <p14:sldIdLst>
-            <p14:sldId id="270"/>
-            <p14:sldId id="271"/>
-            <p14:sldId id="272"/>
-          </p14:sldIdLst>
+          <p14:sldIdLst/>
         </p14:section>
         <p14:section name="Process" id="{C9654AFD-1C8B-09C9-4A40-75DED1745131}">
           <p14:sldIdLst>
             <p14:sldId id="273"/>
-            <p14:sldId id="274"/>
+            <p14:sldId id="283"/>
           </p14:sldIdLst>
         </p14:section>
         <p14:section name="Rollout" id="{EFB08FCA-4056-F039-CCF3-DCE1FD5063A9}">
-          <p14:sldIdLst>
-            <p14:sldId id="275"/>
-          </p14:sldIdLst>
+          <p14:sldIdLst/>
         </p14:section>
         <p14:section name="Demo" id="{43B3BE5B-5109-6755-45C3-98B2F8A1CBBC}">
           <p14:sldIdLst>
@@ -182,12 +173,7 @@
           </p14:sldIdLst>
         </p14:section>
         <p14:section name="Backup" id="{A68109D1-000A-3FC1-1EF8-8A883E8719E3}">
-          <p14:sldIdLst>
-            <p14:sldId id="277"/>
-            <p14:sldId id="278"/>
-            <p14:sldId id="279"/>
-            <p14:sldId id="280"/>
-          </p14:sldIdLst>
+          <p14:sldIdLst/>
         </p14:section>
       </p14:sectionLst>
     </p:ext>
@@ -368,12 +354,27 @@
           <a:lstStyle/>
           <a:p>
             <a:r>
-              <a:rPr lang="en-US" dirty="0"/>
-              <a:t>- One line about me, then the plan: about 35 minutes of slides with a 5-minute live demo, then the code and your questions.
-- The scenario is my choice: a Romanian electronics reseller with its own Adobe Commerce shop, the eMAG Marketplace, and one warehouse in Bucharest.
-- The brief was a glue service that keeps systems in sync and handles conflicts, retries and partial failures.
-- The picture on this slide is the whole idea: every order reaches the warehouse once, the warehouse's true stock goes back to both channels, and a person decides what is not safe to decide automatically.
-- Everything runs locally with Docker Compose. The shop, eMAG and the warehouse are mocks shaped like the real APIs.</a:t>
+              <a:t>- One line about me, then the plan: about 20 minutes of slides, then a live demo, then the code and your questions.</a:t>
+            </a:r>
+          </a:p>
+          <a:p>
+            <a:r>
+              <a:t>- The scenario is my choice: a Romanian electronics reseller with its own Adobe Commerce shop, the eMAG Marketplace, and one warehouse in Bucharest.</a:t>
+            </a:r>
+          </a:p>
+          <a:p>
+            <a:r>
+              <a:t>- The brief was a glue service that keeps systems in sync and handles conflicts, retries and partial failures.</a:t>
+            </a:r>
+          </a:p>
+          <a:p>
+            <a:r>
+              <a:t>- The picture on this slide is the whole idea: every order reaches the warehouse once, the warehouse's true stock goes back to both channels, and a person decides what is not safe to decide automatically.</a:t>
+            </a:r>
+          </a:p>
+          <a:p>
+            <a:r>
+              <a:t>- Everything runs locally with Docker Compose. The shop, eMAG and the warehouse are mocks shaped like the real APIs.</a:t>
             </a:r>
           </a:p>
         </p:txBody>
@@ -407,6 +408,307 @@
         <p14:creationId xmlns:p14="http://schemas.microsoft.com/office/powerpoint/2010/main" val="1024086991"/>
       </p:ext>
     </p:extLst>
+  </p:cSld>
+  <p:clrMapOvr>
+    <a:masterClrMapping/>
+  </p:clrMapOvr>
+</p:notes>
+</file>
+
+<file path=ppt/notesSlides/notesSlide10.xml><?xml version="1.0" encoding="utf-8"?>
+<p:notes xmlns:a="http://schemas.openxmlformats.org/drawingml/2006/main" xmlns:r="http://schemas.openxmlformats.org/officeDocument/2006/relationships" xmlns:p="http://schemas.openxmlformats.org/presentationml/2006/main">
+  <p:cSld>
+    <p:spTree>
+      <p:nvGrpSpPr>
+        <p:cNvPr id="1" name=""/>
+        <p:cNvGrpSpPr/>
+        <p:nvPr/>
+      </p:nvGrpSpPr>
+      <p:grpSpPr>
+        <a:xfrm>
+          <a:off x="0" y="0"/>
+          <a:ext cx="0" cy="0"/>
+          <a:chOff x="0" y="0"/>
+          <a:chExt cx="0" cy="0"/>
+        </a:xfrm>
+      </p:grpSpPr>
+      <p:sp>
+        <p:nvSpPr>
+          <p:cNvPr id="3" name="Notes Placeholder 2"/>
+          <p:cNvSpPr>
+            <a:spLocks noGrp="1"/>
+          </p:cNvSpPr>
+          <p:nvPr>
+            <p:ph type="body" idx="1"/>
+          </p:nvPr>
+        </p:nvSpPr>
+        <p:spPr/>
+        <p:txBody>
+          <a:bodyPr/>
+          <a:lstStyle/>
+          <a:p>
+            <a:r>
+              <a:t>Measured, not guessed: scripts/load_probe.py sends signed shop orders through the inbox and the real worker loop in-process on this laptop. About 527 orders/s with 10 worker slots; p50 0.31 s and p95 0.53 s at 300 orders, mostly queue wait. The first probe found the production loop capped at 20 orders/s because it slept whenever every slot was busy; the fix claims the next event as soon as a slot frees.</a:t>
+            </a:r>
+          </a:p>
+          <a:p>
+            <a:r>
+              <a:t>The first real limit is eMAG's rate limit. After that: coalesced stock pushes, a circuit breaker, then Postgres with SKIP LOCKED and workers partitioned by order id.</a:t>
+            </a:r>
+          </a:p>
+          <a:p>
+            <a:r>
+              <a:t>Observability, shown live in the demo: the order timeline, the Flow page, and /metrics for a signed-in viewer. The alert rules, as sentences, are in the README.</a:t>
+            </a:r>
+          </a:p>
+        </p:txBody>
+      </p:sp>
+    </p:spTree>
+  </p:cSld>
+  <p:clrMapOvr>
+    <a:masterClrMapping/>
+  </p:clrMapOvr>
+</p:notes>
+</file>
+
+<file path=ppt/notesSlides/notesSlide11.xml><?xml version="1.0" encoding="utf-8"?>
+<p:notes xmlns:a="http://schemas.openxmlformats.org/drawingml/2006/main" xmlns:r="http://schemas.openxmlformats.org/officeDocument/2006/relationships" xmlns:p="http://schemas.openxmlformats.org/presentationml/2006/main">
+  <p:cSld>
+    <p:spTree>
+      <p:nvGrpSpPr>
+        <p:cNvPr id="1" name=""/>
+        <p:cNvGrpSpPr/>
+        <p:nvPr/>
+      </p:nvGrpSpPr>
+      <p:grpSpPr>
+        <a:xfrm>
+          <a:off x="0" y="0"/>
+          <a:ext cx="0" cy="0"/>
+          <a:chOff x="0" y="0"/>
+          <a:chExt cx="0" cy="0"/>
+        </a:xfrm>
+      </p:grpSpPr>
+      <p:sp>
+        <p:nvSpPr>
+          <p:cNvPr id="2" name="Slide Image Placeholder 1"/>
+          <p:cNvSpPr>
+            <a:spLocks noGrp="1" noRot="1" noChangeAspect="1"/>
+          </p:cNvSpPr>
+          <p:nvPr>
+            <p:ph type="sldImg"/>
+          </p:nvPr>
+        </p:nvSpPr>
+        <p:spPr/>
+      </p:sp>
+      <p:sp>
+        <p:nvSpPr>
+          <p:cNvPr id="3" name="Notes Placeholder 2"/>
+          <p:cNvSpPr>
+            <a:spLocks noGrp="1"/>
+          </p:cNvSpPr>
+          <p:nvPr>
+            <p:ph type="body" idx="1"/>
+          </p:nvPr>
+        </p:nvSpPr>
+        <p:spPr/>
+        <p:txBody>
+          <a:bodyPr/>
+          <a:lstStyle/>
+          <a:p>
+            <a:r>
+              <a:rPr lang="en-US" dirty="0"/>
+              <a:t>- The model runs locally in Ollama: qwen2.5:3b, downloaded once in the background, about 2 GB. Everything else works while it downloads; on a fresh clone the Assistant page says 'Downloading the local model, about 2 GB, one time' with a progress bar, and the triage and ask buttons say why they wait.
+- Each question starts with a block of live facts built in code: each system's state, what waits for a person by cause, the last hour's counts, a stock line for every product, and the orders that failed in the last hour. Then a tool loop over five read-only lookups: system health, a summary, the review items (their plain cause, never the stored reason text), one order with its timeline, and stock by product name. It runs at temperature 0, answers with product names and Bucharest time, and lists the lookups it used.
+- Honest about quality: a 3B model is often vague and sometimes wrong. The common questions were right in the last measured runs; answers still vary a little between runs.
+- Triage decides nothing and runs no tool loop. The rule is decided in code from the facts: for example, the warehouse is answering again, so retry; or the warehouse cannot cover this order, so cancel. The model only writes the explanation the operator reads.
+- The suggestion is kept only if it is one of the actions the item allows, and dropped if the reasoning talks about a different order; sentences that name internal tools or fields are dropped too. It is stored on the item, audited as triage_suggested, and it never acts.
+- Why a small local model: no key, no order data leaving the machine, no cost. The budgets exist for when this points at a paid model, and the daily budget follows the business day, so it resets at midnight in Bucharest. I would not lead with them.
+- Would I ship it? As an explainer, yes. As a decider, no: a stronger model could be given the open choice later, still behind a person.</a:t>
+            </a:r>
+          </a:p>
+        </p:txBody>
+      </p:sp>
+      <p:sp>
+        <p:nvSpPr>
+          <p:cNvPr id="4" name="Slide Number Placeholder 3"/>
+          <p:cNvSpPr>
+            <a:spLocks noGrp="1"/>
+          </p:cNvSpPr>
+          <p:nvPr>
+            <p:ph type="sldNum" sz="quarter" idx="10"/>
+          </p:nvPr>
+        </p:nvSpPr>
+        <p:spPr/>
+        <p:txBody>
+          <a:bodyPr/>
+          <a:lstStyle/>
+          <a:p>
+            <a:fld id="{F7021451-1387-4CA6-816F-3879F97B5CBC}" type="slidenum">
+              <a:rPr lang="en-US"/>
+              <a:t>11</a:t>
+            </a:fld>
+            <a:endParaRPr lang="en-US"/>
+          </a:p>
+        </p:txBody>
+      </p:sp>
+    </p:spTree>
+    <p:extLst>
+      <p:ext uri="{BB962C8B-B14F-4D97-AF65-F5344CB8AC3E}">
+        <p14:creationId xmlns:p14="http://schemas.microsoft.com/office/powerpoint/2010/main" val="1024086991"/>
+      </p:ext>
+    </p:extLst>
+  </p:cSld>
+  <p:clrMapOvr>
+    <a:masterClrMapping/>
+  </p:clrMapOvr>
+</p:notes>
+</file>
+
+<file path=ppt/notesSlides/notesSlide12.xml><?xml version="1.0" encoding="utf-8"?>
+<p:notes xmlns:a="http://schemas.openxmlformats.org/drawingml/2006/main" xmlns:r="http://schemas.openxmlformats.org/officeDocument/2006/relationships" xmlns:p="http://schemas.openxmlformats.org/presentationml/2006/main">
+  <p:cSld>
+    <p:spTree>
+      <p:nvGrpSpPr>
+        <p:cNvPr id="1" name=""/>
+        <p:cNvGrpSpPr/>
+        <p:nvPr/>
+      </p:nvGrpSpPr>
+      <p:grpSpPr>
+        <a:xfrm>
+          <a:off x="0" y="0"/>
+          <a:ext cx="0" cy="0"/>
+          <a:chOff x="0" y="0"/>
+          <a:chExt cx="0" cy="0"/>
+        </a:xfrm>
+      </p:grpSpPr>
+      <p:sp>
+        <p:nvSpPr>
+          <p:cNvPr id="2" name="Slide Image Placeholder 1"/>
+          <p:cNvSpPr>
+            <a:spLocks noGrp="1" noRot="1" noChangeAspect="1"/>
+          </p:cNvSpPr>
+          <p:nvPr>
+            <p:ph type="sldImg"/>
+          </p:nvPr>
+        </p:nvSpPr>
+        <p:spPr/>
+      </p:sp>
+      <p:sp>
+        <p:nvSpPr>
+          <p:cNvPr id="3" name="Notes Placeholder 2"/>
+          <p:cNvSpPr>
+            <a:spLocks noGrp="1"/>
+          </p:cNvSpPr>
+          <p:nvPr>
+            <p:ph type="body" idx="1"/>
+          </p:nvPr>
+        </p:nvSpPr>
+        <p:spPr/>
+        <p:txBody>
+          <a:bodyPr/>
+          <a:lstStyle/>
+          <a:p>
+            <a:r>
+              <a:t>- This is the process, in my own words. I started from the customer and a scenario I could defend, and read the real delivery rules (at-least-once events, eMAG's acknowledge, batch results per item) before writing code.</a:t>
+            </a:r>
+          </a:p>
+          <a:p>
+            <a:r>
+              <a:t>- I agreed HTML mockups of every screen first, and they were the spec the interface was checked against.</a:t>
+            </a:r>
+          </a:p>
+          <a:p>
+            <a:r>
+              <a:t>- The sync core came first, then the console. Every task was reviewed by a separate AI reviewer that had not written it, and I read the findings.</a:t>
+            </a:r>
+          </a:p>
+          <a:p>
+            <a:r>
+              <a:t>- Then I tried to break it. A fresh review reproduced eight gaps in the core as failing tests. The load probe found the worker capped at 20 orders a second. The crash test stops Glue before each of 132 writes. A mutation check plants 18 bugs one at a time and the suite catches every one.</a:t>
+            </a:r>
+          </a:p>
+          <a:p>
+            <a:r>
+              <a:t>- I used AI heavily and say so: it wrote most of the code and ran most of the reviews. The decisions and the final checking were mine, and I can explain any line. The README's Use of AI section says the same.</a:t>
+            </a:r>
+          </a:p>
+        </p:txBody>
+      </p:sp>
+      <p:sp>
+        <p:nvSpPr>
+          <p:cNvPr id="4" name="Slide Number Placeholder 3"/>
+          <p:cNvSpPr>
+            <a:spLocks noGrp="1"/>
+          </p:cNvSpPr>
+          <p:nvPr>
+            <p:ph type="sldNum" sz="quarter" idx="10"/>
+          </p:nvPr>
+        </p:nvSpPr>
+        <p:spPr/>
+        <p:txBody>
+          <a:bodyPr/>
+          <a:lstStyle/>
+          <a:p>
+            <a:fld id="{F7021451-1387-4CA6-816F-3879F97B5CBC}" type="slidenum">
+              <a:rPr lang="en-US"/>
+              <a:t>12</a:t>
+            </a:fld>
+            <a:endParaRPr lang="en-US"/>
+          </a:p>
+        </p:txBody>
+      </p:sp>
+    </p:spTree>
+    <p:extLst>
+      <p:ext uri="{BB962C8B-B14F-4D97-AF65-F5344CB8AC3E}">
+        <p14:creationId xmlns:p14="http://schemas.microsoft.com/office/powerpoint/2010/main" val="1024086991"/>
+      </p:ext>
+    </p:extLst>
+  </p:cSld>
+  <p:clrMapOvr>
+    <a:masterClrMapping/>
+  </p:clrMapOvr>
+</p:notes>
+</file>
+
+<file path=ppt/notesSlides/notesSlide13.xml><?xml version="1.0" encoding="utf-8"?>
+<p:notes xmlns:a="http://schemas.openxmlformats.org/drawingml/2006/main" xmlns:r="http://schemas.openxmlformats.org/officeDocument/2006/relationships" xmlns:p="http://schemas.openxmlformats.org/presentationml/2006/main">
+  <p:cSld>
+    <p:spTree>
+      <p:nvGrpSpPr>
+        <p:cNvPr id="1" name=""/>
+        <p:cNvGrpSpPr/>
+        <p:nvPr/>
+      </p:nvGrpSpPr>
+      <p:grpSpPr>
+        <a:xfrm>
+          <a:off x="0" y="0"/>
+          <a:ext cx="0" cy="0"/>
+          <a:chOff x="0" y="0"/>
+          <a:chExt cx="0" cy="0"/>
+        </a:xfrm>
+      </p:grpSpPr>
+      <p:sp>
+        <p:nvSpPr>
+          <p:cNvPr id="3" name="Notes Placeholder 2"/>
+          <p:cNvSpPr>
+            <a:spLocks noGrp="1"/>
+          </p:cNvSpPr>
+          <p:nvPr>
+            <p:ph type="body" idx="1"/>
+          </p:nvPr>
+        </p:nvSpPr>
+        <p:spPr/>
+        <p:txBody>
+          <a:bodyPr/>
+          <a:lstStyle/>
+          <a:p>
+            <a:r>
+              <a:t>Rollout: shadow mode first, receiving and reading everything and sending nothing, compared daily with the staff's work; then shop stock, then eMAG stock, then orders. About a week per stage. Shadow mode and the stage switches are not built yet: each is a flag checked before Glue calls a system. Success after 30 days is measured, not felt. What the customer provides is in docs/customer-context.md; trade-offs and limitations are in the README.</a:t>
+            </a:r>
+          </a:p>
+        </p:txBody>
+      </p:sp>
+    </p:spTree>
   </p:cSld>
   <p:clrMapOvr>
     <a:masterClrMapping/>
@@ -459,14 +761,27 @@
           <a:lstStyle/>
           <a:p>
             <a:r>
-              <a:rPr lang="en-US" dirty="0"/>
-              <a:t>- The model runs locally in Ollama: qwen2.5:3b, downloaded once in the background, about 2 GB. Everything else works while it downloads; on a fresh clone the Assistant page says 'Downloading the local model, about 2 GB, one time' with a progress bar, and the triage and ask buttons say why they wait.
-- Each question starts with a block of live facts built in code: each system's state, what waits for a person by cause, the last hour's counts, a stock line for every product, and the orders that failed in the last hour. Then a tool loop over five read-only lookups: system health, a summary, the review items (their plain cause, never the stored reason text), one order with its timeline, and stock by product name. It runs at temperature 0, answers with product names and Bucharest time, and lists the lookups it used.
-- Honest about quality: a 3B model is often vague and sometimes wrong. The common questions were right in the last measured runs; answers still vary a little between runs.
-- Triage decides nothing and runs no tool loop. The rule is decided in code from the facts: for example, the warehouse is answering again, so retry; or the warehouse cannot cover this order, so cancel. The model only writes the explanation the operator reads.
-- The suggestion is kept only if it is one of the actions the item allows, and dropped if the reasoning talks about a different order; sentences that name internal tools or fields are dropped too. It is stored on the item, audited as triage_suggested, and it never acts.
-- Why a small local model: no key, no order data leaving the machine, no cost. The budgets exist for when this points at a paid model, and the daily budget follows the business day, so it resets at midnight in Bucharest. I would not lead with them.
-- Would I ship it? As an explainer, yes. As a decider, no: a stronger model could be given the open choice later, still behind a person.</a:t>
+              <a:t>- Switch to the browser. Follow docs/presentation/demo-script.md: Glue at :8000 signed in as admin, shop :8001, marketplace :8002, warehouse :8003.</a:t>
+            </a:r>
+          </a:p>
+          <a:p>
+            <a:r>
+              <a:t>- Say what is about to break before clicking. Keep each step under its time.</a:t>
+            </a:r>
+          </a:p>
+          <a:p>
+            <a:r>
+              <a:t>- If anything misbehaves: Demo controls, Turn every fault off. For a clean start: docker compose down, then docker volume rm glueservice_glue-data, then up. Never down -v: it also deletes the downloaded model.</a:t>
+            </a:r>
+          </a:p>
+          <a:p>
+            <a:r>
+              <a:t>- After the demo, offer the code: glue/router.py for order states, glue/retry.py for the policy, glue/reconciler.py for stock, glue/review.py and glue/settle.py for the queue, tests/conftest.py for how the tests run all four apps in one process.</a:t>
+            </a:r>
+          </a:p>
+          <a:p>
+            <a:r>
+              <a:t>- Timings, for me: live map 30 s, duplicate 30 s, outage 75 s, oversell 75 s, partial batch 40 s, timeline 30 s.</a:t>
             </a:r>
           </a:p>
         </p:txBody>
@@ -489,98 +804,6 @@
             <a:fld id="{F7021451-1387-4CA6-816F-3879F97B5CBC}" type="slidenum">
               <a:rPr lang="en-US"/>
               <a:t>14</a:t>
-            </a:fld>
-            <a:endParaRPr lang="en-US"/>
-          </a:p>
-        </p:txBody>
-      </p:sp>
-    </p:spTree>
-    <p:extLst>
-      <p:ext uri="{BB962C8B-B14F-4D97-AF65-F5344CB8AC3E}">
-        <p14:creationId xmlns:p14="http://schemas.microsoft.com/office/powerpoint/2010/main" val="1024086991"/>
-      </p:ext>
-    </p:extLst>
-  </p:cSld>
-  <p:clrMapOvr>
-    <a:masterClrMapping/>
-  </p:clrMapOvr>
-</p:notes>
-</file>
-
-<file path=ppt/notesSlides/notesSlide18.xml><?xml version="1.0" encoding="utf-8"?>
-<p:notes xmlns:a="http://schemas.openxmlformats.org/drawingml/2006/main" xmlns:r="http://schemas.openxmlformats.org/officeDocument/2006/relationships" xmlns:p="http://schemas.openxmlformats.org/presentationml/2006/main">
-  <p:cSld>
-    <p:spTree>
-      <p:nvGrpSpPr>
-        <p:cNvPr id="1" name=""/>
-        <p:cNvGrpSpPr/>
-        <p:nvPr/>
-      </p:nvGrpSpPr>
-      <p:grpSpPr>
-        <a:xfrm>
-          <a:off x="0" y="0"/>
-          <a:ext cx="0" cy="0"/>
-          <a:chOff x="0" y="0"/>
-          <a:chExt cx="0" cy="0"/>
-        </a:xfrm>
-      </p:grpSpPr>
-      <p:sp>
-        <p:nvSpPr>
-          <p:cNvPr id="2" name="Slide Image Placeholder 1"/>
-          <p:cNvSpPr>
-            <a:spLocks noGrp="1" noRot="1" noChangeAspect="1"/>
-          </p:cNvSpPr>
-          <p:nvPr>
-            <p:ph type="sldImg"/>
-          </p:nvPr>
-        </p:nvSpPr>
-        <p:spPr/>
-      </p:sp>
-      <p:sp>
-        <p:nvSpPr>
-          <p:cNvPr id="3" name="Notes Placeholder 2"/>
-          <p:cNvSpPr>
-            <a:spLocks noGrp="1"/>
-          </p:cNvSpPr>
-          <p:nvPr>
-            <p:ph type="body" idx="1"/>
-          </p:nvPr>
-        </p:nvSpPr>
-        <p:spPr/>
-        <p:txBody>
-          <a:bodyPr/>
-          <a:lstStyle/>
-          <a:p>
-            <a:r>
-              <a:rPr lang="en-US" dirty="0"/>
-              <a:t>- I treated this like a small customer engagement. First the requirement, then a scenario I could defend: Adobe Commerce plus eMAG plus one warehouse, with the real delivery rules researched before writing code (at-least-once events, eMAG's acknowledge, batch results per item).
-- Design first: HTML mockups of every dashboard screen and the three mocks were agreed before any code. They are the spec the UI was checked against.
-- A written plan with small tasks and acceptance checks, sync core first. Each task was built, then reviewed by someone who had not written it, with fix rounds until the review came back clean.
-- When the branch was feature-complete, an independent analysis looked at it fresh. It reproduced eight gaps in the sync core as failing tests: for example a ship notice with no retry path, a crash during a decision, stale review items, and an unsafe Retry-After. The hardening wave fixed each one test-first. The new load probe then found the worker loop capped at about 20 orders per second, which was fixed the same way.
-- Then a final whole-branch review and a last fix wave: plain-word reasons everywhere, Bucharest business days, an outage cause that covers only the warehouse, auto-retry only for outage items, a confirm before cancelling. Then browser QA at several screen widths and a run from a fresh clone, including the first-run model download. 245 backend and 223 frontend tests at the end.
-- A mutation check keeps the tests honest: 18 bugs planted one at a time (dedupe off, Retry-After uncapped, no per-order lock, event id left out of the signature, CSRF header not checked, and others), and the backend suite fails for each. The first version of that check missed two webhook rules; tests were added until every planted bug was caught.</a:t>
-            </a:r>
-          </a:p>
-        </p:txBody>
-      </p:sp>
-      <p:sp>
-        <p:nvSpPr>
-          <p:cNvPr id="4" name="Slide Number Placeholder 3"/>
-          <p:cNvSpPr>
-            <a:spLocks noGrp="1"/>
-          </p:cNvSpPr>
-          <p:nvPr>
-            <p:ph type="sldNum" sz="quarter" idx="10"/>
-          </p:nvPr>
-        </p:nvSpPr>
-        <p:spPr/>
-        <p:txBody>
-          <a:bodyPr/>
-          <a:lstStyle/>
-          <a:p>
-            <a:fld id="{F7021451-1387-4CA6-816F-3879F97B5CBC}" type="slidenum">
-              <a:rPr lang="en-US"/>
-              <a:t>18</a:t>
             </a:fld>
             <a:endParaRPr lang="en-US"/>
           </a:p>
@@ -690,259 +913,6 @@
 </p:notes>
 </file>
 
-<file path=ppt/notesSlides/notesSlide21.xml><?xml version="1.0" encoding="utf-8"?>
-<p:notes xmlns:a="http://schemas.openxmlformats.org/drawingml/2006/main" xmlns:r="http://schemas.openxmlformats.org/officeDocument/2006/relationships" xmlns:p="http://schemas.openxmlformats.org/presentationml/2006/main">
-  <p:cSld>
-    <p:spTree>
-      <p:nvGrpSpPr>
-        <p:cNvPr id="1" name=""/>
-        <p:cNvGrpSpPr/>
-        <p:nvPr/>
-      </p:nvGrpSpPr>
-      <p:grpSpPr>
-        <a:xfrm>
-          <a:off x="0" y="0"/>
-          <a:ext cx="0" cy="0"/>
-          <a:chOff x="0" y="0"/>
-          <a:chExt cx="0" cy="0"/>
-        </a:xfrm>
-      </p:grpSpPr>
-      <p:sp>
-        <p:nvSpPr>
-          <p:cNvPr id="2" name="Slide Image Placeholder 1"/>
-          <p:cNvSpPr>
-            <a:spLocks noGrp="1" noRot="1" noChangeAspect="1"/>
-          </p:cNvSpPr>
-          <p:nvPr>
-            <p:ph type="sldImg"/>
-          </p:nvPr>
-        </p:nvSpPr>
-        <p:spPr/>
-      </p:sp>
-      <p:sp>
-        <p:nvSpPr>
-          <p:cNvPr id="3" name="Notes Placeholder 2"/>
-          <p:cNvSpPr>
-            <a:spLocks noGrp="1"/>
-          </p:cNvSpPr>
-          <p:nvPr>
-            <p:ph type="body" idx="1"/>
-          </p:nvPr>
-        </p:nvSpPr>
-        <p:spPr/>
-        <p:txBody>
-          <a:bodyPr/>
-          <a:lstStyle/>
-          <a:p>
-            <a:r>
-              <a:rPr lang="en-US" dirty="0"/>
-              <a:t>- Switch to the browser. Follow docs/presentation/demo-script.md: Glue at :8000 signed in as admin, shop :8001, marketplace :8002, warehouse :8003.
-- Say what is about to break before clicking. Keep each step under its time.
-- If anything misbehaves: Demo controls, Turn every fault off. For a clean start: docker compose down, then docker volume rm glueservice_glue-data, then up. Never down -v: it also deletes the downloaded model.
-- After the demo, offer the code: glue/router.py for order states, glue/retry.py for the policy, glue/reconciler.py for stock, glue/review.py and glue/settle.py for the queue, tests/conftest.py for how the tests run all four apps in one process.</a:t>
-            </a:r>
-          </a:p>
-        </p:txBody>
-      </p:sp>
-      <p:sp>
-        <p:nvSpPr>
-          <p:cNvPr id="4" name="Slide Number Placeholder 3"/>
-          <p:cNvSpPr>
-            <a:spLocks noGrp="1"/>
-          </p:cNvSpPr>
-          <p:nvPr>
-            <p:ph type="sldNum" sz="quarter" idx="10"/>
-          </p:nvPr>
-        </p:nvSpPr>
-        <p:spPr/>
-        <p:txBody>
-          <a:bodyPr/>
-          <a:lstStyle/>
-          <a:p>
-            <a:fld id="{F7021451-1387-4CA6-816F-3879F97B5CBC}" type="slidenum">
-              <a:rPr lang="en-US"/>
-              <a:t>21</a:t>
-            </a:fld>
-            <a:endParaRPr lang="en-US"/>
-          </a:p>
-        </p:txBody>
-      </p:sp>
-    </p:spTree>
-    <p:extLst>
-      <p:ext uri="{BB962C8B-B14F-4D97-AF65-F5344CB8AC3E}">
-        <p14:creationId xmlns:p14="http://schemas.microsoft.com/office/powerpoint/2010/main" val="1024086991"/>
-      </p:ext>
-    </p:extLst>
-  </p:cSld>
-  <p:clrMapOvr>
-    <a:masterClrMapping/>
-  </p:clrMapOvr>
-</p:notes>
-</file>
-
-<file path=ppt/notesSlides/notesSlide26.xml><?xml version="1.0" encoding="utf-8"?>
-<p:notes xmlns:a="http://schemas.openxmlformats.org/drawingml/2006/main" xmlns:p="http://schemas.openxmlformats.org/presentationml/2006/main" xmlns:r="http://schemas.openxmlformats.org/officeDocument/2006/relationships">
-  <p:cSld>
-    <p:spTree>
-      <p:nvGrpSpPr>
-        <p:cNvPr id="1" name=""/>
-        <p:cNvGrpSpPr/>
-        <p:nvPr/>
-      </p:nvGrpSpPr>
-      <p:grpSpPr>
-        <a:xfrm>
-          <a:off x="0" y="0"/>
-          <a:ext cx="0" cy="0"/>
-          <a:chOff x="0" y="0"/>
-          <a:chExt cx="0" cy="0"/>
-        </a:xfrm>
-      </p:grpSpPr>
-      <p:sp>
-        <p:nvSpPr>
-          <p:cNvPr id="3" name="Notes Placeholder 2"/>
-          <p:cNvSpPr>
-            <a:spLocks noGrp="1"/>
-          </p:cNvSpPr>
-          <p:nvPr>
-            <p:ph type="body" idx="1"/>
-          </p:nvPr>
-        </p:nvSpPr>
-        <p:spPr/>
-        <p:txBody>
-          <a:bodyPr/>
-          <a:lstStyle/>
-          <a:p>
-            <a:r>
-              <a:t>Three ways a glue service fails, and one answer each.</a:t>
-            </a:r>
-          </a:p>
-          <a:p>
-            <a:r>
-              <a:t>- Retries: one policy for every outbound call. Five tries, exponential backoff with jitter, Retry-After parsed and capped at 30 s. Out of tries, the order becomes a review item, and Retry all or the auto-retry rule sends it again when the warehouse is back.</a:t>
-            </a:r>
-          </a:p>
-          <a:p>
-            <a:r>
-              <a:t>- Duplicates: three layers. The inbox is keyed by source and event id; the order id dedupes a redelivery under a new event id; the warehouse replays its first answer for a repeated Idempotency-Key. Exactly once across three systems is not possible; at-least-once plus idempotency gives effectively once.</a:t>
-            </a:r>
-          </a:p>
-          <a:p>
-            <a:r>
-              <a:t>- Crashes: the crash-point test stops Glue before each of 132 writes in 11 flows, restarts it and checks five rules. 41 stops broke something before the fix: a failed order with no review item, a reservation with no audit row, a channel told twice. The fix: each state change, its audit row and its review item commit in one local transaction, never across an await.</a:t>
-            </a:r>
-          </a:p>
-        </p:txBody>
-      </p:sp>
-    </p:spTree>
-  </p:cSld>
-  <p:clrMapOvr>
-    <a:masterClrMapping/>
-  </p:clrMapOvr>
-</p:notes>
-</file>
-
-<file path=ppt/notesSlides/notesSlide27.xml><?xml version="1.0" encoding="utf-8"?>
-<p:notes xmlns:a="http://schemas.openxmlformats.org/drawingml/2006/main" xmlns:p="http://schemas.openxmlformats.org/presentationml/2006/main" xmlns:r="http://schemas.openxmlformats.org/officeDocument/2006/relationships">
-  <p:cSld>
-    <p:spTree>
-      <p:nvGrpSpPr>
-        <p:cNvPr id="1" name=""/>
-        <p:cNvGrpSpPr/>
-        <p:nvPr/>
-      </p:nvGrpSpPr>
-      <p:grpSpPr>
-        <a:xfrm>
-          <a:off x="0" y="0"/>
-          <a:ext cx="0" cy="0"/>
-          <a:chOff x="0" y="0"/>
-          <a:chExt cx="0" cy="0"/>
-        </a:xfrm>
-      </p:grpSpPr>
-      <p:sp>
-        <p:nvSpPr>
-          <p:cNvPr id="3" name="Notes Placeholder 2"/>
-          <p:cNvSpPr>
-            <a:spLocks noGrp="1"/>
-          </p:cNvSpPr>
-          <p:nvPr>
-            <p:ph type="body" idx="1"/>
-          </p:nvPr>
-        </p:nvSpPr>
-        <p:spPr/>
-        <p:txBody>
-          <a:bodyPr/>
-          <a:lstStyle/>
-          <a:p>
-            <a:r>
-              <a:t>Measured, not guessed: scripts/load_probe.py sends signed shop orders through the inbox and the real worker loop in-process on this laptop. About 527 orders/s with 10 worker slots; p50 0.31 s and p95 0.53 s at 300 orders, mostly queue wait. The first probe found the production loop capped at 20 orders/s because it slept whenever every slot was busy; the fix claims the next event as soon as a slot frees.</a:t>
-            </a:r>
-          </a:p>
-          <a:p>
-            <a:r>
-              <a:t>On-call reads /metrics, which needs a signed-in viewer; /health stays a liveness check. The gauges say whether the worker keeps up, whether a paid order waits for a person, and whether stock is fresh. The first real limit is eMAG's rate limit; next steps are coalesced pushes, a circuit breaker, then Postgres with SKIP LOCKED and workers partitioned by order id.</a:t>
-            </a:r>
-          </a:p>
-        </p:txBody>
-      </p:sp>
-    </p:spTree>
-  </p:cSld>
-  <p:clrMapOvr>
-    <a:masterClrMapping/>
-  </p:clrMapOvr>
-</p:notes>
-</file>
-
-<file path=ppt/notesSlides/notesSlide28.xml><?xml version="1.0" encoding="utf-8"?>
-<p:notes xmlns:a="http://schemas.openxmlformats.org/drawingml/2006/main" xmlns:p="http://schemas.openxmlformats.org/presentationml/2006/main" xmlns:r="http://schemas.openxmlformats.org/officeDocument/2006/relationships">
-  <p:cSld>
-    <p:spTree>
-      <p:nvGrpSpPr>
-        <p:cNvPr id="1" name=""/>
-        <p:cNvGrpSpPr/>
-        <p:nvPr/>
-      </p:nvGrpSpPr>
-      <p:grpSpPr>
-        <a:xfrm>
-          <a:off x="0" y="0"/>
-          <a:ext cx="0" cy="0"/>
-          <a:chOff x="0" y="0"/>
-          <a:chExt cx="0" cy="0"/>
-        </a:xfrm>
-      </p:grpSpPr>
-      <p:sp>
-        <p:nvSpPr>
-          <p:cNvPr id="3" name="Notes Placeholder 2"/>
-          <p:cNvSpPr>
-            <a:spLocks noGrp="1"/>
-          </p:cNvSpPr>
-          <p:nvPr>
-            <p:ph type="body" idx="1"/>
-          </p:nvPr>
-        </p:nvSpPr>
-        <p:spPr/>
-        <p:txBody>
-          <a:bodyPr/>
-          <a:lstStyle/>
-          <a:p>
-            <a:r>
-              <a:t>Four trade-offs I would defend: SQLite and one process (one writer; Postgres is a one-file move because all SQL is in glue/db.py), first to the warehouse wins (simple and atomic, but it does not protect eMAG's rating, so a person decides), a person in the loop (someone must own the queue), and mocks instead of sandboxes (real API quirks are untested).</a:t>
-            </a:r>
-          </a:p>
-          <a:p>
-            <a:r>
-              <a:t>Rollout: shadow mode first, receiving and reading everything and sending nothing, compared daily with the staff's work; then shop stock, then eMAG stock, then orders. About a week per stage. Shadow mode and the stage switches are not built yet: each is a flag checked before Glue calls a system. Success after 30 days is measured, not felt. Full limitations are in the README; what the customer provides is in docs/customer-context.md.</a:t>
-            </a:r>
-          </a:p>
-        </p:txBody>
-      </p:sp>
-    </p:spTree>
-  </p:cSld>
-  <p:clrMapOvr>
-    <a:masterClrMapping/>
-  </p:clrMapOvr>
-</p:notes>
-</file>
-
 <file path=ppt/notesSlides/notesSlide3.xml><?xml version="1.0" encoding="utf-8"?>
 <p:notes xmlns:a="http://schemas.openxmlformats.org/drawingml/2006/main" xmlns:r="http://schemas.openxmlformats.org/officeDocument/2006/relationships" xmlns:p="http://schemas.openxmlformats.org/presentationml/2006/main">
   <p:cSld>
@@ -1174,14 +1144,37 @@
           <a:lstStyle/>
           <a:p>
             <a:r>
-              <a:rPr lang="en-US" dirty="0"/>
-              <a:t>- Python and FastAPI: one language everywhere, and pydantic models validate every inbound payload strictly at the edge.
-- httpx: explicit timeouts on every call, and its ASGI transport lets the tests run all four apps in one process with no network.
-- SQLite: the glue needs durability more than throughput. The inbox, orders and audit log survive restarts with no extra service. The schema is versioned with PRAGMA user_version and an ordered list of migrations.
-- React and TypeScript: the dashboard is the operator's product, with live views, so a typed SPA is worth it. TanStack Query does the polling and caching, Recharts the Flow charts, cmdk the command palette.
-- Ollama through the OpenAI SDK: a local model, no key, no order data leaving the machine. The same SDK can point at a hosted model later.
-- Not used, on purpose: a broker, Postgres, an ORM, websockets, a hosted model. Each has a clear trigger for when I would add it, which I cover on the scaling slide.
-- Test counts are after the final fix wave, as in the README: 245 backend, 223 frontend.</a:t>
+              <a:t>- Python and FastAPI: one language everywhere, and pydantic models validate every inbound payload strictly at the edge.</a:t>
+            </a:r>
+          </a:p>
+          <a:p>
+            <a:r>
+              <a:t>- httpx: explicit timeouts on every call, and its ASGI transport lets the tests run all four apps in one process with no network.</a:t>
+            </a:r>
+          </a:p>
+          <a:p>
+            <a:r>
+              <a:t>- SQLite: the glue needs durability more than throughput. The inbox, orders and audit log survive restarts with no extra service. The schema is versioned with PRAGMA user_version and an ordered list of migrations.</a:t>
+            </a:r>
+          </a:p>
+          <a:p>
+            <a:r>
+              <a:t>- React and TypeScript: the dashboard is the operator's product, with live views, so a typed SPA is worth it. TanStack Query does the polling and caching, Recharts the Flow charts, cmdk the command palette.</a:t>
+            </a:r>
+          </a:p>
+          <a:p>
+            <a:r>
+              <a:t>- Ollama through the OpenAI SDK: a local model, no key, no order data leaving the machine. The same SDK can point at a hosted model later.</a:t>
+            </a:r>
+          </a:p>
+          <a:p>
+            <a:r>
+              <a:t>- Not used, on purpose: a broker, Postgres, a hosted model (on the slide), and two smaller ones. An ORM, because plain SQL in one file is easier to review. Websockets, because the dashboard asks every few seconds, which is fine for one operator. Each has a clear trigger for when I would add it, which I cover on the scaling slide.</a:t>
+            </a:r>
+          </a:p>
+          <a:p>
+            <a:r>
+              <a:t>- Test counts are after the final fix wave, as in the README: 245 backend, 223 frontend.</a:t>
             </a:r>
           </a:p>
         </p:txBody>
@@ -1314,6 +1307,99 @@
 </p:notes>
 </file>
 
+<file path=ppt/notesSlides/notesSlide7.xml><?xml version="1.0" encoding="utf-8"?>
+<p:notes xmlns:a="http://schemas.openxmlformats.org/drawingml/2006/main" xmlns:r="http://schemas.openxmlformats.org/officeDocument/2006/relationships" xmlns:p="http://schemas.openxmlformats.org/presentationml/2006/main">
+  <p:cSld>
+    <p:spTree>
+      <p:nvGrpSpPr>
+        <p:cNvPr id="1" name=""/>
+        <p:cNvGrpSpPr/>
+        <p:nvPr/>
+      </p:nvGrpSpPr>
+      <p:grpSpPr>
+        <a:xfrm>
+          <a:off x="0" y="0"/>
+          <a:ext cx="0" cy="0"/>
+          <a:chOff x="0" y="0"/>
+          <a:chExt cx="0" cy="0"/>
+        </a:xfrm>
+      </p:grpSpPr>
+      <p:sp>
+        <p:nvSpPr>
+          <p:cNvPr id="2" name="Slide Image Placeholder 1"/>
+          <p:cNvSpPr>
+            <a:spLocks noGrp="1" noRot="1" noChangeAspect="1"/>
+          </p:cNvSpPr>
+          <p:nvPr>
+            <p:ph type="sldImg"/>
+          </p:nvPr>
+        </p:nvSpPr>
+        <p:spPr/>
+      </p:sp>
+      <p:sp>
+        <p:nvSpPr>
+          <p:cNvPr id="3" name="Notes Placeholder 2"/>
+          <p:cNvSpPr>
+            <a:spLocks noGrp="1"/>
+          </p:cNvSpPr>
+          <p:nvPr>
+            <p:ph type="body" idx="1"/>
+          </p:nvPr>
+        </p:nvSpPr>
+        <p:spPr/>
+        <p:txBody>
+          <a:bodyPr/>
+          <a:lstStyle/>
+          <a:p>
+            <a:r>
+              <a:rPr lang="en-US" dirty="0"/>
+              <a:t>- The warehouse owns stock. Its figure, on hand minus reserved, is the truth; the channels only show what the glue last told them.
+- The reconciler runs at startup, every 10 seconds, after every reservation or cancellation, and on every recount event. Runs hold one lock, so a slower run cannot overwrite a newer figure.
+- It pushes every product on every run, even when the cache says nothing changed. That costs a few calls and heals any drift: a missed event, a restarted channel, a rejected update.
+- eMAG's batch API answers per item. In the table eMAG refused the MacBook Air update: that one row is marked dirty, the other five applied, and the next run fixes it. A rate limit (429 with Retry-After 1) works the same way after its retries.
+- The Stock page shows what Glue last sent each channel and whether the channel accepted it. Honest limit: Glue knows what a channel accepted, not what it shows; reading eMAG's offers back during reconcile would close that.
+- The stock buffer rule can hold units back from one channel, so the last unit sells on the shop only. It is off by default; it is a business decision.
+- A recount below reserved caps both channels at 0. Glue works out how many units are short and sends only the newest reserved orders that cover the shortfall to review, under 'Shelf count too low'. A later count that covers them closes those items by itself. Retry is not offered there, because those orders still hold a reservation.</a:t>
+            </a:r>
+          </a:p>
+        </p:txBody>
+      </p:sp>
+      <p:sp>
+        <p:nvSpPr>
+          <p:cNvPr id="4" name="Slide Number Placeholder 3"/>
+          <p:cNvSpPr>
+            <a:spLocks noGrp="1"/>
+          </p:cNvSpPr>
+          <p:nvPr>
+            <p:ph type="sldNum" sz="quarter" idx="10"/>
+          </p:nvPr>
+        </p:nvSpPr>
+        <p:spPr/>
+        <p:txBody>
+          <a:bodyPr/>
+          <a:lstStyle/>
+          <a:p>
+            <a:fld id="{F7021451-1387-4CA6-816F-3879F97B5CBC}" type="slidenum">
+              <a:rPr lang="en-US"/>
+              <a:t>7</a:t>
+            </a:fld>
+            <a:endParaRPr lang="en-US"/>
+          </a:p>
+        </p:txBody>
+      </p:sp>
+    </p:spTree>
+    <p:extLst>
+      <p:ext uri="{BB962C8B-B14F-4D97-AF65-F5344CB8AC3E}">
+        <p14:creationId xmlns:p14="http://schemas.microsoft.com/office/powerpoint/2010/main" val="1024086991"/>
+      </p:ext>
+    </p:extLst>
+  </p:cSld>
+  <p:clrMapOvr>
+    <a:masterClrMapping/>
+  </p:clrMapOvr>
+</p:notes>
+</file>
+
 <file path=ppt/notesSlides/notesSlide8.xml><?xml version="1.0" encoding="utf-8"?>
 <p:notes xmlns:a="http://schemas.openxmlformats.org/drawingml/2006/main" xmlns:r="http://schemas.openxmlformats.org/officeDocument/2006/relationships" xmlns:p="http://schemas.openxmlformats.org/presentationml/2006/main">
   <p:cSld>
@@ -1360,13 +1446,13 @@
           <a:p>
             <a:r>
               <a:rPr lang="en-US" dirty="0"/>
-              <a:t>- The warehouse owns stock. Its figure, on hand minus reserved, is the truth; the channels only show what the glue last told them.
-- The reconciler runs at startup, every 10 seconds, after every reservation or cancellation, and on every recount event. Runs hold one lock, so a slower run cannot overwrite a newer figure.
-- It pushes every product on every run, even when the cache says nothing changed. That costs a few calls and heals any drift: a missed event, a restarted channel, a rejected update.
-- eMAG's batch API answers per item. In the table eMAG refused the MacBook Air update: that one row is marked dirty, the other five applied, and the next run fixes it. A rate limit (429 with Retry-After 1) works the same way after its retries.
-- The Stock page shows what Glue last sent each channel and whether the channel accepted it. Honest limit: Glue knows what a channel accepted, not what it shows; reading eMAG's offers back during reconcile would close that.
-- The stock buffer rule can hold units back from one channel, so the last unit sells on the shop only. It is off by default; it is a business decision.
-- A recount below reserved caps both channels at 0. Glue works out how many units are short and sends only the newest reserved orders that cover the shortfall to review, under 'Shelf count too low'. A later count that covers them closes those items by itself. Retry is not offered there, because those orders still hold a reservation.</a:t>
+              <a:t>- The conflict that matters is the cross-channel oversell: both channels show the last unit for a moment and two customers pay for it.
+- The rule is first to reach the warehouse wins. The warehouse's reservation is atomic, so exactly one order gets the unit and the other gets 409. Neither channel is preferred.
+- The loser is a paid order. Cancelling it is a business decision: maybe stock arrives tomorrow, maybe the customer takes another model, and on eMAG the cancellation counts against the seller's rating.
+- So the glue does the safe part: it reserves nothing it cannot fill, never offers below zero, acknowledges the order on eMAG because it exists there either way, and queues it with the reason.
+- The card says what happened in plain words, what Glue saw, which order got the unit, and what each button will do. Cancel asks for a confirm first (Yes, cancel it). Actions depend on the order's state: Retry only from the state the failed step left it in, Cancel unless shipped or cancelled.
+- Suggest an action asks the local model for a triage suggestion on this card. The rule is in code, the model writes the reason, and it never acts.
+- Each decision is recorded under the signed-in user, and only operator and admin roles may decide.</a:t>
             </a:r>
           </a:p>
         </p:txBody>
@@ -1426,18 +1512,6 @@
       </p:grpSpPr>
       <p:sp>
         <p:nvSpPr>
-          <p:cNvPr id="2" name="Slide Image Placeholder 1"/>
-          <p:cNvSpPr>
-            <a:spLocks noGrp="1" noRot="1" noChangeAspect="1"/>
-          </p:cNvSpPr>
-          <p:nvPr>
-            <p:ph type="sldImg"/>
-          </p:nvPr>
-        </p:nvSpPr>
-        <p:spPr/>
-      </p:sp>
-      <p:sp>
-        <p:nvSpPr>
           <p:cNvPr id="3" name="Notes Placeholder 2"/>
           <p:cNvSpPr>
             <a:spLocks noGrp="1"/>
@@ -1452,47 +1526,27 @@
           <a:lstStyle/>
           <a:p>
             <a:r>
-              <a:rPr lang="en-US" dirty="0"/>
-              <a:t>- The conflict that matters is the cross-channel oversell: both channels show the last unit for a moment and two customers pay for it.
-- The rule is first to reach the warehouse wins. The warehouse's reservation is atomic, so exactly one order gets the unit and the other gets 409. Neither channel is preferred.
-- The loser is a paid order. Cancelling it is a business decision: maybe stock arrives tomorrow, maybe the customer takes another model, and on eMAG the cancellation counts against the seller's rating.
-- So the glue does the safe part: it reserves nothing it cannot fill, never offers below zero, acknowledges the order on eMAG because it exists there either way, and queues it with the reason.
-- The card says what happened in plain words, what Glue saw, which order got the unit, and what each button will do. Cancel asks for a confirm first (Yes, cancel it). Actions depend on the order's state: Retry only from the state the failed step left it in, Cancel unless shipped or cancelled.
-- Suggest an action asks the local model for a triage suggestion on this card. The rule is in code, the model writes the reason, and it never acts.
-- Each decision is recorded under the signed-in user, and only operator and admin roles may decide.</a:t>
-            </a:r>
-          </a:p>
-        </p:txBody>
-      </p:sp>
-      <p:sp>
-        <p:nvSpPr>
-          <p:cNvPr id="4" name="Slide Number Placeholder 3"/>
-          <p:cNvSpPr>
-            <a:spLocks noGrp="1"/>
-          </p:cNvSpPr>
-          <p:nvPr>
-            <p:ph type="sldNum" sz="quarter" idx="10"/>
-          </p:nvPr>
-        </p:nvSpPr>
-        <p:spPr/>
-        <p:txBody>
-          <a:bodyPr/>
-          <a:lstStyle/>
-          <a:p>
-            <a:fld id="{F7021451-1387-4CA6-816F-3879F97B5CBC}" type="slidenum">
-              <a:rPr lang="en-US"/>
-              <a:t>9</a:t>
-            </a:fld>
-            <a:endParaRPr lang="en-US"/>
+              <a:t>Three ways a glue service fails, and one answer each.</a:t>
+            </a:r>
+          </a:p>
+          <a:p>
+            <a:r>
+              <a:t>- Retries: one policy for every outbound call. Five tries, exponential backoff with jitter, Retry-After parsed and capped at 30 s. Out of tries, the order becomes a review item, and Retry all or the auto-retry rule sends it again when the warehouse is back.</a:t>
+            </a:r>
+          </a:p>
+          <a:p>
+            <a:r>
+              <a:t>- Duplicates: three layers. The inbox is keyed by source and event id; the order id dedupes a redelivery under a new event id; the warehouse replays its first answer for a repeated Idempotency-Key. Exactly once across three systems is not possible; at-least-once plus idempotency gives effectively once.</a:t>
+            </a:r>
+          </a:p>
+          <a:p>
+            <a:r>
+              <a:t>- Crashes: the crash-point test stops Glue before each of 132 writes in 11 flows, restarts it and checks five rules. 41 stops broke something before the fix: a failed order with no review item, a reservation with no audit row, a channel told twice. The fix: each state change, its audit row and its review item commit in one local transaction, never across an await.</a:t>
+            </a:r>
           </a:p>
         </p:txBody>
       </p:sp>
     </p:spTree>
-    <p:extLst>
-      <p:ext uri="{BB962C8B-B14F-4D97-AF65-F5344CB8AC3E}">
-        <p14:creationId xmlns:p14="http://schemas.microsoft.com/office/powerpoint/2010/main" val="1024086991"/>
-      </p:ext>
-    </p:extLst>
   </p:cSld>
   <p:clrMapOvr>
     <a:masterClrMapping/>
@@ -1811,7 +1865,7 @@
           </a:prstGeom>
           <a:extLst>
             <a:ext uri="{C572A759-6A51-4108-AA02-DFA0A04FC94B}">
-              <ma14:wrappingTextBoxFlag xmlns="" xmlns:ma14="http://schemas.microsoft.com/office/mac/drawingml/2011/main" val="0"/>
+              <ma14:wrappingTextBoxFlag xmlns:ma14="http://schemas.microsoft.com/office/mac/drawingml/2011/main" xmlns="" val="0"/>
             </a:ext>
           </a:extLst>
         </p:spPr>
@@ -1886,7 +1940,7 @@
           </a:prstGeom>
           <a:extLst>
             <a:ext uri="{C572A759-6A51-4108-AA02-DFA0A04FC94B}">
-              <ma14:wrappingTextBoxFlag xmlns="" xmlns:ma14="http://schemas.microsoft.com/office/mac/drawingml/2011/main" val="0"/>
+              <ma14:wrappingTextBoxFlag xmlns:ma14="http://schemas.microsoft.com/office/mac/drawingml/2011/main" xmlns="" val="0"/>
             </a:ext>
           </a:extLst>
         </p:spPr>
@@ -3029,15 +3083,22 @@
 </file>
 
 <file path=ppt/slides/slide10.xml><?xml version="1.0" encoding="utf-8"?>
-<p:sld xmlns:a="http://schemas.openxmlformats.org/drawingml/2006/main" xmlns:p="http://schemas.openxmlformats.org/presentationml/2006/main" xmlns:r="http://schemas.openxmlformats.org/officeDocument/2006/relationships">
+<p:sld xmlns:a="http://schemas.openxmlformats.org/drawingml/2006/main" xmlns:r="http://schemas.openxmlformats.org/officeDocument/2006/relationships" xmlns:p="http://schemas.openxmlformats.org/presentationml/2006/main">
   <p:cSld>
     <p:spTree>
       <p:nvGrpSpPr>
-        <p:cNvPr id="2" name=""/>
+        <p:cNvPr id="1" name=""/>
         <p:cNvGrpSpPr/>
         <p:nvPr/>
       </p:nvGrpSpPr>
-      <p:grpSpPr/>
+      <p:grpSpPr>
+        <a:xfrm>
+          <a:off x="0" y="0"/>
+          <a:ext cx="0" cy="0"/>
+          <a:chOff x="0" y="0"/>
+          <a:chExt cx="0" cy="0"/>
+        </a:xfrm>
+      </p:grpSpPr>
       <p:sp>
         <p:nvSpPr>
           <p:cNvPr id="3" name="Text 0"/>
@@ -3115,7 +3176,7 @@
                   <a:schemeClr val="tx1"/>
                 </a:solidFill>
               </a:rPr>
-              <a:t>Operating it: what on-call sees, and how it scales</a:t>
+              <a:t>Scale: measured, and where it breaks first</a:t>
             </a:r>
             <a:endParaRPr lang="en-US" sz="3200" dirty="0"/>
           </a:p>
@@ -3591,7 +3652,7 @@
                   <a:schemeClr val="tx1"/>
                 </a:solidFill>
               </a:rPr>
-              <a:t>What on-call watches, on /metrics</a:t>
+              <a:t>Measuring found a bug</a:t>
             </a:r>
             <a:endParaRPr lang="en-US" sz="1500" dirty="0"/>
           </a:p>
@@ -3606,7 +3667,7 @@
         <p:spPr>
           <a:xfrm>
             <a:off x="548640" y="3822191"/>
-            <a:ext cx="5120640" cy="1463040"/>
+            <a:ext cx="5120640" cy="1097280"/>
           </a:xfrm>
           <a:prstGeom prst="rect">
             <a:avLst/>
@@ -3618,12 +3679,11 @@
           <a:bodyPr wrap="square" lIns="0" tIns="0" rIns="0" bIns="0" rtlCol="0" anchor="t"/>
           <a:lstStyle/>
           <a:p>
-            <a:pPr marL="177800" indent="-177800">
+            <a:pPr marL="0" indent="0">
               <a:spcAft>
                 <a:spcPts val="500"/>
               </a:spcAft>
-              <a:buSzPct val="100000"/>
-              <a:buChar char="•"/>
+              <a:buNone/>
             </a:pPr>
             <a:r>
               <a:rPr lang="en-US" sz="1300" b="1" dirty="0">
@@ -3631,7 +3691,7 @@
                   <a:srgbClr val="3D4552"/>
                 </a:solidFill>
               </a:rPr>
-              <a:t>Oldest pending event: </a:t>
+              <a:t/>
             </a:r>
             <a:r>
               <a:rPr lang="en-US" sz="1300" dirty="0">
@@ -3639,276 +3699,7 @@
                   <a:srgbClr val="3D4552"/>
                 </a:solidFill>
               </a:rPr>
-              <a:t>the worker keeps up</a:t>
-            </a:r>
-            <a:endParaRPr lang="en-US" sz="1300" dirty="0"/>
-          </a:p>
-          <a:p>
-            <a:pPr marL="177800" indent="-177800">
-              <a:spcAft>
-                <a:spcPts val="500"/>
-              </a:spcAft>
-              <a:buSzPct val="100000"/>
-              <a:buChar char="•"/>
-            </a:pPr>
-            <a:r>
-              <a:rPr lang="en-US" sz="1300" b="1" dirty="0">
-                <a:solidFill>
-                  <a:srgbClr val="3D4552"/>
-                </a:solidFill>
-              </a:rPr>
-              <a:t>Oldest review item: </a:t>
-            </a:r>
-            <a:r>
-              <a:rPr lang="en-US" sz="1300" dirty="0">
-                <a:solidFill>
-                  <a:srgbClr val="3D4552"/>
-                </a:solidFill>
-              </a:rPr>
-              <a:t>a paid order waits for a person</a:t>
-            </a:r>
-            <a:endParaRPr lang="en-US" sz="1300" dirty="0"/>
-          </a:p>
-          <a:p>
-            <a:pPr marL="177800" indent="-177800">
-              <a:spcAft>
-                <a:spcPts val="500"/>
-              </a:spcAft>
-              <a:buSzPct val="100000"/>
-              <a:buChar char="•"/>
-            </a:pPr>
-            <a:r>
-              <a:rPr lang="en-US" sz="1300" b="1" dirty="0">
-                <a:solidFill>
-                  <a:srgbClr val="3D4552"/>
-                </a:solidFill>
-              </a:rPr>
-              <a:t>Warehouse down, last good reconcile: </a:t>
-            </a:r>
-            <a:r>
-              <a:rPr lang="en-US" sz="1300" dirty="0">
-                <a:solidFill>
-                  <a:srgbClr val="3D4552"/>
-                </a:solidFill>
-              </a:rPr>
-              <a:t>stock is fresh</a:t>
-            </a:r>
-            <a:endParaRPr lang="en-US" sz="1300" dirty="0"/>
-          </a:p>
-          <a:p>
-            <a:pPr marL="177800" indent="-177800">
-              <a:spcAft>
-                <a:spcPts val="500"/>
-              </a:spcAft>
-              <a:buSzPct val="100000"/>
-              <a:buChar char="•"/>
-            </a:pPr>
-            <a:r>
-              <a:rPr lang="en-US" sz="1300" b="1" dirty="0">
-                <a:solidFill>
-                  <a:srgbClr val="3D4552"/>
-                </a:solidFill>
-              </a:rPr>
-              <a:t>First real bottleneck: </a:t>
-            </a:r>
-            <a:r>
-              <a:rPr lang="en-US" sz="1300" dirty="0">
-                <a:solidFill>
-                  <a:srgbClr val="3D4552"/>
-                </a:solidFill>
-              </a:rPr>
-              <a:t>eMAG's rate limit, not the glue</a:t>
-            </a:r>
-            <a:endParaRPr lang="en-US" sz="1300" dirty="0"/>
-          </a:p>
-        </p:txBody>
-      </p:sp>
-      <p:sp>
-        <p:nvSpPr>
-          <p:cNvPr id="20" name="alerts"/>
-          <p:cNvSpPr/>
-          <p:nvPr/>
-        </p:nvSpPr>
-        <p:spPr>
-          <a:xfrm>
-            <a:off x="5989320" y="3474720"/>
-            <a:ext cx="5650992" cy="1783080"/>
-          </a:xfrm>
-          <a:prstGeom prst="roundRect">
-            <a:avLst>
-              <a:gd name="adj" fmla="val 4102"/>
-            </a:avLst>
-          </a:prstGeom>
-          <a:solidFill>
-            <a:schemeClr val="bg2"/>
-          </a:solidFill>
-          <a:ln/>
-        </p:spPr>
-        <p:txBody>
-          <a:bodyPr/>
-          <a:lstStyle/>
-          <a:p>
-            <a:endParaRPr lang="en-US"/>
-          </a:p>
-        </p:txBody>
-      </p:sp>
-      <p:sp>
-        <p:nvSpPr>
-          <p:cNvPr id="21" name="Text 23"/>
-          <p:cNvSpPr txBox="1"/>
-          <p:nvPr/>
-        </p:nvSpPr>
-        <p:spPr>
-          <a:xfrm>
-            <a:off x="6217920" y="3630168"/>
-            <a:ext cx="5212080" cy="274320"/>
-          </a:xfrm>
-          <a:prstGeom prst="rect">
-            <a:avLst/>
-          </a:prstGeom>
-          <a:noFill/>
-          <a:ln/>
-        </p:spPr>
-        <p:txBody>
-          <a:bodyPr wrap="square" lIns="0" tIns="0" rIns="0" bIns="0" rtlCol="0" anchor="t"/>
-          <a:lstStyle/>
-          <a:p>
-            <a:pPr marL="0" indent="0">
-              <a:buNone/>
-            </a:pPr>
-            <a:r>
-              <a:rPr lang="en-US" sz="1500" b="1" dirty="0">
-                <a:solidFill>
-                  <a:schemeClr val="tx1"/>
-                </a:solidFill>
-              </a:rPr>
-              <a:t>Alerts I would set, as sentences</a:t>
-            </a:r>
-            <a:endParaRPr lang="en-US" sz="1500" dirty="0"/>
-          </a:p>
-        </p:txBody>
-      </p:sp>
-      <p:sp>
-        <p:nvSpPr>
-          <p:cNvPr id="22" name="Text 24"/>
-          <p:cNvSpPr txBox="1"/>
-          <p:nvPr/>
-        </p:nvSpPr>
-        <p:spPr>
-          <a:xfrm>
-            <a:off x="6217920" y="4023360"/>
-            <a:ext cx="5257800" cy="1463040"/>
-          </a:xfrm>
-          <a:prstGeom prst="rect">
-            <a:avLst/>
-          </a:prstGeom>
-          <a:noFill/>
-          <a:ln/>
-        </p:spPr>
-        <p:txBody>
-          <a:bodyPr wrap="square" lIns="0" tIns="0" rIns="0" bIns="0" rtlCol="0" anchor="t"/>
-          <a:lstStyle/>
-          <a:p>
-            <a:pPr marL="177800" indent="-177800">
-              <a:spcAft>
-                <a:spcPts val="400"/>
-              </a:spcAft>
-              <a:buSzPct val="100000"/>
-              <a:buChar char="•"/>
-            </a:pPr>
-            <a:r>
-              <a:rPr lang="en-US" sz="1300" b="1" dirty="0">
-                <a:solidFill>
-                  <a:srgbClr val="3D4552"/>
-                </a:solidFill>
-              </a:rPr>
-              <a:t>Page: </a:t>
-            </a:r>
-            <a:r>
-              <a:rPr lang="en-US" sz="1300" dirty="0">
-                <a:solidFill>
-                  <a:srgbClr val="3D4552"/>
-                </a:solidFill>
-              </a:rPr>
-              <a:t>oldest pending event older than 60 s</a:t>
-            </a:r>
-            <a:endParaRPr lang="en-US" sz="1300" dirty="0"/>
-          </a:p>
-          <a:p>
-            <a:pPr marL="177800" indent="-177800">
-              <a:spcAft>
-                <a:spcPts val="400"/>
-              </a:spcAft>
-              <a:buSzPct val="100000"/>
-              <a:buChar char="•"/>
-            </a:pPr>
-            <a:r>
-              <a:rPr lang="en-US" sz="1300" b="1" dirty="0">
-                <a:solidFill>
-                  <a:srgbClr val="3D4552"/>
-                </a:solidFill>
-              </a:rPr>
-              <a:t>Page: </a:t>
-            </a:r>
-            <a:r>
-              <a:rPr lang="en-US" sz="1300" dirty="0">
-                <a:solidFill>
-                  <a:srgbClr val="3D4552"/>
-                </a:solidFill>
-              </a:rPr>
-              <a:t>warehouse down for more than 5 min</a:t>
-            </a:r>
-            <a:endParaRPr lang="en-US" sz="1300" dirty="0"/>
-          </a:p>
-          <a:p>
-            <a:pPr marL="177800" indent="-177800">
-              <a:spcAft>
-                <a:spcPts val="400"/>
-              </a:spcAft>
-              <a:buSzPct val="100000"/>
-              <a:buChar char="•"/>
-            </a:pPr>
-            <a:r>
-              <a:rPr lang="en-US" sz="1300" b="1" dirty="0">
-                <a:solidFill>
-                  <a:srgbClr val="3D4552"/>
-                </a:solidFill>
-              </a:rPr>
-              <a:t>Page: </a:t>
-            </a:r>
-            <a:r>
-              <a:rPr lang="en-US" sz="1300" dirty="0">
-                <a:solidFill>
-                  <a:srgbClr val="3D4552"/>
-                </a:solidFill>
-              </a:rPr>
-              <a:t>no good reconcile in 3 intervals, warehouse up</a:t>
-            </a:r>
-            <a:endParaRPr lang="en-US" sz="1300" dirty="0"/>
-          </a:p>
-          <a:p>
-            <a:pPr marL="177800" indent="-177800">
-              <a:spcAft>
-                <a:spcPts val="400"/>
-              </a:spcAft>
-              <a:buSzPct val="100000"/>
-              <a:buChar char="•"/>
-            </a:pPr>
-            <a:r>
-              <a:rPr lang="en-US" sz="1300" b="1" dirty="0">
-                <a:solidFill>
-                  <a:srgbClr val="3D4552"/>
-                </a:solidFill>
-              </a:rPr>
-              <a:t>Warn: </a:t>
-            </a:r>
-            <a:r>
-              <a:rPr lang="en-US" sz="1300" dirty="0">
-                <a:solidFill>
-                  <a:srgbClr val="3D4552"/>
-                </a:solidFill>
-              </a:rPr>
-              <a:t>a review item waiting 30 min in business hours</a:t>
+              <a:t>The first test showed the worker capped at 20 orders a second, because it paused whenever all 10 slots were busy. Now it takes the next event as soon as a slot frees.</a:t>
             </a:r>
             <a:endParaRPr lang="en-US" sz="1300" dirty="0"/>
           </a:p>
@@ -3934,7 +3725,7 @@
           </a:prstGeom>
           <a:extLst>
             <a:ext uri="{C572A759-6A51-4108-AA02-DFA0A04FC94B}">
-              <ma14:wrappingTextBoxFlag xmlns="" xmlns:ma14="http://schemas.microsoft.com/office/mac/drawingml/2011/main" val="0"/>
+              <ma14:wrappingTextBoxFlag xmlns:ma14="http://schemas.microsoft.com/office/mac/drawingml/2011/main" xmlns="" val="0"/>
             </a:ext>
           </a:extLst>
         </p:spPr>
@@ -3953,9 +3744,92 @@
             <a:pPr algn="r"/>
             <a:fld id="{F7021451-1387-4CA6-816F-3879F97B5CBC}" type="slidenum">
               <a:rPr lang="en-US" b="0"/>
-              <a:t>13</a:t>
+              <a:t>10</a:t>
             </a:fld>
             <a:endParaRPr lang="en-US"/>
+          </a:p>
+        </p:txBody>
+      </p:sp>
+      <p:sp>
+        <p:nvSpPr>
+          <p:cNvPr id="24" name="Text 18"/>
+          <p:cNvSpPr txBox="1"/>
+          <p:nvPr/>
+        </p:nvSpPr>
+        <p:spPr>
+          <a:xfrm>
+            <a:off x="5989320" y="3474720"/>
+            <a:ext cx="5394960" cy="274320"/>
+          </a:xfrm>
+          <a:prstGeom prst="rect">
+            <a:avLst/>
+          </a:prstGeom>
+          <a:noFill/>
+          <a:ln/>
+        </p:spPr>
+        <p:txBody>
+          <a:bodyPr wrap="square" lIns="0" tIns="0" rIns="0" bIns="0" rtlCol="0" anchor="t"/>
+          <a:lstStyle/>
+          <a:p>
+            <a:pPr marL="0" indent="0">
+              <a:buNone/>
+            </a:pPr>
+            <a:r>
+              <a:rPr lang="en-US" sz="1500" b="1" dirty="0">
+                <a:solidFill>
+                  <a:schemeClr val="tx1"/>
+                </a:solidFill>
+              </a:rPr>
+              <a:t>The first real limit</a:t>
+            </a:r>
+            <a:endParaRPr lang="en-US" sz="1500" dirty="0"/>
+          </a:p>
+        </p:txBody>
+      </p:sp>
+      <p:sp>
+        <p:nvSpPr>
+          <p:cNvPr id="25" name="Text 19"/>
+          <p:cNvSpPr txBox="1"/>
+          <p:nvPr/>
+        </p:nvSpPr>
+        <p:spPr>
+          <a:xfrm>
+            <a:off x="5989320" y="3822191"/>
+            <a:ext cx="5577840" cy="1097280"/>
+          </a:xfrm>
+          <a:prstGeom prst="rect">
+            <a:avLst/>
+          </a:prstGeom>
+          <a:noFill/>
+          <a:ln/>
+        </p:spPr>
+        <p:txBody>
+          <a:bodyPr wrap="square" lIns="0" tIns="0" rIns="0" bIns="0" rtlCol="0" anchor="t"/>
+          <a:lstStyle/>
+          <a:p>
+            <a:pPr marL="0" indent="0">
+              <a:spcAft>
+                <a:spcPts val="500"/>
+              </a:spcAft>
+              <a:buNone/>
+            </a:pPr>
+            <a:r>
+              <a:rPr lang="en-US" sz="1300" b="1" dirty="0">
+                <a:solidFill>
+                  <a:srgbClr val="3D4552"/>
+                </a:solidFill>
+              </a:rPr>
+              <a:t/>
+            </a:r>
+            <a:r>
+              <a:rPr lang="en-US" sz="1300" dirty="0">
+                <a:solidFill>
+                  <a:srgbClr val="3D4552"/>
+                </a:solidFill>
+              </a:rPr>
+              <a:t>eMAG's rate limit, not the glue. Beyond that: a real queue, Postgres, and workers split by order. Observability I show live: an order's timeline, and the Flow page.</a:t>
+            </a:r>
+            <a:endParaRPr lang="en-US" sz="1300" dirty="0"/>
           </a:p>
         </p:txBody>
       </p:sp>
@@ -4994,7 +4868,7 @@
           </a:prstGeom>
           <a:extLst>
             <a:ext uri="{C572A759-6A51-4108-AA02-DFA0A04FC94B}">
-              <ma14:wrappingTextBoxFlag xmlns="" xmlns:ma14="http://schemas.microsoft.com/office/mac/drawingml/2011/main" val="0"/>
+              <ma14:wrappingTextBoxFlag xmlns:ma14="http://schemas.microsoft.com/office/mac/drawingml/2011/main" xmlns="" val="0"/>
             </a:ext>
           </a:extLst>
         </p:spPr>
@@ -5013,7 +4887,7 @@
             <a:pPr algn="r"/>
             <a:fld id="{F7021451-1387-4CA6-816F-3879F97B5CBC}" type="slidenum">
               <a:rPr lang="en-US" b="0"/>
-              <a:t>14</a:t>
+              <a:t>11</a:t>
             </a:fld>
             <a:endParaRPr lang="en-US"/>
           </a:p>
@@ -5028,6 +4902,1123 @@
 </file>
 
 <file path=ppt/slides/slide12.xml><?xml version="1.0" encoding="utf-8"?>
+<p:sld xmlns:a="http://schemas.openxmlformats.org/drawingml/2006/main" xmlns:r="http://schemas.openxmlformats.org/officeDocument/2006/relationships" xmlns:p="http://schemas.openxmlformats.org/presentationml/2006/main">
+  <p:cSld>
+    <p:spTree>
+      <p:nvGrpSpPr>
+        <p:cNvPr id="1" name=""/>
+        <p:cNvGrpSpPr/>
+        <p:nvPr/>
+      </p:nvGrpSpPr>
+      <p:grpSpPr>
+        <a:xfrm>
+          <a:off x="0" y="0"/>
+          <a:ext cx="0" cy="0"/>
+          <a:chOff x="0" y="0"/>
+          <a:chExt cx="0" cy="0"/>
+        </a:xfrm>
+      </p:grpSpPr>
+      <p:sp>
+        <p:nvSpPr>
+          <p:cNvPr id="3" name="Text 0"/>
+          <p:cNvSpPr>
+            <a:spLocks noGrp="1"/>
+          </p:cNvSpPr>
+          <p:nvPr>
+            <p:ph type="body" idx="100" hasCustomPrompt="1"/>
+          </p:nvPr>
+        </p:nvSpPr>
+        <p:spPr>
+          <a:xfrm>
+            <a:off x="548640" y="384048"/>
+            <a:ext cx="8229600" cy="237744"/>
+          </a:xfrm>
+          <a:prstGeom prst="rect">
+            <a:avLst/>
+          </a:prstGeom>
+          <a:noFill/>
+          <a:ln/>
+        </p:spPr>
+        <p:txBody>
+          <a:bodyPr wrap="square" lIns="0" tIns="0" rIns="0" bIns="0" rtlCol="0" anchor="t"/>
+          <a:lstStyle/>
+          <a:p>
+            <a:pPr marL="0" indent="0" algn="l">
+              <a:buNone/>
+            </a:pPr>
+            <a:r>
+              <a:rPr lang="en-US" sz="1100" b="1" dirty="0">
+                <a:solidFill>
+                  <a:schemeClr val="tx2"/>
+                </a:solidFill>
+                <a:latin typeface="Courier New" pitchFamily="34" charset="0"/>
+                <a:ea typeface="Courier New" pitchFamily="34" charset="-122"/>
+                <a:cs typeface="Courier New" pitchFamily="34" charset="-120"/>
+              </a:rPr>
+              <a:t>AT THE CUSTOMER</a:t>
+            </a:r>
+            <a:endParaRPr lang="en-US" sz="1100" dirty="0"/>
+          </a:p>
+        </p:txBody>
+      </p:sp>
+      <p:sp>
+        <p:nvSpPr>
+          <p:cNvPr id="4" name="Text 0"/>
+          <p:cNvSpPr>
+            <a:spLocks noGrp="1"/>
+          </p:cNvSpPr>
+          <p:nvPr>
+            <p:ph type="title" idx="101" hasCustomPrompt="1"/>
+          </p:nvPr>
+        </p:nvSpPr>
+        <p:spPr>
+          <a:xfrm>
+            <a:off x="548640" y="621792"/>
+            <a:ext cx="11094415" cy="640080"/>
+          </a:xfrm>
+          <a:prstGeom prst="rect">
+            <a:avLst/>
+          </a:prstGeom>
+          <a:noFill/>
+          <a:ln/>
+        </p:spPr>
+        <p:txBody>
+          <a:bodyPr wrap="square" lIns="0" tIns="0" rIns="0" bIns="0" rtlCol="0" anchor="t"/>
+          <a:lstStyle/>
+          <a:p>
+            <a:pPr marL="0" indent="0" algn="l">
+              <a:buNone/>
+            </a:pPr>
+            <a:r>
+              <a:rPr lang="en-US" sz="3200" b="1" dirty="0">
+                <a:solidFill>
+                  <a:schemeClr val="tx1"/>
+                </a:solidFill>
+              </a:rPr>
+              <a:t>How I'd roll it out</a:t>
+            </a:r>
+            <a:endParaRPr lang="en-US" sz="3200" dirty="0"/>
+          </a:p>
+        </p:txBody>
+      </p:sp>
+      <p:sp>
+        <p:nvSpPr>
+          <p:cNvPr id="5" name="Shadow mode"/>
+          <p:cNvSpPr/>
+          <p:nvPr/>
+        </p:nvSpPr>
+        <p:spPr>
+          <a:xfrm>
+            <a:off x="548640" y="1463040"/>
+            <a:ext cx="2606040" cy="1600200"/>
+          </a:xfrm>
+          <a:prstGeom prst="roundRect">
+            <a:avLst>
+              <a:gd name="adj" fmla="val 4571"/>
+            </a:avLst>
+          </a:prstGeom>
+          <a:solidFill>
+            <a:schemeClr val="bg1"/>
+          </a:solidFill>
+          <a:ln w="9525">
+            <a:solidFill>
+              <a:srgbClr val="E3E6EB"/>
+            </a:solidFill>
+            <a:prstDash val="solid"/>
+          </a:ln>
+        </p:spPr>
+        <p:txBody>
+          <a:bodyPr/>
+          <a:lstStyle/>
+          <a:p>
+            <a:endParaRPr lang="en-US"/>
+          </a:p>
+        </p:txBody>
+      </p:sp>
+      <p:sp>
+        <p:nvSpPr>
+          <p:cNvPr id="6" name="step 1"/>
+          <p:cNvSpPr/>
+          <p:nvPr/>
+        </p:nvSpPr>
+        <p:spPr>
+          <a:xfrm>
+            <a:off x="731520" y="1627632"/>
+            <a:ext cx="365760" cy="365760"/>
+          </a:xfrm>
+          <a:prstGeom prst="ellipse">
+            <a:avLst/>
+          </a:prstGeom>
+          <a:solidFill>
+            <a:schemeClr val="accent1"/>
+          </a:solidFill>
+          <a:ln/>
+        </p:spPr>
+        <p:txBody>
+          <a:bodyPr/>
+          <a:lstStyle/>
+          <a:p>
+            <a:endParaRPr lang="en-US"/>
+          </a:p>
+        </p:txBody>
+      </p:sp>
+      <p:sp>
+        <p:nvSpPr>
+          <p:cNvPr id="7" name="Text 4"/>
+          <p:cNvSpPr txBox="1"/>
+          <p:nvPr/>
+        </p:nvSpPr>
+        <p:spPr>
+          <a:xfrm>
+            <a:off x="731520" y="1627632"/>
+            <a:ext cx="365760" cy="365760"/>
+          </a:xfrm>
+          <a:prstGeom prst="rect">
+            <a:avLst/>
+          </a:prstGeom>
+          <a:noFill/>
+          <a:ln/>
+        </p:spPr>
+        <p:txBody>
+          <a:bodyPr wrap="square" lIns="0" tIns="0" rIns="0" bIns="0" rtlCol="0" anchor="ctr"/>
+          <a:lstStyle/>
+          <a:p>
+            <a:pPr marL="0" indent="0" algn="ctr">
+              <a:buNone/>
+            </a:pPr>
+            <a:r>
+              <a:rPr lang="en-US" sz="1200" b="1" dirty="0">
+                <a:solidFill>
+                  <a:schemeClr val="bg1"/>
+                </a:solidFill>
+              </a:rPr>
+              <a:t>1</a:t>
+            </a:r>
+            <a:endParaRPr lang="en-US" sz="1200" dirty="0"/>
+          </a:p>
+        </p:txBody>
+      </p:sp>
+      <p:sp>
+        <p:nvSpPr>
+          <p:cNvPr id="8" name="Text 5"/>
+          <p:cNvSpPr txBox="1"/>
+          <p:nvPr/>
+        </p:nvSpPr>
+        <p:spPr>
+          <a:xfrm>
+            <a:off x="1207008" y="1627632"/>
+            <a:ext cx="1828800" cy="365760"/>
+          </a:xfrm>
+          <a:prstGeom prst="rect">
+            <a:avLst/>
+          </a:prstGeom>
+          <a:noFill/>
+          <a:ln/>
+        </p:spPr>
+        <p:txBody>
+          <a:bodyPr wrap="square" lIns="0" tIns="0" rIns="0" bIns="0" rtlCol="0" anchor="ctr"/>
+          <a:lstStyle/>
+          <a:p>
+            <a:pPr marL="0" indent="0">
+              <a:buNone/>
+            </a:pPr>
+            <a:r>
+              <a:rPr lang="en-US" sz="1600" b="1" dirty="0">
+                <a:solidFill>
+                  <a:schemeClr val="tx1"/>
+                </a:solidFill>
+              </a:rPr>
+              <a:t>Shadow mode</a:t>
+            </a:r>
+            <a:endParaRPr lang="en-US" sz="1600" dirty="0"/>
+          </a:p>
+        </p:txBody>
+      </p:sp>
+      <p:sp>
+        <p:nvSpPr>
+          <p:cNvPr id="9" name="Text 6"/>
+          <p:cNvSpPr txBox="1"/>
+          <p:nvPr/>
+        </p:nvSpPr>
+        <p:spPr>
+          <a:xfrm>
+            <a:off x="731520" y="2121408"/>
+            <a:ext cx="2286000" cy="868680"/>
+          </a:xfrm>
+          <a:prstGeom prst="rect">
+            <a:avLst/>
+          </a:prstGeom>
+          <a:noFill/>
+          <a:ln/>
+        </p:spPr>
+        <p:txBody>
+          <a:bodyPr wrap="square" lIns="0" tIns="0" rIns="0" bIns="0" rtlCol="0" anchor="t"/>
+          <a:lstStyle/>
+          <a:p>
+            <a:pPr marL="0" indent="0">
+              <a:buNone/>
+            </a:pPr>
+            <a:r>
+              <a:rPr lang="en-US" sz="1300" dirty="0">
+                <a:solidFill>
+                  <a:srgbClr val="3D4552"/>
+                </a:solidFill>
+              </a:rPr>
+              <a:t>Receives and reads everything, sends nothing. Compared daily with the staff's work.</a:t>
+            </a:r>
+            <a:endParaRPr lang="en-US" sz="1300" dirty="0"/>
+          </a:p>
+        </p:txBody>
+      </p:sp>
+      <p:sp>
+        <p:nvSpPr>
+          <p:cNvPr id="10" name="Shape 7"/>
+          <p:cNvSpPr/>
+          <p:nvPr/>
+        </p:nvSpPr>
+        <p:spPr>
+          <a:xfrm>
+            <a:off x="3182112" y="2263140"/>
+            <a:ext cx="173736" cy="0"/>
+          </a:xfrm>
+          <a:prstGeom prst="line">
+            <a:avLst/>
+          </a:prstGeom>
+          <a:noFill/>
+          <a:ln w="15875">
+            <a:solidFill>
+              <a:schemeClr val="tx1"/>
+            </a:solidFill>
+            <a:prstDash val="solid"/>
+            <a:tailEnd type="triangle"/>
+          </a:ln>
+        </p:spPr>
+        <p:txBody>
+          <a:bodyPr/>
+          <a:lstStyle/>
+          <a:p>
+            <a:endParaRPr lang="en-US"/>
+          </a:p>
+        </p:txBody>
+      </p:sp>
+      <p:sp>
+        <p:nvSpPr>
+          <p:cNvPr id="11" name="Shop stock"/>
+          <p:cNvSpPr/>
+          <p:nvPr/>
+        </p:nvSpPr>
+        <p:spPr>
+          <a:xfrm>
+            <a:off x="3383280" y="1463040"/>
+            <a:ext cx="2606040" cy="1600200"/>
+          </a:xfrm>
+          <a:prstGeom prst="roundRect">
+            <a:avLst>
+              <a:gd name="adj" fmla="val 4571"/>
+            </a:avLst>
+          </a:prstGeom>
+          <a:solidFill>
+            <a:schemeClr val="bg1"/>
+          </a:solidFill>
+          <a:ln w="9525">
+            <a:solidFill>
+              <a:srgbClr val="E3E6EB"/>
+            </a:solidFill>
+            <a:prstDash val="solid"/>
+          </a:ln>
+        </p:spPr>
+        <p:txBody>
+          <a:bodyPr/>
+          <a:lstStyle/>
+          <a:p>
+            <a:endParaRPr lang="en-US"/>
+          </a:p>
+        </p:txBody>
+      </p:sp>
+      <p:sp>
+        <p:nvSpPr>
+          <p:cNvPr id="12" name="step 2"/>
+          <p:cNvSpPr/>
+          <p:nvPr/>
+        </p:nvSpPr>
+        <p:spPr>
+          <a:xfrm>
+            <a:off x="3566160" y="1627632"/>
+            <a:ext cx="365760" cy="365760"/>
+          </a:xfrm>
+          <a:prstGeom prst="ellipse">
+            <a:avLst/>
+          </a:prstGeom>
+          <a:solidFill>
+            <a:schemeClr val="accent1"/>
+          </a:solidFill>
+          <a:ln/>
+        </p:spPr>
+        <p:txBody>
+          <a:bodyPr/>
+          <a:lstStyle/>
+          <a:p>
+            <a:endParaRPr lang="en-US"/>
+          </a:p>
+        </p:txBody>
+      </p:sp>
+      <p:sp>
+        <p:nvSpPr>
+          <p:cNvPr id="13" name="Text 10"/>
+          <p:cNvSpPr txBox="1"/>
+          <p:nvPr/>
+        </p:nvSpPr>
+        <p:spPr>
+          <a:xfrm>
+            <a:off x="3566160" y="1627632"/>
+            <a:ext cx="365760" cy="365760"/>
+          </a:xfrm>
+          <a:prstGeom prst="rect">
+            <a:avLst/>
+          </a:prstGeom>
+          <a:noFill/>
+          <a:ln/>
+        </p:spPr>
+        <p:txBody>
+          <a:bodyPr wrap="square" lIns="0" tIns="0" rIns="0" bIns="0" rtlCol="0" anchor="ctr"/>
+          <a:lstStyle/>
+          <a:p>
+            <a:pPr marL="0" indent="0" algn="ctr">
+              <a:buNone/>
+            </a:pPr>
+            <a:r>
+              <a:rPr lang="en-US" sz="1200" b="1" dirty="0">
+                <a:solidFill>
+                  <a:schemeClr val="bg1"/>
+                </a:solidFill>
+              </a:rPr>
+              <a:t>2</a:t>
+            </a:r>
+            <a:endParaRPr lang="en-US" sz="1200" dirty="0"/>
+          </a:p>
+        </p:txBody>
+      </p:sp>
+      <p:sp>
+        <p:nvSpPr>
+          <p:cNvPr id="14" name="Text 11"/>
+          <p:cNvSpPr txBox="1"/>
+          <p:nvPr/>
+        </p:nvSpPr>
+        <p:spPr>
+          <a:xfrm>
+            <a:off x="4041648" y="1627632"/>
+            <a:ext cx="1828800" cy="365760"/>
+          </a:xfrm>
+          <a:prstGeom prst="rect">
+            <a:avLst/>
+          </a:prstGeom>
+          <a:noFill/>
+          <a:ln/>
+        </p:spPr>
+        <p:txBody>
+          <a:bodyPr wrap="square" lIns="0" tIns="0" rIns="0" bIns="0" rtlCol="0" anchor="ctr"/>
+          <a:lstStyle/>
+          <a:p>
+            <a:pPr marL="0" indent="0">
+              <a:buNone/>
+            </a:pPr>
+            <a:r>
+              <a:rPr lang="en-US" sz="1600" b="1" dirty="0">
+                <a:solidFill>
+                  <a:schemeClr val="tx1"/>
+                </a:solidFill>
+              </a:rPr>
+              <a:t>Shop stock</a:t>
+            </a:r>
+            <a:endParaRPr lang="en-US" sz="1600" dirty="0"/>
+          </a:p>
+        </p:txBody>
+      </p:sp>
+      <p:sp>
+        <p:nvSpPr>
+          <p:cNvPr id="15" name="Text 12"/>
+          <p:cNvSpPr txBox="1"/>
+          <p:nvPr/>
+        </p:nvSpPr>
+        <p:spPr>
+          <a:xfrm>
+            <a:off x="3566160" y="2121408"/>
+            <a:ext cx="2286000" cy="868680"/>
+          </a:xfrm>
+          <a:prstGeom prst="rect">
+            <a:avLst/>
+          </a:prstGeom>
+          <a:noFill/>
+          <a:ln/>
+        </p:spPr>
+        <p:txBody>
+          <a:bodyPr wrap="square" lIns="0" tIns="0" rIns="0" bIns="0" rtlCol="0" anchor="t"/>
+          <a:lstStyle/>
+          <a:p>
+            <a:pPr marL="0" indent="0">
+              <a:buNone/>
+            </a:pPr>
+            <a:r>
+              <a:rPr lang="en-US" sz="1300" dirty="0">
+                <a:solidFill>
+                  <a:srgbClr val="3D4552"/>
+                </a:solidFill>
+              </a:rPr>
+              <a:t>Glue pushes stock to the shop only. Staff keep everything else.</a:t>
+            </a:r>
+            <a:endParaRPr lang="en-US" sz="1300" dirty="0"/>
+          </a:p>
+        </p:txBody>
+      </p:sp>
+      <p:sp>
+        <p:nvSpPr>
+          <p:cNvPr id="16" name="Shape 13"/>
+          <p:cNvSpPr/>
+          <p:nvPr/>
+        </p:nvSpPr>
+        <p:spPr>
+          <a:xfrm>
+            <a:off x="6016752" y="2263140"/>
+            <a:ext cx="173736" cy="0"/>
+          </a:xfrm>
+          <a:prstGeom prst="line">
+            <a:avLst/>
+          </a:prstGeom>
+          <a:noFill/>
+          <a:ln w="15875">
+            <a:solidFill>
+              <a:schemeClr val="tx1"/>
+            </a:solidFill>
+            <a:prstDash val="solid"/>
+            <a:tailEnd type="triangle"/>
+          </a:ln>
+        </p:spPr>
+        <p:txBody>
+          <a:bodyPr/>
+          <a:lstStyle/>
+          <a:p>
+            <a:endParaRPr lang="en-US"/>
+          </a:p>
+        </p:txBody>
+      </p:sp>
+      <p:sp>
+        <p:nvSpPr>
+          <p:cNvPr id="17" name="eMAG stock"/>
+          <p:cNvSpPr/>
+          <p:nvPr/>
+        </p:nvSpPr>
+        <p:spPr>
+          <a:xfrm>
+            <a:off x="6217920" y="1463040"/>
+            <a:ext cx="2606040" cy="1600200"/>
+          </a:xfrm>
+          <a:prstGeom prst="roundRect">
+            <a:avLst>
+              <a:gd name="adj" fmla="val 4571"/>
+            </a:avLst>
+          </a:prstGeom>
+          <a:solidFill>
+            <a:schemeClr val="bg1"/>
+          </a:solidFill>
+          <a:ln w="9525">
+            <a:solidFill>
+              <a:srgbClr val="E3E6EB"/>
+            </a:solidFill>
+            <a:prstDash val="solid"/>
+          </a:ln>
+        </p:spPr>
+        <p:txBody>
+          <a:bodyPr/>
+          <a:lstStyle/>
+          <a:p>
+            <a:endParaRPr lang="en-US"/>
+          </a:p>
+        </p:txBody>
+      </p:sp>
+      <p:sp>
+        <p:nvSpPr>
+          <p:cNvPr id="18" name="step 3"/>
+          <p:cNvSpPr/>
+          <p:nvPr/>
+        </p:nvSpPr>
+        <p:spPr>
+          <a:xfrm>
+            <a:off x="6400800" y="1627632"/>
+            <a:ext cx="365760" cy="365760"/>
+          </a:xfrm>
+          <a:prstGeom prst="ellipse">
+            <a:avLst/>
+          </a:prstGeom>
+          <a:solidFill>
+            <a:schemeClr val="accent1"/>
+          </a:solidFill>
+          <a:ln/>
+        </p:spPr>
+        <p:txBody>
+          <a:bodyPr/>
+          <a:lstStyle/>
+          <a:p>
+            <a:endParaRPr lang="en-US"/>
+          </a:p>
+        </p:txBody>
+      </p:sp>
+      <p:sp>
+        <p:nvSpPr>
+          <p:cNvPr id="19" name="Text 16"/>
+          <p:cNvSpPr txBox="1"/>
+          <p:nvPr/>
+        </p:nvSpPr>
+        <p:spPr>
+          <a:xfrm>
+            <a:off x="6400800" y="1627632"/>
+            <a:ext cx="365760" cy="365760"/>
+          </a:xfrm>
+          <a:prstGeom prst="rect">
+            <a:avLst/>
+          </a:prstGeom>
+          <a:noFill/>
+          <a:ln/>
+        </p:spPr>
+        <p:txBody>
+          <a:bodyPr wrap="square" lIns="0" tIns="0" rIns="0" bIns="0" rtlCol="0" anchor="ctr"/>
+          <a:lstStyle/>
+          <a:p>
+            <a:pPr marL="0" indent="0" algn="ctr">
+              <a:buNone/>
+            </a:pPr>
+            <a:r>
+              <a:rPr lang="en-US" sz="1200" b="1" dirty="0">
+                <a:solidFill>
+                  <a:schemeClr val="bg1"/>
+                </a:solidFill>
+              </a:rPr>
+              <a:t>3</a:t>
+            </a:r>
+            <a:endParaRPr lang="en-US" sz="1200" dirty="0"/>
+          </a:p>
+        </p:txBody>
+      </p:sp>
+      <p:sp>
+        <p:nvSpPr>
+          <p:cNvPr id="20" name="Text 17"/>
+          <p:cNvSpPr txBox="1"/>
+          <p:nvPr/>
+        </p:nvSpPr>
+        <p:spPr>
+          <a:xfrm>
+            <a:off x="6876288" y="1627632"/>
+            <a:ext cx="1828800" cy="365760"/>
+          </a:xfrm>
+          <a:prstGeom prst="rect">
+            <a:avLst/>
+          </a:prstGeom>
+          <a:noFill/>
+          <a:ln/>
+        </p:spPr>
+        <p:txBody>
+          <a:bodyPr wrap="square" lIns="0" tIns="0" rIns="0" bIns="0" rtlCol="0" anchor="ctr"/>
+          <a:lstStyle/>
+          <a:p>
+            <a:pPr marL="0" indent="0">
+              <a:buNone/>
+            </a:pPr>
+            <a:r>
+              <a:rPr lang="en-US" sz="1600" b="1" dirty="0">
+                <a:solidFill>
+                  <a:schemeClr val="tx1"/>
+                </a:solidFill>
+              </a:rPr>
+              <a:t>eMAG stock</a:t>
+            </a:r>
+            <a:endParaRPr lang="en-US" sz="1600" dirty="0"/>
+          </a:p>
+        </p:txBody>
+      </p:sp>
+      <p:sp>
+        <p:nvSpPr>
+          <p:cNvPr id="21" name="Text 18"/>
+          <p:cNvSpPr txBox="1"/>
+          <p:nvPr/>
+        </p:nvSpPr>
+        <p:spPr>
+          <a:xfrm>
+            <a:off x="6400800" y="2121408"/>
+            <a:ext cx="2286000" cy="868680"/>
+          </a:xfrm>
+          <a:prstGeom prst="rect">
+            <a:avLst/>
+          </a:prstGeom>
+          <a:noFill/>
+          <a:ln/>
+        </p:spPr>
+        <p:txBody>
+          <a:bodyPr wrap="square" lIns="0" tIns="0" rIns="0" bIns="0" rtlCol="0" anchor="t"/>
+          <a:lstStyle/>
+          <a:p>
+            <a:pPr marL="0" indent="0">
+              <a:buNone/>
+            </a:pPr>
+            <a:r>
+              <a:rPr lang="en-US" sz="1300" dirty="0">
+                <a:solidFill>
+                  <a:srgbClr val="3D4552"/>
+                </a:solidFill>
+              </a:rPr>
+              <a:t>Then eMAG. Oversell risk drops; eMAG's real rate limits are met here.</a:t>
+            </a:r>
+            <a:endParaRPr lang="en-US" sz="1300" dirty="0"/>
+          </a:p>
+        </p:txBody>
+      </p:sp>
+      <p:sp>
+        <p:nvSpPr>
+          <p:cNvPr id="22" name="Shape 19"/>
+          <p:cNvSpPr/>
+          <p:nvPr/>
+        </p:nvSpPr>
+        <p:spPr>
+          <a:xfrm>
+            <a:off x="8851392" y="2263140"/>
+            <a:ext cx="173736" cy="0"/>
+          </a:xfrm>
+          <a:prstGeom prst="line">
+            <a:avLst/>
+          </a:prstGeom>
+          <a:noFill/>
+          <a:ln w="15875">
+            <a:solidFill>
+              <a:schemeClr val="tx1"/>
+            </a:solidFill>
+            <a:prstDash val="solid"/>
+            <a:tailEnd type="triangle"/>
+          </a:ln>
+        </p:spPr>
+        <p:txBody>
+          <a:bodyPr/>
+          <a:lstStyle/>
+          <a:p>
+            <a:endParaRPr lang="en-US"/>
+          </a:p>
+        </p:txBody>
+      </p:sp>
+      <p:sp>
+        <p:nvSpPr>
+          <p:cNvPr id="23" name="Orders"/>
+          <p:cNvSpPr/>
+          <p:nvPr/>
+        </p:nvSpPr>
+        <p:spPr>
+          <a:xfrm>
+            <a:off x="9052560" y="1463040"/>
+            <a:ext cx="2606040" cy="1600200"/>
+          </a:xfrm>
+          <a:prstGeom prst="roundRect">
+            <a:avLst>
+              <a:gd name="adj" fmla="val 4571"/>
+            </a:avLst>
+          </a:prstGeom>
+          <a:solidFill>
+            <a:srgbClr val="E8EEFD"/>
+          </a:solidFill>
+          <a:ln w="9525">
+            <a:solidFill>
+              <a:srgbClr val="9DB4F0"/>
+            </a:solidFill>
+            <a:prstDash val="solid"/>
+          </a:ln>
+        </p:spPr>
+        <p:txBody>
+          <a:bodyPr/>
+          <a:lstStyle/>
+          <a:p>
+            <a:endParaRPr lang="en-US"/>
+          </a:p>
+        </p:txBody>
+      </p:sp>
+      <p:sp>
+        <p:nvSpPr>
+          <p:cNvPr id="24" name="step 4"/>
+          <p:cNvSpPr/>
+          <p:nvPr/>
+        </p:nvSpPr>
+        <p:spPr>
+          <a:xfrm>
+            <a:off x="9235440" y="1627632"/>
+            <a:ext cx="365760" cy="365760"/>
+          </a:xfrm>
+          <a:prstGeom prst="ellipse">
+            <a:avLst/>
+          </a:prstGeom>
+          <a:solidFill>
+            <a:schemeClr val="accent1"/>
+          </a:solidFill>
+          <a:ln/>
+        </p:spPr>
+        <p:txBody>
+          <a:bodyPr/>
+          <a:lstStyle/>
+          <a:p>
+            <a:endParaRPr lang="en-US"/>
+          </a:p>
+        </p:txBody>
+      </p:sp>
+      <p:sp>
+        <p:nvSpPr>
+          <p:cNvPr id="25" name="Text 22"/>
+          <p:cNvSpPr txBox="1"/>
+          <p:nvPr/>
+        </p:nvSpPr>
+        <p:spPr>
+          <a:xfrm>
+            <a:off x="9235440" y="1627632"/>
+            <a:ext cx="365760" cy="365760"/>
+          </a:xfrm>
+          <a:prstGeom prst="rect">
+            <a:avLst/>
+          </a:prstGeom>
+          <a:noFill/>
+          <a:ln/>
+        </p:spPr>
+        <p:txBody>
+          <a:bodyPr wrap="square" lIns="0" tIns="0" rIns="0" bIns="0" rtlCol="0" anchor="ctr"/>
+          <a:lstStyle/>
+          <a:p>
+            <a:pPr marL="0" indent="0" algn="ctr">
+              <a:buNone/>
+            </a:pPr>
+            <a:r>
+              <a:rPr lang="en-US" sz="1200" b="1" dirty="0">
+                <a:solidFill>
+                  <a:schemeClr val="bg1"/>
+                </a:solidFill>
+              </a:rPr>
+              <a:t>4</a:t>
+            </a:r>
+            <a:endParaRPr lang="en-US" sz="1200" dirty="0"/>
+          </a:p>
+        </p:txBody>
+      </p:sp>
+      <p:sp>
+        <p:nvSpPr>
+          <p:cNvPr id="26" name="Text 23"/>
+          <p:cNvSpPr txBox="1"/>
+          <p:nvPr/>
+        </p:nvSpPr>
+        <p:spPr>
+          <a:xfrm>
+            <a:off x="9710928" y="1627632"/>
+            <a:ext cx="1828800" cy="365760"/>
+          </a:xfrm>
+          <a:prstGeom prst="rect">
+            <a:avLst/>
+          </a:prstGeom>
+          <a:noFill/>
+          <a:ln/>
+        </p:spPr>
+        <p:txBody>
+          <a:bodyPr wrap="square" lIns="0" tIns="0" rIns="0" bIns="0" rtlCol="0" anchor="ctr"/>
+          <a:lstStyle/>
+          <a:p>
+            <a:pPr marL="0" indent="0">
+              <a:buNone/>
+            </a:pPr>
+            <a:r>
+              <a:rPr lang="en-US" sz="1600" b="1" dirty="0">
+                <a:solidFill>
+                  <a:schemeClr val="tx1"/>
+                </a:solidFill>
+              </a:rPr>
+              <a:t>Orders</a:t>
+            </a:r>
+            <a:endParaRPr lang="en-US" sz="1600" dirty="0"/>
+          </a:p>
+        </p:txBody>
+      </p:sp>
+      <p:sp>
+        <p:nvSpPr>
+          <p:cNvPr id="27" name="Text 24"/>
+          <p:cNvSpPr txBox="1"/>
+          <p:nvPr/>
+        </p:nvSpPr>
+        <p:spPr>
+          <a:xfrm>
+            <a:off x="9235440" y="2121408"/>
+            <a:ext cx="2286000" cy="868680"/>
+          </a:xfrm>
+          <a:prstGeom prst="rect">
+            <a:avLst/>
+          </a:prstGeom>
+          <a:noFill/>
+          <a:ln/>
+        </p:spPr>
+        <p:txBody>
+          <a:bodyPr wrap="square" lIns="0" tIns="0" rIns="0" bIns="0" rtlCol="0" anchor="t"/>
+          <a:lstStyle/>
+          <a:p>
+            <a:pPr marL="0" indent="0">
+              <a:buNone/>
+            </a:pPr>
+            <a:r>
+              <a:rPr lang="en-US" sz="1300" dirty="0">
+                <a:solidFill>
+                  <a:srgbClr val="3D4552"/>
+                </a:solidFill>
+              </a:rPr>
+              <a:t>eMAG first, as it re-sends until confirmed, then the shop. The queue owner starts.</a:t>
+            </a:r>
+            <a:endParaRPr lang="en-US" sz="1300" dirty="0"/>
+          </a:p>
+        </p:txBody>
+      </p:sp>
+      <p:sp>
+        <p:nvSpPr>
+          <p:cNvPr id="28" name="Text 25"/>
+          <p:cNvSpPr txBox="1"/>
+          <p:nvPr/>
+        </p:nvSpPr>
+        <p:spPr>
+          <a:xfrm>
+            <a:off x="548640" y="3154680"/>
+            <a:ext cx="11094415" cy="274320"/>
+          </a:xfrm>
+          <a:prstGeom prst="rect">
+            <a:avLst/>
+          </a:prstGeom>
+          <a:noFill/>
+          <a:ln/>
+        </p:spPr>
+        <p:txBody>
+          <a:bodyPr wrap="square" lIns="0" tIns="0" rIns="0" bIns="0" rtlCol="0" anchor="t"/>
+          <a:lstStyle/>
+          <a:p>
+            <a:pPr marL="0" indent="0">
+              <a:buNone/>
+            </a:pPr>
+            <a:r>
+              <a:rPr lang="en-US" sz="1200" dirty="0">
+                <a:solidFill>
+                  <a:schemeClr val="tx2"/>
+                </a:solidFill>
+              </a:rPr>
+              <a:t>About a week per stage. Shadow mode and the per-stage switches are not built yet: each is a flag checked before Glue calls a system.</a:t>
+            </a:r>
+            <a:endParaRPr lang="en-US" sz="1200" dirty="0"/>
+          </a:p>
+        </p:txBody>
+      </p:sp>
+      <p:sp>
+        <p:nvSpPr>
+          <p:cNvPr id="30" name="success"/>
+          <p:cNvSpPr/>
+          <p:nvPr/>
+        </p:nvSpPr>
+        <p:spPr>
+          <a:xfrm>
+            <a:off x="548640" y="3611880"/>
+            <a:ext cx="11091672" cy="1783080"/>
+          </a:xfrm>
+          <a:prstGeom prst="roundRect">
+            <a:avLst>
+              <a:gd name="adj" fmla="val 3636"/>
+            </a:avLst>
+          </a:prstGeom>
+          <a:solidFill>
+            <a:schemeClr val="bg2"/>
+          </a:solidFill>
+          <a:ln/>
+        </p:spPr>
+        <p:txBody>
+          <a:bodyPr/>
+          <a:lstStyle/>
+          <a:p>
+            <a:endParaRPr lang="en-US"/>
+          </a:p>
+        </p:txBody>
+      </p:sp>
+      <p:sp>
+        <p:nvSpPr>
+          <p:cNvPr id="31" name="Text 29"/>
+          <p:cNvSpPr txBox="1"/>
+          <p:nvPr/>
+        </p:nvSpPr>
+        <p:spPr>
+          <a:xfrm>
+            <a:off x="777240" y="3767328"/>
+            <a:ext cx="4937760" cy="274320"/>
+          </a:xfrm>
+          <a:prstGeom prst="rect">
+            <a:avLst/>
+          </a:prstGeom>
+          <a:noFill/>
+          <a:ln/>
+        </p:spPr>
+        <p:txBody>
+          <a:bodyPr wrap="square" lIns="0" tIns="0" rIns="0" bIns="0" rtlCol="0" anchor="t"/>
+          <a:lstStyle/>
+          <a:p>
+            <a:pPr marL="0" indent="0">
+              <a:buNone/>
+            </a:pPr>
+            <a:r>
+              <a:rPr lang="en-US" sz="1500" b="1" dirty="0">
+                <a:solidFill>
+                  <a:schemeClr val="tx1"/>
+                </a:solidFill>
+              </a:rPr>
+              <a:t>Success after 30 days</a:t>
+            </a:r>
+            <a:endParaRPr lang="en-US" sz="1500" dirty="0"/>
+          </a:p>
+        </p:txBody>
+      </p:sp>
+      <p:sp>
+        <p:nvSpPr>
+          <p:cNvPr id="32" name="Text 30"/>
+          <p:cNvSpPr txBox="1"/>
+          <p:nvPr/>
+        </p:nvSpPr>
+        <p:spPr>
+          <a:xfrm>
+            <a:off x="777240" y="4114800"/>
+            <a:ext cx="10607040" cy="1828800"/>
+          </a:xfrm>
+          <a:prstGeom prst="rect">
+            <a:avLst/>
+          </a:prstGeom>
+          <a:noFill/>
+          <a:ln/>
+        </p:spPr>
+        <p:txBody>
+          <a:bodyPr wrap="square" lIns="0" tIns="0" rIns="0" bIns="0" rtlCol="0" anchor="t"/>
+          <a:lstStyle/>
+          <a:p>
+            <a:pPr marL="177800" indent="-177800">
+              <a:spcAft>
+                <a:spcPts val="500"/>
+              </a:spcAft>
+              <a:buSzPct val="100000"/>
+              <a:buChar char="•"/>
+            </a:pPr>
+            <a:r>
+              <a:rPr lang="en-US" sz="1300" dirty="0">
+                <a:solidFill>
+                  <a:srgbClr val="3D4552"/>
+                </a:solidFill>
+              </a:rPr>
+              <a:t>Missed orders: zero, and Flow shows no lost orders</a:t>
+            </a:r>
+            <a:endParaRPr lang="en-US" sz="1300" dirty="0"/>
+          </a:p>
+          <a:p>
+            <a:pPr marL="177800" indent="-177800">
+              <a:spcAft>
+                <a:spcPts val="500"/>
+              </a:spcAft>
+              <a:buSzPct val="100000"/>
+              <a:buChar char="•"/>
+            </a:pPr>
+            <a:r>
+              <a:rPr lang="en-US" sz="1300" dirty="0">
+                <a:solidFill>
+                  <a:srgbClr val="3D4552"/>
+                </a:solidFill>
+              </a:rPr>
+              <a:t>Oversells well below the baseline</a:t>
+            </a:r>
+            <a:endParaRPr lang="en-US" sz="1300" dirty="0"/>
+          </a:p>
+          <a:p>
+            <a:pPr marL="177800" indent="-177800">
+              <a:spcAft>
+                <a:spcPts val="500"/>
+              </a:spcAft>
+              <a:buSzPct val="100000"/>
+              <a:buChar char="•"/>
+            </a:pPr>
+            <a:r>
+              <a:rPr lang="en-US" sz="1300" dirty="0">
+                <a:solidFill>
+                  <a:srgbClr val="3D4552"/>
+                </a:solidFill>
+              </a:rPr>
+              <a:t>eMAG seller cancellation rate inside eMAG's threshold</a:t>
+            </a:r>
+            <a:endParaRPr lang="en-US" sz="1300" dirty="0"/>
+          </a:p>
+          <a:p>
+            <a:pPr marL="177800" indent="-177800">
+              <a:spcAft>
+                <a:spcPts val="500"/>
+              </a:spcAft>
+              <a:buSzPct val="100000"/>
+              <a:buChar char="•"/>
+            </a:pPr>
+            <a:r>
+              <a:rPr lang="en-US" sz="1300" dirty="0">
+                <a:solidFill>
+                  <a:srgbClr val="3D4552"/>
+                </a:solidFill>
+              </a:rPr>
+              <a:t>Oldest open review item under 30 min in business hours</a:t>
+            </a:r>
+            <a:endParaRPr lang="en-US" sz="1300" dirty="0"/>
+          </a:p>
+        </p:txBody>
+      </p:sp>
+      <p:sp>
+        <p:nvSpPr>
+          <p:cNvPr id="33" name="Slide Number Placeholder 0"/>
+          <p:cNvSpPr>
+            <a:spLocks noGrp="1"/>
+          </p:cNvSpPr>
+          <p:nvPr>
+            <p:ph type="sldNum" sz="quarter" idx="4294967295"/>
+          </p:nvPr>
+        </p:nvSpPr>
+        <p:spPr>
+          <a:xfrm>
+            <a:off x="11183112" y="6446520"/>
+            <a:ext cx="457200" cy="228600"/>
+          </a:xfrm>
+          <a:prstGeom prst="rect">
+            <a:avLst/>
+          </a:prstGeom>
+          <a:extLst>
+            <a:ext uri="{C572A759-6A51-4108-AA02-DFA0A04FC94B}">
+              <ma14:wrappingTextBoxFlag xmlns:ma14="http://schemas.microsoft.com/office/mac/drawingml/2011/main" xmlns="" val="0"/>
+            </a:ext>
+          </a:extLst>
+        </p:spPr>
+        <p:txBody>
+          <a:bodyPr lIns="0" tIns="0" rIns="0" bIns="0"/>
+          <a:lstStyle>
+            <a:lvl1pPr>
+              <a:defRPr sz="1000">
+                <a:solidFill>
+                  <a:srgbClr val="8A93A1"/>
+                </a:solidFill>
+              </a:defRPr>
+            </a:lvl1pPr>
+          </a:lstStyle>
+          <a:p>
+            <a:pPr algn="r"/>
+            <a:fld id="{F7021451-1387-4CA6-816F-3879F97B5CBC}" type="slidenum">
+              <a:rPr lang="en-US" b="0"/>
+              <a:t>13</a:t>
+            </a:fld>
+            <a:endParaRPr lang="en-US"/>
+          </a:p>
+        </p:txBody>
+      </p:sp>
+    </p:spTree>
+  </p:cSld>
+  <p:clrMapOvr>
+    <a:masterClrMapping/>
+  </p:clrMapOvr>
+</p:sld>
+</file>
+
+<file path=ppt/slides/slide13.xml><?xml version="1.0" encoding="utf-8"?>
 <p:sld xmlns:a="http://schemas.openxmlformats.org/drawingml/2006/main" xmlns:r="http://schemas.openxmlformats.org/officeDocument/2006/relationships" xmlns:p="http://schemas.openxmlformats.org/presentationml/2006/main">
   <p:cSld name="Slide 18">
     <p:spTree>
@@ -5121,1262 +6112,9 @@
                   <a:schemeClr val="tx1"/>
                 </a:solidFill>
               </a:rPr>
-              <a:t>How it was built</a:t>
+              <a:t>How I built it</a:t>
             </a:r>
             <a:endParaRPr lang="en-US" sz="3200" dirty="0"/>
-          </a:p>
-        </p:txBody>
-      </p:sp>
-      <p:sp>
-        <p:nvSpPr>
-          <p:cNvPr id="4" name="timeline"/>
-          <p:cNvSpPr/>
-          <p:nvPr/>
-        </p:nvSpPr>
-        <p:spPr>
-          <a:xfrm>
-            <a:off x="777240" y="1856232"/>
-            <a:ext cx="9509499" cy="18288"/>
-          </a:xfrm>
-          <a:prstGeom prst="rect">
-            <a:avLst/>
-          </a:prstGeom>
-          <a:solidFill>
-            <a:srgbClr val="E3E6EB"/>
-          </a:solidFill>
-          <a:ln/>
-        </p:spPr>
-        <p:txBody>
-          <a:bodyPr/>
-          <a:lstStyle/>
-          <a:p>
-            <a:endParaRPr lang="en-US"/>
-          </a:p>
-        </p:txBody>
-      </p:sp>
-      <p:sp>
-        <p:nvSpPr>
-          <p:cNvPr id="5" name="step 1"/>
-          <p:cNvSpPr/>
-          <p:nvPr/>
-        </p:nvSpPr>
-        <p:spPr>
-          <a:xfrm>
-            <a:off x="594360" y="1645920"/>
-            <a:ext cx="438912" cy="438912"/>
-          </a:xfrm>
-          <a:prstGeom prst="ellipse">
-            <a:avLst/>
-          </a:prstGeom>
-          <a:solidFill>
-            <a:schemeClr val="tx1"/>
-          </a:solidFill>
-          <a:ln/>
-        </p:spPr>
-        <p:txBody>
-          <a:bodyPr/>
-          <a:lstStyle/>
-          <a:p>
-            <a:endParaRPr lang="en-US"/>
-          </a:p>
-        </p:txBody>
-      </p:sp>
-      <p:sp>
-        <p:nvSpPr>
-          <p:cNvPr id="6" name="Text 4"/>
-          <p:cNvSpPr txBox="1"/>
-          <p:nvPr/>
-        </p:nvSpPr>
-        <p:spPr>
-          <a:xfrm>
-            <a:off x="594360" y="1645920"/>
-            <a:ext cx="438912" cy="438912"/>
-          </a:xfrm>
-          <a:prstGeom prst="rect">
-            <a:avLst/>
-          </a:prstGeom>
-          <a:noFill/>
-          <a:ln/>
-        </p:spPr>
-        <p:txBody>
-          <a:bodyPr wrap="square" lIns="0" tIns="0" rIns="0" bIns="0" rtlCol="0" anchor="ctr"/>
-          <a:lstStyle/>
-          <a:p>
-            <a:pPr marL="0" indent="0" algn="ctr">
-              <a:buNone/>
-            </a:pPr>
-            <a:r>
-              <a:rPr lang="en-US" sz="1500" b="1" dirty="0">
-                <a:solidFill>
-                  <a:schemeClr val="bg1"/>
-                </a:solidFill>
-              </a:rPr>
-              <a:t>1</a:t>
-            </a:r>
-            <a:endParaRPr lang="en-US" sz="1500" dirty="0"/>
-          </a:p>
-        </p:txBody>
-      </p:sp>
-      <p:sp>
-        <p:nvSpPr>
-          <p:cNvPr id="7" name="Text 5"/>
-          <p:cNvSpPr txBox="1"/>
-          <p:nvPr/>
-        </p:nvSpPr>
-        <p:spPr>
-          <a:xfrm>
-            <a:off x="548640" y="2286000"/>
-            <a:ext cx="1447756" cy="566928"/>
-          </a:xfrm>
-          <a:prstGeom prst="rect">
-            <a:avLst/>
-          </a:prstGeom>
-          <a:noFill/>
-          <a:ln/>
-        </p:spPr>
-        <p:txBody>
-          <a:bodyPr wrap="square" lIns="0" tIns="0" rIns="0" bIns="0" rtlCol="0" anchor="t"/>
-          <a:lstStyle/>
-          <a:p>
-            <a:pPr marL="0" indent="0">
-              <a:buNone/>
-            </a:pPr>
-            <a:r>
-              <a:rPr lang="en-US" sz="1400" b="1" dirty="0">
-                <a:solidFill>
-                  <a:schemeClr val="tx1"/>
-                </a:solidFill>
-              </a:rPr>
-              <a:t>Requirement</a:t>
-            </a:r>
-            <a:endParaRPr lang="en-US" sz="1400" dirty="0"/>
-          </a:p>
-        </p:txBody>
-      </p:sp>
-      <p:sp>
-        <p:nvSpPr>
-          <p:cNvPr id="8" name="Text 6"/>
-          <p:cNvSpPr txBox="1"/>
-          <p:nvPr/>
-        </p:nvSpPr>
-        <p:spPr>
-          <a:xfrm>
-            <a:off x="548640" y="2880360"/>
-            <a:ext cx="1447756" cy="1463040"/>
-          </a:xfrm>
-          <a:prstGeom prst="rect">
-            <a:avLst/>
-          </a:prstGeom>
-          <a:noFill/>
-          <a:ln/>
-        </p:spPr>
-        <p:txBody>
-          <a:bodyPr wrap="square" lIns="0" tIns="0" rIns="0" bIns="0" rtlCol="0" anchor="t"/>
-          <a:lstStyle/>
-          <a:p>
-            <a:pPr marL="0" indent="0">
-              <a:buNone/>
-            </a:pPr>
-            <a:r>
-              <a:rPr lang="en-US" sz="1200" dirty="0">
-                <a:solidFill>
-                  <a:srgbClr val="3D4552"/>
-                </a:solidFill>
-              </a:rPr>
-              <a:t>Sync orders and stock; handle conflicts, retries and partial failures.</a:t>
-            </a:r>
-            <a:endParaRPr lang="en-US" sz="1200" dirty="0"/>
-          </a:p>
-        </p:txBody>
-      </p:sp>
-      <p:sp>
-        <p:nvSpPr>
-          <p:cNvPr id="9" name="step 2"/>
-          <p:cNvSpPr/>
-          <p:nvPr/>
-        </p:nvSpPr>
-        <p:spPr>
-          <a:xfrm>
-            <a:off x="2179276" y="1645920"/>
-            <a:ext cx="438912" cy="438912"/>
-          </a:xfrm>
-          <a:prstGeom prst="ellipse">
-            <a:avLst/>
-          </a:prstGeom>
-          <a:solidFill>
-            <a:schemeClr val="tx1"/>
-          </a:solidFill>
-          <a:ln/>
-        </p:spPr>
-        <p:txBody>
-          <a:bodyPr/>
-          <a:lstStyle/>
-          <a:p>
-            <a:endParaRPr lang="en-US"/>
-          </a:p>
-        </p:txBody>
-      </p:sp>
-      <p:sp>
-        <p:nvSpPr>
-          <p:cNvPr id="10" name="Text 8"/>
-          <p:cNvSpPr txBox="1"/>
-          <p:nvPr/>
-        </p:nvSpPr>
-        <p:spPr>
-          <a:xfrm>
-            <a:off x="2179276" y="1645920"/>
-            <a:ext cx="438912" cy="438912"/>
-          </a:xfrm>
-          <a:prstGeom prst="rect">
-            <a:avLst/>
-          </a:prstGeom>
-          <a:noFill/>
-          <a:ln/>
-        </p:spPr>
-        <p:txBody>
-          <a:bodyPr wrap="square" lIns="0" tIns="0" rIns="0" bIns="0" rtlCol="0" anchor="ctr"/>
-          <a:lstStyle/>
-          <a:p>
-            <a:pPr marL="0" indent="0" algn="ctr">
-              <a:buNone/>
-            </a:pPr>
-            <a:r>
-              <a:rPr lang="en-US" sz="1500" b="1" dirty="0">
-                <a:solidFill>
-                  <a:schemeClr val="bg1"/>
-                </a:solidFill>
-              </a:rPr>
-              <a:t>2</a:t>
-            </a:r>
-            <a:endParaRPr lang="en-US" sz="1500" dirty="0"/>
-          </a:p>
-        </p:txBody>
-      </p:sp>
-      <p:sp>
-        <p:nvSpPr>
-          <p:cNvPr id="11" name="Text 9"/>
-          <p:cNvSpPr txBox="1"/>
-          <p:nvPr/>
-        </p:nvSpPr>
-        <p:spPr>
-          <a:xfrm>
-            <a:off x="2133556" y="2286000"/>
-            <a:ext cx="1447756" cy="566928"/>
-          </a:xfrm>
-          <a:prstGeom prst="rect">
-            <a:avLst/>
-          </a:prstGeom>
-          <a:noFill/>
-          <a:ln/>
-        </p:spPr>
-        <p:txBody>
-          <a:bodyPr wrap="square" lIns="0" tIns="0" rIns="0" bIns="0" rtlCol="0" anchor="t"/>
-          <a:lstStyle/>
-          <a:p>
-            <a:pPr marL="0" indent="0">
-              <a:buNone/>
-            </a:pPr>
-            <a:r>
-              <a:rPr lang="en-US" sz="1400" b="1" dirty="0">
-                <a:solidFill>
-                  <a:schemeClr val="tx1"/>
-                </a:solidFill>
-              </a:rPr>
-              <a:t>Scenario</a:t>
-            </a:r>
-            <a:endParaRPr lang="en-US" sz="1400" dirty="0"/>
-          </a:p>
-        </p:txBody>
-      </p:sp>
-      <p:sp>
-        <p:nvSpPr>
-          <p:cNvPr id="12" name="Text 10"/>
-          <p:cNvSpPr txBox="1"/>
-          <p:nvPr/>
-        </p:nvSpPr>
-        <p:spPr>
-          <a:xfrm>
-            <a:off x="2133556" y="2880360"/>
-            <a:ext cx="1447756" cy="1463040"/>
-          </a:xfrm>
-          <a:prstGeom prst="rect">
-            <a:avLst/>
-          </a:prstGeom>
-          <a:noFill/>
-          <a:ln/>
-        </p:spPr>
-        <p:txBody>
-          <a:bodyPr wrap="square" lIns="0" tIns="0" rIns="0" bIns="0" rtlCol="0" anchor="t"/>
-          <a:lstStyle/>
-          <a:p>
-            <a:pPr marL="0" indent="0">
-              <a:buNone/>
-            </a:pPr>
-            <a:r>
-              <a:rPr lang="en-US" sz="1200" dirty="0">
-                <a:solidFill>
-                  <a:srgbClr val="3D4552"/>
-                </a:solidFill>
-              </a:rPr>
-              <a:t>A real-shaped customer; the real APIs' delivery rules researched first.</a:t>
-            </a:r>
-            <a:endParaRPr lang="en-US" sz="1200" dirty="0"/>
-          </a:p>
-        </p:txBody>
-      </p:sp>
-      <p:sp>
-        <p:nvSpPr>
-          <p:cNvPr id="13" name="step 3"/>
-          <p:cNvSpPr/>
-          <p:nvPr/>
-        </p:nvSpPr>
-        <p:spPr>
-          <a:xfrm>
-            <a:off x="3764193" y="1645920"/>
-            <a:ext cx="438912" cy="438912"/>
-          </a:xfrm>
-          <a:prstGeom prst="ellipse">
-            <a:avLst/>
-          </a:prstGeom>
-          <a:solidFill>
-            <a:schemeClr val="tx1"/>
-          </a:solidFill>
-          <a:ln/>
-        </p:spPr>
-        <p:txBody>
-          <a:bodyPr/>
-          <a:lstStyle/>
-          <a:p>
-            <a:endParaRPr lang="en-US"/>
-          </a:p>
-        </p:txBody>
-      </p:sp>
-      <p:sp>
-        <p:nvSpPr>
-          <p:cNvPr id="14" name="Text 12"/>
-          <p:cNvSpPr txBox="1"/>
-          <p:nvPr/>
-        </p:nvSpPr>
-        <p:spPr>
-          <a:xfrm>
-            <a:off x="3764193" y="1645920"/>
-            <a:ext cx="438912" cy="438912"/>
-          </a:xfrm>
-          <a:prstGeom prst="rect">
-            <a:avLst/>
-          </a:prstGeom>
-          <a:noFill/>
-          <a:ln/>
-        </p:spPr>
-        <p:txBody>
-          <a:bodyPr wrap="square" lIns="0" tIns="0" rIns="0" bIns="0" rtlCol="0" anchor="ctr"/>
-          <a:lstStyle/>
-          <a:p>
-            <a:pPr marL="0" indent="0" algn="ctr">
-              <a:buNone/>
-            </a:pPr>
-            <a:r>
-              <a:rPr lang="en-US" sz="1500" b="1" dirty="0">
-                <a:solidFill>
-                  <a:schemeClr val="bg1"/>
-                </a:solidFill>
-              </a:rPr>
-              <a:t>3</a:t>
-            </a:r>
-            <a:endParaRPr lang="en-US" sz="1500" dirty="0"/>
-          </a:p>
-        </p:txBody>
-      </p:sp>
-      <p:sp>
-        <p:nvSpPr>
-          <p:cNvPr id="15" name="Text 13"/>
-          <p:cNvSpPr txBox="1"/>
-          <p:nvPr/>
-        </p:nvSpPr>
-        <p:spPr>
-          <a:xfrm>
-            <a:off x="3718473" y="2286000"/>
-            <a:ext cx="1447756" cy="566928"/>
-          </a:xfrm>
-          <a:prstGeom prst="rect">
-            <a:avLst/>
-          </a:prstGeom>
-          <a:noFill/>
-          <a:ln/>
-        </p:spPr>
-        <p:txBody>
-          <a:bodyPr wrap="square" lIns="0" tIns="0" rIns="0" bIns="0" rtlCol="0" anchor="t"/>
-          <a:lstStyle/>
-          <a:p>
-            <a:pPr marL="0" indent="0">
-              <a:buNone/>
-            </a:pPr>
-            <a:r>
-              <a:rPr lang="en-US" sz="1400" b="1" dirty="0">
-                <a:solidFill>
-                  <a:schemeClr val="tx1"/>
-                </a:solidFill>
-              </a:rPr>
-              <a:t>Design first</a:t>
-            </a:r>
-            <a:endParaRPr lang="en-US" sz="1400" dirty="0"/>
-          </a:p>
-        </p:txBody>
-      </p:sp>
-      <p:sp>
-        <p:nvSpPr>
-          <p:cNvPr id="16" name="Text 14"/>
-          <p:cNvSpPr txBox="1"/>
-          <p:nvPr/>
-        </p:nvSpPr>
-        <p:spPr>
-          <a:xfrm>
-            <a:off x="3718473" y="2880360"/>
-            <a:ext cx="1447756" cy="1463040"/>
-          </a:xfrm>
-          <a:prstGeom prst="rect">
-            <a:avLst/>
-          </a:prstGeom>
-          <a:noFill/>
-          <a:ln/>
-        </p:spPr>
-        <p:txBody>
-          <a:bodyPr wrap="square" lIns="0" tIns="0" rIns="0" bIns="0" rtlCol="0" anchor="t"/>
-          <a:lstStyle/>
-          <a:p>
-            <a:pPr marL="0" indent="0">
-              <a:buNone/>
-            </a:pPr>
-            <a:r>
-              <a:rPr lang="en-US" sz="1200" dirty="0">
-                <a:solidFill>
-                  <a:srgbClr val="3D4552"/>
-                </a:solidFill>
-              </a:rPr>
-              <a:t>Mockups of every screen, approved before any code.</a:t>
-            </a:r>
-            <a:endParaRPr lang="en-US" sz="1200" dirty="0"/>
-          </a:p>
-        </p:txBody>
-      </p:sp>
-      <p:sp>
-        <p:nvSpPr>
-          <p:cNvPr id="17" name="step 4"/>
-          <p:cNvSpPr/>
-          <p:nvPr/>
-        </p:nvSpPr>
-        <p:spPr>
-          <a:xfrm>
-            <a:off x="5349109" y="1645920"/>
-            <a:ext cx="438912" cy="438912"/>
-          </a:xfrm>
-          <a:prstGeom prst="ellipse">
-            <a:avLst/>
-          </a:prstGeom>
-          <a:solidFill>
-            <a:schemeClr val="tx1"/>
-          </a:solidFill>
-          <a:ln/>
-        </p:spPr>
-        <p:txBody>
-          <a:bodyPr/>
-          <a:lstStyle/>
-          <a:p>
-            <a:endParaRPr lang="en-US"/>
-          </a:p>
-        </p:txBody>
-      </p:sp>
-      <p:sp>
-        <p:nvSpPr>
-          <p:cNvPr id="18" name="Text 16"/>
-          <p:cNvSpPr txBox="1"/>
-          <p:nvPr/>
-        </p:nvSpPr>
-        <p:spPr>
-          <a:xfrm>
-            <a:off x="5349109" y="1645920"/>
-            <a:ext cx="438912" cy="438912"/>
-          </a:xfrm>
-          <a:prstGeom prst="rect">
-            <a:avLst/>
-          </a:prstGeom>
-          <a:noFill/>
-          <a:ln/>
-        </p:spPr>
-        <p:txBody>
-          <a:bodyPr wrap="square" lIns="0" tIns="0" rIns="0" bIns="0" rtlCol="0" anchor="ctr"/>
-          <a:lstStyle/>
-          <a:p>
-            <a:pPr marL="0" indent="0" algn="ctr">
-              <a:buNone/>
-            </a:pPr>
-            <a:r>
-              <a:rPr lang="en-US" sz="1500" b="1" dirty="0">
-                <a:solidFill>
-                  <a:schemeClr val="bg1"/>
-                </a:solidFill>
-              </a:rPr>
-              <a:t>4</a:t>
-            </a:r>
-            <a:endParaRPr lang="en-US" sz="1500" dirty="0"/>
-          </a:p>
-        </p:txBody>
-      </p:sp>
-      <p:sp>
-        <p:nvSpPr>
-          <p:cNvPr id="19" name="Text 17"/>
-          <p:cNvSpPr txBox="1"/>
-          <p:nvPr/>
-        </p:nvSpPr>
-        <p:spPr>
-          <a:xfrm>
-            <a:off x="5303389" y="2286000"/>
-            <a:ext cx="1447756" cy="566928"/>
-          </a:xfrm>
-          <a:prstGeom prst="rect">
-            <a:avLst/>
-          </a:prstGeom>
-          <a:noFill/>
-          <a:ln/>
-        </p:spPr>
-        <p:txBody>
-          <a:bodyPr wrap="square" lIns="0" tIns="0" rIns="0" bIns="0" rtlCol="0" anchor="t"/>
-          <a:lstStyle/>
-          <a:p>
-            <a:pPr marL="0" indent="0">
-              <a:buNone/>
-            </a:pPr>
-            <a:r>
-              <a:rPr lang="en-US" sz="1400" b="1" dirty="0">
-                <a:solidFill>
-                  <a:schemeClr val="tx1"/>
-                </a:solidFill>
-              </a:rPr>
-              <a:t>Written plan</a:t>
-            </a:r>
-            <a:endParaRPr lang="en-US" sz="1400" dirty="0"/>
-          </a:p>
-        </p:txBody>
-      </p:sp>
-      <p:sp>
-        <p:nvSpPr>
-          <p:cNvPr id="20" name="Text 18"/>
-          <p:cNvSpPr txBox="1"/>
-          <p:nvPr/>
-        </p:nvSpPr>
-        <p:spPr>
-          <a:xfrm>
-            <a:off x="5303389" y="2880360"/>
-            <a:ext cx="1447756" cy="1463040"/>
-          </a:xfrm>
-          <a:prstGeom prst="rect">
-            <a:avLst/>
-          </a:prstGeom>
-          <a:noFill/>
-          <a:ln/>
-        </p:spPr>
-        <p:txBody>
-          <a:bodyPr wrap="square" lIns="0" tIns="0" rIns="0" bIns="0" rtlCol="0" anchor="t"/>
-          <a:lstStyle/>
-          <a:p>
-            <a:pPr marL="0" indent="0">
-              <a:buNone/>
-            </a:pPr>
-            <a:r>
-              <a:rPr lang="en-US" sz="1200" dirty="0">
-                <a:solidFill>
-                  <a:srgbClr val="3D4552"/>
-                </a:solidFill>
-              </a:rPr>
-              <a:t>Small tasks with acceptance checks; the sync core before anything else.</a:t>
-            </a:r>
-            <a:endParaRPr lang="en-US" sz="1200" dirty="0"/>
-          </a:p>
-        </p:txBody>
-      </p:sp>
-      <p:sp>
-        <p:nvSpPr>
-          <p:cNvPr id="21" name="step 5"/>
-          <p:cNvSpPr/>
-          <p:nvPr/>
-        </p:nvSpPr>
-        <p:spPr>
-          <a:xfrm>
-            <a:off x="6934026" y="1645920"/>
-            <a:ext cx="438912" cy="438912"/>
-          </a:xfrm>
-          <a:prstGeom prst="ellipse">
-            <a:avLst/>
-          </a:prstGeom>
-          <a:solidFill>
-            <a:schemeClr val="tx1"/>
-          </a:solidFill>
-          <a:ln/>
-        </p:spPr>
-        <p:txBody>
-          <a:bodyPr/>
-          <a:lstStyle/>
-          <a:p>
-            <a:endParaRPr lang="en-US"/>
-          </a:p>
-        </p:txBody>
-      </p:sp>
-      <p:sp>
-        <p:nvSpPr>
-          <p:cNvPr id="22" name="Text 20"/>
-          <p:cNvSpPr txBox="1"/>
-          <p:nvPr/>
-        </p:nvSpPr>
-        <p:spPr>
-          <a:xfrm>
-            <a:off x="6934026" y="1645920"/>
-            <a:ext cx="438912" cy="438912"/>
-          </a:xfrm>
-          <a:prstGeom prst="rect">
-            <a:avLst/>
-          </a:prstGeom>
-          <a:noFill/>
-          <a:ln/>
-        </p:spPr>
-        <p:txBody>
-          <a:bodyPr wrap="square" lIns="0" tIns="0" rIns="0" bIns="0" rtlCol="0" anchor="ctr"/>
-          <a:lstStyle/>
-          <a:p>
-            <a:pPr marL="0" indent="0" algn="ctr">
-              <a:buNone/>
-            </a:pPr>
-            <a:r>
-              <a:rPr lang="en-US" sz="1500" b="1" dirty="0">
-                <a:solidFill>
-                  <a:schemeClr val="bg1"/>
-                </a:solidFill>
-              </a:rPr>
-              <a:t>5</a:t>
-            </a:r>
-            <a:endParaRPr lang="en-US" sz="1500" dirty="0"/>
-          </a:p>
-        </p:txBody>
-      </p:sp>
-      <p:sp>
-        <p:nvSpPr>
-          <p:cNvPr id="23" name="Text 21"/>
-          <p:cNvSpPr txBox="1"/>
-          <p:nvPr/>
-        </p:nvSpPr>
-        <p:spPr>
-          <a:xfrm>
-            <a:off x="6888306" y="2286000"/>
-            <a:ext cx="1447756" cy="566928"/>
-          </a:xfrm>
-          <a:prstGeom prst="rect">
-            <a:avLst/>
-          </a:prstGeom>
-          <a:noFill/>
-          <a:ln/>
-        </p:spPr>
-        <p:txBody>
-          <a:bodyPr wrap="square" lIns="0" tIns="0" rIns="0" bIns="0" rtlCol="0" anchor="t"/>
-          <a:lstStyle/>
-          <a:p>
-            <a:pPr marL="0" indent="0">
-              <a:buNone/>
-            </a:pPr>
-            <a:r>
-              <a:rPr lang="en-US" sz="1400" b="1" dirty="0">
-                <a:solidFill>
-                  <a:schemeClr val="tx1"/>
-                </a:solidFill>
-              </a:rPr>
-              <a:t>Task by task</a:t>
-            </a:r>
-            <a:endParaRPr lang="en-US" sz="1400" dirty="0"/>
-          </a:p>
-        </p:txBody>
-      </p:sp>
-      <p:sp>
-        <p:nvSpPr>
-          <p:cNvPr id="24" name="Text 22"/>
-          <p:cNvSpPr txBox="1"/>
-          <p:nvPr/>
-        </p:nvSpPr>
-        <p:spPr>
-          <a:xfrm>
-            <a:off x="6888306" y="2880360"/>
-            <a:ext cx="1447756" cy="1463040"/>
-          </a:xfrm>
-          <a:prstGeom prst="rect">
-            <a:avLst/>
-          </a:prstGeom>
-          <a:noFill/>
-          <a:ln/>
-        </p:spPr>
-        <p:txBody>
-          <a:bodyPr wrap="square" lIns="0" tIns="0" rIns="0" bIns="0" rtlCol="0" anchor="t"/>
-          <a:lstStyle/>
-          <a:p>
-            <a:pPr marL="0" indent="0">
-              <a:buNone/>
-            </a:pPr>
-            <a:r>
-              <a:rPr lang="en-US" sz="1200" dirty="0">
-                <a:solidFill>
-                  <a:srgbClr val="3D4552"/>
-                </a:solidFill>
-              </a:rPr>
-              <a:t>Each task reviewed independently, with fix rounds until clean.</a:t>
-            </a:r>
-            <a:endParaRPr lang="en-US" sz="1200" dirty="0"/>
-          </a:p>
-        </p:txBody>
-      </p:sp>
-      <p:sp>
-        <p:nvSpPr>
-          <p:cNvPr id="25" name="step 6"/>
-          <p:cNvSpPr/>
-          <p:nvPr/>
-        </p:nvSpPr>
-        <p:spPr>
-          <a:xfrm>
-            <a:off x="8518942" y="1645920"/>
-            <a:ext cx="438912" cy="438912"/>
-          </a:xfrm>
-          <a:prstGeom prst="ellipse">
-            <a:avLst/>
-          </a:prstGeom>
-          <a:solidFill>
-            <a:schemeClr val="accent1"/>
-          </a:solidFill>
-          <a:ln/>
-        </p:spPr>
-        <p:txBody>
-          <a:bodyPr/>
-          <a:lstStyle/>
-          <a:p>
-            <a:endParaRPr lang="en-US"/>
-          </a:p>
-        </p:txBody>
-      </p:sp>
-      <p:sp>
-        <p:nvSpPr>
-          <p:cNvPr id="26" name="Text 24"/>
-          <p:cNvSpPr txBox="1"/>
-          <p:nvPr/>
-        </p:nvSpPr>
-        <p:spPr>
-          <a:xfrm>
-            <a:off x="8518942" y="1645920"/>
-            <a:ext cx="438912" cy="438912"/>
-          </a:xfrm>
-          <a:prstGeom prst="rect">
-            <a:avLst/>
-          </a:prstGeom>
-          <a:noFill/>
-          <a:ln/>
-        </p:spPr>
-        <p:txBody>
-          <a:bodyPr wrap="square" lIns="0" tIns="0" rIns="0" bIns="0" rtlCol="0" anchor="ctr"/>
-          <a:lstStyle/>
-          <a:p>
-            <a:pPr marL="0" indent="0" algn="ctr">
-              <a:buNone/>
-            </a:pPr>
-            <a:r>
-              <a:rPr lang="en-US" sz="1500" b="1" dirty="0">
-                <a:solidFill>
-                  <a:schemeClr val="bg1"/>
-                </a:solidFill>
-              </a:rPr>
-              <a:t>6</a:t>
-            </a:r>
-            <a:endParaRPr lang="en-US" sz="1500" dirty="0"/>
-          </a:p>
-        </p:txBody>
-      </p:sp>
-      <p:sp>
-        <p:nvSpPr>
-          <p:cNvPr id="27" name="Text 25"/>
-          <p:cNvSpPr txBox="1"/>
-          <p:nvPr/>
-        </p:nvSpPr>
-        <p:spPr>
-          <a:xfrm>
-            <a:off x="8473222" y="2286000"/>
-            <a:ext cx="1447756" cy="566928"/>
-          </a:xfrm>
-          <a:prstGeom prst="rect">
-            <a:avLst/>
-          </a:prstGeom>
-          <a:noFill/>
-          <a:ln/>
-        </p:spPr>
-        <p:txBody>
-          <a:bodyPr wrap="square" lIns="0" tIns="0" rIns="0" bIns="0" rtlCol="0" anchor="t"/>
-          <a:lstStyle/>
-          <a:p>
-            <a:pPr marL="0" indent="0">
-              <a:buNone/>
-            </a:pPr>
-            <a:r>
-              <a:rPr lang="en-US" sz="1400" b="1" dirty="0">
-                <a:solidFill>
-                  <a:schemeClr val="tx1"/>
-                </a:solidFill>
-              </a:rPr>
-              <a:t>Analysis, then hardening</a:t>
-            </a:r>
-            <a:endParaRPr lang="en-US" sz="1400" dirty="0"/>
-          </a:p>
-        </p:txBody>
-      </p:sp>
-      <p:sp>
-        <p:nvSpPr>
-          <p:cNvPr id="28" name="Text 26"/>
-          <p:cNvSpPr txBox="1"/>
-          <p:nvPr/>
-        </p:nvSpPr>
-        <p:spPr>
-          <a:xfrm>
-            <a:off x="8473222" y="2880360"/>
-            <a:ext cx="1447756" cy="1463040"/>
-          </a:xfrm>
-          <a:prstGeom prst="rect">
-            <a:avLst/>
-          </a:prstGeom>
-          <a:noFill/>
-          <a:ln/>
-        </p:spPr>
-        <p:txBody>
-          <a:bodyPr wrap="square" lIns="0" tIns="0" rIns="0" bIns="0" rtlCol="0" anchor="t"/>
-          <a:lstStyle/>
-          <a:p>
-            <a:pPr marL="0" indent="0">
-              <a:buNone/>
-            </a:pPr>
-            <a:r>
-              <a:rPr lang="en-US" sz="1200" dirty="0">
-                <a:solidFill>
-                  <a:srgbClr val="3D4552"/>
-                </a:solidFill>
-              </a:rPr>
-              <a:t>A fresh review reproduced 8 core gaps as failing tests; a load probe found a 20 orders/s cap.</a:t>
-            </a:r>
-            <a:endParaRPr lang="en-US" sz="1200" dirty="0"/>
-          </a:p>
-        </p:txBody>
-      </p:sp>
-      <p:sp>
-        <p:nvSpPr>
-          <p:cNvPr id="29" name="step 7"/>
-          <p:cNvSpPr/>
-          <p:nvPr/>
-        </p:nvSpPr>
-        <p:spPr>
-          <a:xfrm>
-            <a:off x="10103859" y="1645920"/>
-            <a:ext cx="438912" cy="438912"/>
-          </a:xfrm>
-          <a:prstGeom prst="ellipse">
-            <a:avLst/>
-          </a:prstGeom>
-          <a:solidFill>
-            <a:schemeClr val="accent1"/>
-          </a:solidFill>
-          <a:ln/>
-        </p:spPr>
-        <p:txBody>
-          <a:bodyPr/>
-          <a:lstStyle/>
-          <a:p>
-            <a:endParaRPr lang="en-US"/>
-          </a:p>
-        </p:txBody>
-      </p:sp>
-      <p:sp>
-        <p:nvSpPr>
-          <p:cNvPr id="30" name="Text 28"/>
-          <p:cNvSpPr txBox="1"/>
-          <p:nvPr/>
-        </p:nvSpPr>
-        <p:spPr>
-          <a:xfrm>
-            <a:off x="10103859" y="1645920"/>
-            <a:ext cx="438912" cy="438912"/>
-          </a:xfrm>
-          <a:prstGeom prst="rect">
-            <a:avLst/>
-          </a:prstGeom>
-          <a:noFill/>
-          <a:ln/>
-        </p:spPr>
-        <p:txBody>
-          <a:bodyPr wrap="square" lIns="0" tIns="0" rIns="0" bIns="0" rtlCol="0" anchor="ctr"/>
-          <a:lstStyle/>
-          <a:p>
-            <a:pPr marL="0" indent="0" algn="ctr">
-              <a:buNone/>
-            </a:pPr>
-            <a:r>
-              <a:rPr lang="en-US" sz="1500" b="1" dirty="0">
-                <a:solidFill>
-                  <a:schemeClr val="bg1"/>
-                </a:solidFill>
-              </a:rPr>
-              <a:t>7</a:t>
-            </a:r>
-            <a:endParaRPr lang="en-US" sz="1500" dirty="0"/>
-          </a:p>
-        </p:txBody>
-      </p:sp>
-      <p:sp>
-        <p:nvSpPr>
-          <p:cNvPr id="31" name="Text 29"/>
-          <p:cNvSpPr txBox="1"/>
-          <p:nvPr/>
-        </p:nvSpPr>
-        <p:spPr>
-          <a:xfrm>
-            <a:off x="10058139" y="2286000"/>
-            <a:ext cx="1447756" cy="566928"/>
-          </a:xfrm>
-          <a:prstGeom prst="rect">
-            <a:avLst/>
-          </a:prstGeom>
-          <a:noFill/>
-          <a:ln/>
-        </p:spPr>
-        <p:txBody>
-          <a:bodyPr wrap="square" lIns="0" tIns="0" rIns="0" bIns="0" rtlCol="0" anchor="t"/>
-          <a:lstStyle/>
-          <a:p>
-            <a:pPr marL="0" indent="0">
-              <a:buNone/>
-            </a:pPr>
-            <a:r>
-              <a:rPr lang="en-US" sz="1400" b="1" dirty="0">
-                <a:solidFill>
-                  <a:schemeClr val="tx1"/>
-                </a:solidFill>
-              </a:rPr>
-              <a:t>Final review and QA</a:t>
-            </a:r>
-            <a:endParaRPr lang="en-US" sz="1400" dirty="0"/>
-          </a:p>
-        </p:txBody>
-      </p:sp>
-      <p:sp>
-        <p:nvSpPr>
-          <p:cNvPr id="32" name="Text 30"/>
-          <p:cNvSpPr txBox="1"/>
-          <p:nvPr/>
-        </p:nvSpPr>
-        <p:spPr>
-          <a:xfrm>
-            <a:off x="10058139" y="2880360"/>
-            <a:ext cx="1447756" cy="1463040"/>
-          </a:xfrm>
-          <a:prstGeom prst="rect">
-            <a:avLst/>
-          </a:prstGeom>
-          <a:noFill/>
-          <a:ln/>
-        </p:spPr>
-        <p:txBody>
-          <a:bodyPr wrap="square" lIns="0" tIns="0" rIns="0" bIns="0" rtlCol="0" anchor="t"/>
-          <a:lstStyle/>
-          <a:p>
-            <a:pPr marL="0" indent="0">
-              <a:buNone/>
-            </a:pPr>
-            <a:r>
-              <a:rPr lang="en-US" sz="1200" dirty="0">
-                <a:solidFill>
-                  <a:srgbClr val="3D4552"/>
-                </a:solidFill>
-              </a:rPr>
-              <a:t>Whole-branch review, a last fix wave, browser checks, a run from a fresh clone.</a:t>
-            </a:r>
-            <a:endParaRPr lang="en-US" sz="1200" dirty="0"/>
-          </a:p>
-        </p:txBody>
-      </p:sp>
-      <p:sp>
-        <p:nvSpPr>
-          <p:cNvPr id="33" name="habits"/>
-          <p:cNvSpPr/>
-          <p:nvPr/>
-        </p:nvSpPr>
-        <p:spPr>
-          <a:xfrm>
-            <a:off x="548640" y="4297680"/>
-            <a:ext cx="11094415" cy="1463040"/>
-          </a:xfrm>
-          <a:prstGeom prst="roundRect">
-            <a:avLst>
-              <a:gd name="adj" fmla="val 5000"/>
-            </a:avLst>
-          </a:prstGeom>
-          <a:solidFill>
-            <a:schemeClr val="bg2"/>
-          </a:solidFill>
-          <a:ln/>
-        </p:spPr>
-        <p:txBody>
-          <a:bodyPr/>
-          <a:lstStyle/>
-          <a:p>
-            <a:endParaRPr lang="en-US"/>
-          </a:p>
-        </p:txBody>
-      </p:sp>
-      <p:sp>
-        <p:nvSpPr>
-          <p:cNvPr id="34" name="Text 32"/>
-          <p:cNvSpPr txBox="1"/>
-          <p:nvPr/>
-        </p:nvSpPr>
-        <p:spPr>
-          <a:xfrm>
-            <a:off x="777240" y="4453128"/>
-            <a:ext cx="3657600" cy="274320"/>
-          </a:xfrm>
-          <a:prstGeom prst="rect">
-            <a:avLst/>
-          </a:prstGeom>
-          <a:noFill/>
-          <a:ln/>
-        </p:spPr>
-        <p:txBody>
-          <a:bodyPr wrap="square" lIns="0" tIns="0" rIns="0" bIns="0" rtlCol="0" anchor="t"/>
-          <a:lstStyle/>
-          <a:p>
-            <a:pPr marL="0" indent="0">
-              <a:buNone/>
-            </a:pPr>
-            <a:r>
-              <a:rPr lang="en-US" sz="1500" b="1" dirty="0">
-                <a:solidFill>
-                  <a:schemeClr val="tx1"/>
-                </a:solidFill>
-              </a:rPr>
-              <a:t>Habits throughout</a:t>
-            </a:r>
-            <a:endParaRPr lang="en-US" sz="1500" dirty="0"/>
-          </a:p>
-        </p:txBody>
-      </p:sp>
-      <p:sp>
-        <p:nvSpPr>
-          <p:cNvPr id="35" name="Text 33"/>
-          <p:cNvSpPr txBox="1"/>
-          <p:nvPr/>
-        </p:nvSpPr>
-        <p:spPr>
-          <a:xfrm>
-            <a:off x="777240" y="4846320"/>
-            <a:ext cx="3383280" cy="274320"/>
-          </a:xfrm>
-          <a:prstGeom prst="rect">
-            <a:avLst/>
-          </a:prstGeom>
-          <a:noFill/>
-          <a:ln/>
-        </p:spPr>
-        <p:txBody>
-          <a:bodyPr wrap="square" lIns="0" tIns="0" rIns="0" bIns="0" rtlCol="0" anchor="t"/>
-          <a:lstStyle/>
-          <a:p>
-            <a:pPr marL="0" indent="0">
-              <a:buNone/>
-            </a:pPr>
-            <a:r>
-              <a:rPr lang="en-US" sz="1400" b="1" dirty="0">
-                <a:solidFill>
-                  <a:schemeClr val="accent1"/>
-                </a:solidFill>
-              </a:rPr>
-              <a:t>Core first</a:t>
-            </a:r>
-            <a:endParaRPr lang="en-US" sz="1400" dirty="0"/>
-          </a:p>
-        </p:txBody>
-      </p:sp>
-      <p:sp>
-        <p:nvSpPr>
-          <p:cNvPr id="36" name="Text 34"/>
-          <p:cNvSpPr txBox="1"/>
-          <p:nvPr/>
-        </p:nvSpPr>
-        <p:spPr>
-          <a:xfrm>
-            <a:off x="777240" y="5148072"/>
-            <a:ext cx="3383280" cy="548640"/>
-          </a:xfrm>
-          <a:prstGeom prst="rect">
-            <a:avLst/>
-          </a:prstGeom>
-          <a:noFill/>
-          <a:ln/>
-        </p:spPr>
-        <p:txBody>
-          <a:bodyPr wrap="square" lIns="0" tIns="0" rIns="0" bIns="0" rtlCol="0" anchor="t"/>
-          <a:lstStyle/>
-          <a:p>
-            <a:pPr marL="0" indent="0">
-              <a:buNone/>
-            </a:pPr>
-            <a:r>
-              <a:rPr lang="en-US" sz="1300" dirty="0">
-                <a:solidFill>
-                  <a:srgbClr val="3D4552"/>
-                </a:solidFill>
-              </a:rPr>
-              <a:t>sync, conflicts and retries worked end to end before the console</a:t>
-            </a:r>
-            <a:endParaRPr lang="en-US" sz="1300" dirty="0"/>
-          </a:p>
-        </p:txBody>
-      </p:sp>
-      <p:sp>
-        <p:nvSpPr>
-          <p:cNvPr id="37" name="Text 35"/>
-          <p:cNvSpPr txBox="1"/>
-          <p:nvPr/>
-        </p:nvSpPr>
-        <p:spPr>
-          <a:xfrm>
-            <a:off x="4434840" y="4846320"/>
-            <a:ext cx="3383280" cy="274320"/>
-          </a:xfrm>
-          <a:prstGeom prst="rect">
-            <a:avLst/>
-          </a:prstGeom>
-          <a:noFill/>
-          <a:ln/>
-        </p:spPr>
-        <p:txBody>
-          <a:bodyPr wrap="square" lIns="0" tIns="0" rIns="0" bIns="0" rtlCol="0" anchor="t"/>
-          <a:lstStyle/>
-          <a:p>
-            <a:pPr marL="0" indent="0">
-              <a:buNone/>
-            </a:pPr>
-            <a:r>
-              <a:rPr lang="en-US" sz="1400" b="1" dirty="0">
-                <a:solidFill>
-                  <a:schemeClr val="accent1"/>
-                </a:solidFill>
-              </a:rPr>
-              <a:t>A failing test first</a:t>
-            </a:r>
-            <a:endParaRPr lang="en-US" sz="1400" dirty="0"/>
-          </a:p>
-        </p:txBody>
-      </p:sp>
-      <p:sp>
-        <p:nvSpPr>
-          <p:cNvPr id="38" name="Text 36"/>
-          <p:cNvSpPr txBox="1"/>
-          <p:nvPr/>
-        </p:nvSpPr>
-        <p:spPr>
-          <a:xfrm>
-            <a:off x="4434840" y="5148072"/>
-            <a:ext cx="3383280" cy="548640"/>
-          </a:xfrm>
-          <a:prstGeom prst="rect">
-            <a:avLst/>
-          </a:prstGeom>
-          <a:noFill/>
-          <a:ln/>
-        </p:spPr>
-        <p:txBody>
-          <a:bodyPr wrap="square" lIns="0" tIns="0" rIns="0" bIns="0" rtlCol="0" anchor="t"/>
-          <a:lstStyle/>
-          <a:p>
-            <a:pPr marL="0" indent="0">
-              <a:buNone/>
-            </a:pPr>
-            <a:r>
-              <a:rPr lang="en-US" sz="1300" dirty="0">
-                <a:solidFill>
-                  <a:srgbClr val="3D4552"/>
-                </a:solidFill>
-              </a:rPr>
-              <a:t>for every core gap; 18 planted bugs, each caught by the suite</a:t>
-            </a:r>
-            <a:endParaRPr lang="en-US" sz="1300" dirty="0"/>
-          </a:p>
-        </p:txBody>
-      </p:sp>
-      <p:sp>
-        <p:nvSpPr>
-          <p:cNvPr id="39" name="Text 37"/>
-          <p:cNvSpPr txBox="1"/>
-          <p:nvPr/>
-        </p:nvSpPr>
-        <p:spPr>
-          <a:xfrm>
-            <a:off x="8092440" y="4846320"/>
-            <a:ext cx="3383280" cy="274320"/>
-          </a:xfrm>
-          <a:prstGeom prst="rect">
-            <a:avLst/>
-          </a:prstGeom>
-          <a:noFill/>
-          <a:ln/>
-        </p:spPr>
-        <p:txBody>
-          <a:bodyPr wrap="square" lIns="0" tIns="0" rIns="0" bIns="0" rtlCol="0" anchor="t"/>
-          <a:lstStyle/>
-          <a:p>
-            <a:pPr marL="0" indent="0">
-              <a:buNone/>
-            </a:pPr>
-            <a:r>
-              <a:rPr lang="en-US" sz="1400" b="1" dirty="0">
-                <a:solidFill>
-                  <a:schemeClr val="accent1"/>
-                </a:solidFill>
-              </a:rPr>
-              <a:t>Checked against the code</a:t>
-            </a:r>
-            <a:endParaRPr lang="en-US" sz="1400" dirty="0"/>
-          </a:p>
-        </p:txBody>
-      </p:sp>
-      <p:sp>
-        <p:nvSpPr>
-          <p:cNvPr id="40" name="Text 38"/>
-          <p:cNvSpPr txBox="1"/>
-          <p:nvPr/>
-        </p:nvSpPr>
-        <p:spPr>
-          <a:xfrm>
-            <a:off x="8092440" y="5148072"/>
-            <a:ext cx="3383280" cy="548640"/>
-          </a:xfrm>
-          <a:prstGeom prst="rect">
-            <a:avLst/>
-          </a:prstGeom>
-          <a:noFill/>
-          <a:ln/>
-        </p:spPr>
-        <p:txBody>
-          <a:bodyPr wrap="square" lIns="0" tIns="0" rIns="0" bIns="0" rtlCol="0" anchor="t"/>
-          <a:lstStyle/>
-          <a:p>
-            <a:pPr marL="0" indent="0">
-              <a:buNone/>
-            </a:pPr>
-            <a:r>
-              <a:rPr lang="en-US" sz="1300" dirty="0">
-                <a:solidFill>
-                  <a:srgbClr val="3D4552"/>
-                </a:solidFill>
-              </a:rPr>
-              <a:t>docs and slides say only what the code does</a:t>
-            </a:r>
-            <a:endParaRPr lang="en-US" sz="1300" dirty="0"/>
           </a:p>
         </p:txBody>
       </p:sp>
@@ -6400,7 +6138,7 @@
           </a:prstGeom>
           <a:extLst>
             <a:ext uri="{C572A759-6A51-4108-AA02-DFA0A04FC94B}">
-              <ma14:wrappingTextBoxFlag xmlns="" xmlns:ma14="http://schemas.microsoft.com/office/mac/drawingml/2011/main" val="0"/>
+              <ma14:wrappingTextBoxFlag xmlns:ma14="http://schemas.microsoft.com/office/mac/drawingml/2011/main" xmlns="" val="0"/>
             </a:ext>
           </a:extLst>
         </p:spPr>
@@ -6419,44 +6157,22 @@
             <a:pPr algn="r"/>
             <a:fld id="{F7021451-1387-4CA6-816F-3879F97B5CBC}" type="slidenum">
               <a:rPr lang="en-US" b="0"/>
-              <a:t>18</a:t>
+              <a:t>12</a:t>
             </a:fld>
             <a:endParaRPr lang="en-US"/>
           </a:p>
         </p:txBody>
       </p:sp>
-    </p:spTree>
-  </p:cSld>
-  <p:clrMapOvr>
-    <a:masterClrMapping/>
-  </p:clrMapOvr>
-</p:sld>
-</file>
-
-<file path=ppt/slides/slide13.xml><?xml version="1.0" encoding="utf-8"?>
-<p:sld xmlns:a="http://schemas.openxmlformats.org/drawingml/2006/main" xmlns:p="http://schemas.openxmlformats.org/presentationml/2006/main" xmlns:r="http://schemas.openxmlformats.org/officeDocument/2006/relationships">
-  <p:cSld>
-    <p:spTree>
-      <p:nvGrpSpPr>
-        <p:cNvPr id="2" name=""/>
-        <p:cNvGrpSpPr/>
-        <p:nvPr/>
-      </p:nvGrpSpPr>
-      <p:grpSpPr/>
-      <p:sp>
-        <p:nvSpPr>
-          <p:cNvPr id="3" name="Text 0"/>
-          <p:cNvSpPr>
-            <a:spLocks noGrp="1"/>
-          </p:cNvSpPr>
-          <p:nvPr>
-            <p:ph type="body" idx="100" hasCustomPrompt="1"/>
-          </p:nvPr>
-        </p:nvSpPr>
-        <p:spPr>
-          <a:xfrm>
-            <a:off x="548640" y="384048"/>
-            <a:ext cx="8229600" cy="237744"/>
+      <p:sp>
+        <p:nvSpPr>
+          <p:cNvPr id="42" name="Text 7"/>
+          <p:cNvSpPr txBox="1"/>
+          <p:nvPr/>
+        </p:nvSpPr>
+        <p:spPr>
+          <a:xfrm>
+            <a:off x="548640" y="1554480"/>
+            <a:ext cx="10881360" cy="3108960"/>
           </a:xfrm>
           <a:prstGeom prst="rect">
             <a:avLst/>
@@ -6468,1554 +6184,110 @@
           <a:bodyPr wrap="square" lIns="0" tIns="0" rIns="0" bIns="0" rtlCol="0" anchor="t"/>
           <a:lstStyle/>
           <a:p>
-            <a:pPr marL="0" indent="0" algn="l">
-              <a:buNone/>
-            </a:pPr>
-            <a:r>
-              <a:rPr lang="en-US" sz="1100" b="1" dirty="0">
-                <a:solidFill>
-                  <a:schemeClr val="tx2"/>
-                </a:solidFill>
-                <a:latin typeface="Courier New" pitchFamily="34" charset="0"/>
-                <a:ea typeface="Courier New" pitchFamily="34" charset="-122"/>
-                <a:cs typeface="Courier New" pitchFamily="34" charset="-120"/>
-              </a:rPr>
-              <a:t>REFLECTION</a:t>
-            </a:r>
-            <a:endParaRPr lang="en-US" sz="1100" dirty="0"/>
-          </a:p>
-        </p:txBody>
-      </p:sp>
-      <p:sp>
-        <p:nvSpPr>
-          <p:cNvPr id="4" name="Text 0"/>
-          <p:cNvSpPr>
-            <a:spLocks noGrp="1"/>
-          </p:cNvSpPr>
-          <p:nvPr>
-            <p:ph type="title" idx="101" hasCustomPrompt="1"/>
-          </p:nvPr>
-        </p:nvSpPr>
-        <p:spPr>
-          <a:xfrm>
-            <a:off x="548640" y="621792"/>
-            <a:ext cx="11094415" cy="640080"/>
-          </a:xfrm>
-          <a:prstGeom prst="rect">
-            <a:avLst/>
-          </a:prstGeom>
-          <a:noFill/>
-          <a:ln/>
-        </p:spPr>
-        <p:txBody>
-          <a:bodyPr wrap="square" lIns="0" tIns="0" rIns="0" bIns="0" rtlCol="0" anchor="t"/>
-          <a:lstStyle/>
-          <a:p>
-            <a:pPr marL="0" indent="0" algn="l">
-              <a:buNone/>
-            </a:pPr>
-            <a:r>
-              <a:rPr lang="en-US" sz="3200" b="1" dirty="0">
-                <a:solidFill>
-                  <a:schemeClr val="tx1"/>
-                </a:solidFill>
-              </a:rPr>
-              <a:t>Trade-offs, and how I'd roll it out</a:t>
-            </a:r>
-            <a:endParaRPr lang="en-US" sz="3200" dirty="0"/>
-          </a:p>
-        </p:txBody>
-      </p:sp>
-      <p:sp>
-        <p:nvSpPr>
-          <p:cNvPr id="5" name="Shadow mode"/>
-          <p:cNvSpPr/>
-          <p:nvPr/>
-        </p:nvSpPr>
-        <p:spPr>
-          <a:xfrm>
-            <a:off x="548640" y="1463040"/>
-            <a:ext cx="2606040" cy="1600200"/>
-          </a:xfrm>
-          <a:prstGeom prst="roundRect">
-            <a:avLst>
-              <a:gd name="adj" fmla="val 4571"/>
-            </a:avLst>
-          </a:prstGeom>
-          <a:solidFill>
-            <a:schemeClr val="bg1"/>
-          </a:solidFill>
-          <a:ln w="9525">
-            <a:solidFill>
-              <a:srgbClr val="E3E6EB"/>
-            </a:solidFill>
-            <a:prstDash val="solid"/>
-          </a:ln>
-        </p:spPr>
-        <p:txBody>
-          <a:bodyPr/>
-          <a:lstStyle/>
-          <a:p>
-            <a:endParaRPr lang="en-US"/>
-          </a:p>
-        </p:txBody>
-      </p:sp>
-      <p:sp>
-        <p:nvSpPr>
-          <p:cNvPr id="6" name="step 1"/>
-          <p:cNvSpPr/>
-          <p:nvPr/>
-        </p:nvSpPr>
-        <p:spPr>
-          <a:xfrm>
-            <a:off x="731520" y="1627632"/>
-            <a:ext cx="365760" cy="365760"/>
-          </a:xfrm>
-          <a:prstGeom prst="ellipse">
-            <a:avLst/>
-          </a:prstGeom>
-          <a:solidFill>
-            <a:schemeClr val="accent1"/>
-          </a:solidFill>
-          <a:ln/>
-        </p:spPr>
-        <p:txBody>
-          <a:bodyPr/>
-          <a:lstStyle/>
-          <a:p>
-            <a:endParaRPr lang="en-US"/>
-          </a:p>
-        </p:txBody>
-      </p:sp>
-      <p:sp>
-        <p:nvSpPr>
-          <p:cNvPr id="7" name="Text 4"/>
-          <p:cNvSpPr txBox="1"/>
-          <p:nvPr/>
-        </p:nvSpPr>
-        <p:spPr>
-          <a:xfrm>
-            <a:off x="731520" y="1627632"/>
-            <a:ext cx="365760" cy="365760"/>
-          </a:xfrm>
-          <a:prstGeom prst="rect">
-            <a:avLst/>
-          </a:prstGeom>
-          <a:noFill/>
-          <a:ln/>
-        </p:spPr>
-        <p:txBody>
-          <a:bodyPr wrap="square" lIns="0" tIns="0" rIns="0" bIns="0" rtlCol="0" anchor="ctr"/>
-          <a:lstStyle/>
-          <a:p>
-            <a:pPr marL="0" indent="0" algn="ctr">
-              <a:buNone/>
-            </a:pPr>
-            <a:r>
-              <a:rPr lang="en-US" sz="1200" b="1" dirty="0">
-                <a:solidFill>
-                  <a:schemeClr val="bg1"/>
-                </a:solidFill>
-              </a:rPr>
-              <a:t>1</a:t>
-            </a:r>
-            <a:endParaRPr lang="en-US" sz="1200" dirty="0"/>
-          </a:p>
-        </p:txBody>
-      </p:sp>
-      <p:sp>
-        <p:nvSpPr>
-          <p:cNvPr id="8" name="Text 5"/>
-          <p:cNvSpPr txBox="1"/>
-          <p:nvPr/>
-        </p:nvSpPr>
-        <p:spPr>
-          <a:xfrm>
-            <a:off x="1207008" y="1627632"/>
-            <a:ext cx="1828800" cy="365760"/>
-          </a:xfrm>
-          <a:prstGeom prst="rect">
-            <a:avLst/>
-          </a:prstGeom>
-          <a:noFill/>
-          <a:ln/>
-        </p:spPr>
-        <p:txBody>
-          <a:bodyPr wrap="square" lIns="0" tIns="0" rIns="0" bIns="0" rtlCol="0" anchor="ctr"/>
-          <a:lstStyle/>
-          <a:p>
-            <a:pPr marL="0" indent="0">
-              <a:buNone/>
-            </a:pPr>
-            <a:r>
-              <a:rPr lang="en-US" sz="1600" b="1" dirty="0">
-                <a:solidFill>
-                  <a:schemeClr val="tx1"/>
-                </a:solidFill>
-              </a:rPr>
-              <a:t>Shadow mode</a:t>
-            </a:r>
-            <a:endParaRPr lang="en-US" sz="1600" dirty="0"/>
-          </a:p>
-        </p:txBody>
-      </p:sp>
-      <p:sp>
-        <p:nvSpPr>
-          <p:cNvPr id="9" name="Text 6"/>
-          <p:cNvSpPr txBox="1"/>
-          <p:nvPr/>
-        </p:nvSpPr>
-        <p:spPr>
-          <a:xfrm>
-            <a:off x="731520" y="2121408"/>
-            <a:ext cx="2286000" cy="868680"/>
-          </a:xfrm>
-          <a:prstGeom prst="rect">
-            <a:avLst/>
-          </a:prstGeom>
-          <a:noFill/>
-          <a:ln/>
-        </p:spPr>
-        <p:txBody>
-          <a:bodyPr wrap="square" lIns="0" tIns="0" rIns="0" bIns="0" rtlCol="0" anchor="t"/>
-          <a:lstStyle/>
-          <a:p>
-            <a:pPr marL="0" indent="0">
-              <a:buNone/>
-            </a:pPr>
-            <a:r>
-              <a:rPr lang="en-US" sz="1300" dirty="0">
-                <a:solidFill>
-                  <a:srgbClr val="3D4552"/>
-                </a:solidFill>
-              </a:rPr>
-              <a:t>Receives and reads everything, sends nothing. Compared daily with the staff's work.</a:t>
-            </a:r>
-            <a:endParaRPr lang="en-US" sz="1300" dirty="0"/>
-          </a:p>
-        </p:txBody>
-      </p:sp>
-      <p:sp>
-        <p:nvSpPr>
-          <p:cNvPr id="10" name="Shape 7"/>
-          <p:cNvSpPr/>
-          <p:nvPr/>
-        </p:nvSpPr>
-        <p:spPr>
-          <a:xfrm>
-            <a:off x="3182112" y="2263140"/>
-            <a:ext cx="173736" cy="0"/>
-          </a:xfrm>
-          <a:prstGeom prst="line">
-            <a:avLst/>
-          </a:prstGeom>
-          <a:noFill/>
-          <a:ln w="15875">
-            <a:solidFill>
-              <a:schemeClr val="tx1"/>
-            </a:solidFill>
-            <a:prstDash val="solid"/>
-            <a:tailEnd type="triangle"/>
-          </a:ln>
-        </p:spPr>
-        <p:txBody>
-          <a:bodyPr/>
-          <a:lstStyle/>
-          <a:p>
-            <a:endParaRPr lang="en-US"/>
-          </a:p>
-        </p:txBody>
-      </p:sp>
-      <p:sp>
-        <p:nvSpPr>
-          <p:cNvPr id="11" name="Shop stock"/>
-          <p:cNvSpPr/>
-          <p:nvPr/>
-        </p:nvSpPr>
-        <p:spPr>
-          <a:xfrm>
-            <a:off x="3383280" y="1463040"/>
-            <a:ext cx="2606040" cy="1600200"/>
-          </a:xfrm>
-          <a:prstGeom prst="roundRect">
-            <a:avLst>
-              <a:gd name="adj" fmla="val 4571"/>
-            </a:avLst>
-          </a:prstGeom>
-          <a:solidFill>
-            <a:schemeClr val="bg1"/>
-          </a:solidFill>
-          <a:ln w="9525">
-            <a:solidFill>
-              <a:srgbClr val="E3E6EB"/>
-            </a:solidFill>
-            <a:prstDash val="solid"/>
-          </a:ln>
-        </p:spPr>
-        <p:txBody>
-          <a:bodyPr/>
-          <a:lstStyle/>
-          <a:p>
-            <a:endParaRPr lang="en-US"/>
-          </a:p>
-        </p:txBody>
-      </p:sp>
-      <p:sp>
-        <p:nvSpPr>
-          <p:cNvPr id="12" name="step 2"/>
-          <p:cNvSpPr/>
-          <p:nvPr/>
-        </p:nvSpPr>
-        <p:spPr>
-          <a:xfrm>
-            <a:off x="3566160" y="1627632"/>
-            <a:ext cx="365760" cy="365760"/>
-          </a:xfrm>
-          <a:prstGeom prst="ellipse">
-            <a:avLst/>
-          </a:prstGeom>
-          <a:solidFill>
-            <a:schemeClr val="accent1"/>
-          </a:solidFill>
-          <a:ln/>
-        </p:spPr>
-        <p:txBody>
-          <a:bodyPr/>
-          <a:lstStyle/>
-          <a:p>
-            <a:endParaRPr lang="en-US"/>
-          </a:p>
-        </p:txBody>
-      </p:sp>
-      <p:sp>
-        <p:nvSpPr>
-          <p:cNvPr id="13" name="Text 10"/>
-          <p:cNvSpPr txBox="1"/>
-          <p:nvPr/>
-        </p:nvSpPr>
-        <p:spPr>
-          <a:xfrm>
-            <a:off x="3566160" y="1627632"/>
-            <a:ext cx="365760" cy="365760"/>
-          </a:xfrm>
-          <a:prstGeom prst="rect">
-            <a:avLst/>
-          </a:prstGeom>
-          <a:noFill/>
-          <a:ln/>
-        </p:spPr>
-        <p:txBody>
-          <a:bodyPr wrap="square" lIns="0" tIns="0" rIns="0" bIns="0" rtlCol="0" anchor="ctr"/>
-          <a:lstStyle/>
-          <a:p>
-            <a:pPr marL="0" indent="0" algn="ctr">
-              <a:buNone/>
-            </a:pPr>
-            <a:r>
-              <a:rPr lang="en-US" sz="1200" b="1" dirty="0">
-                <a:solidFill>
-                  <a:schemeClr val="bg1"/>
-                </a:solidFill>
-              </a:rPr>
-              <a:t>2</a:t>
-            </a:r>
-            <a:endParaRPr lang="en-US" sz="1200" dirty="0"/>
-          </a:p>
-        </p:txBody>
-      </p:sp>
-      <p:sp>
-        <p:nvSpPr>
-          <p:cNvPr id="14" name="Text 11"/>
-          <p:cNvSpPr txBox="1"/>
-          <p:nvPr/>
-        </p:nvSpPr>
-        <p:spPr>
-          <a:xfrm>
-            <a:off x="4041648" y="1627632"/>
-            <a:ext cx="1828800" cy="365760"/>
-          </a:xfrm>
-          <a:prstGeom prst="rect">
-            <a:avLst/>
-          </a:prstGeom>
-          <a:noFill/>
-          <a:ln/>
-        </p:spPr>
-        <p:txBody>
-          <a:bodyPr wrap="square" lIns="0" tIns="0" rIns="0" bIns="0" rtlCol="0" anchor="ctr"/>
-          <a:lstStyle/>
-          <a:p>
-            <a:pPr marL="0" indent="0">
-              <a:buNone/>
-            </a:pPr>
-            <a:r>
-              <a:rPr lang="en-US" sz="1600" b="1" dirty="0">
-                <a:solidFill>
-                  <a:schemeClr val="tx1"/>
-                </a:solidFill>
-              </a:rPr>
-              <a:t>Shop stock</a:t>
-            </a:r>
-            <a:endParaRPr lang="en-US" sz="1600" dirty="0"/>
-          </a:p>
-        </p:txBody>
-      </p:sp>
-      <p:sp>
-        <p:nvSpPr>
-          <p:cNvPr id="15" name="Text 12"/>
-          <p:cNvSpPr txBox="1"/>
-          <p:nvPr/>
-        </p:nvSpPr>
-        <p:spPr>
-          <a:xfrm>
-            <a:off x="3566160" y="2121408"/>
-            <a:ext cx="2286000" cy="868680"/>
-          </a:xfrm>
-          <a:prstGeom prst="rect">
-            <a:avLst/>
-          </a:prstGeom>
-          <a:noFill/>
-          <a:ln/>
-        </p:spPr>
-        <p:txBody>
-          <a:bodyPr wrap="square" lIns="0" tIns="0" rIns="0" bIns="0" rtlCol="0" anchor="t"/>
-          <a:lstStyle/>
-          <a:p>
-            <a:pPr marL="0" indent="0">
-              <a:buNone/>
-            </a:pPr>
-            <a:r>
-              <a:rPr lang="en-US" sz="1300" dirty="0">
-                <a:solidFill>
-                  <a:srgbClr val="3D4552"/>
-                </a:solidFill>
-              </a:rPr>
-              <a:t>Glue pushes stock to the shop only. Staff keep everything else.</a:t>
-            </a:r>
-            <a:endParaRPr lang="en-US" sz="1300" dirty="0"/>
-          </a:p>
-        </p:txBody>
-      </p:sp>
-      <p:sp>
-        <p:nvSpPr>
-          <p:cNvPr id="16" name="Shape 13"/>
-          <p:cNvSpPr/>
-          <p:nvPr/>
-        </p:nvSpPr>
-        <p:spPr>
-          <a:xfrm>
-            <a:off x="6016752" y="2263140"/>
-            <a:ext cx="173736" cy="0"/>
-          </a:xfrm>
-          <a:prstGeom prst="line">
-            <a:avLst/>
-          </a:prstGeom>
-          <a:noFill/>
-          <a:ln w="15875">
-            <a:solidFill>
-              <a:schemeClr val="tx1"/>
-            </a:solidFill>
-            <a:prstDash val="solid"/>
-            <a:tailEnd type="triangle"/>
-          </a:ln>
-        </p:spPr>
-        <p:txBody>
-          <a:bodyPr/>
-          <a:lstStyle/>
-          <a:p>
-            <a:endParaRPr lang="en-US"/>
-          </a:p>
-        </p:txBody>
-      </p:sp>
-      <p:sp>
-        <p:nvSpPr>
-          <p:cNvPr id="17" name="eMAG stock"/>
-          <p:cNvSpPr/>
-          <p:nvPr/>
-        </p:nvSpPr>
-        <p:spPr>
-          <a:xfrm>
-            <a:off x="6217920" y="1463040"/>
-            <a:ext cx="2606040" cy="1600200"/>
-          </a:xfrm>
-          <a:prstGeom prst="roundRect">
-            <a:avLst>
-              <a:gd name="adj" fmla="val 4571"/>
-            </a:avLst>
-          </a:prstGeom>
-          <a:solidFill>
-            <a:schemeClr val="bg1"/>
-          </a:solidFill>
-          <a:ln w="9525">
-            <a:solidFill>
-              <a:srgbClr val="E3E6EB"/>
-            </a:solidFill>
-            <a:prstDash val="solid"/>
-          </a:ln>
-        </p:spPr>
-        <p:txBody>
-          <a:bodyPr/>
-          <a:lstStyle/>
-          <a:p>
-            <a:endParaRPr lang="en-US"/>
-          </a:p>
-        </p:txBody>
-      </p:sp>
-      <p:sp>
-        <p:nvSpPr>
-          <p:cNvPr id="18" name="step 3"/>
-          <p:cNvSpPr/>
-          <p:nvPr/>
-        </p:nvSpPr>
-        <p:spPr>
-          <a:xfrm>
-            <a:off x="6400800" y="1627632"/>
-            <a:ext cx="365760" cy="365760"/>
-          </a:xfrm>
-          <a:prstGeom prst="ellipse">
-            <a:avLst/>
-          </a:prstGeom>
-          <a:solidFill>
-            <a:schemeClr val="accent1"/>
-          </a:solidFill>
-          <a:ln/>
-        </p:spPr>
-        <p:txBody>
-          <a:bodyPr/>
-          <a:lstStyle/>
-          <a:p>
-            <a:endParaRPr lang="en-US"/>
-          </a:p>
-        </p:txBody>
-      </p:sp>
-      <p:sp>
-        <p:nvSpPr>
-          <p:cNvPr id="19" name="Text 16"/>
-          <p:cNvSpPr txBox="1"/>
-          <p:nvPr/>
-        </p:nvSpPr>
-        <p:spPr>
-          <a:xfrm>
-            <a:off x="6400800" y="1627632"/>
-            <a:ext cx="365760" cy="365760"/>
-          </a:xfrm>
-          <a:prstGeom prst="rect">
-            <a:avLst/>
-          </a:prstGeom>
-          <a:noFill/>
-          <a:ln/>
-        </p:spPr>
-        <p:txBody>
-          <a:bodyPr wrap="square" lIns="0" tIns="0" rIns="0" bIns="0" rtlCol="0" anchor="ctr"/>
-          <a:lstStyle/>
-          <a:p>
-            <a:pPr marL="0" indent="0" algn="ctr">
-              <a:buNone/>
-            </a:pPr>
-            <a:r>
-              <a:rPr lang="en-US" sz="1200" b="1" dirty="0">
-                <a:solidFill>
-                  <a:schemeClr val="bg1"/>
-                </a:solidFill>
-              </a:rPr>
-              <a:t>3</a:t>
-            </a:r>
-            <a:endParaRPr lang="en-US" sz="1200" dirty="0"/>
-          </a:p>
-        </p:txBody>
-      </p:sp>
-      <p:sp>
-        <p:nvSpPr>
-          <p:cNvPr id="20" name="Text 17"/>
-          <p:cNvSpPr txBox="1"/>
-          <p:nvPr/>
-        </p:nvSpPr>
-        <p:spPr>
-          <a:xfrm>
-            <a:off x="6876288" y="1627632"/>
-            <a:ext cx="1828800" cy="365760"/>
-          </a:xfrm>
-          <a:prstGeom prst="rect">
-            <a:avLst/>
-          </a:prstGeom>
-          <a:noFill/>
-          <a:ln/>
-        </p:spPr>
-        <p:txBody>
-          <a:bodyPr wrap="square" lIns="0" tIns="0" rIns="0" bIns="0" rtlCol="0" anchor="ctr"/>
-          <a:lstStyle/>
-          <a:p>
-            <a:pPr marL="0" indent="0">
-              <a:buNone/>
-            </a:pPr>
-            <a:r>
-              <a:rPr lang="en-US" sz="1600" b="1" dirty="0">
-                <a:solidFill>
-                  <a:schemeClr val="tx1"/>
-                </a:solidFill>
-              </a:rPr>
-              <a:t>eMAG stock</a:t>
-            </a:r>
-            <a:endParaRPr lang="en-US" sz="1600" dirty="0"/>
-          </a:p>
-        </p:txBody>
-      </p:sp>
-      <p:sp>
-        <p:nvSpPr>
-          <p:cNvPr id="21" name="Text 18"/>
-          <p:cNvSpPr txBox="1"/>
-          <p:nvPr/>
-        </p:nvSpPr>
-        <p:spPr>
-          <a:xfrm>
-            <a:off x="6400800" y="2121408"/>
-            <a:ext cx="2286000" cy="868680"/>
-          </a:xfrm>
-          <a:prstGeom prst="rect">
-            <a:avLst/>
-          </a:prstGeom>
-          <a:noFill/>
-          <a:ln/>
-        </p:spPr>
-        <p:txBody>
-          <a:bodyPr wrap="square" lIns="0" tIns="0" rIns="0" bIns="0" rtlCol="0" anchor="t"/>
-          <a:lstStyle/>
-          <a:p>
-            <a:pPr marL="0" indent="0">
-              <a:buNone/>
-            </a:pPr>
-            <a:r>
-              <a:rPr lang="en-US" sz="1300" dirty="0">
-                <a:solidFill>
-                  <a:srgbClr val="3D4552"/>
-                </a:solidFill>
-              </a:rPr>
-              <a:t>Then eMAG. Oversell risk drops; eMAG's real rate limits are met here.</a:t>
-            </a:r>
-            <a:endParaRPr lang="en-US" sz="1300" dirty="0"/>
-          </a:p>
-        </p:txBody>
-      </p:sp>
-      <p:sp>
-        <p:nvSpPr>
-          <p:cNvPr id="22" name="Shape 19"/>
-          <p:cNvSpPr/>
-          <p:nvPr/>
-        </p:nvSpPr>
-        <p:spPr>
-          <a:xfrm>
-            <a:off x="8851392" y="2263140"/>
-            <a:ext cx="173736" cy="0"/>
-          </a:xfrm>
-          <a:prstGeom prst="line">
-            <a:avLst/>
-          </a:prstGeom>
-          <a:noFill/>
-          <a:ln w="15875">
-            <a:solidFill>
-              <a:schemeClr val="tx1"/>
-            </a:solidFill>
-            <a:prstDash val="solid"/>
-            <a:tailEnd type="triangle"/>
-          </a:ln>
-        </p:spPr>
-        <p:txBody>
-          <a:bodyPr/>
-          <a:lstStyle/>
-          <a:p>
-            <a:endParaRPr lang="en-US"/>
-          </a:p>
-        </p:txBody>
-      </p:sp>
-      <p:sp>
-        <p:nvSpPr>
-          <p:cNvPr id="23" name="Orders"/>
-          <p:cNvSpPr/>
-          <p:nvPr/>
-        </p:nvSpPr>
-        <p:spPr>
-          <a:xfrm>
-            <a:off x="9052560" y="1463040"/>
-            <a:ext cx="2606040" cy="1600200"/>
-          </a:xfrm>
-          <a:prstGeom prst="roundRect">
-            <a:avLst>
-              <a:gd name="adj" fmla="val 4571"/>
-            </a:avLst>
-          </a:prstGeom>
-          <a:solidFill>
-            <a:srgbClr val="E8EEFD"/>
-          </a:solidFill>
-          <a:ln w="9525">
-            <a:solidFill>
-              <a:srgbClr val="9DB4F0"/>
-            </a:solidFill>
-            <a:prstDash val="solid"/>
-          </a:ln>
-        </p:spPr>
-        <p:txBody>
-          <a:bodyPr/>
-          <a:lstStyle/>
-          <a:p>
-            <a:endParaRPr lang="en-US"/>
-          </a:p>
-        </p:txBody>
-      </p:sp>
-      <p:sp>
-        <p:nvSpPr>
-          <p:cNvPr id="24" name="step 4"/>
-          <p:cNvSpPr/>
-          <p:nvPr/>
-        </p:nvSpPr>
-        <p:spPr>
-          <a:xfrm>
-            <a:off x="9235440" y="1627632"/>
-            <a:ext cx="365760" cy="365760"/>
-          </a:xfrm>
-          <a:prstGeom prst="ellipse">
-            <a:avLst/>
-          </a:prstGeom>
-          <a:solidFill>
-            <a:schemeClr val="accent1"/>
-          </a:solidFill>
-          <a:ln/>
-        </p:spPr>
-        <p:txBody>
-          <a:bodyPr/>
-          <a:lstStyle/>
-          <a:p>
-            <a:endParaRPr lang="en-US"/>
-          </a:p>
-        </p:txBody>
-      </p:sp>
-      <p:sp>
-        <p:nvSpPr>
-          <p:cNvPr id="25" name="Text 22"/>
-          <p:cNvSpPr txBox="1"/>
-          <p:nvPr/>
-        </p:nvSpPr>
-        <p:spPr>
-          <a:xfrm>
-            <a:off x="9235440" y="1627632"/>
-            <a:ext cx="365760" cy="365760"/>
-          </a:xfrm>
-          <a:prstGeom prst="rect">
-            <a:avLst/>
-          </a:prstGeom>
-          <a:noFill/>
-          <a:ln/>
-        </p:spPr>
-        <p:txBody>
-          <a:bodyPr wrap="square" lIns="0" tIns="0" rIns="0" bIns="0" rtlCol="0" anchor="ctr"/>
-          <a:lstStyle/>
-          <a:p>
-            <a:pPr marL="0" indent="0" algn="ctr">
-              <a:buNone/>
-            </a:pPr>
-            <a:r>
-              <a:rPr lang="en-US" sz="1200" b="1" dirty="0">
-                <a:solidFill>
-                  <a:schemeClr val="bg1"/>
-                </a:solidFill>
-              </a:rPr>
-              <a:t>4</a:t>
-            </a:r>
-            <a:endParaRPr lang="en-US" sz="1200" dirty="0"/>
-          </a:p>
-        </p:txBody>
-      </p:sp>
-      <p:sp>
-        <p:nvSpPr>
-          <p:cNvPr id="26" name="Text 23"/>
-          <p:cNvSpPr txBox="1"/>
-          <p:nvPr/>
-        </p:nvSpPr>
-        <p:spPr>
-          <a:xfrm>
-            <a:off x="9710928" y="1627632"/>
-            <a:ext cx="1828800" cy="365760"/>
-          </a:xfrm>
-          <a:prstGeom prst="rect">
-            <a:avLst/>
-          </a:prstGeom>
-          <a:noFill/>
-          <a:ln/>
-        </p:spPr>
-        <p:txBody>
-          <a:bodyPr wrap="square" lIns="0" tIns="0" rIns="0" bIns="0" rtlCol="0" anchor="ctr"/>
-          <a:lstStyle/>
-          <a:p>
-            <a:pPr marL="0" indent="0">
-              <a:buNone/>
-            </a:pPr>
-            <a:r>
-              <a:rPr lang="en-US" sz="1600" b="1" dirty="0">
-                <a:solidFill>
-                  <a:schemeClr val="tx1"/>
-                </a:solidFill>
-              </a:rPr>
-              <a:t>Orders</a:t>
-            </a:r>
-            <a:endParaRPr lang="en-US" sz="1600" dirty="0"/>
-          </a:p>
-        </p:txBody>
-      </p:sp>
-      <p:sp>
-        <p:nvSpPr>
-          <p:cNvPr id="27" name="Text 24"/>
-          <p:cNvSpPr txBox="1"/>
-          <p:nvPr/>
-        </p:nvSpPr>
-        <p:spPr>
-          <a:xfrm>
-            <a:off x="9235440" y="2121408"/>
-            <a:ext cx="2286000" cy="868680"/>
-          </a:xfrm>
-          <a:prstGeom prst="rect">
-            <a:avLst/>
-          </a:prstGeom>
-          <a:noFill/>
-          <a:ln/>
-        </p:spPr>
-        <p:txBody>
-          <a:bodyPr wrap="square" lIns="0" tIns="0" rIns="0" bIns="0" rtlCol="0" anchor="t"/>
-          <a:lstStyle/>
-          <a:p>
-            <a:pPr marL="0" indent="0">
-              <a:buNone/>
-            </a:pPr>
-            <a:r>
-              <a:rPr lang="en-US" sz="1300" dirty="0">
-                <a:solidFill>
-                  <a:srgbClr val="3D4552"/>
-                </a:solidFill>
-              </a:rPr>
-              <a:t>eMAG first, as it re-sends until confirmed, then the shop. The queue owner starts.</a:t>
-            </a:r>
-            <a:endParaRPr lang="en-US" sz="1300" dirty="0"/>
-          </a:p>
-        </p:txBody>
-      </p:sp>
-      <p:sp>
-        <p:nvSpPr>
-          <p:cNvPr id="28" name="Text 25"/>
-          <p:cNvSpPr txBox="1"/>
-          <p:nvPr/>
-        </p:nvSpPr>
-        <p:spPr>
-          <a:xfrm>
-            <a:off x="548640" y="3154680"/>
-            <a:ext cx="11094415" cy="274320"/>
-          </a:xfrm>
-          <a:prstGeom prst="rect">
-            <a:avLst/>
-          </a:prstGeom>
-          <a:noFill/>
-          <a:ln/>
-        </p:spPr>
-        <p:txBody>
-          <a:bodyPr wrap="square" lIns="0" tIns="0" rIns="0" bIns="0" rtlCol="0" anchor="t"/>
-          <a:lstStyle/>
-          <a:p>
-            <a:pPr marL="0" indent="0">
-              <a:buNone/>
-            </a:pPr>
-            <a:r>
-              <a:rPr lang="en-US" sz="1200" dirty="0">
-                <a:solidFill>
-                  <a:schemeClr val="tx2"/>
-                </a:solidFill>
-              </a:rPr>
-              <a:t>About a week per stage. Shadow mode and the per-stage switches are not built yet: each is a flag checked before Glue calls a system.</a:t>
-            </a:r>
-            <a:endParaRPr lang="en-US" sz="1200" dirty="0"/>
-          </a:p>
-        </p:txBody>
-      </p:sp>
-      <p:graphicFrame>
-        <p:nvGraphicFramePr>
-          <p:cNvPr id="29" name="Table 0"/>
-          <p:cNvGraphicFramePr>
-            <a:graphicFrameLocks noGrp="1"/>
-          </p:cNvGraphicFramePr>
-          <p:nvPr>
-            <p:extLst>
-              <p:ext uri="{D42A27DB-BD31-4B8C-83A1-F6EECF244321}">
-                <p14:modId xmlns:p14="http://schemas.microsoft.com/office/powerpoint/2010/main" val="1579011935"/>
-              </p:ext>
-            </p:extLst>
-          </p:nvPr>
-        </p:nvGraphicFramePr>
-        <p:xfrm>
-          <a:off x="548640" y="3611880"/>
-          <a:ext cx="5394960" cy="2103120"/>
-        </p:xfrm>
-        <a:graphic>
-          <a:graphicData uri="http://schemas.openxmlformats.org/drawingml/2006/table">
-            <a:tbl>
-              <a:tblPr/>
-              <a:tblGrid>
-                <a:gridCol w="2788920">
-                  <a:extLst>
-                    <a:ext uri="{9D8B030D-6E8A-4147-A177-3AD203B41FA5}">
-                      <a16:colId xmlns:a16="http://schemas.microsoft.com/office/drawing/2014/main" val="20000"/>
-                    </a:ext>
-                  </a:extLst>
-                </a:gridCol>
-                <a:gridCol w="2606040">
-                  <a:extLst>
-                    <a:ext uri="{9D8B030D-6E8A-4147-A177-3AD203B41FA5}">
-                      <a16:colId xmlns:a16="http://schemas.microsoft.com/office/drawing/2014/main" val="20001"/>
-                    </a:ext>
-                  </a:extLst>
-                </a:gridCol>
-              </a:tblGrid>
-              <a:tr h="402336">
-                <a:tc>
-                  <a:txBody>
-                    <a:bodyPr/>
-                    <a:lstStyle/>
-                    <a:p>
-                      <a:pPr marL="0" indent="0">
-                        <a:buNone/>
-                      </a:pPr>
-                      <a:r>
-                        <a:rPr lang="en-US" sz="1200" b="1" dirty="0">
-                          <a:solidFill>
-                            <a:srgbClr val="5B6472"/>
-                          </a:solidFill>
-                        </a:rPr>
-                        <a:t>I chose</a:t>
-                      </a:r>
-                      <a:endParaRPr lang="en-US" sz="1200" dirty="0"/>
-                    </a:p>
-                  </a:txBody>
-                  <a:tcPr marL="54864" marR="54864" marT="0" marB="0" anchor="ctr">
-                    <a:lnL w="0" cap="flat" cmpd="sng" algn="ctr">
-                      <a:noFill/>
-                    </a:lnL>
-                    <a:lnR w="0" cap="flat" cmpd="sng" algn="ctr">
-                      <a:noFill/>
-                    </a:lnR>
-                    <a:lnT w="0" cap="flat" cmpd="sng" algn="ctr">
-                      <a:noFill/>
-                    </a:lnT>
-                    <a:lnB w="9525" cap="flat" cmpd="sng" algn="ctr">
-                      <a:solidFill>
-                        <a:srgbClr val="E3E6EB"/>
-                      </a:solidFill>
-                      <a:prstDash val="solid"/>
-                      <a:round/>
-                      <a:headEnd type="none" w="med" len="med"/>
-                      <a:tailEnd type="none" w="med" len="med"/>
-                    </a:lnB>
-                    <a:solidFill>
-                      <a:srgbClr val="F6F7F9"/>
-                    </a:solidFill>
-                  </a:tcPr>
-                </a:tc>
-                <a:tc>
-                  <a:txBody>
-                    <a:bodyPr/>
-                    <a:lstStyle/>
-                    <a:p>
-                      <a:pPr marL="0" indent="0">
-                        <a:buNone/>
-                      </a:pPr>
-                      <a:r>
-                        <a:rPr lang="en-US" sz="1200" b="1" dirty="0">
-                          <a:solidFill>
-                            <a:srgbClr val="5B6472"/>
-                          </a:solidFill>
-                        </a:rPr>
-                        <a:t>It costs</a:t>
-                      </a:r>
-                      <a:endParaRPr lang="en-US" sz="1200" dirty="0"/>
-                    </a:p>
-                  </a:txBody>
-                  <a:tcPr marL="54864" marR="54864" marT="0" marB="0" anchor="ctr">
-                    <a:lnL w="0" cap="flat" cmpd="sng" algn="ctr">
-                      <a:noFill/>
-                    </a:lnL>
-                    <a:lnR w="0" cap="flat" cmpd="sng" algn="ctr">
-                      <a:noFill/>
-                    </a:lnR>
-                    <a:lnT w="0" cap="flat" cmpd="sng" algn="ctr">
-                      <a:noFill/>
-                    </a:lnT>
-                    <a:lnB w="9525" cap="flat" cmpd="sng" algn="ctr">
-                      <a:solidFill>
-                        <a:srgbClr val="E3E6EB"/>
-                      </a:solidFill>
-                      <a:prstDash val="solid"/>
-                      <a:round/>
-                      <a:headEnd type="none" w="med" len="med"/>
-                      <a:tailEnd type="none" w="med" len="med"/>
-                    </a:lnB>
-                    <a:solidFill>
-                      <a:srgbClr val="F6F7F9"/>
-                    </a:solidFill>
-                  </a:tcPr>
-                </a:tc>
-                <a:extLst>
-                  <a:ext uri="{0D108BD9-81ED-4DB2-BD59-A6C34878D82A}">
-                    <a16:rowId xmlns:a16="http://schemas.microsoft.com/office/drawing/2014/main" val="10000"/>
-                  </a:ext>
-                </a:extLst>
-              </a:tr>
-              <a:tr h="402336">
-                <a:tc>
-                  <a:txBody>
-                    <a:bodyPr/>
-                    <a:lstStyle/>
-                    <a:p>
-                      <a:pPr marL="0" indent="0">
-                        <a:buNone/>
-                      </a:pPr>
-                      <a:r>
-                        <a:rPr lang="en-US" sz="1400" b="1" dirty="0">
-                          <a:solidFill>
-                            <a:schemeClr val="tx1"/>
-                          </a:solidFill>
-                        </a:rPr>
-                        <a:t>SQLite and one process</a:t>
-                      </a:r>
-                      <a:endParaRPr lang="en-US" sz="1400" dirty="0"/>
-                    </a:p>
-                  </a:txBody>
-                  <a:tcPr marL="54864" marR="54864" marT="0" marB="0" anchor="ctr">
-                    <a:lnL w="0" cap="flat" cmpd="sng" algn="ctr">
-                      <a:noFill/>
-                    </a:lnL>
-                    <a:lnR w="0" cap="flat" cmpd="sng" algn="ctr">
-                      <a:noFill/>
-                    </a:lnR>
-                    <a:lnT w="9525" cap="flat" cmpd="sng" algn="ctr">
-                      <a:solidFill>
-                        <a:srgbClr val="E3E6EB"/>
-                      </a:solidFill>
-                      <a:prstDash val="solid"/>
-                      <a:round/>
-                      <a:headEnd type="none" w="med" len="med"/>
-                      <a:tailEnd type="none" w="med" len="med"/>
-                    </a:lnT>
-                    <a:lnB w="9525" cap="flat" cmpd="sng" algn="ctr">
-                      <a:solidFill>
-                        <a:srgbClr val="E3E6EB"/>
-                      </a:solidFill>
-                      <a:prstDash val="solid"/>
-                      <a:round/>
-                      <a:headEnd type="none" w="med" len="med"/>
-                      <a:tailEnd type="none" w="med" len="med"/>
-                    </a:lnB>
-                  </a:tcPr>
-                </a:tc>
-                <a:tc>
-                  <a:txBody>
-                    <a:bodyPr/>
-                    <a:lstStyle/>
-                    <a:p>
-                      <a:pPr marL="0" indent="0">
-                        <a:buNone/>
-                      </a:pPr>
-                      <a:r>
-                        <a:rPr lang="en-US" sz="1400" dirty="0">
-                          <a:solidFill>
-                            <a:srgbClr val="3D4552"/>
-                          </a:solidFill>
-                        </a:rPr>
-                        <a:t>One writer, one instance</a:t>
-                      </a:r>
-                      <a:endParaRPr lang="en-US" sz="1400" dirty="0"/>
-                    </a:p>
-                  </a:txBody>
-                  <a:tcPr marL="54864" marR="54864" marT="0" marB="0" anchor="ctr">
-                    <a:lnL w="0" cap="flat" cmpd="sng" algn="ctr">
-                      <a:noFill/>
-                    </a:lnL>
-                    <a:lnR w="0" cap="flat" cmpd="sng" algn="ctr">
-                      <a:noFill/>
-                    </a:lnR>
-                    <a:lnT w="9525" cap="flat" cmpd="sng" algn="ctr">
-                      <a:solidFill>
-                        <a:srgbClr val="E3E6EB"/>
-                      </a:solidFill>
-                      <a:prstDash val="solid"/>
-                      <a:round/>
-                      <a:headEnd type="none" w="med" len="med"/>
-                      <a:tailEnd type="none" w="med" len="med"/>
-                    </a:lnT>
-                    <a:lnB w="9525" cap="flat" cmpd="sng" algn="ctr">
-                      <a:solidFill>
-                        <a:srgbClr val="E3E6EB"/>
-                      </a:solidFill>
-                      <a:prstDash val="solid"/>
-                      <a:round/>
-                      <a:headEnd type="none" w="med" len="med"/>
-                      <a:tailEnd type="none" w="med" len="med"/>
-                    </a:lnB>
-                  </a:tcPr>
-                </a:tc>
-                <a:extLst>
-                  <a:ext uri="{0D108BD9-81ED-4DB2-BD59-A6C34878D82A}">
-                    <a16:rowId xmlns:a16="http://schemas.microsoft.com/office/drawing/2014/main" val="10001"/>
-                  </a:ext>
-                </a:extLst>
-              </a:tr>
-              <a:tr h="402336">
-                <a:tc>
-                  <a:txBody>
-                    <a:bodyPr/>
-                    <a:lstStyle/>
-                    <a:p>
-                      <a:pPr marL="0" indent="0">
-                        <a:buNone/>
-                      </a:pPr>
-                      <a:r>
-                        <a:rPr lang="en-US" sz="1400" b="1" dirty="0">
-                          <a:solidFill>
-                            <a:schemeClr val="tx1"/>
-                          </a:solidFill>
-                        </a:rPr>
-                        <a:t>First to the warehouse wins</a:t>
-                      </a:r>
-                      <a:endParaRPr lang="en-US" sz="1400" dirty="0"/>
-                    </a:p>
-                  </a:txBody>
-                  <a:tcPr marL="54864" marR="54864" marT="0" marB="0" anchor="ctr">
-                    <a:lnL w="0" cap="flat" cmpd="sng" algn="ctr">
-                      <a:noFill/>
-                    </a:lnL>
-                    <a:lnR w="0" cap="flat" cmpd="sng" algn="ctr">
-                      <a:noFill/>
-                    </a:lnR>
-                    <a:lnT w="9525" cap="flat" cmpd="sng" algn="ctr">
-                      <a:solidFill>
-                        <a:srgbClr val="E3E6EB"/>
-                      </a:solidFill>
-                      <a:prstDash val="solid"/>
-                      <a:round/>
-                      <a:headEnd type="none" w="med" len="med"/>
-                      <a:tailEnd type="none" w="med" len="med"/>
-                    </a:lnT>
-                    <a:lnB w="9525" cap="flat" cmpd="sng" algn="ctr">
-                      <a:solidFill>
-                        <a:srgbClr val="E3E6EB"/>
-                      </a:solidFill>
-                      <a:prstDash val="solid"/>
-                      <a:round/>
-                      <a:headEnd type="none" w="med" len="med"/>
-                      <a:tailEnd type="none" w="med" len="med"/>
-                    </a:lnB>
-                  </a:tcPr>
-                </a:tc>
-                <a:tc>
-                  <a:txBody>
-                    <a:bodyPr/>
-                    <a:lstStyle/>
-                    <a:p>
-                      <a:pPr marL="0" indent="0">
-                        <a:buNone/>
-                      </a:pPr>
-                      <a:r>
-                        <a:rPr lang="en-US" sz="1400" dirty="0">
-                          <a:solidFill>
-                            <a:srgbClr val="3D4552"/>
-                          </a:solidFill>
-                        </a:rPr>
-                        <a:t>Does not protect eMAG's rating</a:t>
-                      </a:r>
-                      <a:endParaRPr lang="en-US" sz="1400" dirty="0"/>
-                    </a:p>
-                  </a:txBody>
-                  <a:tcPr marL="54864" marR="54864" marT="0" marB="0" anchor="ctr">
-                    <a:lnL w="0" cap="flat" cmpd="sng" algn="ctr">
-                      <a:noFill/>
-                    </a:lnL>
-                    <a:lnR w="0" cap="flat" cmpd="sng" algn="ctr">
-                      <a:noFill/>
-                    </a:lnR>
-                    <a:lnT w="9525" cap="flat" cmpd="sng" algn="ctr">
-                      <a:solidFill>
-                        <a:srgbClr val="E3E6EB"/>
-                      </a:solidFill>
-                      <a:prstDash val="solid"/>
-                      <a:round/>
-                      <a:headEnd type="none" w="med" len="med"/>
-                      <a:tailEnd type="none" w="med" len="med"/>
-                    </a:lnT>
-                    <a:lnB w="9525" cap="flat" cmpd="sng" algn="ctr">
-                      <a:solidFill>
-                        <a:srgbClr val="E3E6EB"/>
-                      </a:solidFill>
-                      <a:prstDash val="solid"/>
-                      <a:round/>
-                      <a:headEnd type="none" w="med" len="med"/>
-                      <a:tailEnd type="none" w="med" len="med"/>
-                    </a:lnB>
-                  </a:tcPr>
-                </a:tc>
-                <a:extLst>
-                  <a:ext uri="{0D108BD9-81ED-4DB2-BD59-A6C34878D82A}">
-                    <a16:rowId xmlns:a16="http://schemas.microsoft.com/office/drawing/2014/main" val="10003"/>
-                  </a:ext>
-                </a:extLst>
-              </a:tr>
-              <a:tr h="402336">
-                <a:tc>
-                  <a:txBody>
-                    <a:bodyPr/>
-                    <a:lstStyle/>
-                    <a:p>
-                      <a:pPr marL="0" indent="0">
-                        <a:buNone/>
-                      </a:pPr>
-                      <a:r>
-                        <a:rPr lang="en-US" sz="1400" b="1" dirty="0">
-                          <a:solidFill>
-                            <a:schemeClr val="tx1"/>
-                          </a:solidFill>
-                        </a:rPr>
-                        <a:t>A person decides oversells</a:t>
-                      </a:r>
-                      <a:endParaRPr lang="en-US" sz="1400" dirty="0"/>
-                    </a:p>
-                  </a:txBody>
-                  <a:tcPr marL="54864" marR="54864" marT="0" marB="0" anchor="ctr">
-                    <a:lnL w="0" cap="flat" cmpd="sng" algn="ctr">
-                      <a:noFill/>
-                    </a:lnL>
-                    <a:lnR w="0" cap="flat" cmpd="sng" algn="ctr">
-                      <a:noFill/>
-                    </a:lnR>
-                    <a:lnT w="9525" cap="flat" cmpd="sng" algn="ctr">
-                      <a:solidFill>
-                        <a:srgbClr val="E3E6EB"/>
-                      </a:solidFill>
-                      <a:prstDash val="solid"/>
-                      <a:round/>
-                      <a:headEnd type="none" w="med" len="med"/>
-                      <a:tailEnd type="none" w="med" len="med"/>
-                    </a:lnT>
-                    <a:lnB w="9525" cap="flat" cmpd="sng" algn="ctr">
-                      <a:solidFill>
-                        <a:srgbClr val="E3E6EB"/>
-                      </a:solidFill>
-                      <a:prstDash val="solid"/>
-                      <a:round/>
-                      <a:headEnd type="none" w="med" len="med"/>
-                      <a:tailEnd type="none" w="med" len="med"/>
-                    </a:lnB>
-                  </a:tcPr>
-                </a:tc>
-                <a:tc>
-                  <a:txBody>
-                    <a:bodyPr/>
-                    <a:lstStyle/>
-                    <a:p>
-                      <a:pPr marL="0" indent="0">
-                        <a:buNone/>
-                      </a:pPr>
-                      <a:r>
-                        <a:rPr lang="en-US" sz="1400" dirty="0">
-                          <a:solidFill>
-                            <a:srgbClr val="3D4552"/>
-                          </a:solidFill>
-                        </a:rPr>
-                        <a:t>Someone must watch the queue</a:t>
-                      </a:r>
-                      <a:endParaRPr lang="en-US" sz="1400" dirty="0"/>
-                    </a:p>
-                  </a:txBody>
-                  <a:tcPr marL="54864" marR="54864" marT="0" marB="0" anchor="ctr">
-                    <a:lnL w="0" cap="flat" cmpd="sng" algn="ctr">
-                      <a:noFill/>
-                    </a:lnL>
-                    <a:lnR w="0" cap="flat" cmpd="sng" algn="ctr">
-                      <a:noFill/>
-                    </a:lnR>
-                    <a:lnT w="9525" cap="flat" cmpd="sng" algn="ctr">
-                      <a:solidFill>
-                        <a:srgbClr val="E3E6EB"/>
-                      </a:solidFill>
-                      <a:prstDash val="solid"/>
-                      <a:round/>
-                      <a:headEnd type="none" w="med" len="med"/>
-                      <a:tailEnd type="none" w="med" len="med"/>
-                    </a:lnT>
-                    <a:lnB w="9525" cap="flat" cmpd="sng" algn="ctr">
-                      <a:solidFill>
-                        <a:srgbClr val="E3E6EB"/>
-                      </a:solidFill>
-                      <a:prstDash val="solid"/>
-                      <a:round/>
-                      <a:headEnd type="none" w="med" len="med"/>
-                      <a:tailEnd type="none" w="med" len="med"/>
-                    </a:lnB>
-                  </a:tcPr>
-                </a:tc>
-                <a:extLst>
-                  <a:ext uri="{0D108BD9-81ED-4DB2-BD59-A6C34878D82A}">
-                    <a16:rowId xmlns:a16="http://schemas.microsoft.com/office/drawing/2014/main" val="10004"/>
-                  </a:ext>
-                </a:extLst>
-              </a:tr>
-              <a:tr h="402336">
-                <a:tc>
-                  <a:txBody>
-                    <a:bodyPr/>
-                    <a:lstStyle/>
-                    <a:p>
-                      <a:pPr marL="0" indent="0">
-                        <a:buNone/>
-                      </a:pPr>
-                      <a:r>
-                        <a:rPr lang="en-US" sz="1400" b="1" dirty="0">
-                          <a:solidFill>
-                            <a:schemeClr val="tx1"/>
-                          </a:solidFill>
-                        </a:rPr>
-                        <a:t>Mocks, not sandboxes</a:t>
-                      </a:r>
-                      <a:endParaRPr lang="en-US" sz="1400" dirty="0"/>
-                    </a:p>
-                  </a:txBody>
-                  <a:tcPr marL="54864" marR="54864" marT="0" marB="0" anchor="ctr">
-                    <a:lnL w="0" cap="flat" cmpd="sng" algn="ctr">
-                      <a:noFill/>
-                    </a:lnL>
-                    <a:lnR w="0" cap="flat" cmpd="sng" algn="ctr">
-                      <a:noFill/>
-                    </a:lnR>
-                    <a:lnT w="9525" cap="flat" cmpd="sng" algn="ctr">
-                      <a:solidFill>
-                        <a:srgbClr val="E3E6EB"/>
-                      </a:solidFill>
-                      <a:prstDash val="solid"/>
-                      <a:round/>
-                      <a:headEnd type="none" w="med" len="med"/>
-                      <a:tailEnd type="none" w="med" len="med"/>
-                    </a:lnT>
-                    <a:lnB w="9525" cap="flat" cmpd="sng" algn="ctr">
-                      <a:solidFill>
-                        <a:srgbClr val="E3E6EB"/>
-                      </a:solidFill>
-                      <a:prstDash val="solid"/>
-                      <a:round/>
-                      <a:headEnd type="none" w="med" len="med"/>
-                      <a:tailEnd type="none" w="med" len="med"/>
-                    </a:lnB>
-                  </a:tcPr>
-                </a:tc>
-                <a:tc>
-                  <a:txBody>
-                    <a:bodyPr/>
-                    <a:lstStyle/>
-                    <a:p>
-                      <a:pPr marL="0" indent="0">
-                        <a:buNone/>
-                      </a:pPr>
-                      <a:r>
-                        <a:rPr lang="en-US" sz="1400" dirty="0">
-                          <a:solidFill>
-                            <a:srgbClr val="3D4552"/>
-                          </a:solidFill>
-                        </a:rPr>
-                        <a:t>Real API quirks are untested</a:t>
-                      </a:r>
-                      <a:endParaRPr lang="en-US" sz="1400" dirty="0"/>
-                    </a:p>
-                  </a:txBody>
-                  <a:tcPr marL="54864" marR="54864" marT="0" marB="0" anchor="ctr">
-                    <a:lnL w="0" cap="flat" cmpd="sng" algn="ctr">
-                      <a:noFill/>
-                    </a:lnL>
-                    <a:lnR w="0" cap="flat" cmpd="sng" algn="ctr">
-                      <a:noFill/>
-                    </a:lnR>
-                    <a:lnT w="9525" cap="flat" cmpd="sng" algn="ctr">
-                      <a:solidFill>
-                        <a:srgbClr val="E3E6EB"/>
-                      </a:solidFill>
-                      <a:prstDash val="solid"/>
-                      <a:round/>
-                      <a:headEnd type="none" w="med" len="med"/>
-                      <a:tailEnd type="none" w="med" len="med"/>
-                    </a:lnT>
-                    <a:lnB w="9525" cap="flat" cmpd="sng" algn="ctr">
-                      <a:solidFill>
-                        <a:srgbClr val="E3E6EB"/>
-                      </a:solidFill>
-                      <a:prstDash val="solid"/>
-                      <a:round/>
-                      <a:headEnd type="none" w="med" len="med"/>
-                      <a:tailEnd type="none" w="med" len="med"/>
-                    </a:lnB>
-                  </a:tcPr>
-                </a:tc>
-                <a:extLst>
-                  <a:ext uri="{0D108BD9-81ED-4DB2-BD59-A6C34878D82A}">
-                    <a16:rowId xmlns:a16="http://schemas.microsoft.com/office/drawing/2014/main" val="10005"/>
-                  </a:ext>
-                </a:extLst>
-              </a:tr>
-            </a:tbl>
-          </a:graphicData>
-        </a:graphic>
-      </p:graphicFrame>
-      <p:sp>
-        <p:nvSpPr>
-          <p:cNvPr id="30" name="success"/>
-          <p:cNvSpPr/>
-          <p:nvPr/>
-        </p:nvSpPr>
-        <p:spPr>
-          <a:xfrm>
-            <a:off x="6263640" y="3611880"/>
-            <a:ext cx="5376672" cy="2011680"/>
-          </a:xfrm>
-          <a:prstGeom prst="roundRect">
-            <a:avLst>
-              <a:gd name="adj" fmla="val 3636"/>
-            </a:avLst>
-          </a:prstGeom>
-          <a:solidFill>
-            <a:schemeClr val="bg2"/>
-          </a:solidFill>
-          <a:ln/>
-        </p:spPr>
-        <p:txBody>
-          <a:bodyPr/>
-          <a:lstStyle/>
-          <a:p>
-            <a:endParaRPr lang="en-US"/>
-          </a:p>
-        </p:txBody>
-      </p:sp>
-      <p:sp>
-        <p:nvSpPr>
-          <p:cNvPr id="31" name="Text 29"/>
-          <p:cNvSpPr txBox="1"/>
-          <p:nvPr/>
-        </p:nvSpPr>
-        <p:spPr>
-          <a:xfrm>
-            <a:off x="6492240" y="3767328"/>
-            <a:ext cx="4937760" cy="274320"/>
-          </a:xfrm>
-          <a:prstGeom prst="rect">
-            <a:avLst/>
-          </a:prstGeom>
-          <a:noFill/>
-          <a:ln/>
-        </p:spPr>
-        <p:txBody>
-          <a:bodyPr wrap="square" lIns="0" tIns="0" rIns="0" bIns="0" rtlCol="0" anchor="t"/>
-          <a:lstStyle/>
-          <a:p>
-            <a:pPr marL="0" indent="0">
-              <a:buNone/>
-            </a:pPr>
-            <a:r>
-              <a:rPr lang="en-US" sz="1500" b="1" dirty="0">
-                <a:solidFill>
-                  <a:schemeClr val="tx1"/>
-                </a:solidFill>
-              </a:rPr>
-              <a:t>Success after 30 days</a:t>
-            </a:r>
-            <a:endParaRPr lang="en-US" sz="1500" dirty="0"/>
-          </a:p>
-        </p:txBody>
-      </p:sp>
-      <p:sp>
-        <p:nvSpPr>
-          <p:cNvPr id="32" name="Text 30"/>
-          <p:cNvSpPr txBox="1"/>
-          <p:nvPr/>
-        </p:nvSpPr>
-        <p:spPr>
-          <a:xfrm>
-            <a:off x="6492240" y="4114800"/>
-            <a:ext cx="4983480" cy="1828800"/>
-          </a:xfrm>
-          <a:prstGeom prst="rect">
-            <a:avLst/>
-          </a:prstGeom>
-          <a:noFill/>
-          <a:ln/>
-        </p:spPr>
-        <p:txBody>
-          <a:bodyPr wrap="square" lIns="0" tIns="0" rIns="0" bIns="0" rtlCol="0" anchor="t"/>
-          <a:lstStyle/>
-          <a:p>
-            <a:pPr marL="177800" indent="-177800">
+            <a:pPr marL="228600" indent="-228600">
               <a:spcAft>
-                <a:spcPts val="500"/>
+                <a:spcPts val="1400"/>
               </a:spcAft>
               <a:buSzPct val="100000"/>
-              <a:buChar char="•"/>
-            </a:pPr>
-            <a:r>
-              <a:rPr lang="en-US" sz="1300" dirty="0">
+              <a:buFont typeface="+mj-lt"/>
+              <a:buAutoNum type="arabicPeriod"/>
+            </a:pPr>
+            <a:r>
+              <a:rPr lang="en-US" sz="1800" dirty="0" b="1">
                 <a:solidFill>
                   <a:srgbClr val="3D4552"/>
                 </a:solidFill>
               </a:rPr>
-              <a:t>Missed orders: zero, and Flow shows no lost orders</a:t>
+              <a:t>Started from the customer. </a:t>
+            </a:r>
+            <a:r>
+              <a:rPr lang="en-US" sz="1800" dirty="0" b="0">
+                <a:solidFill>
+                  <a:srgbClr val="3D4552"/>
+                </a:solidFill>
+              </a:rPr>
+              <a:t>A reseller selling on its own Adobe Commerce shop and on eMAG, from one warehouse. I read the real systems' delivery rules first.</a:t>
             </a:r>
             <a:endParaRPr lang="en-US" sz="1300" dirty="0"/>
           </a:p>
           <a:p>
-            <a:pPr marL="177800" indent="-177800">
+            <a:pPr marL="228600" indent="-228600">
               <a:spcAft>
-                <a:spcPts val="500"/>
+                <a:spcPts val="1400"/>
               </a:spcAft>
               <a:buSzPct val="100000"/>
-              <a:buChar char="•"/>
-            </a:pPr>
-            <a:r>
-              <a:rPr lang="en-US" sz="1300" dirty="0">
+              <a:buFont typeface="+mj-lt"/>
+              <a:buAutoNum type="arabicPeriod"/>
+            </a:pPr>
+            <a:r>
+              <a:rPr lang="en-US" sz="1800" dirty="0" b="1">
                 <a:solidFill>
                   <a:srgbClr val="3D4552"/>
                 </a:solidFill>
               </a:rPr>
-              <a:t>Oversells well below the baseline</a:t>
+              <a:t>Agreed the screens before writing any. </a:t>
+            </a:r>
+            <a:r>
+              <a:rPr lang="en-US" sz="1800" dirty="0" b="0">
+                <a:solidFill>
+                  <a:srgbClr val="3D4552"/>
+                </a:solidFill>
+              </a:rPr>
+              <a:t>Clickable mockups of every page, approved before the first line of interface code.</a:t>
             </a:r>
             <a:endParaRPr lang="en-US" sz="1300" dirty="0"/>
           </a:p>
           <a:p>
-            <a:pPr marL="177800" indent="-177800">
+            <a:pPr marL="228600" indent="-228600">
               <a:spcAft>
-                <a:spcPts val="500"/>
+                <a:spcPts val="1400"/>
               </a:spcAft>
               <a:buSzPct val="100000"/>
-              <a:buChar char="•"/>
-            </a:pPr>
-            <a:r>
-              <a:rPr lang="en-US" sz="1300" dirty="0">
+              <a:buFont typeface="+mj-lt"/>
+              <a:buAutoNum type="arabicPeriod"/>
+            </a:pPr>
+            <a:r>
+              <a:rPr lang="en-US" sz="1800" dirty="0" b="1">
                 <a:solidFill>
                   <a:srgbClr val="3D4552"/>
                 </a:solidFill>
               </a:rPr>
-              <a:t>eMAG seller cancellation rate inside eMAG's threshold</a:t>
+              <a:t>Built the sync core first: </a:t>
+            </a:r>
+            <a:r>
+              <a:rPr lang="en-US" sz="1800" dirty="0" b="0">
+                <a:solidFill>
+                  <a:srgbClr val="3D4552"/>
+                </a:solidFill>
+              </a:rPr>
+              <a:t>inbox, retries, stock sync, review queue. The operator console came after.</a:t>
             </a:r>
             <a:endParaRPr lang="en-US" sz="1300" dirty="0"/>
           </a:p>
           <a:p>
-            <a:pPr marL="177800" indent="-177800">
+            <a:pPr marL="228600" indent="-228600">
               <a:spcAft>
-                <a:spcPts val="500"/>
+                <a:spcPts val="1400"/>
               </a:spcAft>
               <a:buSzPct val="100000"/>
-              <a:buChar char="•"/>
-            </a:pPr>
-            <a:r>
-              <a:rPr lang="en-US" sz="1300" dirty="0">
+              <a:buFont typeface="+mj-lt"/>
+              <a:buAutoNum type="arabicPeriod"/>
+            </a:pPr>
+            <a:r>
+              <a:rPr lang="en-US" sz="1800" dirty="0" b="1">
                 <a:solidFill>
                   <a:srgbClr val="3D4552"/>
                 </a:solidFill>
               </a:rPr>
-              <a:t>Oldest open review item under 30 min in business hours</a:t>
+              <a:t>Then tried to break it. </a:t>
+            </a:r>
+            <a:r>
+              <a:rPr lang="en-US" sz="1800" dirty="0" b="0">
+                <a:solidFill>
+                  <a:srgbClr val="3D4552"/>
+                </a:solidFill>
+              </a:rPr>
+              <a:t>An independent review found 8 gaps in the core, a load test found a 20 orders/s cap, a crash test stopped it at 132 points. Each one fixed, with a test.</a:t>
             </a:r>
             <a:endParaRPr lang="en-US" sz="1300" dirty="0"/>
           </a:p>
@@ -8023,46 +6295,37 @@
       </p:sp>
       <p:sp>
         <p:nvSpPr>
-          <p:cNvPr id="33" name="Slide Number Placeholder 0"/>
-          <p:cNvSpPr>
-            <a:spLocks noGrp="1"/>
-          </p:cNvSpPr>
-          <p:nvPr>
-            <p:ph type="sldNum" sz="quarter" idx="4294967295"/>
-          </p:nvPr>
-        </p:nvSpPr>
-        <p:spPr>
-          <a:xfrm>
-            <a:off x="11183112" y="6446520"/>
-            <a:ext cx="457200" cy="228600"/>
-          </a:xfrm>
-          <a:prstGeom prst="rect">
-            <a:avLst/>
-          </a:prstGeom>
-          <a:extLst>
-            <a:ext uri="{C572A759-6A51-4108-AA02-DFA0A04FC94B}">
-              <ma14:wrappingTextBoxFlag xmlns="" xmlns:ma14="http://schemas.microsoft.com/office/mac/drawingml/2011/main" val="0"/>
-            </a:ext>
-          </a:extLst>
-        </p:spPr>
-        <p:txBody>
-          <a:bodyPr lIns="0" tIns="0" rIns="0" bIns="0"/>
-          <a:lstStyle>
-            <a:lvl1pPr>
-              <a:defRPr sz="1000">
-                <a:solidFill>
-                  <a:srgbClr val="8A93A1"/>
-                </a:solidFill>
-              </a:defRPr>
-            </a:lvl1pPr>
-          </a:lstStyle>
-          <a:p>
-            <a:pPr algn="r"/>
-            <a:fld id="{F7021451-1387-4CA6-816F-3879F97B5CBC}" type="slidenum">
-              <a:rPr lang="en-US" b="0"/>
-              <a:t>20</a:t>
-            </a:fld>
-            <a:endParaRPr lang="en-US"/>
+          <p:cNvPr id="43" name="Text 6"/>
+          <p:cNvSpPr txBox="1"/>
+          <p:nvPr/>
+        </p:nvSpPr>
+        <p:spPr>
+          <a:xfrm>
+            <a:off x="548640" y="4754880"/>
+            <a:ext cx="11091672" cy="868680"/>
+          </a:xfrm>
+          <a:prstGeom prst="rect">
+            <a:avLst/>
+          </a:prstGeom>
+          <a:noFill/>
+          <a:ln/>
+        </p:spPr>
+        <p:txBody>
+          <a:bodyPr wrap="square" lIns="0" tIns="0" rIns="0" bIns="0" rtlCol="0" anchor="t"/>
+          <a:lstStyle/>
+          <a:p>
+            <a:pPr marL="0" indent="0">
+              <a:buNone/>
+            </a:pPr>
+            <a:r>
+              <a:rPr lang="en-US" sz="2000" b="1" dirty="0">
+                <a:solidFill>
+                  <a:schemeClr val="tx1"/>
+                </a:solidFill>
+              </a:rPr>
+              <a:t>AI wrote most of the code and ran most of the reviews. The decisions and the final checking were mine.</a:t>
+            </a:r>
+            <a:endParaRPr lang="en-US" sz="1500" dirty="0"/>
           </a:p>
         </p:txBody>
       </p:sp>
@@ -8168,7 +6431,7 @@
                   <a:schemeClr val="tx1"/>
                 </a:solidFill>
               </a:rPr>
-              <a:t>Five minutes, on the real screens</a:t>
+              <a:t>Live demo</a:t>
             </a:r>
             <a:endParaRPr lang="en-US" sz="3200" dirty="0"/>
           </a:p>
@@ -8245,8 +6508,8 @@
         </p:nvSpPr>
         <p:spPr>
           <a:xfrm>
-            <a:off x="1097280" y="1463040"/>
-            <a:ext cx="1463040" cy="566928"/>
+            <a:off x="1097280" y="1389888"/>
+            <a:ext cx="5669280" cy="685800"/>
           </a:xfrm>
           <a:prstGeom prst="rect">
             <a:avLst/>
@@ -8271,77 +6534,19 @@
             </a:r>
             <a:endParaRPr lang="en-US" sz="1500" dirty="0"/>
           </a:p>
-        </p:txBody>
-      </p:sp>
-      <p:sp>
-        <p:nvSpPr>
-          <p:cNvPr id="7" name="Text 5"/>
-          <p:cNvSpPr txBox="1"/>
-          <p:nvPr/>
-        </p:nvSpPr>
-        <p:spPr>
-          <a:xfrm>
-            <a:off x="2606040" y="1463040"/>
-            <a:ext cx="3611880" cy="566928"/>
-          </a:xfrm>
-          <a:prstGeom prst="rect">
-            <a:avLst/>
-          </a:prstGeom>
-          <a:noFill/>
-          <a:ln/>
-        </p:spPr>
-        <p:txBody>
-          <a:bodyPr wrap="square" lIns="0" tIns="0" rIns="0" bIns="0" rtlCol="0" anchor="ctr"/>
-          <a:lstStyle/>
           <a:p>
             <a:pPr marL="0" indent="0">
               <a:buNone/>
             </a:pPr>
             <a:r>
-              <a:rPr lang="en-US" sz="1300" dirty="0">
-                <a:solidFill>
-                  <a:srgbClr val="3D4552"/>
-                </a:solidFill>
-              </a:rPr>
-              <a:t>Traffic is on: orders flow, stock follows.</a:t>
-            </a:r>
-            <a:endParaRPr lang="en-US" sz="1300" dirty="0"/>
-          </a:p>
-        </p:txBody>
-      </p:sp>
-      <p:sp>
-        <p:nvSpPr>
-          <p:cNvPr id="8" name="Text 6"/>
-          <p:cNvSpPr txBox="1"/>
-          <p:nvPr/>
-        </p:nvSpPr>
-        <p:spPr>
-          <a:xfrm>
-            <a:off x="6217920" y="1463040"/>
-            <a:ext cx="502920" cy="566928"/>
-          </a:xfrm>
-          <a:prstGeom prst="rect">
-            <a:avLst/>
-          </a:prstGeom>
-          <a:noFill/>
-          <a:ln/>
-        </p:spPr>
-        <p:txBody>
-          <a:bodyPr wrap="square" lIns="0" tIns="0" rIns="0" bIns="0" rtlCol="0" anchor="ctr"/>
-          <a:lstStyle/>
-          <a:p>
-            <a:pPr marL="0" indent="0" algn="r">
-              <a:buNone/>
-            </a:pPr>
-            <a:r>
-              <a:rPr lang="en-US" sz="1200" dirty="0">
-                <a:solidFill>
-                  <a:schemeClr val="tx2"/>
-                </a:solidFill>
-              </a:rPr>
-              <a:t>30 s</a:t>
-            </a:r>
-            <a:endParaRPr lang="en-US" sz="1200" dirty="0"/>
+              <a:rPr lang="en-US" sz="1500" b="0" dirty="0">
+                <a:solidFill>
+                  <a:schemeClr val="tx1"/>
+                </a:solidFill>
+              </a:rPr>
+              <a:t>Orders flow, stock follows.</a:t>
+            </a:r>
+            <a:endParaRPr lang="en-US" sz="1500" dirty="0"/>
           </a:p>
         </p:txBody>
       </p:sp>
@@ -8416,8 +6621,8 @@
         </p:nvSpPr>
         <p:spPr>
           <a:xfrm>
-            <a:off x="1097280" y="2194560"/>
-            <a:ext cx="1463040" cy="566928"/>
+            <a:off x="1097280" y="2121408"/>
+            <a:ext cx="5669280" cy="685800"/>
           </a:xfrm>
           <a:prstGeom prst="rect">
             <a:avLst/>
@@ -8442,77 +6647,19 @@
             </a:r>
             <a:endParaRPr lang="en-US" sz="1500" dirty="0"/>
           </a:p>
-        </p:txBody>
-      </p:sp>
-      <p:sp>
-        <p:nvSpPr>
-          <p:cNvPr id="12" name="Text 10"/>
-          <p:cNvSpPr txBox="1"/>
-          <p:nvPr/>
-        </p:nvSpPr>
-        <p:spPr>
-          <a:xfrm>
-            <a:off x="2606040" y="2194560"/>
-            <a:ext cx="3611880" cy="566928"/>
-          </a:xfrm>
-          <a:prstGeom prst="rect">
-            <a:avLst/>
-          </a:prstGeom>
-          <a:noFill/>
-          <a:ln/>
-        </p:spPr>
-        <p:txBody>
-          <a:bodyPr wrap="square" lIns="0" tIns="0" rIns="0" bIns="0" rtlCol="0" anchor="ctr"/>
-          <a:lstStyle/>
           <a:p>
             <a:pPr marL="0" indent="0">
               <a:buNone/>
             </a:pPr>
             <a:r>
-              <a:rPr lang="en-US" sz="1300" dirty="0">
-                <a:solidFill>
-                  <a:srgbClr val="3D4552"/>
-                </a:solidFill>
-              </a:rPr>
-              <a:t>Send the same order twice: one order, one duplicate ignored.</a:t>
-            </a:r>
-            <a:endParaRPr lang="en-US" sz="1300" dirty="0"/>
-          </a:p>
-        </p:txBody>
-      </p:sp>
-      <p:sp>
-        <p:nvSpPr>
-          <p:cNvPr id="13" name="Text 11"/>
-          <p:cNvSpPr txBox="1"/>
-          <p:nvPr/>
-        </p:nvSpPr>
-        <p:spPr>
-          <a:xfrm>
-            <a:off x="6217920" y="2194560"/>
-            <a:ext cx="502920" cy="566928"/>
-          </a:xfrm>
-          <a:prstGeom prst="rect">
-            <a:avLst/>
-          </a:prstGeom>
-          <a:noFill/>
-          <a:ln/>
-        </p:spPr>
-        <p:txBody>
-          <a:bodyPr wrap="square" lIns="0" tIns="0" rIns="0" bIns="0" rtlCol="0" anchor="ctr"/>
-          <a:lstStyle/>
-          <a:p>
-            <a:pPr marL="0" indent="0" algn="r">
-              <a:buNone/>
-            </a:pPr>
-            <a:r>
-              <a:rPr lang="en-US" sz="1200" dirty="0">
-                <a:solidFill>
-                  <a:schemeClr val="tx2"/>
-                </a:solidFill>
-              </a:rPr>
-              <a:t>30 s</a:t>
-            </a:r>
-            <a:endParaRPr lang="en-US" sz="1200" dirty="0"/>
+              <a:rPr lang="en-US" sz="1500" b="0" dirty="0">
+                <a:solidFill>
+                  <a:schemeClr val="tx1"/>
+                </a:solidFill>
+              </a:rPr>
+              <a:t>The same order twice, handled once.</a:t>
+            </a:r>
+            <a:endParaRPr lang="en-US" sz="1500" dirty="0"/>
           </a:p>
         </p:txBody>
       </p:sp>
@@ -8587,8 +6734,8 @@
         </p:nvSpPr>
         <p:spPr>
           <a:xfrm>
-            <a:off x="1097280" y="2926080"/>
-            <a:ext cx="1463040" cy="566928"/>
+            <a:off x="1097280" y="2852928"/>
+            <a:ext cx="5669280" cy="685800"/>
           </a:xfrm>
           <a:prstGeom prst="rect">
             <a:avLst/>
@@ -8613,77 +6760,19 @@
             </a:r>
             <a:endParaRPr lang="en-US" sz="1500" dirty="0"/>
           </a:p>
-        </p:txBody>
-      </p:sp>
-      <p:sp>
-        <p:nvSpPr>
-          <p:cNvPr id="17" name="Text 15"/>
-          <p:cNvSpPr txBox="1"/>
-          <p:nvPr/>
-        </p:nvSpPr>
-        <p:spPr>
-          <a:xfrm>
-            <a:off x="2606040" y="2926080"/>
-            <a:ext cx="3611880" cy="566928"/>
-          </a:xfrm>
-          <a:prstGeom prst="rect">
-            <a:avLst/>
-          </a:prstGeom>
-          <a:noFill/>
-          <a:ln/>
-        </p:spPr>
-        <p:txBody>
-          <a:bodyPr wrap="square" lIns="0" tIns="0" rIns="0" bIns="0" rtlCol="0" anchor="ctr"/>
-          <a:lstStyle/>
           <a:p>
             <a:pPr marL="0" indent="0">
               <a:buNone/>
             </a:pPr>
             <a:r>
-              <a:rPr lang="en-US" sz="1300" dirty="0">
-                <a:solidFill>
-                  <a:srgbClr val="3D4552"/>
-                </a:solidFill>
-              </a:rPr>
-              <a:t>Stop answering: retries honour Retry-After, then review. Bring it back, Retry all.</a:t>
-            </a:r>
-            <a:endParaRPr lang="en-US" sz="1300" dirty="0"/>
-          </a:p>
-        </p:txBody>
-      </p:sp>
-      <p:sp>
-        <p:nvSpPr>
-          <p:cNvPr id="18" name="Text 16"/>
-          <p:cNvSpPr txBox="1"/>
-          <p:nvPr/>
-        </p:nvSpPr>
-        <p:spPr>
-          <a:xfrm>
-            <a:off x="6217920" y="2926080"/>
-            <a:ext cx="502920" cy="566928"/>
-          </a:xfrm>
-          <a:prstGeom prst="rect">
-            <a:avLst/>
-          </a:prstGeom>
-          <a:noFill/>
-          <a:ln/>
-        </p:spPr>
-        <p:txBody>
-          <a:bodyPr wrap="square" lIns="0" tIns="0" rIns="0" bIns="0" rtlCol="0" anchor="ctr"/>
-          <a:lstStyle/>
-          <a:p>
-            <a:pPr marL="0" indent="0" algn="r">
-              <a:buNone/>
-            </a:pPr>
-            <a:r>
-              <a:rPr lang="en-US" sz="1200" dirty="0">
-                <a:solidFill>
-                  <a:schemeClr val="tx2"/>
-                </a:solidFill>
-              </a:rPr>
-              <a:t>75 s</a:t>
-            </a:r>
-            <a:endParaRPr lang="en-US" sz="1200" dirty="0"/>
+              <a:rPr lang="en-US" sz="1500" b="0" dirty="0">
+                <a:solidFill>
+                  <a:schemeClr val="tx1"/>
+                </a:solidFill>
+              </a:rPr>
+              <a:t>The warehouse stops: retries, then review.</a:t>
+            </a:r>
+            <a:endParaRPr lang="en-US" sz="1500" dirty="0"/>
           </a:p>
         </p:txBody>
       </p:sp>
@@ -8758,8 +6847,8 @@
         </p:nvSpPr>
         <p:spPr>
           <a:xfrm>
-            <a:off x="1097280" y="3657600"/>
-            <a:ext cx="1463040" cy="566928"/>
+            <a:off x="1097280" y="3584448"/>
+            <a:ext cx="5669280" cy="685800"/>
           </a:xfrm>
           <a:prstGeom prst="rect">
             <a:avLst/>
@@ -8784,77 +6873,19 @@
             </a:r>
             <a:endParaRPr lang="en-US" sz="1500" dirty="0"/>
           </a:p>
-        </p:txBody>
-      </p:sp>
-      <p:sp>
-        <p:nvSpPr>
-          <p:cNvPr id="22" name="Text 20"/>
-          <p:cNvSpPr txBox="1"/>
-          <p:nvPr/>
-        </p:nvSpPr>
-        <p:spPr>
-          <a:xfrm>
-            <a:off x="2606040" y="3657600"/>
-            <a:ext cx="3611880" cy="566928"/>
-          </a:xfrm>
-          <a:prstGeom prst="rect">
-            <a:avLst/>
-          </a:prstGeom>
-          <a:noFill/>
-          <a:ln/>
-        </p:spPr>
-        <p:txBody>
-          <a:bodyPr wrap="square" lIns="0" tIns="0" rIns="0" bIns="0" rtlCol="0" anchor="ctr"/>
-          <a:lstStyle/>
           <a:p>
             <a:pPr marL="0" indent="0">
               <a:buNone/>
             </a:pPr>
             <a:r>
-              <a:rPr lang="en-US" sz="1300" dirty="0">
-                <a:solidFill>
-                  <a:srgbClr val="3D4552"/>
-                </a:solidFill>
-              </a:rPr>
-              <a:t>Last MacBook, eMAG ignores stock: sold on both, the second goes to review. Cancel on eMAG, confirm.</a:t>
-            </a:r>
-            <a:endParaRPr lang="en-US" sz="1300" dirty="0"/>
-          </a:p>
-        </p:txBody>
-      </p:sp>
-      <p:sp>
-        <p:nvSpPr>
-          <p:cNvPr id="23" name="Text 21"/>
-          <p:cNvSpPr txBox="1"/>
-          <p:nvPr/>
-        </p:nvSpPr>
-        <p:spPr>
-          <a:xfrm>
-            <a:off x="6217920" y="3657600"/>
-            <a:ext cx="502920" cy="566928"/>
-          </a:xfrm>
-          <a:prstGeom prst="rect">
-            <a:avLst/>
-          </a:prstGeom>
-          <a:noFill/>
-          <a:ln/>
-        </p:spPr>
-        <p:txBody>
-          <a:bodyPr wrap="square" lIns="0" tIns="0" rIns="0" bIns="0" rtlCol="0" anchor="ctr"/>
-          <a:lstStyle/>
-          <a:p>
-            <a:pPr marL="0" indent="0" algn="r">
-              <a:buNone/>
-            </a:pPr>
-            <a:r>
-              <a:rPr lang="en-US" sz="1200" dirty="0">
-                <a:solidFill>
-                  <a:schemeClr val="tx2"/>
-                </a:solidFill>
-              </a:rPr>
-              <a:t>75 s</a:t>
-            </a:r>
-            <a:endParaRPr lang="en-US" sz="1200" dirty="0"/>
+              <a:rPr lang="en-US" sz="1500" b="0" dirty="0">
+                <a:solidFill>
+                  <a:schemeClr val="tx1"/>
+                </a:solidFill>
+              </a:rPr>
+              <a:t>The last MacBook sold twice; a person decides.</a:t>
+            </a:r>
+            <a:endParaRPr lang="en-US" sz="1500" dirty="0"/>
           </a:p>
         </p:txBody>
       </p:sp>
@@ -8929,8 +6960,8 @@
         </p:nvSpPr>
         <p:spPr>
           <a:xfrm>
-            <a:off x="1097280" y="4389120"/>
-            <a:ext cx="1463040" cy="566928"/>
+            <a:off x="1097280" y="4315968"/>
+            <a:ext cx="5669280" cy="685800"/>
           </a:xfrm>
           <a:prstGeom prst="rect">
             <a:avLst/>
@@ -8955,77 +6986,19 @@
             </a:r>
             <a:endParaRPr lang="en-US" sz="1500" dirty="0"/>
           </a:p>
-        </p:txBody>
-      </p:sp>
-      <p:sp>
-        <p:nvSpPr>
-          <p:cNvPr id="27" name="Text 25"/>
-          <p:cNvSpPr txBox="1"/>
-          <p:nvPr/>
-        </p:nvSpPr>
-        <p:spPr>
-          <a:xfrm>
-            <a:off x="2606040" y="4389120"/>
-            <a:ext cx="3611880" cy="566928"/>
-          </a:xfrm>
-          <a:prstGeom prst="rect">
-            <a:avLst/>
-          </a:prstGeom>
-          <a:noFill/>
-          <a:ln/>
-        </p:spPr>
-        <p:txBody>
-          <a:bodyPr wrap="square" lIns="0" tIns="0" rIns="0" bIns="0" rtlCol="0" anchor="ctr"/>
-          <a:lstStyle/>
           <a:p>
             <a:pPr marL="0" indent="0">
               <a:buNone/>
             </a:pPr>
             <a:r>
-              <a:rPr lang="en-US" sz="1300" dirty="0">
-                <a:solidFill>
-                  <a:srgbClr val="3D4552"/>
-                </a:solidFill>
-              </a:rPr>
-              <a:t>eMAG refuses one product: one row dirty, the rest applied, healed next run.</a:t>
-            </a:r>
-            <a:endParaRPr lang="en-US" sz="1300" dirty="0"/>
-          </a:p>
-        </p:txBody>
-      </p:sp>
-      <p:sp>
-        <p:nvSpPr>
-          <p:cNvPr id="28" name="Text 26"/>
-          <p:cNvSpPr txBox="1"/>
-          <p:nvPr/>
-        </p:nvSpPr>
-        <p:spPr>
-          <a:xfrm>
-            <a:off x="6217920" y="4389120"/>
-            <a:ext cx="502920" cy="566928"/>
-          </a:xfrm>
-          <a:prstGeom prst="rect">
-            <a:avLst/>
-          </a:prstGeom>
-          <a:noFill/>
-          <a:ln/>
-        </p:spPr>
-        <p:txBody>
-          <a:bodyPr wrap="square" lIns="0" tIns="0" rIns="0" bIns="0" rtlCol="0" anchor="ctr"/>
-          <a:lstStyle/>
-          <a:p>
-            <a:pPr marL="0" indent="0" algn="r">
-              <a:buNone/>
-            </a:pPr>
-            <a:r>
-              <a:rPr lang="en-US" sz="1200" dirty="0">
-                <a:solidFill>
-                  <a:schemeClr val="tx2"/>
-                </a:solidFill>
-              </a:rPr>
-              <a:t>40 s</a:t>
-            </a:r>
-            <a:endParaRPr lang="en-US" sz="1200" dirty="0"/>
+              <a:rPr lang="en-US" sz="1500" b="0" dirty="0">
+                <a:solidFill>
+                  <a:schemeClr val="tx1"/>
+                </a:solidFill>
+              </a:rPr>
+              <a:t>eMAG refuses one product; it heals by itself.</a:t>
+            </a:r>
+            <a:endParaRPr lang="en-US" sz="1500" dirty="0"/>
           </a:p>
         </p:txBody>
       </p:sp>
@@ -9100,8 +7073,8 @@
         </p:nvSpPr>
         <p:spPr>
           <a:xfrm>
-            <a:off x="1097280" y="5120640"/>
-            <a:ext cx="1463040" cy="566928"/>
+            <a:off x="1097280" y="5047488"/>
+            <a:ext cx="5669280" cy="685800"/>
           </a:xfrm>
           <a:prstGeom prst="rect">
             <a:avLst/>
@@ -9126,131 +7099,19 @@
             </a:r>
             <a:endParaRPr lang="en-US" sz="1500" dirty="0"/>
           </a:p>
-        </p:txBody>
-      </p:sp>
-      <p:sp>
-        <p:nvSpPr>
-          <p:cNvPr id="32" name="Text 30"/>
-          <p:cNvSpPr txBox="1"/>
-          <p:nvPr/>
-        </p:nvSpPr>
-        <p:spPr>
-          <a:xfrm>
-            <a:off x="2606040" y="5120640"/>
-            <a:ext cx="3611880" cy="566928"/>
-          </a:xfrm>
-          <a:prstGeom prst="rect">
-            <a:avLst/>
-          </a:prstGeom>
-          <a:noFill/>
-          <a:ln/>
-        </p:spPr>
-        <p:txBody>
-          <a:bodyPr wrap="square" lIns="0" tIns="0" rIns="0" bIns="0" rtlCol="0" anchor="ctr"/>
-          <a:lstStyle/>
           <a:p>
             <a:pPr marL="0" indent="0">
               <a:buNone/>
             </a:pPr>
             <a:r>
-              <a:rPr lang="en-US" sz="1300" dirty="0">
-                <a:solidFill>
-                  <a:srgbClr val="3D4552"/>
-                </a:solidFill>
-              </a:rPr>
-              <a:t>Open the order's history, then ask the assistant about it.</a:t>
-            </a:r>
-            <a:endParaRPr lang="en-US" sz="1300" dirty="0"/>
-          </a:p>
-        </p:txBody>
-      </p:sp>
-      <p:sp>
-        <p:nvSpPr>
-          <p:cNvPr id="33" name="Text 31"/>
-          <p:cNvSpPr txBox="1"/>
-          <p:nvPr/>
-        </p:nvSpPr>
-        <p:spPr>
-          <a:xfrm>
-            <a:off x="6217920" y="5120640"/>
-            <a:ext cx="502920" cy="566928"/>
-          </a:xfrm>
-          <a:prstGeom prst="rect">
-            <a:avLst/>
-          </a:prstGeom>
-          <a:noFill/>
-          <a:ln/>
-        </p:spPr>
-        <p:txBody>
-          <a:bodyPr wrap="square" lIns="0" tIns="0" rIns="0" bIns="0" rtlCol="0" anchor="ctr"/>
-          <a:lstStyle/>
-          <a:p>
-            <a:pPr marL="0" indent="0" algn="r">
-              <a:buNone/>
-            </a:pPr>
-            <a:r>
-              <a:rPr lang="en-US" sz="1200" dirty="0">
-                <a:solidFill>
-                  <a:schemeClr val="tx2"/>
-                </a:solidFill>
-              </a:rPr>
-              <a:t>30 s</a:t>
-            </a:r>
-            <a:endParaRPr lang="en-US" sz="1200" dirty="0"/>
-          </a:p>
-        </p:txBody>
-      </p:sp>
-      <p:pic>
-        <p:nvPicPr>
-          <p:cNvPr id="34" name="Image 0" descr="Demo controls page: warehouse, recount, shop, eMAG, security, simulation and sample history cards"/>
-          <p:cNvPicPr>
-            <a:picLocks noChangeAspect="1"/>
-          </p:cNvPicPr>
-          <p:nvPr/>
-        </p:nvPicPr>
-        <p:blipFill>
-          <a:blip r:embed="rId3"/>
-          <a:stretch>
-            <a:fillRect/>
-          </a:stretch>
-        </p:blipFill>
-        <p:spPr>
-          <a:xfrm>
-            <a:off x="7086600" y="1463040"/>
-            <a:ext cx="4553712" cy="2428646"/>
-          </a:xfrm>
-          <a:prstGeom prst="rect">
-            <a:avLst/>
-          </a:prstGeom>
-        </p:spPr>
-      </p:pic>
-      <p:sp>
-        <p:nvSpPr>
-          <p:cNvPr id="35" name="frame"/>
-          <p:cNvSpPr/>
-          <p:nvPr/>
-        </p:nvSpPr>
-        <p:spPr>
-          <a:xfrm>
-            <a:off x="7086600" y="1463040"/>
-            <a:ext cx="4553712" cy="2428646"/>
-          </a:xfrm>
-          <a:prstGeom prst="rect">
-            <a:avLst/>
-          </a:prstGeom>
-          <a:noFill/>
-          <a:ln w="9525">
-            <a:solidFill>
-              <a:srgbClr val="E3E6EB"/>
-            </a:solidFill>
-            <a:prstDash val="solid"/>
-          </a:ln>
-        </p:spPr>
-        <p:txBody>
-          <a:bodyPr/>
-          <a:lstStyle/>
-          <a:p>
-            <a:endParaRPr lang="en-US"/>
+              <a:rPr lang="en-US" sz="1500" b="0" dirty="0">
+                <a:solidFill>
+                  <a:schemeClr val="tx1"/>
+                </a:solidFill>
+              </a:rPr>
+              <a:t>One order's history, then the assistant.</a:t>
+            </a:r>
+            <a:endParaRPr lang="en-US" sz="1500" dirty="0"/>
           </a:p>
         </p:txBody>
       </p:sp>
@@ -9262,8 +7123,8 @@
         </p:nvSpPr>
         <p:spPr>
           <a:xfrm>
-            <a:off x="7086600" y="4120286"/>
-            <a:ext cx="4553712" cy="960120"/>
+            <a:off x="6537960" y="1920240"/>
+            <a:ext cx="5102352" cy="2103120"/>
           </a:xfrm>
           <a:prstGeom prst="roundRect">
             <a:avLst>
@@ -9291,24 +7152,24 @@
         </p:nvSpPr>
         <p:spPr>
           <a:xfrm>
-            <a:off x="7269480" y="4120286"/>
-            <a:ext cx="4206240" cy="960120"/>
-          </a:xfrm>
-          <a:prstGeom prst="rect">
-            <a:avLst/>
-          </a:prstGeom>
-          <a:noFill/>
-          <a:ln/>
-        </p:spPr>
-        <p:txBody>
-          <a:bodyPr wrap="square" lIns="0" tIns="0" rIns="0" bIns="0" rtlCol="0" anchor="ctr"/>
+            <a:off x="6766560" y="2606040"/>
+            <a:ext cx="4754880" cy="1280160"/>
+          </a:xfrm>
+          <a:prstGeom prst="rect">
+            <a:avLst/>
+          </a:prstGeom>
+          <a:noFill/>
+          <a:ln/>
+        </p:spPr>
+        <p:txBody>
+          <a:bodyPr wrap="square" lIns="0" tIns="0" rIns="0" bIns="0" rtlCol="0" anchor="t"/>
           <a:lstStyle/>
           <a:p>
             <a:pPr marL="0" indent="0">
               <a:buNone/>
             </a:pPr>
             <a:r>
-              <a:rPr lang="en-US" sz="1200" b="1" dirty="0">
+              <a:rPr lang="en-US" sz="1500" b="1" dirty="0">
                 <a:solidFill>
                   <a:schemeClr val="tx1"/>
                 </a:solidFill>
@@ -9325,7 +7186,7 @@
               <a:buNone/>
             </a:pPr>
             <a:r>
-              <a:rPr lang="en-US" sz="1200" dirty="0">
+              <a:rPr lang="en-US" sz="1500" b="1" dirty="0">
                 <a:solidFill>
                   <a:schemeClr val="tx1"/>
                 </a:solidFill>
@@ -9342,7 +7203,7 @@
               <a:buNone/>
             </a:pPr>
             <a:r>
-              <a:rPr lang="en-US" sz="1200" dirty="0">
+              <a:rPr lang="en-US" sz="1500" b="1" dirty="0">
                 <a:solidFill>
                   <a:schemeClr val="tx1"/>
                 </a:solidFill>
@@ -9354,70 +7215,12 @@
             </a:r>
             <a:endParaRPr lang="en-US" sz="1200" dirty="0"/>
           </a:p>
-        </p:txBody>
-      </p:sp>
-      <p:sp>
-        <p:nvSpPr>
-          <p:cNvPr id="38" name="Text 35"/>
-          <p:cNvSpPr txBox="1"/>
-          <p:nvPr/>
-        </p:nvSpPr>
-        <p:spPr>
-          <a:xfrm>
-            <a:off x="7086600" y="5217566"/>
-            <a:ext cx="4553712" cy="777240"/>
-          </a:xfrm>
-          <a:prstGeom prst="rect">
-            <a:avLst/>
-          </a:prstGeom>
-          <a:noFill/>
-          <a:ln/>
-        </p:spPr>
-        <p:txBody>
-          <a:bodyPr wrap="square" lIns="0" tIns="0" rIns="0" bIns="0" rtlCol="0" anchor="t"/>
-          <a:lstStyle/>
           <a:p>
             <a:pPr marL="0" indent="0">
               <a:buNone/>
             </a:pPr>
             <a:r>
-              <a:rPr lang="en-US" sz="1300" b="1" dirty="0">
-                <a:solidFill>
-                  <a:schemeClr val="tx1"/>
-                </a:solidFill>
-              </a:rPr>
-              <a:t>If a step misbehaves: </a:t>
-            </a:r>
-            <a:r>
-              <a:rPr lang="en-US" sz="1300" dirty="0">
-                <a:solidFill>
-                  <a:srgbClr val="3D4552"/>
-                </a:solidFill>
-              </a:rPr>
-              <a:t>Turn every fault off.</a:t>
-            </a:r>
-            <a:endParaRPr lang="en-US" sz="1300" dirty="0"/>
-          </a:p>
-          <a:p>
-            <a:pPr marL="0" indent="0">
-              <a:buNone/>
-            </a:pPr>
-            <a:r>
-              <a:rPr lang="en-US" sz="1300" b="1" dirty="0">
-                <a:solidFill>
-                  <a:schemeClr val="tx1"/>
-                </a:solidFill>
-              </a:rPr>
-              <a:t>Clean start, after down: </a:t>
-            </a:r>
-            <a:endParaRPr lang="en-US" sz="1300" dirty="0"/>
-          </a:p>
-          <a:p>
-            <a:pPr marL="0" indent="0">
-              <a:buNone/>
-            </a:pPr>
-            <a:r>
-              <a:rPr lang="en-US" sz="1200" dirty="0">
+              <a:rPr lang="en-US" sz="1500" b="1" dirty="0">
                 <a:solidFill>
                   <a:schemeClr val="tx1"/>
                 </a:solidFill>
@@ -9425,9 +7228,9 @@
                 <a:ea typeface="Courier New" pitchFamily="34" charset="-122"/>
                 <a:cs typeface="Courier New" pitchFamily="34" charset="-120"/>
               </a:rPr>
-              <a:t>docker volume rm glueservice_glue-data</a:t>
-            </a:r>
-            <a:endParaRPr lang="en-US" sz="1300" dirty="0"/>
+              <a:t>No Docker: python3 scripts/run_local.py</a:t>
+            </a:r>
+            <a:endParaRPr lang="en-US" sz="1200" dirty="0"/>
           </a:p>
         </p:txBody>
       </p:sp>
@@ -9451,7 +7254,7 @@
           </a:prstGeom>
           <a:extLst>
             <a:ext uri="{C572A759-6A51-4108-AA02-DFA0A04FC94B}">
-              <ma14:wrappingTextBoxFlag xmlns="" xmlns:ma14="http://schemas.microsoft.com/office/mac/drawingml/2011/main" val="0"/>
+              <ma14:wrappingTextBoxFlag xmlns:ma14="http://schemas.microsoft.com/office/mac/drawingml/2011/main" xmlns="" val="0"/>
             </a:ext>
           </a:extLst>
         </p:spPr>
@@ -9470,9 +7273,45 @@
             <a:pPr algn="r"/>
             <a:fld id="{F7021451-1387-4CA6-816F-3879F97B5CBC}" type="slidenum">
               <a:rPr lang="en-US" b="0"/>
-              <a:t>21</a:t>
+              <a:t>14</a:t>
             </a:fld>
             <a:endParaRPr lang="en-US"/>
+          </a:p>
+        </p:txBody>
+      </p:sp>
+      <p:sp>
+        <p:nvSpPr>
+          <p:cNvPr id="40" name="Text 6"/>
+          <p:cNvSpPr txBox="1"/>
+          <p:nvPr/>
+        </p:nvSpPr>
+        <p:spPr>
+          <a:xfrm>
+            <a:off x="6766560" y="2103120"/>
+            <a:ext cx="4663440" cy="365760"/>
+          </a:xfrm>
+          <a:prstGeom prst="rect">
+            <a:avLst/>
+          </a:prstGeom>
+          <a:noFill/>
+          <a:ln/>
+        </p:spPr>
+        <p:txBody>
+          <a:bodyPr wrap="square" lIns="0" tIns="0" rIns="0" bIns="0" rtlCol="0" anchor="t"/>
+          <a:lstStyle/>
+          <a:p>
+            <a:pPr marL="0" indent="0">
+              <a:buNone/>
+            </a:pPr>
+            <a:r>
+              <a:rPr lang="en-US" sz="1500" b="1" dirty="0">
+                <a:solidFill>
+                  <a:schemeClr val="tx1"/>
+                </a:solidFill>
+              </a:rPr>
+              <a:t>Run it yourself</a:t>
+            </a:r>
+            <a:endParaRPr lang="en-US" sz="1500" dirty="0"/>
           </a:p>
         </p:txBody>
       </p:sp>
@@ -10403,7 +8242,7 @@
                   <a:schemeClr val="tx2"/>
                 </a:solidFill>
               </a:rPr>
-              <a:t>eMAG orders typed in by hand get skipped or entered twice.</a:t>
+              <a:t>eMAG orders are retyped into the warehouse system by hand. Some get skipped, some entered twice.</a:t>
             </a:r>
             <a:endParaRPr lang="en-US" sz="1400" dirty="0"/>
           </a:p>
@@ -10509,7 +8348,7 @@
                   <a:schemeClr val="tx2"/>
                 </a:solidFill>
               </a:rPr>
-              <a:t>A recount in the warehouse reaches the channels hours later.</a:t>
+              <a:t>Every sale lowers the warehouse count, but the shop and eMAG show the old number until someone copies it over.</a:t>
             </a:r>
             <a:endParaRPr lang="en-US" sz="1400" dirty="0"/>
           </a:p>
@@ -10641,7 +8480,7 @@
           </a:prstGeom>
           <a:extLst>
             <a:ext uri="{C572A759-6A51-4108-AA02-DFA0A04FC94B}">
-              <ma14:wrappingTextBoxFlag xmlns="" xmlns:ma14="http://schemas.microsoft.com/office/mac/drawingml/2011/main" val="0"/>
+              <ma14:wrappingTextBoxFlag xmlns:ma14="http://schemas.microsoft.com/office/mac/drawingml/2011/main" xmlns="" val="0"/>
             </a:ext>
           </a:extLst>
         </p:spPr>
@@ -12234,7 +10073,7 @@
                   <a:schemeClr val="tx2"/>
                 </a:solidFill>
               </a:rPr>
-              <a:t>seconds after a change, and any drift heals within 10 seconds.</a:t>
+              <a:t>seconds after a change, and any drift heals within seconds.</a:t>
             </a:r>
             <a:endParaRPr lang="en-US" sz="1400" dirty="0"/>
           </a:p>
@@ -12395,7 +10234,7 @@
           </a:prstGeom>
           <a:extLst>
             <a:ext uri="{C572A759-6A51-4108-AA02-DFA0A04FC94B}">
-              <ma14:wrappingTextBoxFlag xmlns="" xmlns:ma14="http://schemas.microsoft.com/office/mac/drawingml/2011/main" val="0"/>
+              <ma14:wrappingTextBoxFlag xmlns:ma14="http://schemas.microsoft.com/office/mac/drawingml/2011/main" xmlns="" val="0"/>
             </a:ext>
           </a:extLst>
         </p:spPr>
@@ -15104,7 +12943,7 @@
           </a:prstGeom>
           <a:extLst>
             <a:ext uri="{C572A759-6A51-4108-AA02-DFA0A04FC94B}">
-              <ma14:wrappingTextBoxFlag xmlns="" xmlns:ma14="http://schemas.microsoft.com/office/mac/drawingml/2011/main" val="0"/>
+              <ma14:wrappingTextBoxFlag xmlns:ma14="http://schemas.microsoft.com/office/mac/drawingml/2011/main" xmlns="" val="0"/>
             </a:ext>
           </a:extLst>
         </p:spPr>
@@ -15246,7 +13085,7 @@
           <p:nvPr>
             <p:extLst>
               <p:ext uri="{D42A27DB-BD31-4B8C-83A1-F6EECF244321}">
-                <p14:modId xmlns:p14="http://schemas.microsoft.com/office/powerpoint/2010/main" val="1579011935"/>
+                <p14:modId xmlns:p14="http://schemas.microsoft.com/office/powerpoint/2010/main" val="3454702583"/>
               </p:ext>
             </p:extLst>
           </p:nvPr>
@@ -15870,58 +13709,6 @@
                   <a:schemeClr val="tx1"/>
                 </a:solidFill>
               </a:rPr>
-              <a:t>An ORM. </a:t>
-            </a:r>
-            <a:r>
-              <a:rPr lang="en-US" sz="1400" dirty="0">
-                <a:solidFill>
-                  <a:srgbClr val="3D4552"/>
-                </a:solidFill>
-              </a:rPr>
-              <a:t>Plain SQL in one file is easier to review.</a:t>
-            </a:r>
-            <a:endParaRPr lang="en-US" sz="1400" dirty="0"/>
-          </a:p>
-          <a:p>
-            <a:pPr marL="177800" indent="-177800">
-              <a:spcAft>
-                <a:spcPts val="900"/>
-              </a:spcAft>
-              <a:buSzPct val="100000"/>
-              <a:buChar char="•"/>
-            </a:pPr>
-            <a:r>
-              <a:rPr lang="en-US" sz="1400" b="1" dirty="0">
-                <a:solidFill>
-                  <a:schemeClr val="tx1"/>
-                </a:solidFill>
-              </a:rPr>
-              <a:t>Websockets. </a:t>
-            </a:r>
-            <a:r>
-              <a:rPr lang="en-US" sz="1400" dirty="0">
-                <a:solidFill>
-                  <a:srgbClr val="3D4552"/>
-                </a:solidFill>
-              </a:rPr>
-              <a:t>Polling every few seconds is fine for one operator.</a:t>
-            </a:r>
-            <a:endParaRPr lang="en-US" sz="1400" dirty="0"/>
-          </a:p>
-          <a:p>
-            <a:pPr marL="177800" indent="-177800">
-              <a:spcAft>
-                <a:spcPts val="900"/>
-              </a:spcAft>
-              <a:buSzPct val="100000"/>
-              <a:buChar char="•"/>
-            </a:pPr>
-            <a:r>
-              <a:rPr lang="en-US" sz="1400" b="1" dirty="0">
-                <a:solidFill>
-                  <a:schemeClr val="tx1"/>
-                </a:solidFill>
-              </a:rPr>
               <a:t>A hosted model. </a:t>
             </a:r>
             <a:r>
@@ -15956,7 +13743,7 @@
           </a:prstGeom>
           <a:extLst>
             <a:ext uri="{C572A759-6A51-4108-AA02-DFA0A04FC94B}">
-              <ma14:wrappingTextBoxFlag xmlns="" xmlns:ma14="http://schemas.microsoft.com/office/mac/drawingml/2011/main" val="0"/>
+              <ma14:wrappingTextBoxFlag xmlns:ma14="http://schemas.microsoft.com/office/mac/drawingml/2011/main" xmlns="" val="0"/>
             </a:ext>
           </a:extLst>
         </p:spPr>
@@ -17980,7 +15767,7 @@
           </a:prstGeom>
           <a:extLst>
             <a:ext uri="{C572A759-6A51-4108-AA02-DFA0A04FC94B}">
-              <ma14:wrappingTextBoxFlag xmlns="" xmlns:ma14="http://schemas.microsoft.com/office/mac/drawingml/2011/main" val="0"/>
+              <ma14:wrappingTextBoxFlag xmlns:ma14="http://schemas.microsoft.com/office/mac/drawingml/2011/main" xmlns="" val="0"/>
             </a:ext>
           </a:extLst>
         </p:spPr>
@@ -18453,8 +16240,8 @@
         </p:nvSpPr>
         <p:spPr>
           <a:xfrm>
-            <a:off x="548640" y="3154680"/>
-            <a:ext cx="5029200" cy="502920"/>
+            <a:off x="548640" y="3108960"/>
+            <a:ext cx="5029200" cy="868680"/>
           </a:xfrm>
           <a:prstGeom prst="roundRect">
             <a:avLst>
@@ -18482,8 +16269,8 @@
         </p:nvSpPr>
         <p:spPr>
           <a:xfrm>
-            <a:off x="713232" y="3154680"/>
-            <a:ext cx="4754880" cy="502920"/>
+            <a:off x="713232" y="3172968"/>
+            <a:ext cx="4754880" cy="365760"/>
           </a:xfrm>
           <a:prstGeom prst="rect">
             <a:avLst/>
@@ -18507,7 +16294,7 @@
                 <a:ea typeface="Courier New" pitchFamily="34" charset="-122"/>
                 <a:cs typeface="Courier New" pitchFamily="34" charset="-120"/>
               </a:rPr>
-              <a:t>max(0, on_hand - reserved) - held back by a rule</a:t>
+              <a:t>Free to sell = on the shelf - reserved</a:t>
             </a:r>
             <a:endParaRPr lang="en-US" sz="1300" dirty="0"/>
           </a:p>
@@ -18521,7 +16308,7 @@
         </p:nvSpPr>
         <p:spPr>
           <a:xfrm>
-            <a:off x="548640" y="3886200"/>
+            <a:off x="548640" y="4096512"/>
             <a:ext cx="5029200" cy="2103120"/>
           </a:xfrm>
           <a:prstGeom prst="rect">
@@ -18547,7 +16334,7 @@
                   <a:srgbClr val="3D4552"/>
                 </a:solidFill>
               </a:rPr>
-              <a:t>Every product, every run, </a:t>
+              <a:t>Every product, every 10 seconds, </a:t>
             </a:r>
             <a:r>
               <a:rPr lang="en-US" sz="1400" dirty="0">
@@ -18555,7 +16342,7 @@
                   <a:srgbClr val="3D4552"/>
                 </a:solidFill>
               </a:rPr>
-              <a:t>even when nothing seems to have changed. A restarted channel or a lost update is fixed on the next run.</a:t>
+              <a:t>even if nothing changed. A channel that restarted or missed an update is corrected on the next run.</a:t>
             </a:r>
             <a:endParaRPr lang="en-US" sz="1400" dirty="0"/>
           </a:p>
@@ -18573,7 +16360,15 @@
                   <a:srgbClr val="3D4552"/>
                 </a:solidFill>
               </a:rPr>
-              <a:t>Events make it fast; the pull makes it correct.</a:t>
+              <a:t>Events make it fast; the pull makes it correct. </a:t>
+            </a:r>
+            <a:r>
+              <a:rPr lang="en-US" sz="1400" dirty="0">
+                <a:solidFill>
+                  <a:srgbClr val="3D4552"/>
+                </a:solidFill>
+              </a:rPr>
+              <a:t>An event (an order, a recount) updates at once; the 10-second pull catches anything missed.</a:t>
             </a:r>
             <a:endParaRPr lang="en-US" sz="1400" dirty="0"/>
           </a:p>
@@ -18591,7 +16386,7 @@
                   <a:srgbClr val="3D4552"/>
                 </a:solidFill>
               </a:rPr>
-              <a:t>A recount below reserved </a:t>
+              <a:t>A recount below reserved: </a:t>
             </a:r>
             <a:r>
               <a:rPr lang="en-US" sz="1400" dirty="0">
@@ -18599,7 +16394,7 @@
                   <a:srgbClr val="3D4552"/>
                 </a:solidFill>
               </a:rPr>
-              <a:t>caps both channels at 0 and sends only the newest orders the shelf cannot cover to review.</a:t>
+              <a:t>say 18 on the shelf, 20 reserved. Both channels go to 0, and only the 2 newest orders the shelf cannot cover go to review.</a:t>
             </a:r>
             <a:endParaRPr lang="en-US" sz="1400" dirty="0"/>
           </a:p>
@@ -20910,7 +18705,7 @@
                   <a:schemeClr val="tx2"/>
                 </a:solidFill>
               </a:rPr>
-              <a:t>A partial batch failure on eMAG, healed without anyone touching it.</a:t>
+              <a:t>A partial batch failure on eMAG. The next run is automatic (the 10-second timer or the next event); nobody touches it.</a:t>
             </a:r>
             <a:endParaRPr lang="en-US" sz="1100" dirty="0"/>
           </a:p>
@@ -20936,7 +18731,7 @@
           </a:prstGeom>
           <a:extLst>
             <a:ext uri="{C572A759-6A51-4108-AA02-DFA0A04FC94B}">
-              <ma14:wrappingTextBoxFlag xmlns="" xmlns:ma14="http://schemas.microsoft.com/office/mac/drawingml/2011/main" val="0"/>
+              <ma14:wrappingTextBoxFlag xmlns:ma14="http://schemas.microsoft.com/office/mac/drawingml/2011/main" xmlns="" val="0"/>
             </a:ext>
           </a:extLst>
         </p:spPr>
@@ -20955,9 +18750,45 @@
             <a:pPr algn="r"/>
             <a:fld id="{F7021451-1387-4CA6-816F-3879F97B5CBC}" type="slidenum">
               <a:rPr lang="en-US" b="0"/>
-              <a:t>8</a:t>
+              <a:t>7</a:t>
             </a:fld>
             <a:endParaRPr lang="en-US"/>
+          </a:p>
+        </p:txBody>
+      </p:sp>
+      <p:sp>
+        <p:nvSpPr>
+          <p:cNvPr id="36" name="Text 15"/>
+          <p:cNvSpPr txBox="1"/>
+          <p:nvPr/>
+        </p:nvSpPr>
+        <p:spPr>
+          <a:xfrm>
+            <a:off x="713232" y="3566160"/>
+            <a:ext cx="4800600" cy="320040"/>
+          </a:xfrm>
+          <a:prstGeom prst="rect">
+            <a:avLst/>
+          </a:prstGeom>
+          <a:noFill/>
+          <a:ln/>
+        </p:spPr>
+        <p:txBody>
+          <a:bodyPr wrap="square" lIns="0" tIns="0" rIns="0" bIns="0" rtlCol="0" anchor="t"/>
+          <a:lstStyle/>
+          <a:p>
+            <a:pPr marL="0" indent="0">
+              <a:buNone/>
+            </a:pPr>
+            <a:r>
+              <a:rPr lang="en-US" sz="1100" dirty="0">
+                <a:solidFill>
+                  <a:schemeClr val="tx2"/>
+                </a:solidFill>
+              </a:rPr>
+              <a:t>Never below zero; a rule can hold units back. Example: 25 - 5 = 20.</a:t>
+            </a:r>
+            <a:endParaRPr lang="en-US" sz="1100" dirty="0"/>
           </a:p>
         </p:txBody>
       </p:sp>
@@ -21676,7 +19507,7 @@
           </a:prstGeom>
           <a:extLst>
             <a:ext uri="{C572A759-6A51-4108-AA02-DFA0A04FC94B}">
-              <ma14:wrappingTextBoxFlag xmlns="" xmlns:ma14="http://schemas.microsoft.com/office/mac/drawingml/2011/main" val="0"/>
+              <ma14:wrappingTextBoxFlag xmlns:ma14="http://schemas.microsoft.com/office/mac/drawingml/2011/main" xmlns="" val="0"/>
             </a:ext>
           </a:extLst>
         </p:spPr>
@@ -21695,9 +19526,45 @@
             <a:pPr algn="r"/>
             <a:fld id="{F7021451-1387-4CA6-816F-3879F97B5CBC}" type="slidenum">
               <a:rPr lang="en-US" b="0"/>
-              <a:t>9</a:t>
+              <a:t>8</a:t>
             </a:fld>
             <a:endParaRPr lang="en-US"/>
+          </a:p>
+        </p:txBody>
+      </p:sp>
+      <p:sp>
+        <p:nvSpPr>
+          <p:cNvPr id="26" name="Text 15"/>
+          <p:cNvSpPr txBox="1"/>
+          <p:nvPr/>
+        </p:nvSpPr>
+        <p:spPr>
+          <a:xfrm>
+            <a:off x="548640" y="3273552"/>
+            <a:ext cx="7863840" cy="256032"/>
+          </a:xfrm>
+          <a:prstGeom prst="rect">
+            <a:avLst/>
+          </a:prstGeom>
+          <a:noFill/>
+          <a:ln/>
+        </p:spPr>
+        <p:txBody>
+          <a:bodyPr wrap="square" lIns="0" tIns="0" rIns="0" bIns="0" rtlCol="0" anchor="t"/>
+          <a:lstStyle/>
+          <a:p>
+            <a:pPr marL="0" indent="0">
+              <a:buNone/>
+            </a:pPr>
+            <a:r>
+              <a:rPr lang="en-US" sz="1100" dirty="0">
+                <a:solidFill>
+                  <a:schemeClr val="tx2"/>
+                </a:solidFill>
+              </a:rPr>
+              <a:t>Suggest an action is the only AI on this card. It never acts: a person clicks one of the three buttons.</a:t>
+            </a:r>
+            <a:endParaRPr lang="en-US" sz="1100" dirty="0"/>
           </a:p>
         </p:txBody>
       </p:sp>
@@ -21710,15 +19577,22 @@
 </file>
 
 <file path=ppt/slides/slide9.xml><?xml version="1.0" encoding="utf-8"?>
-<p:sld xmlns:a="http://schemas.openxmlformats.org/drawingml/2006/main" xmlns:p="http://schemas.openxmlformats.org/presentationml/2006/main" xmlns:r="http://schemas.openxmlformats.org/officeDocument/2006/relationships">
+<p:sld xmlns:a="http://schemas.openxmlformats.org/drawingml/2006/main" xmlns:r="http://schemas.openxmlformats.org/officeDocument/2006/relationships" xmlns:p="http://schemas.openxmlformats.org/presentationml/2006/main">
   <p:cSld>
     <p:spTree>
       <p:nvGrpSpPr>
-        <p:cNvPr id="2" name=""/>
+        <p:cNvPr id="1" name=""/>
         <p:cNvGrpSpPr/>
         <p:nvPr/>
       </p:nvGrpSpPr>
-      <p:grpSpPr/>
+      <p:grpSpPr>
+        <a:xfrm>
+          <a:off x="0" y="0"/>
+          <a:ext cx="0" cy="0"/>
+          <a:chOff x="0" y="0"/>
+          <a:chExt cx="0" cy="0"/>
+        </a:xfrm>
+      </p:grpSpPr>
       <p:sp>
         <p:nvSpPr>
           <p:cNvPr id="3" name="Text 0"/>
@@ -22412,42 +20286,6 @@
       </p:sp>
       <p:sp>
         <p:nvSpPr>
-          <p:cNvPr id="16" name="Text 14"/>
-          <p:cNvSpPr txBox="1"/>
-          <p:nvPr/>
-        </p:nvSpPr>
-        <p:spPr>
-          <a:xfrm>
-            <a:off x="548640" y="4937760"/>
-            <a:ext cx="11091672" cy="274320"/>
-          </a:xfrm>
-          <a:prstGeom prst="rect">
-            <a:avLst/>
-          </a:prstGeom>
-          <a:noFill/>
-          <a:ln/>
-        </p:spPr>
-        <p:txBody>
-          <a:bodyPr wrap="square" lIns="0" tIns="0" rIns="0" bIns="0" rtlCol="0" anchor="t"/>
-          <a:lstStyle/>
-          <a:p>
-            <a:pPr marL="0" indent="0">
-              <a:buNone/>
-            </a:pPr>
-            <a:r>
-              <a:rPr lang="en-US" sz="1100" dirty="0">
-                <a:solidFill>
-                  <a:schemeClr val="tx2"/>
-                </a:solidFill>
-              </a:rPr>
-              <a:t>The detail is in the README and docs/architecture.md.</a:t>
-            </a:r>
-            <a:endParaRPr lang="en-US" sz="1100" dirty="0"/>
-          </a:p>
-        </p:txBody>
-      </p:sp>
-      <p:sp>
-        <p:nvSpPr>
           <p:cNvPr id="17" name="Slide Number Placeholder 0"/>
           <p:cNvSpPr>
             <a:spLocks noGrp="1"/>
@@ -22466,7 +20304,7 @@
           </a:prstGeom>
           <a:extLst>
             <a:ext uri="{C572A759-6A51-4108-AA02-DFA0A04FC94B}">
-              <ma14:wrappingTextBoxFlag xmlns="" xmlns:ma14="http://schemas.microsoft.com/office/mac/drawingml/2011/main" val="0"/>
+              <ma14:wrappingTextBoxFlag xmlns:ma14="http://schemas.microsoft.com/office/mac/drawingml/2011/main" xmlns="" val="0"/>
             </a:ext>
           </a:extLst>
         </p:spPr>
@@ -22485,7 +20323,7 @@
             <a:pPr algn="r"/>
             <a:fld id="{F7021451-1387-4CA6-816F-3879F97B5CBC}" type="slidenum">
               <a:rPr lang="en-US" b="0"/>
-              <a:t>12</a:t>
+              <a:t>9</a:t>
             </a:fld>
             <a:endParaRPr lang="en-US"/>
           </a:p>

--- a/docs/presentation/ADB-Glue-Service.pptx
+++ b/docs/presentation/ADB-Glue-Service.pptx
@@ -5,7 +5,7 @@
     <p:sldMasterId id="2147483648" r:id="rId1"/>
   </p:sldMasterIdLst>
   <p:notesMasterIdLst>
-    <p:notesMasterId r:id="rId16"/>
+    <p:notesMasterId r:id="rId15"/>
   </p:notesMasterIdLst>
   <p:sldIdLst>
     <p:sldId id="256" r:id="rId2"/>
@@ -19,9 +19,8 @@
     <p:sldId id="281" r:id="rId10"/>
     <p:sldId id="282" r:id="rId11"/>
     <p:sldId id="269" r:id="rId12"/>
-    <p:sldId id="283" r:id="rId14"/>
-    <p:sldId id="273" r:id="rId13"/>
-    <p:sldId id="276" r:id="rId15"/>
+    <p:sldId id="283" r:id="rId13"/>
+    <p:sldId id="276" r:id="rId14"/>
   </p:sldIdLst>
   <p:sldSz cx="12192000" cy="6858000"/>
   <p:notesSz cx="6858000" cy="12192000"/>
@@ -160,7 +159,6 @@
         </p14:section>
         <p14:section name="Process" id="{C9654AFD-1C8B-09C9-4A40-75DED1745131}">
           <p14:sldIdLst>
-            <p14:sldId id="273"/>
             <p14:sldId id="283"/>
           </p14:sldIdLst>
         </p14:section>
@@ -583,18 +581,6 @@
       </p:grpSpPr>
       <p:sp>
         <p:nvSpPr>
-          <p:cNvPr id="2" name="Slide Image Placeholder 1"/>
-          <p:cNvSpPr>
-            <a:spLocks noGrp="1" noRot="1" noChangeAspect="1"/>
-          </p:cNvSpPr>
-          <p:nvPr>
-            <p:ph type="sldImg"/>
-          </p:nvPr>
-        </p:nvSpPr>
-        <p:spPr/>
-      </p:sp>
-      <p:sp>
-        <p:nvSpPr>
           <p:cNvPr id="3" name="Notes Placeholder 2"/>
           <p:cNvSpPr>
             <a:spLocks noGrp="1"/>
@@ -609,60 +595,12 @@
           <a:lstStyle/>
           <a:p>
             <a:r>
-              <a:t>- This is the process, in my own words. I started from the customer and a scenario I could defend, and read the real delivery rules (at-least-once events, eMAG's acknowledge, batch results per item) before writing code.</a:t>
-            </a:r>
-          </a:p>
-          <a:p>
-            <a:r>
-              <a:t>- I agreed HTML mockups of every screen first, and they were the spec the interface was checked against.</a:t>
-            </a:r>
-          </a:p>
-          <a:p>
-            <a:r>
-              <a:t>- The sync core came first, then the console. Every task was reviewed by a separate AI reviewer that had not written it, and I read the findings.</a:t>
-            </a:r>
-          </a:p>
-          <a:p>
-            <a:r>
-              <a:t>- Then I tried to break it. A fresh review reproduced eight gaps in the core as failing tests. The load probe found the worker capped at 20 orders a second. The crash test stops Glue before each of 132 writes. A mutation check plants 18 bugs one at a time and the suite catches every one.</a:t>
-            </a:r>
-          </a:p>
-          <a:p>
-            <a:r>
-              <a:t>- I used AI heavily and say so: it wrote most of the code and ran most of the reviews. The decisions and the final checking were mine, and I can explain any line. The README's Use of AI section says the same.</a:t>
-            </a:r>
-          </a:p>
-        </p:txBody>
-      </p:sp>
-      <p:sp>
-        <p:nvSpPr>
-          <p:cNvPr id="4" name="Slide Number Placeholder 3"/>
-          <p:cNvSpPr>
-            <a:spLocks noGrp="1"/>
-          </p:cNvSpPr>
-          <p:nvPr>
-            <p:ph type="sldNum" sz="quarter" idx="10"/>
-          </p:nvPr>
-        </p:nvSpPr>
-        <p:spPr/>
-        <p:txBody>
-          <a:bodyPr/>
-          <a:lstStyle/>
-          <a:p>
-            <a:fld id="{F7021451-1387-4CA6-816F-3879F97B5CBC}" type="slidenum">
-              <a:rPr lang="en-US"/>
-              <a:t>12</a:t>
-            </a:fld>
-            <a:endParaRPr lang="en-US"/>
+              <a:t>Rollout: shadow mode first, receiving and reading everything and sending nothing, compared daily with the staff's work; then shop stock, then eMAG stock, then orders. About a week per stage. Shadow mode and the stage switches are not built yet: each is a flag checked before Glue calls a system. Success after 30 days is measured, not felt. What the customer provides is in docs/customer-context.md; trade-offs and limitations are in the README.</a:t>
+            </a:r>
           </a:p>
         </p:txBody>
       </p:sp>
     </p:spTree>
-    <p:extLst>
-      <p:ext uri="{BB962C8B-B14F-4D97-AF65-F5344CB8AC3E}">
-        <p14:creationId xmlns:p14="http://schemas.microsoft.com/office/powerpoint/2010/main" val="1024086991"/>
-      </p:ext>
-    </p:extLst>
   </p:cSld>
   <p:clrMapOvr>
     <a:masterClrMapping/>
@@ -689,6 +627,18 @@
       </p:grpSpPr>
       <p:sp>
         <p:nvSpPr>
+          <p:cNvPr id="2" name="Slide Image Placeholder 1"/>
+          <p:cNvSpPr>
+            <a:spLocks noGrp="1" noRot="1" noChangeAspect="1"/>
+          </p:cNvSpPr>
+          <p:nvPr>
+            <p:ph type="sldImg"/>
+          </p:nvPr>
+        </p:nvSpPr>
+        <p:spPr/>
+      </p:sp>
+      <p:sp>
+        <p:nvSpPr>
           <p:cNvPr id="3" name="Notes Placeholder 2"/>
           <p:cNvSpPr>
             <a:spLocks noGrp="1"/>
@@ -703,64 +653,6 @@
           <a:lstStyle/>
           <a:p>
             <a:r>
-              <a:t>Rollout: shadow mode first, receiving and reading everything and sending nothing, compared daily with the staff's work; then shop stock, then eMAG stock, then orders. About a week per stage. Shadow mode and the stage switches are not built yet: each is a flag checked before Glue calls a system. Success after 30 days is measured, not felt. What the customer provides is in docs/customer-context.md; trade-offs and limitations are in the README.</a:t>
-            </a:r>
-          </a:p>
-        </p:txBody>
-      </p:sp>
-    </p:spTree>
-  </p:cSld>
-  <p:clrMapOvr>
-    <a:masterClrMapping/>
-  </p:clrMapOvr>
-</p:notes>
-</file>
-
-<file path=ppt/notesSlides/notesSlide14.xml><?xml version="1.0" encoding="utf-8"?>
-<p:notes xmlns:a="http://schemas.openxmlformats.org/drawingml/2006/main" xmlns:r="http://schemas.openxmlformats.org/officeDocument/2006/relationships" xmlns:p="http://schemas.openxmlformats.org/presentationml/2006/main">
-  <p:cSld>
-    <p:spTree>
-      <p:nvGrpSpPr>
-        <p:cNvPr id="1" name=""/>
-        <p:cNvGrpSpPr/>
-        <p:nvPr/>
-      </p:nvGrpSpPr>
-      <p:grpSpPr>
-        <a:xfrm>
-          <a:off x="0" y="0"/>
-          <a:ext cx="0" cy="0"/>
-          <a:chOff x="0" y="0"/>
-          <a:chExt cx="0" cy="0"/>
-        </a:xfrm>
-      </p:grpSpPr>
-      <p:sp>
-        <p:nvSpPr>
-          <p:cNvPr id="2" name="Slide Image Placeholder 1"/>
-          <p:cNvSpPr>
-            <a:spLocks noGrp="1" noRot="1" noChangeAspect="1"/>
-          </p:cNvSpPr>
-          <p:nvPr>
-            <p:ph type="sldImg"/>
-          </p:nvPr>
-        </p:nvSpPr>
-        <p:spPr/>
-      </p:sp>
-      <p:sp>
-        <p:nvSpPr>
-          <p:cNvPr id="3" name="Notes Placeholder 2"/>
-          <p:cNvSpPr>
-            <a:spLocks noGrp="1"/>
-          </p:cNvSpPr>
-          <p:nvPr>
-            <p:ph type="body" idx="1"/>
-          </p:nvPr>
-        </p:nvSpPr>
-        <p:spPr/>
-        <p:txBody>
-          <a:bodyPr/>
-          <a:lstStyle/>
-          <a:p>
-            <a:r>
               <a:t>- Switch to the browser. Follow docs/presentation/demo-script.md: Glue at :8000 signed in as admin, shop :8001, marketplace :8002, warehouse :8003.</a:t>
             </a:r>
           </a:p>
@@ -803,7 +695,7 @@
           <a:p>
             <a:fld id="{F7021451-1387-4CA6-816F-3879F97B5CBC}" type="slidenum">
               <a:rPr lang="en-US"/>
-              <a:t>14</a:t>
+              <a:t>13</a:t>
             </a:fld>
             <a:endParaRPr lang="en-US"/>
           </a:p>
@@ -1865,7 +1757,7 @@
           </a:prstGeom>
           <a:extLst>
             <a:ext uri="{C572A759-6A51-4108-AA02-DFA0A04FC94B}">
-              <ma14:wrappingTextBoxFlag xmlns:ma14="http://schemas.microsoft.com/office/mac/drawingml/2011/main" xmlns="" val="0"/>
+              <ma14:wrappingTextBoxFlag xmlns="" xmlns:ma14="http://schemas.microsoft.com/office/mac/drawingml/2011/main" val="0"/>
             </a:ext>
           </a:extLst>
         </p:spPr>
@@ -1940,7 +1832,7 @@
           </a:prstGeom>
           <a:extLst>
             <a:ext uri="{C572A759-6A51-4108-AA02-DFA0A04FC94B}">
-              <ma14:wrappingTextBoxFlag xmlns:ma14="http://schemas.microsoft.com/office/mac/drawingml/2011/main" xmlns="" val="0"/>
+              <ma14:wrappingTextBoxFlag xmlns="" xmlns:ma14="http://schemas.microsoft.com/office/mac/drawingml/2011/main" val="0"/>
             </a:ext>
           </a:extLst>
         </p:spPr>
@@ -3686,14 +3578,6 @@
               <a:buNone/>
             </a:pPr>
             <a:r>
-              <a:rPr lang="en-US" sz="1300" b="1" dirty="0">
-                <a:solidFill>
-                  <a:srgbClr val="3D4552"/>
-                </a:solidFill>
-              </a:rPr>
-              <a:t/>
-            </a:r>
-            <a:r>
               <a:rPr lang="en-US" sz="1300" dirty="0">
                 <a:solidFill>
                   <a:srgbClr val="3D4552"/>
@@ -3725,7 +3609,7 @@
           </a:prstGeom>
           <a:extLst>
             <a:ext uri="{C572A759-6A51-4108-AA02-DFA0A04FC94B}">
-              <ma14:wrappingTextBoxFlag xmlns:ma14="http://schemas.microsoft.com/office/mac/drawingml/2011/main" xmlns="" val="0"/>
+              <ma14:wrappingTextBoxFlag xmlns="" xmlns:ma14="http://schemas.microsoft.com/office/mac/drawingml/2011/main" val="0"/>
             </a:ext>
           </a:extLst>
         </p:spPr>
@@ -3813,14 +3697,6 @@
               </a:spcAft>
               <a:buNone/>
             </a:pPr>
-            <a:r>
-              <a:rPr lang="en-US" sz="1300" b="1" dirty="0">
-                <a:solidFill>
-                  <a:srgbClr val="3D4552"/>
-                </a:solidFill>
-              </a:rPr>
-              <a:t/>
-            </a:r>
             <a:r>
               <a:rPr lang="en-US" sz="1300" dirty="0">
                 <a:solidFill>
@@ -4868,7 +4744,7 @@
           </a:prstGeom>
           <a:extLst>
             <a:ext uri="{C572A759-6A51-4108-AA02-DFA0A04FC94B}">
-              <ma14:wrappingTextBoxFlag xmlns:ma14="http://schemas.microsoft.com/office/mac/drawingml/2011/main" xmlns="" val="0"/>
+              <ma14:wrappingTextBoxFlag xmlns="" xmlns:ma14="http://schemas.microsoft.com/office/mac/drawingml/2011/main" val="0"/>
             </a:ext>
           </a:extLst>
         </p:spPr>
@@ -5985,7 +5861,7 @@
           </a:prstGeom>
           <a:extLst>
             <a:ext uri="{C572A759-6A51-4108-AA02-DFA0A04FC94B}">
-              <ma14:wrappingTextBoxFlag xmlns:ma14="http://schemas.microsoft.com/office/mac/drawingml/2011/main" xmlns="" val="0"/>
+              <ma14:wrappingTextBoxFlag xmlns="" xmlns:ma14="http://schemas.microsoft.com/office/mac/drawingml/2011/main" val="0"/>
             </a:ext>
           </a:extLst>
         </p:spPr>
@@ -6004,7 +5880,7 @@
             <a:pPr algn="r"/>
             <a:fld id="{F7021451-1387-4CA6-816F-3879F97B5CBC}" type="slidenum">
               <a:rPr lang="en-US" b="0"/>
-              <a:t>13</a:t>
+              <a:t>12</a:t>
             </a:fld>
             <a:endParaRPr lang="en-US"/>
           </a:p>
@@ -6019,325 +5895,6 @@
 </file>
 
 <file path=ppt/slides/slide13.xml><?xml version="1.0" encoding="utf-8"?>
-<p:sld xmlns:a="http://schemas.openxmlformats.org/drawingml/2006/main" xmlns:r="http://schemas.openxmlformats.org/officeDocument/2006/relationships" xmlns:p="http://schemas.openxmlformats.org/presentationml/2006/main">
-  <p:cSld name="Slide 18">
-    <p:spTree>
-      <p:nvGrpSpPr>
-        <p:cNvPr id="1" name=""/>
-        <p:cNvGrpSpPr/>
-        <p:nvPr/>
-      </p:nvGrpSpPr>
-      <p:grpSpPr>
-        <a:xfrm>
-          <a:off x="0" y="0"/>
-          <a:ext cx="0" cy="0"/>
-          <a:chOff x="0" y="0"/>
-          <a:chExt cx="0" cy="0"/>
-        </a:xfrm>
-      </p:grpSpPr>
-      <p:sp>
-        <p:nvSpPr>
-          <p:cNvPr id="2" name="Text 0"/>
-          <p:cNvSpPr>
-            <a:spLocks noGrp="1"/>
-          </p:cNvSpPr>
-          <p:nvPr>
-            <p:ph type="body" idx="100" hasCustomPrompt="1"/>
-          </p:nvPr>
-        </p:nvSpPr>
-        <p:spPr>
-          <a:xfrm>
-            <a:off x="548640" y="384048"/>
-            <a:ext cx="8229600" cy="237744"/>
-          </a:xfrm>
-          <a:prstGeom prst="rect">
-            <a:avLst/>
-          </a:prstGeom>
-          <a:noFill/>
-          <a:ln/>
-        </p:spPr>
-        <p:txBody>
-          <a:bodyPr wrap="square" lIns="0" tIns="0" rIns="0" bIns="0" rtlCol="0" anchor="t"/>
-          <a:lstStyle/>
-          <a:p>
-            <a:pPr marL="0" indent="0" algn="l">
-              <a:buNone/>
-            </a:pPr>
-            <a:r>
-              <a:rPr lang="en-US" sz="1100" b="1" dirty="0">
-                <a:solidFill>
-                  <a:schemeClr val="tx2"/>
-                </a:solidFill>
-                <a:latin typeface="Courier New" pitchFamily="34" charset="0"/>
-                <a:ea typeface="Courier New" pitchFamily="34" charset="-122"/>
-                <a:cs typeface="Courier New" pitchFamily="34" charset="-120"/>
-              </a:rPr>
-              <a:t>PROCESS</a:t>
-            </a:r>
-            <a:endParaRPr lang="en-US" sz="1100" dirty="0"/>
-          </a:p>
-        </p:txBody>
-      </p:sp>
-      <p:sp>
-        <p:nvSpPr>
-          <p:cNvPr id="3" name="Text 0"/>
-          <p:cNvSpPr>
-            <a:spLocks noGrp="1"/>
-          </p:cNvSpPr>
-          <p:nvPr>
-            <p:ph type="title" idx="101" hasCustomPrompt="1"/>
-          </p:nvPr>
-        </p:nvSpPr>
-        <p:spPr>
-          <a:xfrm>
-            <a:off x="548640" y="621792"/>
-            <a:ext cx="11094415" cy="640080"/>
-          </a:xfrm>
-          <a:prstGeom prst="rect">
-            <a:avLst/>
-          </a:prstGeom>
-          <a:noFill/>
-          <a:ln/>
-        </p:spPr>
-        <p:txBody>
-          <a:bodyPr wrap="square" lIns="0" tIns="0" rIns="0" bIns="0" rtlCol="0" anchor="t"/>
-          <a:lstStyle/>
-          <a:p>
-            <a:pPr marL="0" indent="0" algn="l">
-              <a:buNone/>
-            </a:pPr>
-            <a:r>
-              <a:rPr lang="en-US" sz="3200" b="1" dirty="0">
-                <a:solidFill>
-                  <a:schemeClr val="tx1"/>
-                </a:solidFill>
-              </a:rPr>
-              <a:t>How I built it</a:t>
-            </a:r>
-            <a:endParaRPr lang="en-US" sz="3200" dirty="0"/>
-          </a:p>
-        </p:txBody>
-      </p:sp>
-      <p:sp>
-        <p:nvSpPr>
-          <p:cNvPr id="41" name="Slide Number Placeholder 0"/>
-          <p:cNvSpPr>
-            <a:spLocks noGrp="1"/>
-          </p:cNvSpPr>
-          <p:nvPr>
-            <p:ph type="sldNum" sz="quarter" idx="4294967295"/>
-          </p:nvPr>
-        </p:nvSpPr>
-        <p:spPr>
-          <a:xfrm>
-            <a:off x="11183112" y="6446520"/>
-            <a:ext cx="457200" cy="228600"/>
-          </a:xfrm>
-          <a:prstGeom prst="rect">
-            <a:avLst/>
-          </a:prstGeom>
-          <a:extLst>
-            <a:ext uri="{C572A759-6A51-4108-AA02-DFA0A04FC94B}">
-              <ma14:wrappingTextBoxFlag xmlns:ma14="http://schemas.microsoft.com/office/mac/drawingml/2011/main" xmlns="" val="0"/>
-            </a:ext>
-          </a:extLst>
-        </p:spPr>
-        <p:txBody>
-          <a:bodyPr lIns="0" tIns="0" rIns="0" bIns="0"/>
-          <a:lstStyle>
-            <a:lvl1pPr>
-              <a:defRPr sz="1000">
-                <a:solidFill>
-                  <a:srgbClr val="8A93A1"/>
-                </a:solidFill>
-              </a:defRPr>
-            </a:lvl1pPr>
-          </a:lstStyle>
-          <a:p>
-            <a:pPr algn="r"/>
-            <a:fld id="{F7021451-1387-4CA6-816F-3879F97B5CBC}" type="slidenum">
-              <a:rPr lang="en-US" b="0"/>
-              <a:t>12</a:t>
-            </a:fld>
-            <a:endParaRPr lang="en-US"/>
-          </a:p>
-        </p:txBody>
-      </p:sp>
-      <p:sp>
-        <p:nvSpPr>
-          <p:cNvPr id="42" name="Text 7"/>
-          <p:cNvSpPr txBox="1"/>
-          <p:nvPr/>
-        </p:nvSpPr>
-        <p:spPr>
-          <a:xfrm>
-            <a:off x="548640" y="1554480"/>
-            <a:ext cx="10881360" cy="3108960"/>
-          </a:xfrm>
-          <a:prstGeom prst="rect">
-            <a:avLst/>
-          </a:prstGeom>
-          <a:noFill/>
-          <a:ln/>
-        </p:spPr>
-        <p:txBody>
-          <a:bodyPr wrap="square" lIns="0" tIns="0" rIns="0" bIns="0" rtlCol="0" anchor="t"/>
-          <a:lstStyle/>
-          <a:p>
-            <a:pPr marL="228600" indent="-228600">
-              <a:spcAft>
-                <a:spcPts val="1400"/>
-              </a:spcAft>
-              <a:buSzPct val="100000"/>
-              <a:buFont typeface="+mj-lt"/>
-              <a:buAutoNum type="arabicPeriod"/>
-            </a:pPr>
-            <a:r>
-              <a:rPr lang="en-US" sz="1800" dirty="0" b="1">
-                <a:solidFill>
-                  <a:srgbClr val="3D4552"/>
-                </a:solidFill>
-              </a:rPr>
-              <a:t>Started from the customer. </a:t>
-            </a:r>
-            <a:r>
-              <a:rPr lang="en-US" sz="1800" dirty="0" b="0">
-                <a:solidFill>
-                  <a:srgbClr val="3D4552"/>
-                </a:solidFill>
-              </a:rPr>
-              <a:t>A reseller selling on its own Adobe Commerce shop and on eMAG, from one warehouse. I read the real systems' delivery rules first.</a:t>
-            </a:r>
-            <a:endParaRPr lang="en-US" sz="1300" dirty="0"/>
-          </a:p>
-          <a:p>
-            <a:pPr marL="228600" indent="-228600">
-              <a:spcAft>
-                <a:spcPts val="1400"/>
-              </a:spcAft>
-              <a:buSzPct val="100000"/>
-              <a:buFont typeface="+mj-lt"/>
-              <a:buAutoNum type="arabicPeriod"/>
-            </a:pPr>
-            <a:r>
-              <a:rPr lang="en-US" sz="1800" dirty="0" b="1">
-                <a:solidFill>
-                  <a:srgbClr val="3D4552"/>
-                </a:solidFill>
-              </a:rPr>
-              <a:t>Agreed the screens before writing any. </a:t>
-            </a:r>
-            <a:r>
-              <a:rPr lang="en-US" sz="1800" dirty="0" b="0">
-                <a:solidFill>
-                  <a:srgbClr val="3D4552"/>
-                </a:solidFill>
-              </a:rPr>
-              <a:t>Clickable mockups of every page, approved before the first line of interface code.</a:t>
-            </a:r>
-            <a:endParaRPr lang="en-US" sz="1300" dirty="0"/>
-          </a:p>
-          <a:p>
-            <a:pPr marL="228600" indent="-228600">
-              <a:spcAft>
-                <a:spcPts val="1400"/>
-              </a:spcAft>
-              <a:buSzPct val="100000"/>
-              <a:buFont typeface="+mj-lt"/>
-              <a:buAutoNum type="arabicPeriod"/>
-            </a:pPr>
-            <a:r>
-              <a:rPr lang="en-US" sz="1800" dirty="0" b="1">
-                <a:solidFill>
-                  <a:srgbClr val="3D4552"/>
-                </a:solidFill>
-              </a:rPr>
-              <a:t>Built the sync core first: </a:t>
-            </a:r>
-            <a:r>
-              <a:rPr lang="en-US" sz="1800" dirty="0" b="0">
-                <a:solidFill>
-                  <a:srgbClr val="3D4552"/>
-                </a:solidFill>
-              </a:rPr>
-              <a:t>inbox, retries, stock sync, review queue. The operator console came after.</a:t>
-            </a:r>
-            <a:endParaRPr lang="en-US" sz="1300" dirty="0"/>
-          </a:p>
-          <a:p>
-            <a:pPr marL="228600" indent="-228600">
-              <a:spcAft>
-                <a:spcPts val="1400"/>
-              </a:spcAft>
-              <a:buSzPct val="100000"/>
-              <a:buFont typeface="+mj-lt"/>
-              <a:buAutoNum type="arabicPeriod"/>
-            </a:pPr>
-            <a:r>
-              <a:rPr lang="en-US" sz="1800" dirty="0" b="1">
-                <a:solidFill>
-                  <a:srgbClr val="3D4552"/>
-                </a:solidFill>
-              </a:rPr>
-              <a:t>Then tried to break it. </a:t>
-            </a:r>
-            <a:r>
-              <a:rPr lang="en-US" sz="1800" dirty="0" b="0">
-                <a:solidFill>
-                  <a:srgbClr val="3D4552"/>
-                </a:solidFill>
-              </a:rPr>
-              <a:t>An independent review found 8 gaps in the core, a load test found a 20 orders/s cap, a crash test stopped it at 132 points. Each one fixed, with a test.</a:t>
-            </a:r>
-            <a:endParaRPr lang="en-US" sz="1300" dirty="0"/>
-          </a:p>
-        </p:txBody>
-      </p:sp>
-      <p:sp>
-        <p:nvSpPr>
-          <p:cNvPr id="43" name="Text 6"/>
-          <p:cNvSpPr txBox="1"/>
-          <p:nvPr/>
-        </p:nvSpPr>
-        <p:spPr>
-          <a:xfrm>
-            <a:off x="548640" y="4754880"/>
-            <a:ext cx="11091672" cy="868680"/>
-          </a:xfrm>
-          <a:prstGeom prst="rect">
-            <a:avLst/>
-          </a:prstGeom>
-          <a:noFill/>
-          <a:ln/>
-        </p:spPr>
-        <p:txBody>
-          <a:bodyPr wrap="square" lIns="0" tIns="0" rIns="0" bIns="0" rtlCol="0" anchor="t"/>
-          <a:lstStyle/>
-          <a:p>
-            <a:pPr marL="0" indent="0">
-              <a:buNone/>
-            </a:pPr>
-            <a:r>
-              <a:rPr lang="en-US" sz="2000" b="1" dirty="0">
-                <a:solidFill>
-                  <a:schemeClr val="tx1"/>
-                </a:solidFill>
-              </a:rPr>
-              <a:t>AI wrote most of the code and ran most of the reviews. The decisions and the final checking were mine.</a:t>
-            </a:r>
-            <a:endParaRPr lang="en-US" sz="1500" dirty="0"/>
-          </a:p>
-        </p:txBody>
-      </p:sp>
-    </p:spTree>
-  </p:cSld>
-  <p:clrMapOvr>
-    <a:masterClrMapping/>
-  </p:clrMapOvr>
-</p:sld>
-</file>
-
-<file path=ppt/slides/slide14.xml><?xml version="1.0" encoding="utf-8"?>
 <p:sld xmlns:a="http://schemas.openxmlformats.org/drawingml/2006/main" xmlns:r="http://schemas.openxmlformats.org/officeDocument/2006/relationships" xmlns:p="http://schemas.openxmlformats.org/presentationml/2006/main">
   <p:cSld name="Slide 21">
     <p:spTree>
@@ -7254,7 +6811,7 @@
           </a:prstGeom>
           <a:extLst>
             <a:ext uri="{C572A759-6A51-4108-AA02-DFA0A04FC94B}">
-              <ma14:wrappingTextBoxFlag xmlns:ma14="http://schemas.microsoft.com/office/mac/drawingml/2011/main" xmlns="" val="0"/>
+              <ma14:wrappingTextBoxFlag xmlns="" xmlns:ma14="http://schemas.microsoft.com/office/mac/drawingml/2011/main" val="0"/>
             </a:ext>
           </a:extLst>
         </p:spPr>
@@ -7273,7 +6830,7 @@
             <a:pPr algn="r"/>
             <a:fld id="{F7021451-1387-4CA6-816F-3879F97B5CBC}" type="slidenum">
               <a:rPr lang="en-US" b="0"/>
-              <a:t>14</a:t>
+              <a:t>13</a:t>
             </a:fld>
             <a:endParaRPr lang="en-US"/>
           </a:p>
@@ -8480,7 +8037,7 @@
           </a:prstGeom>
           <a:extLst>
             <a:ext uri="{C572A759-6A51-4108-AA02-DFA0A04FC94B}">
-              <ma14:wrappingTextBoxFlag xmlns:ma14="http://schemas.microsoft.com/office/mac/drawingml/2011/main" xmlns="" val="0"/>
+              <ma14:wrappingTextBoxFlag xmlns="" xmlns:ma14="http://schemas.microsoft.com/office/mac/drawingml/2011/main" val="0"/>
             </a:ext>
           </a:extLst>
         </p:spPr>
@@ -10234,7 +9791,7 @@
           </a:prstGeom>
           <a:extLst>
             <a:ext uri="{C572A759-6A51-4108-AA02-DFA0A04FC94B}">
-              <ma14:wrappingTextBoxFlag xmlns:ma14="http://schemas.microsoft.com/office/mac/drawingml/2011/main" xmlns="" val="0"/>
+              <ma14:wrappingTextBoxFlag xmlns="" xmlns:ma14="http://schemas.microsoft.com/office/mac/drawingml/2011/main" val="0"/>
             </a:ext>
           </a:extLst>
         </p:spPr>
@@ -12943,7 +12500,7 @@
           </a:prstGeom>
           <a:extLst>
             <a:ext uri="{C572A759-6A51-4108-AA02-DFA0A04FC94B}">
-              <ma14:wrappingTextBoxFlag xmlns:ma14="http://schemas.microsoft.com/office/mac/drawingml/2011/main" xmlns="" val="0"/>
+              <ma14:wrappingTextBoxFlag xmlns="" xmlns:ma14="http://schemas.microsoft.com/office/mac/drawingml/2011/main" val="0"/>
             </a:ext>
           </a:extLst>
         </p:spPr>
@@ -13743,7 +13300,7 @@
           </a:prstGeom>
           <a:extLst>
             <a:ext uri="{C572A759-6A51-4108-AA02-DFA0A04FC94B}">
-              <ma14:wrappingTextBoxFlag xmlns:ma14="http://schemas.microsoft.com/office/mac/drawingml/2011/main" xmlns="" val="0"/>
+              <ma14:wrappingTextBoxFlag xmlns="" xmlns:ma14="http://schemas.microsoft.com/office/mac/drawingml/2011/main" val="0"/>
             </a:ext>
           </a:extLst>
         </p:spPr>
@@ -15767,7 +15324,7 @@
           </a:prstGeom>
           <a:extLst>
             <a:ext uri="{C572A759-6A51-4108-AA02-DFA0A04FC94B}">
-              <ma14:wrappingTextBoxFlag xmlns:ma14="http://schemas.microsoft.com/office/mac/drawingml/2011/main" xmlns="" val="0"/>
+              <ma14:wrappingTextBoxFlag xmlns="" xmlns:ma14="http://schemas.microsoft.com/office/mac/drawingml/2011/main" val="0"/>
             </a:ext>
           </a:extLst>
         </p:spPr>
@@ -18731,7 +18288,7 @@
           </a:prstGeom>
           <a:extLst>
             <a:ext uri="{C572A759-6A51-4108-AA02-DFA0A04FC94B}">
-              <ma14:wrappingTextBoxFlag xmlns:ma14="http://schemas.microsoft.com/office/mac/drawingml/2011/main" xmlns="" val="0"/>
+              <ma14:wrappingTextBoxFlag xmlns="" xmlns:ma14="http://schemas.microsoft.com/office/mac/drawingml/2011/main" val="0"/>
             </a:ext>
           </a:extLst>
         </p:spPr>
@@ -19507,7 +19064,7 @@
           </a:prstGeom>
           <a:extLst>
             <a:ext uri="{C572A759-6A51-4108-AA02-DFA0A04FC94B}">
-              <ma14:wrappingTextBoxFlag xmlns:ma14="http://schemas.microsoft.com/office/mac/drawingml/2011/main" xmlns="" val="0"/>
+              <ma14:wrappingTextBoxFlag xmlns="" xmlns:ma14="http://schemas.microsoft.com/office/mac/drawingml/2011/main" val="0"/>
             </a:ext>
           </a:extLst>
         </p:spPr>
@@ -20304,7 +19861,7 @@
           </a:prstGeom>
           <a:extLst>
             <a:ext uri="{C572A759-6A51-4108-AA02-DFA0A04FC94B}">
-              <ma14:wrappingTextBoxFlag xmlns:ma14="http://schemas.microsoft.com/office/mac/drawingml/2011/main" xmlns="" val="0"/>
+              <ma14:wrappingTextBoxFlag xmlns="" xmlns:ma14="http://schemas.microsoft.com/office/mac/drawingml/2011/main" val="0"/>
             </a:ext>
           </a:extLst>
         </p:spPr>
